--- a/Face Reconition Presentation_v2.pptx
+++ b/Face Reconition Presentation_v2.pptx
@@ -7,6 +7,18 @@
   <p:sldIdLst>
     <p:sldId id="256" r:id="rId2"/>
     <p:sldId id="257" r:id="rId3"/>
+    <p:sldId id="258" r:id="rId4"/>
+    <p:sldId id="259" r:id="rId5"/>
+    <p:sldId id="260" r:id="rId6"/>
+    <p:sldId id="261" r:id="rId7"/>
+    <p:sldId id="262" r:id="rId8"/>
+    <p:sldId id="263" r:id="rId9"/>
+    <p:sldId id="264" r:id="rId10"/>
+    <p:sldId id="265" r:id="rId11"/>
+    <p:sldId id="266" r:id="rId12"/>
+    <p:sldId id="267" r:id="rId13"/>
+    <p:sldId id="268" r:id="rId14"/>
+    <p:sldId id="269" r:id="rId15"/>
   </p:sldIdLst>
   <p:sldSz cx="12192000" cy="6858000"/>
   <p:notesSz cx="6858000" cy="9144000"/>
@@ -105,7 +117,286 @@
       </a:defRPr>
     </a:lvl9pPr>
   </p:defaultTextStyle>
+  <p:extLst>
+    <p:ext uri="{EFAFB233-063F-42B5-8137-9DF3F51BA10A}">
+      <p15:sldGuideLst xmlns:p15="http://schemas.microsoft.com/office/powerpoint/2012/main"/>
+    </p:ext>
+  </p:extLst>
 </p:presentation>
+</file>
+
+<file path=ppt/revisionInfo.xml><?xml version="1.0" encoding="utf-8"?>
+<p1510:revInfo xmlns:a="http://schemas.openxmlformats.org/drawingml/2006/main" xmlns:r="http://schemas.openxmlformats.org/officeDocument/2006/relationships" xmlns:p1510="http://schemas.microsoft.com/office/powerpoint/2015/10/main">
+  <p1510:revLst>
+    <p1510:client id="{47809704-D555-43E9-8763-C18ABFFD866A}" v="15" dt="2025-06-28T00:09:24.259"/>
+  </p1510:revLst>
+</p1510:revInfo>
+</file>
+
+<file path=ppt/changesInfos/changesInfo1.xml><?xml version="1.0" encoding="utf-8"?>
+<pc:chgInfo xmlns:a="http://schemas.openxmlformats.org/drawingml/2006/main" xmlns:r="http://schemas.openxmlformats.org/officeDocument/2006/relationships" xmlns:ac="http://schemas.microsoft.com/office/drawing/2013/main/command" xmlns:pc="http://schemas.microsoft.com/office/powerpoint/2013/main/command">
+  <pc:docChgLst>
+    <pc:chgData name="Cervan Canton Alvaro W.MSCIDS_F24.2301" userId="09644743-1044-4338-95c6-f7c68461d1d3" providerId="ADAL" clId="{47809704-D555-43E9-8763-C18ABFFD866A}"/>
+    <pc:docChg chg="undo redo custSel addSld modSld">
+      <pc:chgData name="Cervan Canton Alvaro W.MSCIDS_F24.2301" userId="09644743-1044-4338-95c6-f7c68461d1d3" providerId="ADAL" clId="{47809704-D555-43E9-8763-C18ABFFD866A}" dt="2025-06-28T00:17:39.580" v="1260" actId="403"/>
+      <pc:docMkLst>
+        <pc:docMk/>
+      </pc:docMkLst>
+      <pc:sldChg chg="modSp new mod">
+        <pc:chgData name="Cervan Canton Alvaro W.MSCIDS_F24.2301" userId="09644743-1044-4338-95c6-f7c68461d1d3" providerId="ADAL" clId="{47809704-D555-43E9-8763-C18ABFFD866A}" dt="2025-06-27T23:52:09.828" v="124"/>
+        <pc:sldMkLst>
+          <pc:docMk/>
+          <pc:sldMk cId="472454260" sldId="258"/>
+        </pc:sldMkLst>
+        <pc:spChg chg="mod">
+          <ac:chgData name="Cervan Canton Alvaro W.MSCIDS_F24.2301" userId="09644743-1044-4338-95c6-f7c68461d1d3" providerId="ADAL" clId="{47809704-D555-43E9-8763-C18ABFFD866A}" dt="2025-06-27T23:48:30.403" v="1"/>
+          <ac:spMkLst>
+            <pc:docMk/>
+            <pc:sldMk cId="472454260" sldId="258"/>
+            <ac:spMk id="2" creationId="{B2DC29F1-C255-9350-4B4B-4E3B2FD0F7CD}"/>
+          </ac:spMkLst>
+        </pc:spChg>
+        <pc:spChg chg="mod">
+          <ac:chgData name="Cervan Canton Alvaro W.MSCIDS_F24.2301" userId="09644743-1044-4338-95c6-f7c68461d1d3" providerId="ADAL" clId="{47809704-D555-43E9-8763-C18ABFFD866A}" dt="2025-06-27T23:52:09.828" v="124"/>
+          <ac:spMkLst>
+            <pc:docMk/>
+            <pc:sldMk cId="472454260" sldId="258"/>
+            <ac:spMk id="3" creationId="{629E353E-726F-2B63-E6D9-F0A5CADFF231}"/>
+          </ac:spMkLst>
+        </pc:spChg>
+      </pc:sldChg>
+      <pc:sldChg chg="modSp new mod">
+        <pc:chgData name="Cervan Canton Alvaro W.MSCIDS_F24.2301" userId="09644743-1044-4338-95c6-f7c68461d1d3" providerId="ADAL" clId="{47809704-D555-43E9-8763-C18ABFFD866A}" dt="2025-06-27T23:57:18.190" v="331" actId="20577"/>
+        <pc:sldMkLst>
+          <pc:docMk/>
+          <pc:sldMk cId="1119096577" sldId="259"/>
+        </pc:sldMkLst>
+        <pc:spChg chg="mod">
+          <ac:chgData name="Cervan Canton Alvaro W.MSCIDS_F24.2301" userId="09644743-1044-4338-95c6-f7c68461d1d3" providerId="ADAL" clId="{47809704-D555-43E9-8763-C18ABFFD866A}" dt="2025-06-27T23:54:53.972" v="158" actId="20577"/>
+          <ac:spMkLst>
+            <pc:docMk/>
+            <pc:sldMk cId="1119096577" sldId="259"/>
+            <ac:spMk id="2" creationId="{3EEA2A6A-7218-6D05-9E39-DAF42C2CBF0E}"/>
+          </ac:spMkLst>
+        </pc:spChg>
+        <pc:spChg chg="mod">
+          <ac:chgData name="Cervan Canton Alvaro W.MSCIDS_F24.2301" userId="09644743-1044-4338-95c6-f7c68461d1d3" providerId="ADAL" clId="{47809704-D555-43E9-8763-C18ABFFD866A}" dt="2025-06-27T23:57:18.190" v="331" actId="20577"/>
+          <ac:spMkLst>
+            <pc:docMk/>
+            <pc:sldMk cId="1119096577" sldId="259"/>
+            <ac:spMk id="3" creationId="{8FAD9094-2680-17EB-C71A-AC4ABAEC2E6E}"/>
+          </ac:spMkLst>
+        </pc:spChg>
+      </pc:sldChg>
+      <pc:sldChg chg="addSp modSp new mod">
+        <pc:chgData name="Cervan Canton Alvaro W.MSCIDS_F24.2301" userId="09644743-1044-4338-95c6-f7c68461d1d3" providerId="ADAL" clId="{47809704-D555-43E9-8763-C18ABFFD866A}" dt="2025-06-28T00:17:39.580" v="1260" actId="403"/>
+        <pc:sldMkLst>
+          <pc:docMk/>
+          <pc:sldMk cId="1625124294" sldId="260"/>
+        </pc:sldMkLst>
+        <pc:spChg chg="mod">
+          <ac:chgData name="Cervan Canton Alvaro W.MSCIDS_F24.2301" userId="09644743-1044-4338-95c6-f7c68461d1d3" providerId="ADAL" clId="{47809704-D555-43E9-8763-C18ABFFD866A}" dt="2025-06-28T00:16:49.823" v="1259" actId="20577"/>
+          <ac:spMkLst>
+            <pc:docMk/>
+            <pc:sldMk cId="1625124294" sldId="260"/>
+            <ac:spMk id="2" creationId="{0B08014F-0FFD-174B-D16F-11B42F948C3A}"/>
+          </ac:spMkLst>
+        </pc:spChg>
+        <pc:spChg chg="mod">
+          <ac:chgData name="Cervan Canton Alvaro W.MSCIDS_F24.2301" userId="09644743-1044-4338-95c6-f7c68461d1d3" providerId="ADAL" clId="{47809704-D555-43E9-8763-C18ABFFD866A}" dt="2025-06-28T00:13:48.521" v="1051" actId="27636"/>
+          <ac:spMkLst>
+            <pc:docMk/>
+            <pc:sldMk cId="1625124294" sldId="260"/>
+            <ac:spMk id="3" creationId="{FFFE5850-A05B-3B23-F736-BB3CE7697F40}"/>
+          </ac:spMkLst>
+        </pc:spChg>
+        <pc:spChg chg="add mod">
+          <ac:chgData name="Cervan Canton Alvaro W.MSCIDS_F24.2301" userId="09644743-1044-4338-95c6-f7c68461d1d3" providerId="ADAL" clId="{47809704-D555-43E9-8763-C18ABFFD866A}" dt="2025-06-28T00:17:39.580" v="1260" actId="403"/>
+          <ac:spMkLst>
+            <pc:docMk/>
+            <pc:sldMk cId="1625124294" sldId="260"/>
+            <ac:spMk id="4" creationId="{BD029C9D-BD38-07FC-9050-8BEFA4DC9291}"/>
+          </ac:spMkLst>
+        </pc:spChg>
+      </pc:sldChg>
+      <pc:sldChg chg="addSp delSp modSp new mod">
+        <pc:chgData name="Cervan Canton Alvaro W.MSCIDS_F24.2301" userId="09644743-1044-4338-95c6-f7c68461d1d3" providerId="ADAL" clId="{47809704-D555-43E9-8763-C18ABFFD866A}" dt="2025-06-28T00:09:43.013" v="944" actId="20577"/>
+        <pc:sldMkLst>
+          <pc:docMk/>
+          <pc:sldMk cId="1435071399" sldId="261"/>
+        </pc:sldMkLst>
+        <pc:spChg chg="mod">
+          <ac:chgData name="Cervan Canton Alvaro W.MSCIDS_F24.2301" userId="09644743-1044-4338-95c6-f7c68461d1d3" providerId="ADAL" clId="{47809704-D555-43E9-8763-C18ABFFD866A}" dt="2025-06-28T00:01:04.132" v="563" actId="20577"/>
+          <ac:spMkLst>
+            <pc:docMk/>
+            <pc:sldMk cId="1435071399" sldId="261"/>
+            <ac:spMk id="2" creationId="{DB1BA345-6744-3FE7-3680-97566F1F098F}"/>
+          </ac:spMkLst>
+        </pc:spChg>
+        <pc:spChg chg="add del mod">
+          <ac:chgData name="Cervan Canton Alvaro W.MSCIDS_F24.2301" userId="09644743-1044-4338-95c6-f7c68461d1d3" providerId="ADAL" clId="{47809704-D555-43E9-8763-C18ABFFD866A}" dt="2025-06-28T00:09:43.013" v="944" actId="20577"/>
+          <ac:spMkLst>
+            <pc:docMk/>
+            <pc:sldMk cId="1435071399" sldId="261"/>
+            <ac:spMk id="3" creationId="{9F5F05AC-DA74-8CF0-9B54-052F1E831274}"/>
+          </ac:spMkLst>
+        </pc:spChg>
+        <pc:spChg chg="add mod">
+          <ac:chgData name="Cervan Canton Alvaro W.MSCIDS_F24.2301" userId="09644743-1044-4338-95c6-f7c68461d1d3" providerId="ADAL" clId="{47809704-D555-43E9-8763-C18ABFFD866A}" dt="2025-06-28T00:01:11.654" v="569"/>
+          <ac:spMkLst>
+            <pc:docMk/>
+            <pc:sldMk cId="1435071399" sldId="261"/>
+            <ac:spMk id="4" creationId="{6D3F985E-C954-2912-8A69-15E8309BFD72}"/>
+          </ac:spMkLst>
+        </pc:spChg>
+        <pc:spChg chg="add del mod">
+          <ac:chgData name="Cervan Canton Alvaro W.MSCIDS_F24.2301" userId="09644743-1044-4338-95c6-f7c68461d1d3" providerId="ADAL" clId="{47809704-D555-43E9-8763-C18ABFFD866A}" dt="2025-06-28T00:08:24.023" v="926" actId="478"/>
+          <ac:spMkLst>
+            <pc:docMk/>
+            <pc:sldMk cId="1435071399" sldId="261"/>
+            <ac:spMk id="5" creationId="{020517F5-A2FC-E2FD-F559-B52A0956D0B0}"/>
+          </ac:spMkLst>
+        </pc:spChg>
+        <pc:spChg chg="add mod">
+          <ac:chgData name="Cervan Canton Alvaro W.MSCIDS_F24.2301" userId="09644743-1044-4338-95c6-f7c68461d1d3" providerId="ADAL" clId="{47809704-D555-43E9-8763-C18ABFFD866A}" dt="2025-06-28T00:08:10.398" v="924"/>
+          <ac:spMkLst>
+            <pc:docMk/>
+            <pc:sldMk cId="1435071399" sldId="261"/>
+            <ac:spMk id="6" creationId="{DD5DA72E-A268-B99E-8040-C1BD30373C7C}"/>
+          </ac:spMkLst>
+        </pc:spChg>
+        <pc:spChg chg="add del">
+          <ac:chgData name="Cervan Canton Alvaro W.MSCIDS_F24.2301" userId="09644743-1044-4338-95c6-f7c68461d1d3" providerId="ADAL" clId="{47809704-D555-43E9-8763-C18ABFFD866A}" dt="2025-06-28T00:09:24.259" v="940" actId="478"/>
+          <ac:spMkLst>
+            <pc:docMk/>
+            <pc:sldMk cId="1435071399" sldId="261"/>
+            <ac:spMk id="7" creationId="{14E9E968-C6FB-0125-3009-A62324C1BF6A}"/>
+          </ac:spMkLst>
+        </pc:spChg>
+      </pc:sldChg>
+      <pc:sldChg chg="modSp new mod">
+        <pc:chgData name="Cervan Canton Alvaro W.MSCIDS_F24.2301" userId="09644743-1044-4338-95c6-f7c68461d1d3" providerId="ADAL" clId="{47809704-D555-43E9-8763-C18ABFFD866A}" dt="2025-06-28T00:10:33.417" v="979" actId="20577"/>
+        <pc:sldMkLst>
+          <pc:docMk/>
+          <pc:sldMk cId="3056003020" sldId="262"/>
+        </pc:sldMkLst>
+        <pc:spChg chg="mod">
+          <ac:chgData name="Cervan Canton Alvaro W.MSCIDS_F24.2301" userId="09644743-1044-4338-95c6-f7c68461d1d3" providerId="ADAL" clId="{47809704-D555-43E9-8763-C18ABFFD866A}" dt="2025-06-28T00:10:33.417" v="979" actId="20577"/>
+          <ac:spMkLst>
+            <pc:docMk/>
+            <pc:sldMk cId="3056003020" sldId="262"/>
+            <ac:spMk id="2" creationId="{ABAA091E-A79B-A64F-5B66-50BDC9382FAC}"/>
+          </ac:spMkLst>
+        </pc:spChg>
+      </pc:sldChg>
+      <pc:sldChg chg="modSp add mod">
+        <pc:chgData name="Cervan Canton Alvaro W.MSCIDS_F24.2301" userId="09644743-1044-4338-95c6-f7c68461d1d3" providerId="ADAL" clId="{47809704-D555-43E9-8763-C18ABFFD866A}" dt="2025-06-28T00:10:43.475" v="983" actId="20577"/>
+        <pc:sldMkLst>
+          <pc:docMk/>
+          <pc:sldMk cId="384888380" sldId="263"/>
+        </pc:sldMkLst>
+        <pc:spChg chg="mod">
+          <ac:chgData name="Cervan Canton Alvaro W.MSCIDS_F24.2301" userId="09644743-1044-4338-95c6-f7c68461d1d3" providerId="ADAL" clId="{47809704-D555-43E9-8763-C18ABFFD866A}" dt="2025-06-28T00:10:43.475" v="983" actId="20577"/>
+          <ac:spMkLst>
+            <pc:docMk/>
+            <pc:sldMk cId="384888380" sldId="263"/>
+            <ac:spMk id="2" creationId="{ABAA091E-A79B-A64F-5B66-50BDC9382FAC}"/>
+          </ac:spMkLst>
+        </pc:spChg>
+      </pc:sldChg>
+      <pc:sldChg chg="modSp add mod">
+        <pc:chgData name="Cervan Canton Alvaro W.MSCIDS_F24.2301" userId="09644743-1044-4338-95c6-f7c68461d1d3" providerId="ADAL" clId="{47809704-D555-43E9-8763-C18ABFFD866A}" dt="2025-06-28T00:11:04.612" v="993" actId="20577"/>
+        <pc:sldMkLst>
+          <pc:docMk/>
+          <pc:sldMk cId="2318978003" sldId="264"/>
+        </pc:sldMkLst>
+        <pc:spChg chg="mod">
+          <ac:chgData name="Cervan Canton Alvaro W.MSCIDS_F24.2301" userId="09644743-1044-4338-95c6-f7c68461d1d3" providerId="ADAL" clId="{47809704-D555-43E9-8763-C18ABFFD866A}" dt="2025-06-28T00:11:04.612" v="993" actId="20577"/>
+          <ac:spMkLst>
+            <pc:docMk/>
+            <pc:sldMk cId="2318978003" sldId="264"/>
+            <ac:spMk id="2" creationId="{ABAA091E-A79B-A64F-5B66-50BDC9382FAC}"/>
+          </ac:spMkLst>
+        </pc:spChg>
+      </pc:sldChg>
+      <pc:sldChg chg="modSp add mod">
+        <pc:chgData name="Cervan Canton Alvaro W.MSCIDS_F24.2301" userId="09644743-1044-4338-95c6-f7c68461d1d3" providerId="ADAL" clId="{47809704-D555-43E9-8763-C18ABFFD866A}" dt="2025-06-28T00:11:18.375" v="995"/>
+        <pc:sldMkLst>
+          <pc:docMk/>
+          <pc:sldMk cId="1001368556" sldId="265"/>
+        </pc:sldMkLst>
+        <pc:spChg chg="mod">
+          <ac:chgData name="Cervan Canton Alvaro W.MSCIDS_F24.2301" userId="09644743-1044-4338-95c6-f7c68461d1d3" providerId="ADAL" clId="{47809704-D555-43E9-8763-C18ABFFD866A}" dt="2025-06-28T00:11:18.375" v="995"/>
+          <ac:spMkLst>
+            <pc:docMk/>
+            <pc:sldMk cId="1001368556" sldId="265"/>
+            <ac:spMk id="2" creationId="{ABAA091E-A79B-A64F-5B66-50BDC9382FAC}"/>
+          </ac:spMkLst>
+        </pc:spChg>
+      </pc:sldChg>
+      <pc:sldChg chg="modSp add mod">
+        <pc:chgData name="Cervan Canton Alvaro W.MSCIDS_F24.2301" userId="09644743-1044-4338-95c6-f7c68461d1d3" providerId="ADAL" clId="{47809704-D555-43E9-8763-C18ABFFD866A}" dt="2025-06-28T00:11:49.216" v="999"/>
+        <pc:sldMkLst>
+          <pc:docMk/>
+          <pc:sldMk cId="631473613" sldId="266"/>
+        </pc:sldMkLst>
+        <pc:spChg chg="mod">
+          <ac:chgData name="Cervan Canton Alvaro W.MSCIDS_F24.2301" userId="09644743-1044-4338-95c6-f7c68461d1d3" providerId="ADAL" clId="{47809704-D555-43E9-8763-C18ABFFD866A}" dt="2025-06-28T00:11:49.216" v="999"/>
+          <ac:spMkLst>
+            <pc:docMk/>
+            <pc:sldMk cId="631473613" sldId="266"/>
+            <ac:spMk id="2" creationId="{ABAA091E-A79B-A64F-5B66-50BDC9382FAC}"/>
+          </ac:spMkLst>
+        </pc:spChg>
+      </pc:sldChg>
+      <pc:sldChg chg="modSp add mod">
+        <pc:chgData name="Cervan Canton Alvaro W.MSCIDS_F24.2301" userId="09644743-1044-4338-95c6-f7c68461d1d3" providerId="ADAL" clId="{47809704-D555-43E9-8763-C18ABFFD866A}" dt="2025-06-28T00:11:57.157" v="1001"/>
+        <pc:sldMkLst>
+          <pc:docMk/>
+          <pc:sldMk cId="984394870" sldId="267"/>
+        </pc:sldMkLst>
+        <pc:spChg chg="mod">
+          <ac:chgData name="Cervan Canton Alvaro W.MSCIDS_F24.2301" userId="09644743-1044-4338-95c6-f7c68461d1d3" providerId="ADAL" clId="{47809704-D555-43E9-8763-C18ABFFD866A}" dt="2025-06-28T00:11:57.157" v="1001"/>
+          <ac:spMkLst>
+            <pc:docMk/>
+            <pc:sldMk cId="984394870" sldId="267"/>
+            <ac:spMk id="2" creationId="{ABAA091E-A79B-A64F-5B66-50BDC9382FAC}"/>
+          </ac:spMkLst>
+        </pc:spChg>
+      </pc:sldChg>
+      <pc:sldChg chg="modSp new mod">
+        <pc:chgData name="Cervan Canton Alvaro W.MSCIDS_F24.2301" userId="09644743-1044-4338-95c6-f7c68461d1d3" providerId="ADAL" clId="{47809704-D555-43E9-8763-C18ABFFD866A}" dt="2025-06-28T00:12:41.479" v="1029" actId="20577"/>
+        <pc:sldMkLst>
+          <pc:docMk/>
+          <pc:sldMk cId="2522694870" sldId="268"/>
+        </pc:sldMkLst>
+        <pc:spChg chg="mod">
+          <ac:chgData name="Cervan Canton Alvaro W.MSCIDS_F24.2301" userId="09644743-1044-4338-95c6-f7c68461d1d3" providerId="ADAL" clId="{47809704-D555-43E9-8763-C18ABFFD866A}" dt="2025-06-28T00:12:41.479" v="1029" actId="20577"/>
+          <ac:spMkLst>
+            <pc:docMk/>
+            <pc:sldMk cId="2522694870" sldId="268"/>
+            <ac:spMk id="2" creationId="{FF365628-049E-9992-49EF-EEE27A6201B2}"/>
+          </ac:spMkLst>
+        </pc:spChg>
+      </pc:sldChg>
+      <pc:sldChg chg="modSp add mod">
+        <pc:chgData name="Cervan Canton Alvaro W.MSCIDS_F24.2301" userId="09644743-1044-4338-95c6-f7c68461d1d3" providerId="ADAL" clId="{47809704-D555-43E9-8763-C18ABFFD866A}" dt="2025-06-28T00:12:52.548" v="1045" actId="20577"/>
+        <pc:sldMkLst>
+          <pc:docMk/>
+          <pc:sldMk cId="253357861" sldId="269"/>
+        </pc:sldMkLst>
+        <pc:spChg chg="mod">
+          <ac:chgData name="Cervan Canton Alvaro W.MSCIDS_F24.2301" userId="09644743-1044-4338-95c6-f7c68461d1d3" providerId="ADAL" clId="{47809704-D555-43E9-8763-C18ABFFD866A}" dt="2025-06-28T00:12:52.548" v="1045" actId="20577"/>
+          <ac:spMkLst>
+            <pc:docMk/>
+            <pc:sldMk cId="253357861" sldId="269"/>
+            <ac:spMk id="2" creationId="{FF365628-049E-9992-49EF-EEE27A6201B2}"/>
+          </ac:spMkLst>
+        </pc:spChg>
+      </pc:sldChg>
+    </pc:docChg>
+  </pc:docChgLst>
+</pc:chgInfo>
 </file>
 
 <file path=ppt/slideLayouts/slideLayout1.xml><?xml version="1.0" encoding="utf-8"?>
@@ -261,7 +552,7 @@
           <a:p>
             <a:fld id="{C128FA71-3A18-48C0-980F-4B68F7F63042}" type="datetime1">
               <a:rPr lang="en-US" smtClean="0"/>
-              <a:t>6/24/2025</a:t>
+              <a:t>6/28/2025</a:t>
             </a:fld>
             <a:endParaRPr lang="en-US"/>
           </a:p>
@@ -469,7 +760,7 @@
           <a:p>
             <a:fld id="{7104EDB3-C0E8-45F8-9E1D-1B6C8D1880C0}" type="datetime1">
               <a:rPr lang="en-US" smtClean="0"/>
-              <a:t>6/24/2025</a:t>
+              <a:t>6/28/2025</a:t>
             </a:fld>
             <a:endParaRPr lang="en-US"/>
           </a:p>
@@ -679,7 +970,7 @@
           <a:p>
             <a:fld id="{9CF0EC4B-54ED-4041-B552-9BA760FA3DBA}" type="datetime1">
               <a:rPr lang="en-US" smtClean="0"/>
-              <a:t>6/24/2025</a:t>
+              <a:t>6/28/2025</a:t>
             </a:fld>
             <a:endParaRPr lang="en-US"/>
           </a:p>
@@ -877,7 +1168,7 @@
           <a:p>
             <a:fld id="{51C1210E-201E-4473-82AC-2466F5386C38}" type="datetime1">
               <a:rPr lang="en-US" smtClean="0"/>
-              <a:t>6/24/2025</a:t>
+              <a:t>6/28/2025</a:t>
             </a:fld>
             <a:endParaRPr lang="en-US"/>
           </a:p>
@@ -1155,7 +1446,7 @@
           <a:p>
             <a:fld id="{B01EA198-6CAB-4B8F-B93F-1F9C8C4B6CE7}" type="datetime1">
               <a:rPr lang="en-US" smtClean="0"/>
-              <a:t>6/24/2025</a:t>
+              <a:t>6/28/2025</a:t>
             </a:fld>
             <a:endParaRPr lang="en-US"/>
           </a:p>
@@ -1427,7 +1718,7 @@
           <a:p>
             <a:fld id="{CA06041F-4525-44D5-AA4F-332294BF1F56}" type="datetime1">
               <a:rPr lang="en-US" smtClean="0"/>
-              <a:t>6/24/2025</a:t>
+              <a:t>6/28/2025</a:t>
             </a:fld>
             <a:endParaRPr lang="en-US"/>
           </a:p>
@@ -1851,7 +2142,7 @@
           <a:p>
             <a:fld id="{F9557091-BBDF-4EB9-BA6B-2BB67AC4FC0F}" type="datetime1">
               <a:rPr lang="en-US" smtClean="0"/>
-              <a:t>6/24/2025</a:t>
+              <a:t>6/28/2025</a:t>
             </a:fld>
             <a:endParaRPr lang="en-US"/>
           </a:p>
@@ -1992,7 +2283,7 @@
           <a:p>
             <a:fld id="{2D6B226B-77A6-410C-9796-083F278E0125}" type="datetime1">
               <a:rPr lang="en-US" smtClean="0"/>
-              <a:t>6/24/2025</a:t>
+              <a:t>6/28/2025</a:t>
             </a:fld>
             <a:endParaRPr lang="en-US"/>
           </a:p>
@@ -2105,7 +2396,7 @@
           <a:p>
             <a:fld id="{A23A578B-D289-4C40-8593-3D356C49DA58}" type="datetime1">
               <a:rPr lang="en-US" smtClean="0"/>
-              <a:t>6/24/2025</a:t>
+              <a:t>6/28/2025</a:t>
             </a:fld>
             <a:endParaRPr lang="en-US"/>
           </a:p>
@@ -2424,7 +2715,7 @@
           <a:p>
             <a:fld id="{713DFAE3-14DB-48A7-A80F-80DDB072CE3D}" type="datetime1">
               <a:rPr lang="en-US" smtClean="0"/>
-              <a:t>6/24/2025</a:t>
+              <a:t>6/28/2025</a:t>
             </a:fld>
             <a:endParaRPr lang="en-US"/>
           </a:p>
@@ -2718,7 +3009,7 @@
           <a:p>
             <a:fld id="{92C5EAEF-6478-4102-8F5D-A5FE9FC97ACB}" type="datetime1">
               <a:rPr lang="en-US" smtClean="0"/>
-              <a:t>6/24/2025</a:t>
+              <a:t>6/28/2025</a:t>
             </a:fld>
             <a:endParaRPr lang="en-US"/>
           </a:p>
@@ -2959,7 +3250,7 @@
           <a:p>
             <a:fld id="{67F45AC6-C491-4585-A584-9CE2AF7D5500}" type="datetime1">
               <a:rPr lang="en-US" smtClean="0"/>
-              <a:t>6/24/2025</a:t>
+              <a:t>6/28/2025</a:t>
             </a:fld>
             <a:endParaRPr lang="en-US"/>
           </a:p>
@@ -3807,6 +4098,480 @@
 </p:sld>
 </file>
 
+<file path=ppt/slides/slide10.xml><?xml version="1.0" encoding="utf-8"?>
+<p:sld xmlns:a="http://schemas.openxmlformats.org/drawingml/2006/main" xmlns:r="http://schemas.openxmlformats.org/officeDocument/2006/relationships" xmlns:p="http://schemas.openxmlformats.org/presentationml/2006/main">
+  <p:cSld>
+    <p:spTree>
+      <p:nvGrpSpPr>
+        <p:cNvPr id="1" name=""/>
+        <p:cNvGrpSpPr/>
+        <p:nvPr/>
+      </p:nvGrpSpPr>
+      <p:grpSpPr>
+        <a:xfrm>
+          <a:off x="0" y="0"/>
+          <a:ext cx="0" cy="0"/>
+          <a:chOff x="0" y="0"/>
+          <a:chExt cx="0" cy="0"/>
+        </a:xfrm>
+      </p:grpSpPr>
+      <p:sp>
+        <p:nvSpPr>
+          <p:cNvPr id="2" name="Title 1">
+            <a:extLst>
+              <a:ext uri="{FF2B5EF4-FFF2-40B4-BE49-F238E27FC236}">
+                <a16:creationId xmlns:a16="http://schemas.microsoft.com/office/drawing/2014/main" id="{ABAA091E-A79B-A64F-5B66-50BDC9382FAC}"/>
+              </a:ext>
+            </a:extLst>
+          </p:cNvPr>
+          <p:cNvSpPr>
+            <a:spLocks noGrp="1"/>
+          </p:cNvSpPr>
+          <p:nvPr>
+            <p:ph type="title"/>
+          </p:nvPr>
+        </p:nvSpPr>
+        <p:spPr/>
+        <p:txBody>
+          <a:bodyPr/>
+          <a:lstStyle/>
+          <a:p>
+            <a:r>
+              <a:rPr lang="es-ES" dirty="0" err="1"/>
+              <a:t>Models</a:t>
+            </a:r>
+            <a:r>
+              <a:rPr lang="es-ES" dirty="0"/>
+              <a:t>: Transfer Learning – MobileNetV2</a:t>
+            </a:r>
+          </a:p>
+        </p:txBody>
+      </p:sp>
+      <p:sp>
+        <p:nvSpPr>
+          <p:cNvPr id="3" name="Content Placeholder 2">
+            <a:extLst>
+              <a:ext uri="{FF2B5EF4-FFF2-40B4-BE49-F238E27FC236}">
+                <a16:creationId xmlns:a16="http://schemas.microsoft.com/office/drawing/2014/main" id="{E60DA390-2E8B-082C-7D4C-CC5FE49679EE}"/>
+              </a:ext>
+            </a:extLst>
+          </p:cNvPr>
+          <p:cNvSpPr>
+            <a:spLocks noGrp="1"/>
+          </p:cNvSpPr>
+          <p:nvPr>
+            <p:ph idx="1"/>
+          </p:nvPr>
+        </p:nvSpPr>
+        <p:spPr/>
+        <p:txBody>
+          <a:bodyPr/>
+          <a:lstStyle/>
+          <a:p>
+            <a:endParaRPr lang="es-ES"/>
+          </a:p>
+        </p:txBody>
+      </p:sp>
+    </p:spTree>
+    <p:extLst>
+      <p:ext uri="{BB962C8B-B14F-4D97-AF65-F5344CB8AC3E}">
+        <p14:creationId xmlns:p14="http://schemas.microsoft.com/office/powerpoint/2010/main" val="1001368556"/>
+      </p:ext>
+    </p:extLst>
+  </p:cSld>
+  <p:clrMapOvr>
+    <a:masterClrMapping/>
+  </p:clrMapOvr>
+</p:sld>
+</file>
+
+<file path=ppt/slides/slide11.xml><?xml version="1.0" encoding="utf-8"?>
+<p:sld xmlns:a="http://schemas.openxmlformats.org/drawingml/2006/main" xmlns:r="http://schemas.openxmlformats.org/officeDocument/2006/relationships" xmlns:p="http://schemas.openxmlformats.org/presentationml/2006/main">
+  <p:cSld>
+    <p:spTree>
+      <p:nvGrpSpPr>
+        <p:cNvPr id="1" name=""/>
+        <p:cNvGrpSpPr/>
+        <p:nvPr/>
+      </p:nvGrpSpPr>
+      <p:grpSpPr>
+        <a:xfrm>
+          <a:off x="0" y="0"/>
+          <a:ext cx="0" cy="0"/>
+          <a:chOff x="0" y="0"/>
+          <a:chExt cx="0" cy="0"/>
+        </a:xfrm>
+      </p:grpSpPr>
+      <p:sp>
+        <p:nvSpPr>
+          <p:cNvPr id="2" name="Title 1">
+            <a:extLst>
+              <a:ext uri="{FF2B5EF4-FFF2-40B4-BE49-F238E27FC236}">
+                <a16:creationId xmlns:a16="http://schemas.microsoft.com/office/drawing/2014/main" id="{ABAA091E-A79B-A64F-5B66-50BDC9382FAC}"/>
+              </a:ext>
+            </a:extLst>
+          </p:cNvPr>
+          <p:cNvSpPr>
+            <a:spLocks noGrp="1"/>
+          </p:cNvSpPr>
+          <p:nvPr>
+            <p:ph type="title"/>
+          </p:nvPr>
+        </p:nvSpPr>
+        <p:spPr/>
+        <p:txBody>
+          <a:bodyPr/>
+          <a:lstStyle/>
+          <a:p>
+            <a:r>
+              <a:rPr lang="es-ES" dirty="0" err="1"/>
+              <a:t>Models</a:t>
+            </a:r>
+            <a:r>
+              <a:rPr lang="es-ES" dirty="0"/>
+              <a:t>: </a:t>
+            </a:r>
+            <a:r>
+              <a:rPr lang="es-ES" dirty="0" err="1"/>
+              <a:t>Embedding-Based</a:t>
+            </a:r>
+            <a:r>
+              <a:rPr lang="es-ES" dirty="0"/>
+              <a:t> – </a:t>
+            </a:r>
+            <a:r>
+              <a:rPr lang="es-ES" dirty="0" err="1"/>
+              <a:t>FaceNet</a:t>
+            </a:r>
+            <a:endParaRPr lang="es-ES" dirty="0"/>
+          </a:p>
+        </p:txBody>
+      </p:sp>
+      <p:sp>
+        <p:nvSpPr>
+          <p:cNvPr id="3" name="Content Placeholder 2">
+            <a:extLst>
+              <a:ext uri="{FF2B5EF4-FFF2-40B4-BE49-F238E27FC236}">
+                <a16:creationId xmlns:a16="http://schemas.microsoft.com/office/drawing/2014/main" id="{E60DA390-2E8B-082C-7D4C-CC5FE49679EE}"/>
+              </a:ext>
+            </a:extLst>
+          </p:cNvPr>
+          <p:cNvSpPr>
+            <a:spLocks noGrp="1"/>
+          </p:cNvSpPr>
+          <p:nvPr>
+            <p:ph idx="1"/>
+          </p:nvPr>
+        </p:nvSpPr>
+        <p:spPr/>
+        <p:txBody>
+          <a:bodyPr/>
+          <a:lstStyle/>
+          <a:p>
+            <a:endParaRPr lang="es-ES"/>
+          </a:p>
+        </p:txBody>
+      </p:sp>
+    </p:spTree>
+    <p:extLst>
+      <p:ext uri="{BB962C8B-B14F-4D97-AF65-F5344CB8AC3E}">
+        <p14:creationId xmlns:p14="http://schemas.microsoft.com/office/powerpoint/2010/main" val="631473613"/>
+      </p:ext>
+    </p:extLst>
+  </p:cSld>
+  <p:clrMapOvr>
+    <a:masterClrMapping/>
+  </p:clrMapOvr>
+</p:sld>
+</file>
+
+<file path=ppt/slides/slide12.xml><?xml version="1.0" encoding="utf-8"?>
+<p:sld xmlns:a="http://schemas.openxmlformats.org/drawingml/2006/main" xmlns:r="http://schemas.openxmlformats.org/officeDocument/2006/relationships" xmlns:p="http://schemas.openxmlformats.org/presentationml/2006/main">
+  <p:cSld>
+    <p:spTree>
+      <p:nvGrpSpPr>
+        <p:cNvPr id="1" name=""/>
+        <p:cNvGrpSpPr/>
+        <p:nvPr/>
+      </p:nvGrpSpPr>
+      <p:grpSpPr>
+        <a:xfrm>
+          <a:off x="0" y="0"/>
+          <a:ext cx="0" cy="0"/>
+          <a:chOff x="0" y="0"/>
+          <a:chExt cx="0" cy="0"/>
+        </a:xfrm>
+      </p:grpSpPr>
+      <p:sp>
+        <p:nvSpPr>
+          <p:cNvPr id="2" name="Title 1">
+            <a:extLst>
+              <a:ext uri="{FF2B5EF4-FFF2-40B4-BE49-F238E27FC236}">
+                <a16:creationId xmlns:a16="http://schemas.microsoft.com/office/drawing/2014/main" id="{ABAA091E-A79B-A64F-5B66-50BDC9382FAC}"/>
+              </a:ext>
+            </a:extLst>
+          </p:cNvPr>
+          <p:cNvSpPr>
+            <a:spLocks noGrp="1"/>
+          </p:cNvSpPr>
+          <p:nvPr>
+            <p:ph type="title"/>
+          </p:nvPr>
+        </p:nvSpPr>
+        <p:spPr/>
+        <p:txBody>
+          <a:bodyPr/>
+          <a:lstStyle/>
+          <a:p>
+            <a:r>
+              <a:rPr lang="es-ES" dirty="0" err="1"/>
+              <a:t>Models</a:t>
+            </a:r>
+            <a:r>
+              <a:rPr lang="es-ES" dirty="0"/>
+              <a:t>: </a:t>
+            </a:r>
+            <a:r>
+              <a:rPr lang="es-ES" dirty="0" err="1"/>
+              <a:t>Embedding-Based</a:t>
+            </a:r>
+            <a:r>
+              <a:rPr lang="es-ES" dirty="0"/>
+              <a:t> – </a:t>
+            </a:r>
+            <a:r>
+              <a:rPr lang="es-ES" dirty="0" err="1"/>
+              <a:t>ArcFace</a:t>
+            </a:r>
+            <a:endParaRPr lang="es-ES" dirty="0"/>
+          </a:p>
+        </p:txBody>
+      </p:sp>
+      <p:sp>
+        <p:nvSpPr>
+          <p:cNvPr id="3" name="Content Placeholder 2">
+            <a:extLst>
+              <a:ext uri="{FF2B5EF4-FFF2-40B4-BE49-F238E27FC236}">
+                <a16:creationId xmlns:a16="http://schemas.microsoft.com/office/drawing/2014/main" id="{E60DA390-2E8B-082C-7D4C-CC5FE49679EE}"/>
+              </a:ext>
+            </a:extLst>
+          </p:cNvPr>
+          <p:cNvSpPr>
+            <a:spLocks noGrp="1"/>
+          </p:cNvSpPr>
+          <p:nvPr>
+            <p:ph idx="1"/>
+          </p:nvPr>
+        </p:nvSpPr>
+        <p:spPr/>
+        <p:txBody>
+          <a:bodyPr/>
+          <a:lstStyle/>
+          <a:p>
+            <a:endParaRPr lang="es-ES"/>
+          </a:p>
+        </p:txBody>
+      </p:sp>
+    </p:spTree>
+    <p:extLst>
+      <p:ext uri="{BB962C8B-B14F-4D97-AF65-F5344CB8AC3E}">
+        <p14:creationId xmlns:p14="http://schemas.microsoft.com/office/powerpoint/2010/main" val="984394870"/>
+      </p:ext>
+    </p:extLst>
+  </p:cSld>
+  <p:clrMapOvr>
+    <a:masterClrMapping/>
+  </p:clrMapOvr>
+</p:sld>
+</file>
+
+<file path=ppt/slides/slide13.xml><?xml version="1.0" encoding="utf-8"?>
+<p:sld xmlns:a="http://schemas.openxmlformats.org/drawingml/2006/main" xmlns:r="http://schemas.openxmlformats.org/officeDocument/2006/relationships" xmlns:p="http://schemas.openxmlformats.org/presentationml/2006/main">
+  <p:cSld>
+    <p:spTree>
+      <p:nvGrpSpPr>
+        <p:cNvPr id="1" name=""/>
+        <p:cNvGrpSpPr/>
+        <p:nvPr/>
+      </p:nvGrpSpPr>
+      <p:grpSpPr>
+        <a:xfrm>
+          <a:off x="0" y="0"/>
+          <a:ext cx="0" cy="0"/>
+          <a:chOff x="0" y="0"/>
+          <a:chExt cx="0" cy="0"/>
+        </a:xfrm>
+      </p:grpSpPr>
+      <p:sp>
+        <p:nvSpPr>
+          <p:cNvPr id="2" name="Title 1">
+            <a:extLst>
+              <a:ext uri="{FF2B5EF4-FFF2-40B4-BE49-F238E27FC236}">
+                <a16:creationId xmlns:a16="http://schemas.microsoft.com/office/drawing/2014/main" id="{FF365628-049E-9992-49EF-EEE27A6201B2}"/>
+              </a:ext>
+            </a:extLst>
+          </p:cNvPr>
+          <p:cNvSpPr>
+            <a:spLocks noGrp="1"/>
+          </p:cNvSpPr>
+          <p:nvPr>
+            <p:ph type="title"/>
+          </p:nvPr>
+        </p:nvSpPr>
+        <p:spPr/>
+        <p:txBody>
+          <a:bodyPr/>
+          <a:lstStyle/>
+          <a:p>
+            <a:r>
+              <a:rPr lang="es-ES" dirty="0" err="1"/>
+              <a:t>Evaluation</a:t>
+            </a:r>
+            <a:r>
+              <a:rPr lang="es-ES" dirty="0"/>
+              <a:t> - </a:t>
+            </a:r>
+            <a:r>
+              <a:rPr lang="es-ES" dirty="0" err="1"/>
+              <a:t>Classification</a:t>
+            </a:r>
+            <a:endParaRPr lang="es-ES" dirty="0"/>
+          </a:p>
+        </p:txBody>
+      </p:sp>
+      <p:sp>
+        <p:nvSpPr>
+          <p:cNvPr id="3" name="Content Placeholder 2">
+            <a:extLst>
+              <a:ext uri="{FF2B5EF4-FFF2-40B4-BE49-F238E27FC236}">
+                <a16:creationId xmlns:a16="http://schemas.microsoft.com/office/drawing/2014/main" id="{65518192-0545-B17B-4EA3-4AD08303C051}"/>
+              </a:ext>
+            </a:extLst>
+          </p:cNvPr>
+          <p:cNvSpPr>
+            <a:spLocks noGrp="1"/>
+          </p:cNvSpPr>
+          <p:nvPr>
+            <p:ph idx="1"/>
+          </p:nvPr>
+        </p:nvSpPr>
+        <p:spPr/>
+        <p:txBody>
+          <a:bodyPr/>
+          <a:lstStyle/>
+          <a:p>
+            <a:endParaRPr lang="es-ES"/>
+          </a:p>
+        </p:txBody>
+      </p:sp>
+    </p:spTree>
+    <p:extLst>
+      <p:ext uri="{BB962C8B-B14F-4D97-AF65-F5344CB8AC3E}">
+        <p14:creationId xmlns:p14="http://schemas.microsoft.com/office/powerpoint/2010/main" val="2522694870"/>
+      </p:ext>
+    </p:extLst>
+  </p:cSld>
+  <p:clrMapOvr>
+    <a:masterClrMapping/>
+  </p:clrMapOvr>
+</p:sld>
+</file>
+
+<file path=ppt/slides/slide14.xml><?xml version="1.0" encoding="utf-8"?>
+<p:sld xmlns:a="http://schemas.openxmlformats.org/drawingml/2006/main" xmlns:r="http://schemas.openxmlformats.org/officeDocument/2006/relationships" xmlns:p="http://schemas.openxmlformats.org/presentationml/2006/main">
+  <p:cSld>
+    <p:spTree>
+      <p:nvGrpSpPr>
+        <p:cNvPr id="1" name=""/>
+        <p:cNvGrpSpPr/>
+        <p:nvPr/>
+      </p:nvGrpSpPr>
+      <p:grpSpPr>
+        <a:xfrm>
+          <a:off x="0" y="0"/>
+          <a:ext cx="0" cy="0"/>
+          <a:chOff x="0" y="0"/>
+          <a:chExt cx="0" cy="0"/>
+        </a:xfrm>
+      </p:grpSpPr>
+      <p:sp>
+        <p:nvSpPr>
+          <p:cNvPr id="2" name="Title 1">
+            <a:extLst>
+              <a:ext uri="{FF2B5EF4-FFF2-40B4-BE49-F238E27FC236}">
+                <a16:creationId xmlns:a16="http://schemas.microsoft.com/office/drawing/2014/main" id="{FF365628-049E-9992-49EF-EEE27A6201B2}"/>
+              </a:ext>
+            </a:extLst>
+          </p:cNvPr>
+          <p:cNvSpPr>
+            <a:spLocks noGrp="1"/>
+          </p:cNvSpPr>
+          <p:nvPr>
+            <p:ph type="title"/>
+          </p:nvPr>
+        </p:nvSpPr>
+        <p:spPr/>
+        <p:txBody>
+          <a:bodyPr/>
+          <a:lstStyle/>
+          <a:p>
+            <a:r>
+              <a:rPr lang="es-ES" dirty="0" err="1"/>
+              <a:t>Evaluation</a:t>
+            </a:r>
+            <a:r>
+              <a:rPr lang="es-ES" dirty="0"/>
+              <a:t> – </a:t>
+            </a:r>
+            <a:r>
+              <a:rPr lang="es-ES" dirty="0" err="1"/>
+              <a:t>Validation</a:t>
+            </a:r>
+            <a:r>
+              <a:rPr lang="es-ES" dirty="0"/>
+              <a:t> 1:1</a:t>
+            </a:r>
+          </a:p>
+        </p:txBody>
+      </p:sp>
+      <p:sp>
+        <p:nvSpPr>
+          <p:cNvPr id="3" name="Content Placeholder 2">
+            <a:extLst>
+              <a:ext uri="{FF2B5EF4-FFF2-40B4-BE49-F238E27FC236}">
+                <a16:creationId xmlns:a16="http://schemas.microsoft.com/office/drawing/2014/main" id="{65518192-0545-B17B-4EA3-4AD08303C051}"/>
+              </a:ext>
+            </a:extLst>
+          </p:cNvPr>
+          <p:cNvSpPr>
+            <a:spLocks noGrp="1"/>
+          </p:cNvSpPr>
+          <p:nvPr>
+            <p:ph idx="1"/>
+          </p:nvPr>
+        </p:nvSpPr>
+        <p:spPr/>
+        <p:txBody>
+          <a:bodyPr/>
+          <a:lstStyle/>
+          <a:p>
+            <a:endParaRPr lang="es-ES" dirty="0"/>
+          </a:p>
+        </p:txBody>
+      </p:sp>
+    </p:spTree>
+    <p:extLst>
+      <p:ext uri="{BB962C8B-B14F-4D97-AF65-F5344CB8AC3E}">
+        <p14:creationId xmlns:p14="http://schemas.microsoft.com/office/powerpoint/2010/main" val="253357861"/>
+      </p:ext>
+    </p:extLst>
+  </p:cSld>
+  <p:clrMapOvr>
+    <a:masterClrMapping/>
+  </p:clrMapOvr>
+</p:sld>
+</file>
+
 <file path=ppt/slides/slide2.xml><?xml version="1.0" encoding="utf-8"?>
 <p:sld xmlns:a="http://schemas.openxmlformats.org/drawingml/2006/main" xmlns:r="http://schemas.openxmlformats.org/officeDocument/2006/relationships" xmlns:p="http://schemas.openxmlformats.org/presentationml/2006/main">
   <p:cSld>
@@ -4118,6 +4883,1336 @@
     <p:extLst>
       <p:ext uri="{BB962C8B-B14F-4D97-AF65-F5344CB8AC3E}">
         <p14:creationId xmlns:p14="http://schemas.microsoft.com/office/powerpoint/2010/main" val="1294510381"/>
+      </p:ext>
+    </p:extLst>
+  </p:cSld>
+  <p:clrMapOvr>
+    <a:masterClrMapping/>
+  </p:clrMapOvr>
+</p:sld>
+</file>
+
+<file path=ppt/slides/slide3.xml><?xml version="1.0" encoding="utf-8"?>
+<p:sld xmlns:a="http://schemas.openxmlformats.org/drawingml/2006/main" xmlns:r="http://schemas.openxmlformats.org/officeDocument/2006/relationships" xmlns:p="http://schemas.openxmlformats.org/presentationml/2006/main">
+  <p:cSld>
+    <p:spTree>
+      <p:nvGrpSpPr>
+        <p:cNvPr id="1" name=""/>
+        <p:cNvGrpSpPr/>
+        <p:nvPr/>
+      </p:nvGrpSpPr>
+      <p:grpSpPr>
+        <a:xfrm>
+          <a:off x="0" y="0"/>
+          <a:ext cx="0" cy="0"/>
+          <a:chOff x="0" y="0"/>
+          <a:chExt cx="0" cy="0"/>
+        </a:xfrm>
+      </p:grpSpPr>
+      <p:sp>
+        <p:nvSpPr>
+          <p:cNvPr id="2" name="Title 1">
+            <a:extLst>
+              <a:ext uri="{FF2B5EF4-FFF2-40B4-BE49-F238E27FC236}">
+                <a16:creationId xmlns:a16="http://schemas.microsoft.com/office/drawing/2014/main" id="{B2DC29F1-C255-9350-4B4B-4E3B2FD0F7CD}"/>
+              </a:ext>
+            </a:extLst>
+          </p:cNvPr>
+          <p:cNvSpPr>
+            <a:spLocks noGrp="1"/>
+          </p:cNvSpPr>
+          <p:nvPr>
+            <p:ph type="title"/>
+          </p:nvPr>
+        </p:nvSpPr>
+        <p:spPr/>
+        <p:txBody>
+          <a:bodyPr/>
+          <a:lstStyle/>
+          <a:p>
+            <a:r>
+              <a:rPr lang="es-ES" dirty="0"/>
+              <a:t>What is </a:t>
+            </a:r>
+            <a:r>
+              <a:rPr lang="es-ES" dirty="0" err="1"/>
+              <a:t>Face</a:t>
+            </a:r>
+            <a:r>
+              <a:rPr lang="es-ES" dirty="0"/>
+              <a:t> </a:t>
+            </a:r>
+            <a:r>
+              <a:rPr lang="es-ES" dirty="0" err="1"/>
+              <a:t>Recognition</a:t>
+            </a:r>
+            <a:r>
+              <a:rPr lang="es-ES" dirty="0"/>
+              <a:t>?</a:t>
+            </a:r>
+          </a:p>
+        </p:txBody>
+      </p:sp>
+      <p:sp>
+        <p:nvSpPr>
+          <p:cNvPr id="3" name="Content Placeholder 2">
+            <a:extLst>
+              <a:ext uri="{FF2B5EF4-FFF2-40B4-BE49-F238E27FC236}">
+                <a16:creationId xmlns:a16="http://schemas.microsoft.com/office/drawing/2014/main" id="{629E353E-726F-2B63-E6D9-F0A5CADFF231}"/>
+              </a:ext>
+            </a:extLst>
+          </p:cNvPr>
+          <p:cNvSpPr>
+            <a:spLocks noGrp="1"/>
+          </p:cNvSpPr>
+          <p:nvPr>
+            <p:ph idx="1"/>
+          </p:nvPr>
+        </p:nvSpPr>
+        <p:spPr/>
+        <p:txBody>
+          <a:bodyPr/>
+          <a:lstStyle/>
+          <a:p>
+            <a:r>
+              <a:rPr lang="en-US" dirty="0"/>
+              <a:t>Fundamental task in computer vision with diverse applications (device unlock, surveillance, access control, social media tagging).</a:t>
+            </a:r>
+          </a:p>
+          <a:p>
+            <a:r>
+              <a:rPr lang="en-US" dirty="0"/>
+              <a:t>This project focuses on the face detection and comparison between images for security and log-in functions.</a:t>
+            </a:r>
+          </a:p>
+          <a:p>
+            <a:r>
+              <a:rPr lang="en-US" dirty="0"/>
+              <a:t>Deep learning, especially CNNs, has boosted face recognition accuracy by learning robust facial features. These models outperform older methods, even under poor lighting or angle variations.</a:t>
+            </a:r>
+            <a:endParaRPr lang="es-ES" dirty="0"/>
+          </a:p>
+        </p:txBody>
+      </p:sp>
+    </p:spTree>
+    <p:extLst>
+      <p:ext uri="{BB962C8B-B14F-4D97-AF65-F5344CB8AC3E}">
+        <p14:creationId xmlns:p14="http://schemas.microsoft.com/office/powerpoint/2010/main" val="472454260"/>
+      </p:ext>
+    </p:extLst>
+  </p:cSld>
+  <p:clrMapOvr>
+    <a:masterClrMapping/>
+  </p:clrMapOvr>
+</p:sld>
+</file>
+
+<file path=ppt/slides/slide4.xml><?xml version="1.0" encoding="utf-8"?>
+<p:sld xmlns:a="http://schemas.openxmlformats.org/drawingml/2006/main" xmlns:r="http://schemas.openxmlformats.org/officeDocument/2006/relationships" xmlns:p="http://schemas.openxmlformats.org/presentationml/2006/main">
+  <p:cSld>
+    <p:spTree>
+      <p:nvGrpSpPr>
+        <p:cNvPr id="1" name=""/>
+        <p:cNvGrpSpPr/>
+        <p:nvPr/>
+      </p:nvGrpSpPr>
+      <p:grpSpPr>
+        <a:xfrm>
+          <a:off x="0" y="0"/>
+          <a:ext cx="0" cy="0"/>
+          <a:chOff x="0" y="0"/>
+          <a:chExt cx="0" cy="0"/>
+        </a:xfrm>
+      </p:grpSpPr>
+      <p:sp>
+        <p:nvSpPr>
+          <p:cNvPr id="2" name="Title 1">
+            <a:extLst>
+              <a:ext uri="{FF2B5EF4-FFF2-40B4-BE49-F238E27FC236}">
+                <a16:creationId xmlns:a16="http://schemas.microsoft.com/office/drawing/2014/main" id="{3EEA2A6A-7218-6D05-9E39-DAF42C2CBF0E}"/>
+              </a:ext>
+            </a:extLst>
+          </p:cNvPr>
+          <p:cNvSpPr>
+            <a:spLocks noGrp="1"/>
+          </p:cNvSpPr>
+          <p:nvPr>
+            <p:ph type="title"/>
+          </p:nvPr>
+        </p:nvSpPr>
+        <p:spPr/>
+        <p:txBody>
+          <a:bodyPr/>
+          <a:lstStyle/>
+          <a:p>
+            <a:r>
+              <a:rPr lang="es-ES" dirty="0"/>
+              <a:t>Project </a:t>
+            </a:r>
+            <a:r>
+              <a:rPr lang="es-ES" dirty="0" err="1"/>
+              <a:t>Objective</a:t>
+            </a:r>
+            <a:r>
+              <a:rPr lang="es-ES" dirty="0"/>
+              <a:t> and </a:t>
+            </a:r>
+            <a:r>
+              <a:rPr lang="es-ES" dirty="0" err="1"/>
+              <a:t>Motivation</a:t>
+            </a:r>
+            <a:endParaRPr lang="es-ES" dirty="0"/>
+          </a:p>
+        </p:txBody>
+      </p:sp>
+      <p:sp>
+        <p:nvSpPr>
+          <p:cNvPr id="3" name="Content Placeholder 2">
+            <a:extLst>
+              <a:ext uri="{FF2B5EF4-FFF2-40B4-BE49-F238E27FC236}">
+                <a16:creationId xmlns:a16="http://schemas.microsoft.com/office/drawing/2014/main" id="{8FAD9094-2680-17EB-C71A-AC4ABAEC2E6E}"/>
+              </a:ext>
+            </a:extLst>
+          </p:cNvPr>
+          <p:cNvSpPr>
+            <a:spLocks noGrp="1"/>
+          </p:cNvSpPr>
+          <p:nvPr>
+            <p:ph idx="1"/>
+          </p:nvPr>
+        </p:nvSpPr>
+        <p:spPr/>
+        <p:txBody>
+          <a:bodyPr/>
+          <a:lstStyle/>
+          <a:p>
+            <a:r>
+              <a:rPr lang="en-US" b="1" dirty="0"/>
+              <a:t>Objective:</a:t>
+            </a:r>
+            <a:r>
+              <a:rPr lang="en-US" dirty="0"/>
+              <a:t> To evaluate and compare various deep learning models for face classification.</a:t>
+            </a:r>
+            <a:endParaRPr lang="es-ES" dirty="0"/>
+          </a:p>
+          <a:p>
+            <a:r>
+              <a:rPr lang="en-US" b="1" dirty="0"/>
+              <a:t>Dataset:</a:t>
+            </a:r>
+            <a:r>
+              <a:rPr lang="en-US" dirty="0"/>
+              <a:t> Curated dataset of 18 celebrities, about 100 images each.</a:t>
+            </a:r>
+          </a:p>
+          <a:p>
+            <a:r>
+              <a:rPr lang="en-US" b="1" dirty="0"/>
+              <a:t>Goals:</a:t>
+            </a:r>
+            <a:r>
+              <a:rPr lang="en-US" dirty="0"/>
+              <a:t> Understand performance, analyze generalization/overfitting, develop a reproducible evaluation framework.</a:t>
+            </a:r>
+          </a:p>
+          <a:p>
+            <a:r>
+              <a:rPr lang="en-US" b="1" dirty="0"/>
+              <a:t>Why it Matters:</a:t>
+            </a:r>
+            <a:r>
+              <a:rPr lang="en-US" dirty="0"/>
+              <a:t> Insights into transfer learning for smaller datasets, foundational work for resource-constrained deployments.</a:t>
+            </a:r>
+          </a:p>
+          <a:p>
+            <a:r>
+              <a:rPr lang="en-US" b="1" dirty="0"/>
+              <a:t>Question:</a:t>
+            </a:r>
+            <a:r>
+              <a:rPr lang="en-US" dirty="0"/>
+              <a:t> What are the options for less powerful devices like smartphones or laptops to use non-proprietary models and implementations.</a:t>
+            </a:r>
+            <a:endParaRPr lang="es-ES" b="1" dirty="0"/>
+          </a:p>
+        </p:txBody>
+      </p:sp>
+    </p:spTree>
+    <p:extLst>
+      <p:ext uri="{BB962C8B-B14F-4D97-AF65-F5344CB8AC3E}">
+        <p14:creationId xmlns:p14="http://schemas.microsoft.com/office/powerpoint/2010/main" val="1119096577"/>
+      </p:ext>
+    </p:extLst>
+  </p:cSld>
+  <p:clrMapOvr>
+    <a:masterClrMapping/>
+  </p:clrMapOvr>
+</p:sld>
+</file>
+
+<file path=ppt/slides/slide5.xml><?xml version="1.0" encoding="utf-8"?>
+<p:sld xmlns:a="http://schemas.openxmlformats.org/drawingml/2006/main" xmlns:r="http://schemas.openxmlformats.org/officeDocument/2006/relationships" xmlns:p="http://schemas.openxmlformats.org/presentationml/2006/main">
+  <p:cSld>
+    <p:spTree>
+      <p:nvGrpSpPr>
+        <p:cNvPr id="1" name=""/>
+        <p:cNvGrpSpPr/>
+        <p:nvPr/>
+      </p:nvGrpSpPr>
+      <p:grpSpPr>
+        <a:xfrm>
+          <a:off x="0" y="0"/>
+          <a:ext cx="0" cy="0"/>
+          <a:chOff x="0" y="0"/>
+          <a:chExt cx="0" cy="0"/>
+        </a:xfrm>
+      </p:grpSpPr>
+      <p:sp>
+        <p:nvSpPr>
+          <p:cNvPr id="2" name="Title 1">
+            <a:extLst>
+              <a:ext uri="{FF2B5EF4-FFF2-40B4-BE49-F238E27FC236}">
+                <a16:creationId xmlns:a16="http://schemas.microsoft.com/office/drawing/2014/main" id="{0B08014F-0FFD-174B-D16F-11B42F948C3A}"/>
+              </a:ext>
+            </a:extLst>
+          </p:cNvPr>
+          <p:cNvSpPr>
+            <a:spLocks noGrp="1"/>
+          </p:cNvSpPr>
+          <p:nvPr>
+            <p:ph type="title"/>
+          </p:nvPr>
+        </p:nvSpPr>
+        <p:spPr/>
+        <p:txBody>
+          <a:bodyPr/>
+          <a:lstStyle/>
+          <a:p>
+            <a:r>
+              <a:rPr lang="es-ES" dirty="0"/>
+              <a:t>The </a:t>
+            </a:r>
+            <a:r>
+              <a:rPr lang="es-ES" dirty="0" err="1"/>
+              <a:t>Datasets</a:t>
+            </a:r>
+            <a:endParaRPr lang="es-ES" dirty="0"/>
+          </a:p>
+        </p:txBody>
+      </p:sp>
+      <p:sp>
+        <p:nvSpPr>
+          <p:cNvPr id="3" name="Content Placeholder 2">
+            <a:extLst>
+              <a:ext uri="{FF2B5EF4-FFF2-40B4-BE49-F238E27FC236}">
+                <a16:creationId xmlns:a16="http://schemas.microsoft.com/office/drawing/2014/main" id="{FFFE5850-A05B-3B23-F736-BB3CE7697F40}"/>
+              </a:ext>
+            </a:extLst>
+          </p:cNvPr>
+          <p:cNvSpPr>
+            <a:spLocks noGrp="1"/>
+          </p:cNvSpPr>
+          <p:nvPr>
+            <p:ph idx="1"/>
+          </p:nvPr>
+        </p:nvSpPr>
+        <p:spPr>
+          <a:xfrm>
+            <a:off x="612647" y="1715532"/>
+            <a:ext cx="10653579" cy="3992541"/>
+          </a:xfrm>
+        </p:spPr>
+        <p:txBody>
+          <a:bodyPr>
+            <a:normAutofit lnSpcReduction="10000"/>
+          </a:bodyPr>
+          <a:lstStyle/>
+          <a:p>
+            <a:pPr marL="0" indent="0">
+              <a:buNone/>
+            </a:pPr>
+            <a:r>
+              <a:rPr lang="es-ES" sz="2400" b="1" dirty="0"/>
+              <a:t>Original </a:t>
+            </a:r>
+            <a:r>
+              <a:rPr lang="es-ES" sz="2400" b="1" dirty="0" err="1"/>
+              <a:t>Dataset</a:t>
+            </a:r>
+            <a:endParaRPr lang="es-ES" sz="2400" b="1" dirty="0"/>
+          </a:p>
+          <a:p>
+            <a:r>
+              <a:rPr lang="es-ES" dirty="0"/>
+              <a:t>The </a:t>
+            </a:r>
+            <a:r>
+              <a:rPr lang="es-ES" dirty="0" err="1"/>
+              <a:t>dataset</a:t>
+            </a:r>
+            <a:r>
+              <a:rPr lang="es-ES" dirty="0"/>
+              <a:t> </a:t>
+            </a:r>
+            <a:r>
+              <a:rPr lang="es-ES" dirty="0" err="1"/>
+              <a:t>contains</a:t>
+            </a:r>
+            <a:r>
+              <a:rPr lang="es-ES" dirty="0"/>
+              <a:t> 17 </a:t>
+            </a:r>
+            <a:r>
+              <a:rPr lang="es-ES" dirty="0" err="1"/>
+              <a:t>celebrities</a:t>
+            </a:r>
+            <a:r>
+              <a:rPr lang="es-ES" dirty="0"/>
+              <a:t> (100 </a:t>
+            </a:r>
+            <a:r>
+              <a:rPr lang="es-ES" dirty="0" err="1"/>
+              <a:t>images</a:t>
+            </a:r>
+            <a:r>
+              <a:rPr lang="es-ES" dirty="0"/>
+              <a:t> each) </a:t>
+            </a:r>
+            <a:r>
+              <a:rPr lang="es-ES" dirty="0" err="1"/>
+              <a:t>from</a:t>
+            </a:r>
+            <a:r>
+              <a:rPr lang="es-ES" dirty="0"/>
+              <a:t> </a:t>
+            </a:r>
+            <a:r>
+              <a:rPr lang="es-ES" dirty="0" err="1">
+                <a:hlinkClick r:id="rId2"/>
+              </a:rPr>
+              <a:t>kaggle</a:t>
+            </a:r>
+            <a:r>
+              <a:rPr lang="es-ES" dirty="0"/>
+              <a:t> + the </a:t>
+            </a:r>
+            <a:r>
+              <a:rPr lang="es-ES" dirty="0" err="1"/>
+              <a:t>student</a:t>
+            </a:r>
+            <a:r>
+              <a:rPr lang="es-ES" dirty="0"/>
+              <a:t> </a:t>
+            </a:r>
+            <a:r>
+              <a:rPr lang="es-ES" dirty="0" err="1"/>
+              <a:t>images</a:t>
+            </a:r>
+            <a:r>
+              <a:rPr lang="es-ES" dirty="0"/>
+              <a:t> </a:t>
+            </a:r>
+            <a:r>
+              <a:rPr lang="es-ES" dirty="0" err="1"/>
+              <a:t>from</a:t>
+            </a:r>
+            <a:r>
+              <a:rPr lang="es-ES" dirty="0"/>
+              <a:t> a </a:t>
+            </a:r>
+            <a:r>
+              <a:rPr lang="es-ES" dirty="0" err="1"/>
+              <a:t>face</a:t>
+            </a:r>
+            <a:r>
+              <a:rPr lang="es-ES" dirty="0"/>
+              <a:t> </a:t>
+            </a:r>
+            <a:r>
+              <a:rPr lang="es-ES" dirty="0" err="1"/>
+              <a:t>scan</a:t>
+            </a:r>
+            <a:r>
+              <a:rPr lang="es-ES" dirty="0"/>
+              <a:t> video (300 </a:t>
+            </a:r>
+            <a:r>
+              <a:rPr lang="es-ES" dirty="0" err="1"/>
+              <a:t>images</a:t>
+            </a:r>
+            <a:r>
+              <a:rPr lang="es-ES" dirty="0"/>
+              <a:t>), </a:t>
+            </a:r>
+            <a:r>
+              <a:rPr lang="es-ES" dirty="0" err="1"/>
+              <a:t>totalling</a:t>
+            </a:r>
+            <a:r>
+              <a:rPr lang="es-ES" dirty="0"/>
+              <a:t> </a:t>
+            </a:r>
+            <a:r>
+              <a:rPr lang="es-ES" dirty="0" err="1"/>
+              <a:t>around</a:t>
+            </a:r>
+            <a:r>
+              <a:rPr lang="es-ES" dirty="0"/>
+              <a:t> 2000 </a:t>
+            </a:r>
+            <a:r>
+              <a:rPr lang="es-ES" dirty="0" err="1"/>
+              <a:t>images</a:t>
+            </a:r>
+            <a:r>
+              <a:rPr lang="es-ES" dirty="0"/>
+              <a:t>.</a:t>
+            </a:r>
+          </a:p>
+          <a:p>
+            <a:r>
+              <a:rPr lang="es-ES" dirty="0" err="1"/>
+              <a:t>All</a:t>
+            </a:r>
+            <a:r>
+              <a:rPr lang="es-ES" dirty="0"/>
+              <a:t> </a:t>
+            </a:r>
+            <a:r>
+              <a:rPr lang="es-ES" dirty="0" err="1"/>
+              <a:t>images</a:t>
+            </a:r>
+            <a:r>
+              <a:rPr lang="es-ES" dirty="0"/>
+              <a:t> were </a:t>
+            </a:r>
+            <a:r>
+              <a:rPr lang="es-ES" dirty="0" err="1"/>
+              <a:t>pre-processed</a:t>
+            </a:r>
+            <a:r>
+              <a:rPr lang="es-ES" dirty="0"/>
+              <a:t> by using MTCNN </a:t>
+            </a:r>
+            <a:r>
+              <a:rPr lang="es-ES" dirty="0" err="1"/>
+              <a:t>for</a:t>
+            </a:r>
+            <a:r>
+              <a:rPr lang="es-ES" dirty="0"/>
+              <a:t> </a:t>
+            </a:r>
+            <a:r>
+              <a:rPr lang="es-ES" dirty="0" err="1"/>
+              <a:t>face</a:t>
+            </a:r>
+            <a:r>
+              <a:rPr lang="es-ES" dirty="0"/>
+              <a:t> </a:t>
+            </a:r>
+            <a:r>
+              <a:rPr lang="es-ES" dirty="0" err="1"/>
+              <a:t>detection</a:t>
+            </a:r>
+            <a:r>
+              <a:rPr lang="es-ES" dirty="0"/>
+              <a:t>, </a:t>
+            </a:r>
+            <a:r>
+              <a:rPr lang="es-ES" dirty="0" err="1"/>
+              <a:t>resizing</a:t>
+            </a:r>
+            <a:r>
+              <a:rPr lang="es-ES" dirty="0"/>
+              <a:t> and </a:t>
+            </a:r>
+            <a:r>
+              <a:rPr lang="es-ES" dirty="0" err="1"/>
+              <a:t>cropping</a:t>
+            </a:r>
+            <a:r>
+              <a:rPr lang="es-ES" dirty="0"/>
+              <a:t> (128x128) and </a:t>
+            </a:r>
+            <a:r>
+              <a:rPr lang="es-ES" dirty="0" err="1"/>
+              <a:t>normalization</a:t>
+            </a:r>
+            <a:r>
+              <a:rPr lang="es-ES" dirty="0"/>
+              <a:t>.</a:t>
+            </a:r>
+          </a:p>
+          <a:p>
+            <a:pPr marL="0" indent="0">
+              <a:buNone/>
+            </a:pPr>
+            <a:r>
+              <a:rPr lang="es-ES" sz="2400" b="1" dirty="0" err="1"/>
+              <a:t>Augmentation</a:t>
+            </a:r>
+            <a:endParaRPr lang="es-ES" sz="2000" b="1" dirty="0"/>
+          </a:p>
+          <a:p>
+            <a:r>
+              <a:rPr lang="es-ES" dirty="0" err="1"/>
+              <a:t>Images</a:t>
+            </a:r>
+            <a:r>
+              <a:rPr lang="es-ES" dirty="0"/>
+              <a:t> </a:t>
+            </a:r>
+            <a:r>
+              <a:rPr lang="es-ES" dirty="0" err="1"/>
+              <a:t>augmented</a:t>
+            </a:r>
+            <a:r>
+              <a:rPr lang="es-ES" dirty="0"/>
+              <a:t> in 3 different </a:t>
+            </a:r>
+            <a:r>
+              <a:rPr lang="es-ES" dirty="0" err="1"/>
+              <a:t>ways</a:t>
+            </a:r>
+            <a:r>
+              <a:rPr lang="es-ES" dirty="0"/>
+              <a:t>: Horizontal </a:t>
+            </a:r>
+            <a:r>
+              <a:rPr lang="es-ES" dirty="0" err="1"/>
+              <a:t>flip</a:t>
+            </a:r>
+            <a:r>
+              <a:rPr lang="es-ES" dirty="0"/>
+              <a:t>, </a:t>
+            </a:r>
+            <a:r>
+              <a:rPr lang="es-ES" dirty="0" err="1"/>
+              <a:t>slight</a:t>
+            </a:r>
+            <a:r>
+              <a:rPr lang="es-ES" dirty="0"/>
+              <a:t> </a:t>
+            </a:r>
+            <a:r>
+              <a:rPr lang="es-ES" dirty="0" err="1"/>
+              <a:t>rotation</a:t>
+            </a:r>
+            <a:r>
+              <a:rPr lang="es-ES" dirty="0"/>
+              <a:t> and color </a:t>
+            </a:r>
+            <a:r>
+              <a:rPr lang="es-ES" dirty="0" err="1"/>
+              <a:t>jitter</a:t>
+            </a:r>
+            <a:endParaRPr lang="es-ES" dirty="0"/>
+          </a:p>
+          <a:p>
+            <a:r>
+              <a:rPr lang="es-ES" sz="2000" dirty="0"/>
+              <a:t>This </a:t>
+            </a:r>
+            <a:r>
+              <a:rPr lang="es-ES" sz="2000" dirty="0" err="1"/>
+              <a:t>created</a:t>
+            </a:r>
+            <a:r>
+              <a:rPr lang="es-ES" sz="2000" dirty="0"/>
+              <a:t> </a:t>
+            </a:r>
+            <a:r>
+              <a:rPr lang="es-ES" sz="2000" dirty="0" err="1"/>
+              <a:t>for</a:t>
+            </a:r>
+            <a:r>
+              <a:rPr lang="es-ES" sz="2000" dirty="0"/>
+              <a:t> each original </a:t>
+            </a:r>
+            <a:r>
+              <a:rPr lang="es-ES" sz="2000" dirty="0" err="1"/>
+              <a:t>images</a:t>
+            </a:r>
+            <a:r>
+              <a:rPr lang="es-ES" sz="2000" dirty="0"/>
+              <a:t>, 3 extra </a:t>
+            </a:r>
+            <a:r>
+              <a:rPr lang="es-ES" sz="2000" dirty="0" err="1"/>
+              <a:t>augmented</a:t>
+            </a:r>
+            <a:r>
+              <a:rPr lang="es-ES" sz="2000" dirty="0"/>
+              <a:t>, </a:t>
+            </a:r>
+            <a:r>
+              <a:rPr lang="es-ES" sz="2000" dirty="0" err="1"/>
+              <a:t>totalling</a:t>
+            </a:r>
+            <a:r>
+              <a:rPr lang="es-ES" sz="2000" dirty="0"/>
+              <a:t> 2000 x 4 = 8000 </a:t>
+            </a:r>
+            <a:r>
+              <a:rPr lang="es-ES" sz="2000" dirty="0" err="1"/>
+              <a:t>images</a:t>
+            </a:r>
+            <a:endParaRPr lang="es-ES" sz="2000" dirty="0"/>
+          </a:p>
+          <a:p>
+            <a:pPr marL="0" indent="0">
+              <a:buNone/>
+            </a:pPr>
+            <a:endParaRPr lang="es-ES" dirty="0"/>
+          </a:p>
+        </p:txBody>
+      </p:sp>
+      <p:sp>
+        <p:nvSpPr>
+          <p:cNvPr id="4" name="Rectangle: Rounded Corners 3">
+            <a:extLst>
+              <a:ext uri="{FF2B5EF4-FFF2-40B4-BE49-F238E27FC236}">
+                <a16:creationId xmlns:a16="http://schemas.microsoft.com/office/drawing/2014/main" id="{BD029C9D-BD38-07FC-9050-8BEFA4DC9291}"/>
+              </a:ext>
+            </a:extLst>
+          </p:cNvPr>
+          <p:cNvSpPr/>
+          <p:nvPr/>
+        </p:nvSpPr>
+        <p:spPr>
+          <a:xfrm>
+            <a:off x="612648" y="5721927"/>
+            <a:ext cx="10653578" cy="955964"/>
+          </a:xfrm>
+          <a:prstGeom prst="roundRect">
+            <a:avLst/>
+          </a:prstGeom>
+          <a:solidFill>
+            <a:schemeClr val="bg1"/>
+          </a:solidFill>
+          <a:ln w="28575">
+            <a:solidFill>
+              <a:srgbClr val="0070C0"/>
+            </a:solidFill>
+          </a:ln>
+        </p:spPr>
+        <p:style>
+          <a:lnRef idx="2">
+            <a:schemeClr val="accent1">
+              <a:shade val="15000"/>
+            </a:schemeClr>
+          </a:lnRef>
+          <a:fillRef idx="1">
+            <a:schemeClr val="accent1"/>
+          </a:fillRef>
+          <a:effectRef idx="0">
+            <a:schemeClr val="accent1"/>
+          </a:effectRef>
+          <a:fontRef idx="minor">
+            <a:schemeClr val="lt1"/>
+          </a:fontRef>
+        </p:style>
+        <p:txBody>
+          <a:bodyPr rtlCol="0" anchor="ctr"/>
+          <a:lstStyle/>
+          <a:p>
+            <a:pPr algn="ctr"/>
+            <a:r>
+              <a:rPr lang="es-ES" dirty="0">
+                <a:solidFill>
+                  <a:schemeClr val="tx1"/>
+                </a:solidFill>
+              </a:rPr>
+              <a:t>To </a:t>
+            </a:r>
+            <a:r>
+              <a:rPr lang="es-ES" dirty="0" err="1">
+                <a:solidFill>
+                  <a:schemeClr val="tx1"/>
+                </a:solidFill>
+              </a:rPr>
+              <a:t>avoid</a:t>
+            </a:r>
+            <a:r>
+              <a:rPr lang="es-ES" dirty="0">
+                <a:solidFill>
+                  <a:schemeClr val="tx1"/>
+                </a:solidFill>
+              </a:rPr>
+              <a:t> a </a:t>
+            </a:r>
+            <a:r>
+              <a:rPr lang="es-ES" dirty="0" err="1">
+                <a:solidFill>
+                  <a:schemeClr val="tx1"/>
+                </a:solidFill>
+              </a:rPr>
+              <a:t>previous</a:t>
+            </a:r>
+            <a:r>
+              <a:rPr lang="es-ES" dirty="0">
+                <a:solidFill>
+                  <a:schemeClr val="tx1"/>
+                </a:solidFill>
+              </a:rPr>
+              <a:t> </a:t>
+            </a:r>
+            <a:r>
+              <a:rPr lang="es-ES" b="1" dirty="0">
+                <a:solidFill>
+                  <a:schemeClr val="tx1"/>
+                </a:solidFill>
+              </a:rPr>
+              <a:t>data </a:t>
+            </a:r>
+            <a:r>
+              <a:rPr lang="es-ES" b="1" dirty="0" err="1">
+                <a:solidFill>
+                  <a:schemeClr val="tx1"/>
+                </a:solidFill>
+              </a:rPr>
+              <a:t>leakage</a:t>
+            </a:r>
+            <a:r>
+              <a:rPr lang="es-ES" dirty="0">
+                <a:solidFill>
+                  <a:schemeClr val="tx1"/>
+                </a:solidFill>
+              </a:rPr>
+              <a:t>, the Split is done 70% - 15% - 15% in a non-</a:t>
+            </a:r>
+            <a:r>
+              <a:rPr lang="es-ES" dirty="0" err="1">
+                <a:solidFill>
+                  <a:schemeClr val="tx1"/>
+                </a:solidFill>
+              </a:rPr>
+              <a:t>random</a:t>
+            </a:r>
+            <a:r>
+              <a:rPr lang="es-ES" dirty="0">
+                <a:solidFill>
+                  <a:schemeClr val="tx1"/>
+                </a:solidFill>
+              </a:rPr>
+              <a:t> way, </a:t>
+            </a:r>
+            <a:r>
+              <a:rPr lang="es-ES" dirty="0" err="1">
+                <a:solidFill>
+                  <a:schemeClr val="tx1"/>
+                </a:solidFill>
+              </a:rPr>
+              <a:t>making</a:t>
+            </a:r>
+            <a:r>
+              <a:rPr lang="es-ES" dirty="0">
+                <a:solidFill>
+                  <a:schemeClr val="tx1"/>
+                </a:solidFill>
+              </a:rPr>
+              <a:t> </a:t>
+            </a:r>
+            <a:r>
+              <a:rPr lang="es-ES" dirty="0" err="1">
+                <a:solidFill>
+                  <a:schemeClr val="tx1"/>
+                </a:solidFill>
+              </a:rPr>
+              <a:t>deterministic</a:t>
+            </a:r>
+            <a:r>
+              <a:rPr lang="es-ES" dirty="0">
+                <a:solidFill>
+                  <a:schemeClr val="tx1"/>
+                </a:solidFill>
+              </a:rPr>
+              <a:t> and </a:t>
+            </a:r>
+            <a:r>
+              <a:rPr lang="es-ES" dirty="0" err="1">
+                <a:solidFill>
+                  <a:schemeClr val="tx1"/>
+                </a:solidFill>
+              </a:rPr>
+              <a:t>checking</a:t>
+            </a:r>
+            <a:r>
+              <a:rPr lang="es-ES" dirty="0">
+                <a:solidFill>
+                  <a:schemeClr val="tx1"/>
+                </a:solidFill>
+              </a:rPr>
+              <a:t> that </a:t>
+            </a:r>
+            <a:r>
+              <a:rPr lang="es-ES" dirty="0" err="1">
+                <a:solidFill>
+                  <a:schemeClr val="tx1"/>
+                </a:solidFill>
+              </a:rPr>
+              <a:t>all</a:t>
+            </a:r>
+            <a:r>
+              <a:rPr lang="es-ES" dirty="0">
+                <a:solidFill>
+                  <a:schemeClr val="tx1"/>
+                </a:solidFill>
+              </a:rPr>
+              <a:t> 4 </a:t>
+            </a:r>
+            <a:r>
+              <a:rPr lang="es-ES" dirty="0" err="1">
+                <a:solidFill>
+                  <a:schemeClr val="tx1"/>
+                </a:solidFill>
+              </a:rPr>
+              <a:t>images</a:t>
+            </a:r>
+            <a:r>
+              <a:rPr lang="es-ES" dirty="0">
+                <a:solidFill>
+                  <a:schemeClr val="tx1"/>
+                </a:solidFill>
+              </a:rPr>
+              <a:t> (original + 3 </a:t>
+            </a:r>
+            <a:r>
+              <a:rPr lang="es-ES" dirty="0" err="1">
+                <a:solidFill>
+                  <a:schemeClr val="tx1"/>
+                </a:solidFill>
+              </a:rPr>
+              <a:t>augmented</a:t>
+            </a:r>
+            <a:r>
+              <a:rPr lang="es-ES" dirty="0">
+                <a:solidFill>
+                  <a:schemeClr val="tx1"/>
+                </a:solidFill>
+              </a:rPr>
+              <a:t>) were in a single Split.</a:t>
+            </a:r>
+          </a:p>
+        </p:txBody>
+      </p:sp>
+    </p:spTree>
+    <p:extLst>
+      <p:ext uri="{BB962C8B-B14F-4D97-AF65-F5344CB8AC3E}">
+        <p14:creationId xmlns:p14="http://schemas.microsoft.com/office/powerpoint/2010/main" val="1625124294"/>
+      </p:ext>
+    </p:extLst>
+  </p:cSld>
+  <p:clrMapOvr>
+    <a:masterClrMapping/>
+  </p:clrMapOvr>
+</p:sld>
+</file>
+
+<file path=ppt/slides/slide6.xml><?xml version="1.0" encoding="utf-8"?>
+<p:sld xmlns:a="http://schemas.openxmlformats.org/drawingml/2006/main" xmlns:r="http://schemas.openxmlformats.org/officeDocument/2006/relationships" xmlns:p="http://schemas.openxmlformats.org/presentationml/2006/main">
+  <p:cSld>
+    <p:spTree>
+      <p:nvGrpSpPr>
+        <p:cNvPr id="1" name=""/>
+        <p:cNvGrpSpPr/>
+        <p:nvPr/>
+      </p:nvGrpSpPr>
+      <p:grpSpPr>
+        <a:xfrm>
+          <a:off x="0" y="0"/>
+          <a:ext cx="0" cy="0"/>
+          <a:chOff x="0" y="0"/>
+          <a:chExt cx="0" cy="0"/>
+        </a:xfrm>
+      </p:grpSpPr>
+      <p:sp>
+        <p:nvSpPr>
+          <p:cNvPr id="2" name="Title 1">
+            <a:extLst>
+              <a:ext uri="{FF2B5EF4-FFF2-40B4-BE49-F238E27FC236}">
+                <a16:creationId xmlns:a16="http://schemas.microsoft.com/office/drawing/2014/main" id="{DB1BA345-6744-3FE7-3680-97566F1F098F}"/>
+              </a:ext>
+            </a:extLst>
+          </p:cNvPr>
+          <p:cNvSpPr>
+            <a:spLocks noGrp="1"/>
+          </p:cNvSpPr>
+          <p:nvPr>
+            <p:ph type="title"/>
+          </p:nvPr>
+        </p:nvSpPr>
+        <p:spPr/>
+        <p:txBody>
+          <a:bodyPr/>
+          <a:lstStyle/>
+          <a:p>
+            <a:r>
+              <a:rPr lang="es-ES" dirty="0" err="1"/>
+              <a:t>Models</a:t>
+            </a:r>
+            <a:endParaRPr lang="es-ES" dirty="0"/>
+          </a:p>
+        </p:txBody>
+      </p:sp>
+      <p:sp>
+        <p:nvSpPr>
+          <p:cNvPr id="3" name="Content Placeholder 2">
+            <a:extLst>
+              <a:ext uri="{FF2B5EF4-FFF2-40B4-BE49-F238E27FC236}">
+                <a16:creationId xmlns:a16="http://schemas.microsoft.com/office/drawing/2014/main" id="{9F5F05AC-DA74-8CF0-9B54-052F1E831274}"/>
+              </a:ext>
+            </a:extLst>
+          </p:cNvPr>
+          <p:cNvSpPr>
+            <a:spLocks noGrp="1"/>
+          </p:cNvSpPr>
+          <p:nvPr>
+            <p:ph idx="1"/>
+          </p:nvPr>
+        </p:nvSpPr>
+        <p:spPr/>
+        <p:txBody>
+          <a:bodyPr/>
+          <a:lstStyle/>
+          <a:p>
+            <a:r>
+              <a:rPr lang="en-US" dirty="0"/>
+              <a:t>Classical Approaches: PCA, LBP </a:t>
+            </a:r>
+          </a:p>
+          <a:p>
+            <a:r>
+              <a:rPr lang="en-US" dirty="0"/>
+              <a:t>Transfer Learning (CNN Baselines): VGG16 (fine-tuned), MobileNetV2</a:t>
+            </a:r>
+          </a:p>
+          <a:p>
+            <a:r>
+              <a:rPr lang="en-US" dirty="0"/>
+              <a:t>Embedding-Based (State-of-the-Art): </a:t>
+            </a:r>
+            <a:r>
+              <a:rPr lang="en-US" dirty="0" err="1"/>
+              <a:t>FaceNet</a:t>
+            </a:r>
+            <a:r>
+              <a:rPr lang="en-US" dirty="0"/>
+              <a:t>, </a:t>
+            </a:r>
+            <a:r>
+              <a:rPr lang="en-US" dirty="0" err="1"/>
+              <a:t>ArcFace</a:t>
+            </a:r>
+            <a:r>
+              <a:rPr lang="en-US" dirty="0"/>
+              <a:t> (with KNN classifier) </a:t>
+            </a:r>
+          </a:p>
+          <a:p>
+            <a:endParaRPr lang="es-ES" dirty="0"/>
+          </a:p>
+        </p:txBody>
+      </p:sp>
+    </p:spTree>
+    <p:extLst>
+      <p:ext uri="{BB962C8B-B14F-4D97-AF65-F5344CB8AC3E}">
+        <p14:creationId xmlns:p14="http://schemas.microsoft.com/office/powerpoint/2010/main" val="1435071399"/>
+      </p:ext>
+    </p:extLst>
+  </p:cSld>
+  <p:clrMapOvr>
+    <a:masterClrMapping/>
+  </p:clrMapOvr>
+</p:sld>
+</file>
+
+<file path=ppt/slides/slide7.xml><?xml version="1.0" encoding="utf-8"?>
+<p:sld xmlns:a="http://schemas.openxmlformats.org/drawingml/2006/main" xmlns:r="http://schemas.openxmlformats.org/officeDocument/2006/relationships" xmlns:p="http://schemas.openxmlformats.org/presentationml/2006/main">
+  <p:cSld>
+    <p:spTree>
+      <p:nvGrpSpPr>
+        <p:cNvPr id="1" name=""/>
+        <p:cNvGrpSpPr/>
+        <p:nvPr/>
+      </p:nvGrpSpPr>
+      <p:grpSpPr>
+        <a:xfrm>
+          <a:off x="0" y="0"/>
+          <a:ext cx="0" cy="0"/>
+          <a:chOff x="0" y="0"/>
+          <a:chExt cx="0" cy="0"/>
+        </a:xfrm>
+      </p:grpSpPr>
+      <p:sp>
+        <p:nvSpPr>
+          <p:cNvPr id="2" name="Title 1">
+            <a:extLst>
+              <a:ext uri="{FF2B5EF4-FFF2-40B4-BE49-F238E27FC236}">
+                <a16:creationId xmlns:a16="http://schemas.microsoft.com/office/drawing/2014/main" id="{ABAA091E-A79B-A64F-5B66-50BDC9382FAC}"/>
+              </a:ext>
+            </a:extLst>
+          </p:cNvPr>
+          <p:cNvSpPr>
+            <a:spLocks noGrp="1"/>
+          </p:cNvSpPr>
+          <p:nvPr>
+            <p:ph type="title"/>
+          </p:nvPr>
+        </p:nvSpPr>
+        <p:spPr/>
+        <p:txBody>
+          <a:bodyPr/>
+          <a:lstStyle/>
+          <a:p>
+            <a:r>
+              <a:rPr lang="es-ES" dirty="0" err="1"/>
+              <a:t>Models</a:t>
+            </a:r>
+            <a:r>
+              <a:rPr lang="es-ES" dirty="0"/>
+              <a:t>: </a:t>
+            </a:r>
+            <a:r>
+              <a:rPr lang="es-ES" dirty="0" err="1"/>
+              <a:t>Classical</a:t>
+            </a:r>
+            <a:r>
+              <a:rPr lang="es-ES" dirty="0"/>
+              <a:t> </a:t>
+            </a:r>
+            <a:r>
+              <a:rPr lang="es-ES" dirty="0" err="1"/>
+              <a:t>Approaches</a:t>
+            </a:r>
+            <a:r>
+              <a:rPr lang="es-ES" dirty="0"/>
+              <a:t> - PCA</a:t>
+            </a:r>
+          </a:p>
+        </p:txBody>
+      </p:sp>
+      <p:sp>
+        <p:nvSpPr>
+          <p:cNvPr id="3" name="Content Placeholder 2">
+            <a:extLst>
+              <a:ext uri="{FF2B5EF4-FFF2-40B4-BE49-F238E27FC236}">
+                <a16:creationId xmlns:a16="http://schemas.microsoft.com/office/drawing/2014/main" id="{E60DA390-2E8B-082C-7D4C-CC5FE49679EE}"/>
+              </a:ext>
+            </a:extLst>
+          </p:cNvPr>
+          <p:cNvSpPr>
+            <a:spLocks noGrp="1"/>
+          </p:cNvSpPr>
+          <p:nvPr>
+            <p:ph idx="1"/>
+          </p:nvPr>
+        </p:nvSpPr>
+        <p:spPr/>
+        <p:txBody>
+          <a:bodyPr/>
+          <a:lstStyle/>
+          <a:p>
+            <a:endParaRPr lang="es-ES"/>
+          </a:p>
+        </p:txBody>
+      </p:sp>
+    </p:spTree>
+    <p:extLst>
+      <p:ext uri="{BB962C8B-B14F-4D97-AF65-F5344CB8AC3E}">
+        <p14:creationId xmlns:p14="http://schemas.microsoft.com/office/powerpoint/2010/main" val="3056003020"/>
+      </p:ext>
+    </p:extLst>
+  </p:cSld>
+  <p:clrMapOvr>
+    <a:masterClrMapping/>
+  </p:clrMapOvr>
+</p:sld>
+</file>
+
+<file path=ppt/slides/slide8.xml><?xml version="1.0" encoding="utf-8"?>
+<p:sld xmlns:a="http://schemas.openxmlformats.org/drawingml/2006/main" xmlns:r="http://schemas.openxmlformats.org/officeDocument/2006/relationships" xmlns:p="http://schemas.openxmlformats.org/presentationml/2006/main">
+  <p:cSld>
+    <p:spTree>
+      <p:nvGrpSpPr>
+        <p:cNvPr id="1" name=""/>
+        <p:cNvGrpSpPr/>
+        <p:nvPr/>
+      </p:nvGrpSpPr>
+      <p:grpSpPr>
+        <a:xfrm>
+          <a:off x="0" y="0"/>
+          <a:ext cx="0" cy="0"/>
+          <a:chOff x="0" y="0"/>
+          <a:chExt cx="0" cy="0"/>
+        </a:xfrm>
+      </p:grpSpPr>
+      <p:sp>
+        <p:nvSpPr>
+          <p:cNvPr id="2" name="Title 1">
+            <a:extLst>
+              <a:ext uri="{FF2B5EF4-FFF2-40B4-BE49-F238E27FC236}">
+                <a16:creationId xmlns:a16="http://schemas.microsoft.com/office/drawing/2014/main" id="{ABAA091E-A79B-A64F-5B66-50BDC9382FAC}"/>
+              </a:ext>
+            </a:extLst>
+          </p:cNvPr>
+          <p:cNvSpPr>
+            <a:spLocks noGrp="1"/>
+          </p:cNvSpPr>
+          <p:nvPr>
+            <p:ph type="title"/>
+          </p:nvPr>
+        </p:nvSpPr>
+        <p:spPr/>
+        <p:txBody>
+          <a:bodyPr/>
+          <a:lstStyle/>
+          <a:p>
+            <a:r>
+              <a:rPr lang="es-ES" dirty="0" err="1"/>
+              <a:t>Models</a:t>
+            </a:r>
+            <a:r>
+              <a:rPr lang="es-ES" dirty="0"/>
+              <a:t>: </a:t>
+            </a:r>
+            <a:r>
+              <a:rPr lang="es-ES" dirty="0" err="1"/>
+              <a:t>Classical</a:t>
+            </a:r>
+            <a:r>
+              <a:rPr lang="es-ES" dirty="0"/>
+              <a:t> </a:t>
+            </a:r>
+            <a:r>
+              <a:rPr lang="es-ES" dirty="0" err="1"/>
+              <a:t>Approaches</a:t>
+            </a:r>
+            <a:r>
+              <a:rPr lang="es-ES" dirty="0"/>
+              <a:t> - LBP</a:t>
+            </a:r>
+          </a:p>
+        </p:txBody>
+      </p:sp>
+      <p:sp>
+        <p:nvSpPr>
+          <p:cNvPr id="3" name="Content Placeholder 2">
+            <a:extLst>
+              <a:ext uri="{FF2B5EF4-FFF2-40B4-BE49-F238E27FC236}">
+                <a16:creationId xmlns:a16="http://schemas.microsoft.com/office/drawing/2014/main" id="{E60DA390-2E8B-082C-7D4C-CC5FE49679EE}"/>
+              </a:ext>
+            </a:extLst>
+          </p:cNvPr>
+          <p:cNvSpPr>
+            <a:spLocks noGrp="1"/>
+          </p:cNvSpPr>
+          <p:nvPr>
+            <p:ph idx="1"/>
+          </p:nvPr>
+        </p:nvSpPr>
+        <p:spPr/>
+        <p:txBody>
+          <a:bodyPr/>
+          <a:lstStyle/>
+          <a:p>
+            <a:endParaRPr lang="es-ES"/>
+          </a:p>
+        </p:txBody>
+      </p:sp>
+    </p:spTree>
+    <p:extLst>
+      <p:ext uri="{BB962C8B-B14F-4D97-AF65-F5344CB8AC3E}">
+        <p14:creationId xmlns:p14="http://schemas.microsoft.com/office/powerpoint/2010/main" val="384888380"/>
+      </p:ext>
+    </p:extLst>
+  </p:cSld>
+  <p:clrMapOvr>
+    <a:masterClrMapping/>
+  </p:clrMapOvr>
+</p:sld>
+</file>
+
+<file path=ppt/slides/slide9.xml><?xml version="1.0" encoding="utf-8"?>
+<p:sld xmlns:a="http://schemas.openxmlformats.org/drawingml/2006/main" xmlns:r="http://schemas.openxmlformats.org/officeDocument/2006/relationships" xmlns:p="http://schemas.openxmlformats.org/presentationml/2006/main">
+  <p:cSld>
+    <p:spTree>
+      <p:nvGrpSpPr>
+        <p:cNvPr id="1" name=""/>
+        <p:cNvGrpSpPr/>
+        <p:nvPr/>
+      </p:nvGrpSpPr>
+      <p:grpSpPr>
+        <a:xfrm>
+          <a:off x="0" y="0"/>
+          <a:ext cx="0" cy="0"/>
+          <a:chOff x="0" y="0"/>
+          <a:chExt cx="0" cy="0"/>
+        </a:xfrm>
+      </p:grpSpPr>
+      <p:sp>
+        <p:nvSpPr>
+          <p:cNvPr id="2" name="Title 1">
+            <a:extLst>
+              <a:ext uri="{FF2B5EF4-FFF2-40B4-BE49-F238E27FC236}">
+                <a16:creationId xmlns:a16="http://schemas.microsoft.com/office/drawing/2014/main" id="{ABAA091E-A79B-A64F-5B66-50BDC9382FAC}"/>
+              </a:ext>
+            </a:extLst>
+          </p:cNvPr>
+          <p:cNvSpPr>
+            <a:spLocks noGrp="1"/>
+          </p:cNvSpPr>
+          <p:nvPr>
+            <p:ph type="title"/>
+          </p:nvPr>
+        </p:nvSpPr>
+        <p:spPr/>
+        <p:txBody>
+          <a:bodyPr/>
+          <a:lstStyle/>
+          <a:p>
+            <a:r>
+              <a:rPr lang="es-ES" dirty="0" err="1"/>
+              <a:t>Models</a:t>
+            </a:r>
+            <a:r>
+              <a:rPr lang="es-ES" dirty="0"/>
+              <a:t>: Transfer Learning – VGG16</a:t>
+            </a:r>
+          </a:p>
+        </p:txBody>
+      </p:sp>
+      <p:sp>
+        <p:nvSpPr>
+          <p:cNvPr id="3" name="Content Placeholder 2">
+            <a:extLst>
+              <a:ext uri="{FF2B5EF4-FFF2-40B4-BE49-F238E27FC236}">
+                <a16:creationId xmlns:a16="http://schemas.microsoft.com/office/drawing/2014/main" id="{E60DA390-2E8B-082C-7D4C-CC5FE49679EE}"/>
+              </a:ext>
+            </a:extLst>
+          </p:cNvPr>
+          <p:cNvSpPr>
+            <a:spLocks noGrp="1"/>
+          </p:cNvSpPr>
+          <p:nvPr>
+            <p:ph idx="1"/>
+          </p:nvPr>
+        </p:nvSpPr>
+        <p:spPr/>
+        <p:txBody>
+          <a:bodyPr/>
+          <a:lstStyle/>
+          <a:p>
+            <a:endParaRPr lang="es-ES"/>
+          </a:p>
+        </p:txBody>
+      </p:sp>
+    </p:spTree>
+    <p:extLst>
+      <p:ext uri="{BB962C8B-B14F-4D97-AF65-F5344CB8AC3E}">
+        <p14:creationId xmlns:p14="http://schemas.microsoft.com/office/powerpoint/2010/main" val="2318978003"/>
       </p:ext>
     </p:extLst>
   </p:cSld>

--- a/Face Reconition Presentation_v2.pptx
+++ b/Face Reconition Presentation_v2.pptx
@@ -4,6 +4,9 @@
   <p:sldMasterIdLst>
     <p:sldMasterId id="2147483660" r:id="rId1"/>
   </p:sldMasterIdLst>
+  <p:notesMasterIdLst>
+    <p:notesMasterId r:id="rId26"/>
+  </p:notesMasterIdLst>
   <p:sldIdLst>
     <p:sldId id="256" r:id="rId2"/>
     <p:sldId id="257" r:id="rId3"/>
@@ -14,11 +17,21 @@
     <p:sldId id="262" r:id="rId8"/>
     <p:sldId id="263" r:id="rId9"/>
     <p:sldId id="264" r:id="rId10"/>
-    <p:sldId id="265" r:id="rId11"/>
-    <p:sldId id="266" r:id="rId12"/>
-    <p:sldId id="267" r:id="rId13"/>
-    <p:sldId id="268" r:id="rId14"/>
-    <p:sldId id="269" r:id="rId15"/>
+    <p:sldId id="270" r:id="rId11"/>
+    <p:sldId id="265" r:id="rId12"/>
+    <p:sldId id="266" r:id="rId13"/>
+    <p:sldId id="271" r:id="rId14"/>
+    <p:sldId id="267" r:id="rId15"/>
+    <p:sldId id="272" r:id="rId16"/>
+    <p:sldId id="273" r:id="rId17"/>
+    <p:sldId id="274" r:id="rId18"/>
+    <p:sldId id="269" r:id="rId19"/>
+    <p:sldId id="275" r:id="rId20"/>
+    <p:sldId id="277" r:id="rId21"/>
+    <p:sldId id="278" r:id="rId22"/>
+    <p:sldId id="276" r:id="rId23"/>
+    <p:sldId id="279" r:id="rId24"/>
+    <p:sldId id="280" r:id="rId25"/>
   </p:sldIdLst>
   <p:sldSz cx="12192000" cy="6858000"/>
   <p:notesSz cx="6858000" cy="9144000"/>
@@ -128,7 +141,7 @@
 <file path=ppt/revisionInfo.xml><?xml version="1.0" encoding="utf-8"?>
 <p1510:revInfo xmlns:a="http://schemas.openxmlformats.org/drawingml/2006/main" xmlns:r="http://schemas.openxmlformats.org/officeDocument/2006/relationships" xmlns:p1510="http://schemas.microsoft.com/office/powerpoint/2015/10/main">
   <p1510:revLst>
-    <p1510:client id="{47809704-D555-43E9-8763-C18ABFFD866A}" v="15" dt="2025-06-28T00:09:24.259"/>
+    <p1510:client id="{47809704-D555-43E9-8763-C18ABFFD866A}" v="853" dt="2025-06-30T14:16:28.215"/>
   </p1510:revLst>
 </p1510:revInfo>
 </file>
@@ -137,8 +150,8 @@
 <pc:chgInfo xmlns:a="http://schemas.openxmlformats.org/drawingml/2006/main" xmlns:r="http://schemas.openxmlformats.org/officeDocument/2006/relationships" xmlns:ac="http://schemas.microsoft.com/office/drawing/2013/main/command" xmlns:pc="http://schemas.microsoft.com/office/powerpoint/2013/main/command">
   <pc:docChgLst>
     <pc:chgData name="Cervan Canton Alvaro W.MSCIDS_F24.2301" userId="09644743-1044-4338-95c6-f7c68461d1d3" providerId="ADAL" clId="{47809704-D555-43E9-8763-C18ABFFD866A}"/>
-    <pc:docChg chg="undo redo custSel addSld modSld">
-      <pc:chgData name="Cervan Canton Alvaro W.MSCIDS_F24.2301" userId="09644743-1044-4338-95c6-f7c68461d1d3" providerId="ADAL" clId="{47809704-D555-43E9-8763-C18ABFFD866A}" dt="2025-06-28T00:17:39.580" v="1260" actId="403"/>
+    <pc:docChg chg="undo redo custSel addSld delSld modSld">
+      <pc:chgData name="Cervan Canton Alvaro W.MSCIDS_F24.2301" userId="09644743-1044-4338-95c6-f7c68461d1d3" providerId="ADAL" clId="{47809704-D555-43E9-8763-C18ABFFD866A}" dt="2025-06-30T14:18:31.659" v="5878" actId="122"/>
       <pc:docMkLst>
         <pc:docMk/>
       </pc:docMkLst>
@@ -274,38 +287,110 @@
           </ac:spMkLst>
         </pc:spChg>
       </pc:sldChg>
-      <pc:sldChg chg="modSp new mod">
-        <pc:chgData name="Cervan Canton Alvaro W.MSCIDS_F24.2301" userId="09644743-1044-4338-95c6-f7c68461d1d3" providerId="ADAL" clId="{47809704-D555-43E9-8763-C18ABFFD866A}" dt="2025-06-28T00:10:33.417" v="979" actId="20577"/>
+      <pc:sldChg chg="addSp delSp modSp new mod setBg">
+        <pc:chgData name="Cervan Canton Alvaro W.MSCIDS_F24.2301" userId="09644743-1044-4338-95c6-f7c68461d1d3" providerId="ADAL" clId="{47809704-D555-43E9-8763-C18ABFFD866A}" dt="2025-06-28T22:20:18.516" v="1530" actId="403"/>
         <pc:sldMkLst>
           <pc:docMk/>
           <pc:sldMk cId="3056003020" sldId="262"/>
         </pc:sldMkLst>
         <pc:spChg chg="mod">
-          <ac:chgData name="Cervan Canton Alvaro W.MSCIDS_F24.2301" userId="09644743-1044-4338-95c6-f7c68461d1d3" providerId="ADAL" clId="{47809704-D555-43E9-8763-C18ABFFD866A}" dt="2025-06-28T00:10:33.417" v="979" actId="20577"/>
+          <ac:chgData name="Cervan Canton Alvaro W.MSCIDS_F24.2301" userId="09644743-1044-4338-95c6-f7c68461d1d3" providerId="ADAL" clId="{47809704-D555-43E9-8763-C18ABFFD866A}" dt="2025-06-28T17:58:33.559" v="1348" actId="26606"/>
           <ac:spMkLst>
             <pc:docMk/>
             <pc:sldMk cId="3056003020" sldId="262"/>
             <ac:spMk id="2" creationId="{ABAA091E-A79B-A64F-5B66-50BDC9382FAC}"/>
           </ac:spMkLst>
         </pc:spChg>
+        <pc:spChg chg="add del mod">
+          <ac:chgData name="Cervan Canton Alvaro W.MSCIDS_F24.2301" userId="09644743-1044-4338-95c6-f7c68461d1d3" providerId="ADAL" clId="{47809704-D555-43E9-8763-C18ABFFD866A}" dt="2025-06-28T22:20:18.516" v="1530" actId="403"/>
+          <ac:spMkLst>
+            <pc:docMk/>
+            <pc:sldMk cId="3056003020" sldId="262"/>
+            <ac:spMk id="3" creationId="{E60DA390-2E8B-082C-7D4C-CC5FE49679EE}"/>
+          </ac:spMkLst>
+        </pc:spChg>
+        <pc:spChg chg="add mod">
+          <ac:chgData name="Cervan Canton Alvaro W.MSCIDS_F24.2301" userId="09644743-1044-4338-95c6-f7c68461d1d3" providerId="ADAL" clId="{47809704-D555-43E9-8763-C18ABFFD866A}" dt="2025-06-28T17:53:07.681" v="1270"/>
+          <ac:spMkLst>
+            <pc:docMk/>
+            <pc:sldMk cId="3056003020" sldId="262"/>
+            <ac:spMk id="4" creationId="{4537C35A-A04D-8A6C-2DC2-0EFF16BD9E46}"/>
+          </ac:spMkLst>
+        </pc:spChg>
+        <pc:spChg chg="add del">
+          <ac:chgData name="Cervan Canton Alvaro W.MSCIDS_F24.2301" userId="09644743-1044-4338-95c6-f7c68461d1d3" providerId="ADAL" clId="{47809704-D555-43E9-8763-C18ABFFD866A}" dt="2025-06-28T17:58:33.559" v="1348" actId="26606"/>
+          <ac:spMkLst>
+            <pc:docMk/>
+            <pc:sldMk cId="3056003020" sldId="262"/>
+            <ac:spMk id="11" creationId="{C20CE451-818C-E63D-258B-234B6C543D34}"/>
+          </ac:spMkLst>
+        </pc:spChg>
+        <pc:picChg chg="add del mod">
+          <ac:chgData name="Cervan Canton Alvaro W.MSCIDS_F24.2301" userId="09644743-1044-4338-95c6-f7c68461d1d3" providerId="ADAL" clId="{47809704-D555-43E9-8763-C18ABFFD866A}" dt="2025-06-28T17:58:54.230" v="1349" actId="478"/>
+          <ac:picMkLst>
+            <pc:docMk/>
+            <pc:sldMk cId="3056003020" sldId="262"/>
+            <ac:picMk id="6" creationId="{9D46319F-76F3-1FD2-A83F-876A310167F0}"/>
+          </ac:picMkLst>
+        </pc:picChg>
+        <pc:picChg chg="add mod">
+          <ac:chgData name="Cervan Canton Alvaro W.MSCIDS_F24.2301" userId="09644743-1044-4338-95c6-f7c68461d1d3" providerId="ADAL" clId="{47809704-D555-43E9-8763-C18ABFFD866A}" dt="2025-06-28T18:00:20.145" v="1402" actId="29295"/>
+          <ac:picMkLst>
+            <pc:docMk/>
+            <pc:sldMk cId="3056003020" sldId="262"/>
+            <ac:picMk id="8" creationId="{19EFF18C-9660-9BDE-5281-E9BE5B9CEF6B}"/>
+          </ac:picMkLst>
+        </pc:picChg>
       </pc:sldChg>
-      <pc:sldChg chg="modSp add mod">
-        <pc:chgData name="Cervan Canton Alvaro W.MSCIDS_F24.2301" userId="09644743-1044-4338-95c6-f7c68461d1d3" providerId="ADAL" clId="{47809704-D555-43E9-8763-C18ABFFD866A}" dt="2025-06-28T00:10:43.475" v="983" actId="20577"/>
+      <pc:sldChg chg="addSp delSp modSp add mod setBg">
+        <pc:chgData name="Cervan Canton Alvaro W.MSCIDS_F24.2301" userId="09644743-1044-4338-95c6-f7c68461d1d3" providerId="ADAL" clId="{47809704-D555-43E9-8763-C18ABFFD866A}" dt="2025-06-28T21:43:02.844" v="1527" actId="14100"/>
         <pc:sldMkLst>
           <pc:docMk/>
           <pc:sldMk cId="384888380" sldId="263"/>
         </pc:sldMkLst>
         <pc:spChg chg="mod">
-          <ac:chgData name="Cervan Canton Alvaro W.MSCIDS_F24.2301" userId="09644743-1044-4338-95c6-f7c68461d1d3" providerId="ADAL" clId="{47809704-D555-43E9-8763-C18ABFFD866A}" dt="2025-06-28T00:10:43.475" v="983" actId="20577"/>
+          <ac:chgData name="Cervan Canton Alvaro W.MSCIDS_F24.2301" userId="09644743-1044-4338-95c6-f7c68461d1d3" providerId="ADAL" clId="{47809704-D555-43E9-8763-C18ABFFD866A}" dt="2025-06-28T21:40:28.951" v="1472" actId="26606"/>
           <ac:spMkLst>
             <pc:docMk/>
             <pc:sldMk cId="384888380" sldId="263"/>
             <ac:spMk id="2" creationId="{ABAA091E-A79B-A64F-5B66-50BDC9382FAC}"/>
           </ac:spMkLst>
         </pc:spChg>
+        <pc:spChg chg="mod">
+          <ac:chgData name="Cervan Canton Alvaro W.MSCIDS_F24.2301" userId="09644743-1044-4338-95c6-f7c68461d1d3" providerId="ADAL" clId="{47809704-D555-43E9-8763-C18ABFFD866A}" dt="2025-06-28T21:42:02.959" v="1515" actId="20577"/>
+          <ac:spMkLst>
+            <pc:docMk/>
+            <pc:sldMk cId="384888380" sldId="263"/>
+            <ac:spMk id="3" creationId="{E60DA390-2E8B-082C-7D4C-CC5FE49679EE}"/>
+          </ac:spMkLst>
+        </pc:spChg>
+        <pc:spChg chg="add del">
+          <ac:chgData name="Cervan Canton Alvaro W.MSCIDS_F24.2301" userId="09644743-1044-4338-95c6-f7c68461d1d3" providerId="ADAL" clId="{47809704-D555-43E9-8763-C18ABFFD866A}" dt="2025-06-28T21:40:28.951" v="1472" actId="26606"/>
+          <ac:spMkLst>
+            <pc:docMk/>
+            <pc:sldMk cId="384888380" sldId="263"/>
+            <ac:spMk id="9" creationId="{CBB0869A-0BE5-B3E9-F73D-2F3691E4D932}"/>
+          </ac:spMkLst>
+        </pc:spChg>
+        <pc:picChg chg="add mod modCrop">
+          <ac:chgData name="Cervan Canton Alvaro W.MSCIDS_F24.2301" userId="09644743-1044-4338-95c6-f7c68461d1d3" providerId="ADAL" clId="{47809704-D555-43E9-8763-C18ABFFD866A}" dt="2025-06-28T21:43:02.844" v="1527" actId="14100"/>
+          <ac:picMkLst>
+            <pc:docMk/>
+            <pc:sldMk cId="384888380" sldId="263"/>
+            <ac:picMk id="4" creationId="{738549E6-5096-71B8-77A9-F419BAD87D42}"/>
+          </ac:picMkLst>
+        </pc:picChg>
+        <pc:picChg chg="add mod modCrop">
+          <ac:chgData name="Cervan Canton Alvaro W.MSCIDS_F24.2301" userId="09644743-1044-4338-95c6-f7c68461d1d3" providerId="ADAL" clId="{47809704-D555-43E9-8763-C18ABFFD866A}" dt="2025-06-28T21:42:31.699" v="1526" actId="29295"/>
+          <ac:picMkLst>
+            <pc:docMk/>
+            <pc:sldMk cId="384888380" sldId="263"/>
+            <ac:picMk id="6" creationId="{973C4CC3-B0AC-B046-E999-E6504C4AD5DD}"/>
+          </ac:picMkLst>
+        </pc:picChg>
       </pc:sldChg>
-      <pc:sldChg chg="modSp add mod">
-        <pc:chgData name="Cervan Canton Alvaro W.MSCIDS_F24.2301" userId="09644743-1044-4338-95c6-f7c68461d1d3" providerId="ADAL" clId="{47809704-D555-43E9-8763-C18ABFFD866A}" dt="2025-06-28T00:11:04.612" v="993" actId="20577"/>
+      <pc:sldChg chg="addSp delSp modSp add mod">
+        <pc:chgData name="Cervan Canton Alvaro W.MSCIDS_F24.2301" userId="09644743-1044-4338-95c6-f7c68461d1d3" providerId="ADAL" clId="{47809704-D555-43E9-8763-C18ABFFD866A}" dt="2025-06-28T23:12:31.608" v="2293" actId="20577"/>
         <pc:sldMkLst>
           <pc:docMk/>
           <pc:sldMk cId="2318978003" sldId="264"/>
@@ -318,69 +403,261 @@
             <ac:spMk id="2" creationId="{ABAA091E-A79B-A64F-5B66-50BDC9382FAC}"/>
           </ac:spMkLst>
         </pc:spChg>
+        <pc:spChg chg="mod">
+          <ac:chgData name="Cervan Canton Alvaro W.MSCIDS_F24.2301" userId="09644743-1044-4338-95c6-f7c68461d1d3" providerId="ADAL" clId="{47809704-D555-43E9-8763-C18ABFFD866A}" dt="2025-06-28T23:12:31.608" v="2293" actId="20577"/>
+          <ac:spMkLst>
+            <pc:docMk/>
+            <pc:sldMk cId="2318978003" sldId="264"/>
+            <ac:spMk id="3" creationId="{E60DA390-2E8B-082C-7D4C-CC5FE49679EE}"/>
+          </ac:spMkLst>
+        </pc:spChg>
+        <pc:spChg chg="add del mod">
+          <ac:chgData name="Cervan Canton Alvaro W.MSCIDS_F24.2301" userId="09644743-1044-4338-95c6-f7c68461d1d3" providerId="ADAL" clId="{47809704-D555-43E9-8763-C18ABFFD866A}" dt="2025-06-28T22:45:09.525" v="1710" actId="478"/>
+          <ac:spMkLst>
+            <pc:docMk/>
+            <pc:sldMk cId="2318978003" sldId="264"/>
+            <ac:spMk id="5" creationId="{15BA95DA-E4AC-6FEF-9565-9937DE47DC66}"/>
+          </ac:spMkLst>
+        </pc:spChg>
+        <pc:spChg chg="add del">
+          <ac:chgData name="Cervan Canton Alvaro W.MSCIDS_F24.2301" userId="09644743-1044-4338-95c6-f7c68461d1d3" providerId="ADAL" clId="{47809704-D555-43E9-8763-C18ABFFD866A}" dt="2025-06-28T22:43:51.326" v="1706" actId="478"/>
+          <ac:spMkLst>
+            <pc:docMk/>
+            <pc:sldMk cId="2318978003" sldId="264"/>
+            <ac:spMk id="6" creationId="{1CE6733D-349D-5A2E-5651-BD74E83FC896}"/>
+          </ac:spMkLst>
+        </pc:spChg>
+        <pc:spChg chg="add del">
+          <ac:chgData name="Cervan Canton Alvaro W.MSCIDS_F24.2301" userId="09644743-1044-4338-95c6-f7c68461d1d3" providerId="ADAL" clId="{47809704-D555-43E9-8763-C18ABFFD866A}" dt="2025-06-28T22:44:41.709" v="1708" actId="11529"/>
+          <ac:spMkLst>
+            <pc:docMk/>
+            <pc:sldMk cId="2318978003" sldId="264"/>
+            <ac:spMk id="7" creationId="{06F3BF84-5361-9FD5-2995-50D9E77A1DF4}"/>
+          </ac:spMkLst>
+        </pc:spChg>
+        <pc:spChg chg="add del">
+          <ac:chgData name="Cervan Canton Alvaro W.MSCIDS_F24.2301" userId="09644743-1044-4338-95c6-f7c68461d1d3" providerId="ADAL" clId="{47809704-D555-43E9-8763-C18ABFFD866A}" dt="2025-06-28T22:45:25.366" v="1712" actId="478"/>
+          <ac:spMkLst>
+            <pc:docMk/>
+            <pc:sldMk cId="2318978003" sldId="264"/>
+            <ac:spMk id="8" creationId="{AEB225F0-1508-9B93-2CAD-A4B8DF06931B}"/>
+          </ac:spMkLst>
+        </pc:spChg>
+        <pc:spChg chg="add del mod">
+          <ac:chgData name="Cervan Canton Alvaro W.MSCIDS_F24.2301" userId="09644743-1044-4338-95c6-f7c68461d1d3" providerId="ADAL" clId="{47809704-D555-43E9-8763-C18ABFFD866A}" dt="2025-06-28T22:46:10.494" v="1721" actId="478"/>
+          <ac:spMkLst>
+            <pc:docMk/>
+            <pc:sldMk cId="2318978003" sldId="264"/>
+            <ac:spMk id="9" creationId="{A2BF3057-A20A-8313-D58A-E805FF5004C1}"/>
+          </ac:spMkLst>
+        </pc:spChg>
+        <pc:spChg chg="add mod">
+          <ac:chgData name="Cervan Canton Alvaro W.MSCIDS_F24.2301" userId="09644743-1044-4338-95c6-f7c68461d1d3" providerId="ADAL" clId="{47809704-D555-43E9-8763-C18ABFFD866A}" dt="2025-06-28T22:47:31.110" v="1736" actId="113"/>
+          <ac:spMkLst>
+            <pc:docMk/>
+            <pc:sldMk cId="2318978003" sldId="264"/>
+            <ac:spMk id="10" creationId="{977DDC21-4FA7-C6E5-5FF8-5CAD877B7EA0}"/>
+          </ac:spMkLst>
+        </pc:spChg>
+        <pc:picChg chg="add mod">
+          <ac:chgData name="Cervan Canton Alvaro W.MSCIDS_F24.2301" userId="09644743-1044-4338-95c6-f7c68461d1d3" providerId="ADAL" clId="{47809704-D555-43E9-8763-C18ABFFD866A}" dt="2025-06-28T22:37:34.218" v="1560" actId="14100"/>
+          <ac:picMkLst>
+            <pc:docMk/>
+            <pc:sldMk cId="2318978003" sldId="264"/>
+            <ac:picMk id="4" creationId="{3C1CF4E7-D23A-B46D-CDAA-D507B6AAF57A}"/>
+          </ac:picMkLst>
+        </pc:picChg>
       </pc:sldChg>
-      <pc:sldChg chg="modSp add mod">
-        <pc:chgData name="Cervan Canton Alvaro W.MSCIDS_F24.2301" userId="09644743-1044-4338-95c6-f7c68461d1d3" providerId="ADAL" clId="{47809704-D555-43E9-8763-C18ABFFD866A}" dt="2025-06-28T00:11:18.375" v="995"/>
+      <pc:sldChg chg="addSp delSp modSp add mod modNotesTx">
+        <pc:chgData name="Cervan Canton Alvaro W.MSCIDS_F24.2301" userId="09644743-1044-4338-95c6-f7c68461d1d3" providerId="ADAL" clId="{47809704-D555-43E9-8763-C18ABFFD866A}" dt="2025-06-28T23:18:07.879" v="2417" actId="20577"/>
         <pc:sldMkLst>
           <pc:docMk/>
           <pc:sldMk cId="1001368556" sldId="265"/>
         </pc:sldMkLst>
         <pc:spChg chg="mod">
-          <ac:chgData name="Cervan Canton Alvaro W.MSCIDS_F24.2301" userId="09644743-1044-4338-95c6-f7c68461d1d3" providerId="ADAL" clId="{47809704-D555-43E9-8763-C18ABFFD866A}" dt="2025-06-28T00:11:18.375" v="995"/>
+          <ac:chgData name="Cervan Canton Alvaro W.MSCIDS_F24.2301" userId="09644743-1044-4338-95c6-f7c68461d1d3" providerId="ADAL" clId="{47809704-D555-43E9-8763-C18ABFFD866A}" dt="2025-06-28T23:06:22.610" v="2087" actId="27636"/>
           <ac:spMkLst>
             <pc:docMk/>
             <pc:sldMk cId="1001368556" sldId="265"/>
             <ac:spMk id="2" creationId="{ABAA091E-A79B-A64F-5B66-50BDC9382FAC}"/>
           </ac:spMkLst>
         </pc:spChg>
+        <pc:spChg chg="del">
+          <ac:chgData name="Cervan Canton Alvaro W.MSCIDS_F24.2301" userId="09644743-1044-4338-95c6-f7c68461d1d3" providerId="ADAL" clId="{47809704-D555-43E9-8763-C18ABFFD866A}" dt="2025-06-28T23:05:32.831" v="2074"/>
+          <ac:spMkLst>
+            <pc:docMk/>
+            <pc:sldMk cId="1001368556" sldId="265"/>
+            <ac:spMk id="3" creationId="{E60DA390-2E8B-082C-7D4C-CC5FE49679EE}"/>
+          </ac:spMkLst>
+        </pc:spChg>
+        <pc:spChg chg="add del mod">
+          <ac:chgData name="Cervan Canton Alvaro W.MSCIDS_F24.2301" userId="09644743-1044-4338-95c6-f7c68461d1d3" providerId="ADAL" clId="{47809704-D555-43E9-8763-C18ABFFD866A}" dt="2025-06-28T23:07:52.899" v="2089" actId="478"/>
+          <ac:spMkLst>
+            <pc:docMk/>
+            <pc:sldMk cId="1001368556" sldId="265"/>
+            <ac:spMk id="6" creationId="{C8077880-6A12-A4A2-CA80-17FB6FDFEA71}"/>
+          </ac:spMkLst>
+        </pc:spChg>
+        <pc:spChg chg="add mod">
+          <ac:chgData name="Cervan Canton Alvaro W.MSCIDS_F24.2301" userId="09644743-1044-4338-95c6-f7c68461d1d3" providerId="ADAL" clId="{47809704-D555-43E9-8763-C18ABFFD866A}" dt="2025-06-28T23:12:48.441" v="2298" actId="6549"/>
+          <ac:spMkLst>
+            <pc:docMk/>
+            <pc:sldMk cId="1001368556" sldId="265"/>
+            <ac:spMk id="7" creationId="{AB6A5032-431D-5231-581C-BE4C80E64EF1}"/>
+          </ac:spMkLst>
+        </pc:spChg>
+        <pc:spChg chg="add mod">
+          <ac:chgData name="Cervan Canton Alvaro W.MSCIDS_F24.2301" userId="09644743-1044-4338-95c6-f7c68461d1d3" providerId="ADAL" clId="{47809704-D555-43E9-8763-C18ABFFD866A}" dt="2025-06-28T23:08:09.243" v="2092"/>
+          <ac:spMkLst>
+            <pc:docMk/>
+            <pc:sldMk cId="1001368556" sldId="265"/>
+            <ac:spMk id="8" creationId="{5C726F39-43D3-5A19-55A3-C3952CB4F821}"/>
+          </ac:spMkLst>
+        </pc:spChg>
+        <pc:spChg chg="add mod">
+          <ac:chgData name="Cervan Canton Alvaro W.MSCIDS_F24.2301" userId="09644743-1044-4338-95c6-f7c68461d1d3" providerId="ADAL" clId="{47809704-D555-43E9-8763-C18ABFFD866A}" dt="2025-06-28T23:15:05.978" v="2382" actId="1076"/>
+          <ac:spMkLst>
+            <pc:docMk/>
+            <pc:sldMk cId="1001368556" sldId="265"/>
+            <ac:spMk id="9" creationId="{1B112EA8-3445-68AB-5090-D74A5B53C3FC}"/>
+          </ac:spMkLst>
+        </pc:spChg>
+        <pc:picChg chg="add mod">
+          <ac:chgData name="Cervan Canton Alvaro W.MSCIDS_F24.2301" userId="09644743-1044-4338-95c6-f7c68461d1d3" providerId="ADAL" clId="{47809704-D555-43E9-8763-C18ABFFD866A}" dt="2025-06-28T23:05:59.476" v="2078" actId="1076"/>
+          <ac:picMkLst>
+            <pc:docMk/>
+            <pc:sldMk cId="1001368556" sldId="265"/>
+            <ac:picMk id="5" creationId="{A25BCE4A-C90D-6F61-D14C-62E45A1646D6}"/>
+          </ac:picMkLst>
+        </pc:picChg>
       </pc:sldChg>
-      <pc:sldChg chg="modSp add mod">
-        <pc:chgData name="Cervan Canton Alvaro W.MSCIDS_F24.2301" userId="09644743-1044-4338-95c6-f7c68461d1d3" providerId="ADAL" clId="{47809704-D555-43E9-8763-C18ABFFD866A}" dt="2025-06-28T00:11:49.216" v="999"/>
+      <pc:sldChg chg="addSp modSp add mod">
+        <pc:chgData name="Cervan Canton Alvaro W.MSCIDS_F24.2301" userId="09644743-1044-4338-95c6-f7c68461d1d3" providerId="ADAL" clId="{47809704-D555-43E9-8763-C18ABFFD866A}" dt="2025-06-29T19:57:29.265" v="2572" actId="20577"/>
         <pc:sldMkLst>
           <pc:docMk/>
           <pc:sldMk cId="631473613" sldId="266"/>
         </pc:sldMkLst>
         <pc:spChg chg="mod">
-          <ac:chgData name="Cervan Canton Alvaro W.MSCIDS_F24.2301" userId="09644743-1044-4338-95c6-f7c68461d1d3" providerId="ADAL" clId="{47809704-D555-43E9-8763-C18ABFFD866A}" dt="2025-06-28T00:11:49.216" v="999"/>
+          <ac:chgData name="Cervan Canton Alvaro W.MSCIDS_F24.2301" userId="09644743-1044-4338-95c6-f7c68461d1d3" providerId="ADAL" clId="{47809704-D555-43E9-8763-C18ABFFD866A}" dt="2025-06-29T19:56:51.274" v="2543" actId="20577"/>
           <ac:spMkLst>
             <pc:docMk/>
             <pc:sldMk cId="631473613" sldId="266"/>
             <ac:spMk id="2" creationId="{ABAA091E-A79B-A64F-5B66-50BDC9382FAC}"/>
           </ac:spMkLst>
         </pc:spChg>
+        <pc:spChg chg="mod">
+          <ac:chgData name="Cervan Canton Alvaro W.MSCIDS_F24.2301" userId="09644743-1044-4338-95c6-f7c68461d1d3" providerId="ADAL" clId="{47809704-D555-43E9-8763-C18ABFFD866A}" dt="2025-06-29T19:57:29.265" v="2572" actId="20577"/>
+          <ac:spMkLst>
+            <pc:docMk/>
+            <pc:sldMk cId="631473613" sldId="266"/>
+            <ac:spMk id="3" creationId="{E60DA390-2E8B-082C-7D4C-CC5FE49679EE}"/>
+          </ac:spMkLst>
+        </pc:spChg>
+        <pc:spChg chg="add">
+          <ac:chgData name="Cervan Canton Alvaro W.MSCIDS_F24.2301" userId="09644743-1044-4338-95c6-f7c68461d1d3" providerId="ADAL" clId="{47809704-D555-43E9-8763-C18ABFFD866A}" dt="2025-06-29T12:02:45.476" v="2462"/>
+          <ac:spMkLst>
+            <pc:docMk/>
+            <pc:sldMk cId="631473613" sldId="266"/>
+            <ac:spMk id="4" creationId="{4841812E-8123-7941-13A7-E91CD522061E}"/>
+          </ac:spMkLst>
+        </pc:spChg>
+        <pc:spChg chg="add mod">
+          <ac:chgData name="Cervan Canton Alvaro W.MSCIDS_F24.2301" userId="09644743-1044-4338-95c6-f7c68461d1d3" providerId="ADAL" clId="{47809704-D555-43E9-8763-C18ABFFD866A}" dt="2025-06-29T19:56:20.404" v="2541" actId="1582"/>
+          <ac:spMkLst>
+            <pc:docMk/>
+            <pc:sldMk cId="631473613" sldId="266"/>
+            <ac:spMk id="6" creationId="{0388CF5E-F212-9990-3CCD-46D50631628D}"/>
+          </ac:spMkLst>
+        </pc:spChg>
+        <pc:picChg chg="add mod modCrop">
+          <ac:chgData name="Cervan Canton Alvaro W.MSCIDS_F24.2301" userId="09644743-1044-4338-95c6-f7c68461d1d3" providerId="ADAL" clId="{47809704-D555-43E9-8763-C18ABFFD866A}" dt="2025-06-29T19:55:27.671" v="2536" actId="1076"/>
+          <ac:picMkLst>
+            <pc:docMk/>
+            <pc:sldMk cId="631473613" sldId="266"/>
+            <ac:picMk id="5" creationId="{5CD61DA5-9966-6A91-F9E0-1787F812F09D}"/>
+          </ac:picMkLst>
+        </pc:picChg>
       </pc:sldChg>
-      <pc:sldChg chg="modSp add mod">
-        <pc:chgData name="Cervan Canton Alvaro W.MSCIDS_F24.2301" userId="09644743-1044-4338-95c6-f7c68461d1d3" providerId="ADAL" clId="{47809704-D555-43E9-8763-C18ABFFD866A}" dt="2025-06-28T00:11:57.157" v="1001"/>
+      <pc:sldChg chg="addSp delSp modSp add mod">
+        <pc:chgData name="Cervan Canton Alvaro W.MSCIDS_F24.2301" userId="09644743-1044-4338-95c6-f7c68461d1d3" providerId="ADAL" clId="{47809704-D555-43E9-8763-C18ABFFD866A}" dt="2025-06-29T20:13:59.310" v="2837" actId="20577"/>
         <pc:sldMkLst>
           <pc:docMk/>
           <pc:sldMk cId="984394870" sldId="267"/>
         </pc:sldMkLst>
         <pc:spChg chg="mod">
-          <ac:chgData name="Cervan Canton Alvaro W.MSCIDS_F24.2301" userId="09644743-1044-4338-95c6-f7c68461d1d3" providerId="ADAL" clId="{47809704-D555-43E9-8763-C18ABFFD866A}" dt="2025-06-28T00:11:57.157" v="1001"/>
+          <ac:chgData name="Cervan Canton Alvaro W.MSCIDS_F24.2301" userId="09644743-1044-4338-95c6-f7c68461d1d3" providerId="ADAL" clId="{47809704-D555-43E9-8763-C18ABFFD866A}" dt="2025-06-29T19:56:54.752" v="2545" actId="20577"/>
           <ac:spMkLst>
             <pc:docMk/>
             <pc:sldMk cId="984394870" sldId="267"/>
             <ac:spMk id="2" creationId="{ABAA091E-A79B-A64F-5B66-50BDC9382FAC}"/>
           </ac:spMkLst>
         </pc:spChg>
+        <pc:spChg chg="add del mod">
+          <ac:chgData name="Cervan Canton Alvaro W.MSCIDS_F24.2301" userId="09644743-1044-4338-95c6-f7c68461d1d3" providerId="ADAL" clId="{47809704-D555-43E9-8763-C18ABFFD866A}" dt="2025-06-29T20:13:59.310" v="2837" actId="20577"/>
+          <ac:spMkLst>
+            <pc:docMk/>
+            <pc:sldMk cId="984394870" sldId="267"/>
+            <ac:spMk id="3" creationId="{E60DA390-2E8B-082C-7D4C-CC5FE49679EE}"/>
+          </ac:spMkLst>
+        </pc:spChg>
+        <pc:spChg chg="add mod">
+          <ac:chgData name="Cervan Canton Alvaro W.MSCIDS_F24.2301" userId="09644743-1044-4338-95c6-f7c68461d1d3" providerId="ADAL" clId="{47809704-D555-43E9-8763-C18ABFFD866A}" dt="2025-06-29T20:09:07.042" v="2776"/>
+          <ac:spMkLst>
+            <pc:docMk/>
+            <pc:sldMk cId="984394870" sldId="267"/>
+            <ac:spMk id="4" creationId="{19B7F936-7F5A-6B88-58E6-AA2D8878C4B6}"/>
+          </ac:spMkLst>
+        </pc:spChg>
+        <pc:picChg chg="add mod modCrop">
+          <ac:chgData name="Cervan Canton Alvaro W.MSCIDS_F24.2301" userId="09644743-1044-4338-95c6-f7c68461d1d3" providerId="ADAL" clId="{47809704-D555-43E9-8763-C18ABFFD866A}" dt="2025-06-29T20:12:48.031" v="2827" actId="1076"/>
+          <ac:picMkLst>
+            <pc:docMk/>
+            <pc:sldMk cId="984394870" sldId="267"/>
+            <ac:picMk id="6" creationId="{6F7F44FC-4E03-0ABF-B2D2-B8357013F18A}"/>
+          </ac:picMkLst>
+        </pc:picChg>
       </pc:sldChg>
-      <pc:sldChg chg="modSp new mod">
-        <pc:chgData name="Cervan Canton Alvaro W.MSCIDS_F24.2301" userId="09644743-1044-4338-95c6-f7c68461d1d3" providerId="ADAL" clId="{47809704-D555-43E9-8763-C18ABFFD866A}" dt="2025-06-28T00:12:41.479" v="1029" actId="20577"/>
+      <pc:sldChg chg="addSp modSp new del mod setBg">
+        <pc:chgData name="Cervan Canton Alvaro W.MSCIDS_F24.2301" userId="09644743-1044-4338-95c6-f7c68461d1d3" providerId="ADAL" clId="{47809704-D555-43E9-8763-C18ABFFD866A}" dt="2025-06-29T20:29:16.003" v="3138" actId="2696"/>
         <pc:sldMkLst>
           <pc:docMk/>
           <pc:sldMk cId="2522694870" sldId="268"/>
         </pc:sldMkLst>
         <pc:spChg chg="mod">
-          <ac:chgData name="Cervan Canton Alvaro W.MSCIDS_F24.2301" userId="09644743-1044-4338-95c6-f7c68461d1d3" providerId="ADAL" clId="{47809704-D555-43E9-8763-C18ABFFD866A}" dt="2025-06-28T00:12:41.479" v="1029" actId="20577"/>
+          <ac:chgData name="Cervan Canton Alvaro W.MSCIDS_F24.2301" userId="09644743-1044-4338-95c6-f7c68461d1d3" providerId="ADAL" clId="{47809704-D555-43E9-8763-C18ABFFD866A}" dt="2025-06-29T20:28:08.887" v="3125" actId="1076"/>
           <ac:spMkLst>
             <pc:docMk/>
             <pc:sldMk cId="2522694870" sldId="268"/>
             <ac:spMk id="2" creationId="{FF365628-049E-9992-49EF-EEE27A6201B2}"/>
           </ac:spMkLst>
         </pc:spChg>
+        <pc:spChg chg="mod">
+          <ac:chgData name="Cervan Canton Alvaro W.MSCIDS_F24.2301" userId="09644743-1044-4338-95c6-f7c68461d1d3" providerId="ADAL" clId="{47809704-D555-43E9-8763-C18ABFFD866A}" dt="2025-06-29T20:27:57.128" v="3123" actId="26606"/>
+          <ac:spMkLst>
+            <pc:docMk/>
+            <pc:sldMk cId="2522694870" sldId="268"/>
+            <ac:spMk id="3" creationId="{65518192-0545-B17B-4EA3-4AD08303C051}"/>
+          </ac:spMkLst>
+        </pc:spChg>
+        <pc:spChg chg="add">
+          <ac:chgData name="Cervan Canton Alvaro W.MSCIDS_F24.2301" userId="09644743-1044-4338-95c6-f7c68461d1d3" providerId="ADAL" clId="{47809704-D555-43E9-8763-C18ABFFD866A}" dt="2025-06-29T20:27:57.128" v="3123" actId="26606"/>
+          <ac:spMkLst>
+            <pc:docMk/>
+            <pc:sldMk cId="2522694870" sldId="268"/>
+            <ac:spMk id="10" creationId="{CBB0869A-0BE5-B3E9-F73D-2F3691E4D932}"/>
+          </ac:spMkLst>
+        </pc:spChg>
+        <pc:picChg chg="add mod">
+          <ac:chgData name="Cervan Canton Alvaro W.MSCIDS_F24.2301" userId="09644743-1044-4338-95c6-f7c68461d1d3" providerId="ADAL" clId="{47809704-D555-43E9-8763-C18ABFFD866A}" dt="2025-06-29T20:28:04.167" v="3124" actId="14100"/>
+          <ac:picMkLst>
+            <pc:docMk/>
+            <pc:sldMk cId="2522694870" sldId="268"/>
+            <ac:picMk id="5" creationId="{C71DC73E-F2B0-B39B-8B7D-E0AA83CA9BCB}"/>
+          </ac:picMkLst>
+        </pc:picChg>
       </pc:sldChg>
-      <pc:sldChg chg="modSp add mod">
-        <pc:chgData name="Cervan Canton Alvaro W.MSCIDS_F24.2301" userId="09644743-1044-4338-95c6-f7c68461d1d3" providerId="ADAL" clId="{47809704-D555-43E9-8763-C18ABFFD866A}" dt="2025-06-28T00:12:52.548" v="1045" actId="20577"/>
+      <pc:sldChg chg="addSp delSp modSp add mod">
+        <pc:chgData name="Cervan Canton Alvaro W.MSCIDS_F24.2301" userId="09644743-1044-4338-95c6-f7c68461d1d3" providerId="ADAL" clId="{47809704-D555-43E9-8763-C18ABFFD866A}" dt="2025-06-29T20:55:59.899" v="3958" actId="20577"/>
         <pc:sldMkLst>
           <pc:docMk/>
           <pc:sldMk cId="253357861" sldId="269"/>
@@ -393,10 +670,1224 @@
             <ac:spMk id="2" creationId="{FF365628-049E-9992-49EF-EEE27A6201B2}"/>
           </ac:spMkLst>
         </pc:spChg>
+        <pc:spChg chg="del">
+          <ac:chgData name="Cervan Canton Alvaro W.MSCIDS_F24.2301" userId="09644743-1044-4338-95c6-f7c68461d1d3" providerId="ADAL" clId="{47809704-D555-43E9-8763-C18ABFFD866A}" dt="2025-06-29T20:50:25.965" v="3696"/>
+          <ac:spMkLst>
+            <pc:docMk/>
+            <pc:sldMk cId="253357861" sldId="269"/>
+            <ac:spMk id="3" creationId="{65518192-0545-B17B-4EA3-4AD08303C051}"/>
+          </ac:spMkLst>
+        </pc:spChg>
+        <pc:spChg chg="add mod">
+          <ac:chgData name="Cervan Canton Alvaro W.MSCIDS_F24.2301" userId="09644743-1044-4338-95c6-f7c68461d1d3" providerId="ADAL" clId="{47809704-D555-43E9-8763-C18ABFFD866A}" dt="2025-06-29T20:55:59.899" v="3958" actId="20577"/>
+          <ac:spMkLst>
+            <pc:docMk/>
+            <pc:sldMk cId="253357861" sldId="269"/>
+            <ac:spMk id="6" creationId="{E8770D66-49D2-5060-E7CB-8E1B7A969801}"/>
+          </ac:spMkLst>
+        </pc:spChg>
+        <pc:spChg chg="add">
+          <ac:chgData name="Cervan Canton Alvaro W.MSCIDS_F24.2301" userId="09644743-1044-4338-95c6-f7c68461d1d3" providerId="ADAL" clId="{47809704-D555-43E9-8763-C18ABFFD866A}" dt="2025-06-29T20:53:50.607" v="3836"/>
+          <ac:spMkLst>
+            <pc:docMk/>
+            <pc:sldMk cId="253357861" sldId="269"/>
+            <ac:spMk id="7" creationId="{BFED14D5-DC8A-E222-2A0A-D309A5A03623}"/>
+          </ac:spMkLst>
+        </pc:spChg>
+        <pc:picChg chg="add mod">
+          <ac:chgData name="Cervan Canton Alvaro W.MSCIDS_F24.2301" userId="09644743-1044-4338-95c6-f7c68461d1d3" providerId="ADAL" clId="{47809704-D555-43E9-8763-C18ABFFD866A}" dt="2025-06-29T20:50:34.359" v="3701" actId="1076"/>
+          <ac:picMkLst>
+            <pc:docMk/>
+            <pc:sldMk cId="253357861" sldId="269"/>
+            <ac:picMk id="5" creationId="{6D77D4CA-C9F3-4073-7B47-ACDBC5B2E972}"/>
+          </ac:picMkLst>
+        </pc:picChg>
+      </pc:sldChg>
+      <pc:sldChg chg="addSp delSp modSp add mod">
+        <pc:chgData name="Cervan Canton Alvaro W.MSCIDS_F24.2301" userId="09644743-1044-4338-95c6-f7c68461d1d3" providerId="ADAL" clId="{47809704-D555-43E9-8763-C18ABFFD866A}" dt="2025-06-28T23:12:42.900" v="2296" actId="6549"/>
+        <pc:sldMkLst>
+          <pc:docMk/>
+          <pc:sldMk cId="3653057986" sldId="270"/>
+        </pc:sldMkLst>
+        <pc:spChg chg="mod">
+          <ac:chgData name="Cervan Canton Alvaro W.MSCIDS_F24.2301" userId="09644743-1044-4338-95c6-f7c68461d1d3" providerId="ADAL" clId="{47809704-D555-43E9-8763-C18ABFFD866A}" dt="2025-06-28T22:48:43.183" v="1756" actId="20577"/>
+          <ac:spMkLst>
+            <pc:docMk/>
+            <pc:sldMk cId="3653057986" sldId="270"/>
+            <ac:spMk id="2" creationId="{ABAA091E-A79B-A64F-5B66-50BDC9382FAC}"/>
+          </ac:spMkLst>
+        </pc:spChg>
+        <pc:spChg chg="mod">
+          <ac:chgData name="Cervan Canton Alvaro W.MSCIDS_F24.2301" userId="09644743-1044-4338-95c6-f7c68461d1d3" providerId="ADAL" clId="{47809704-D555-43E9-8763-C18ABFFD866A}" dt="2025-06-28T23:12:42.900" v="2296" actId="6549"/>
+          <ac:spMkLst>
+            <pc:docMk/>
+            <pc:sldMk cId="3653057986" sldId="270"/>
+            <ac:spMk id="3" creationId="{E60DA390-2E8B-082C-7D4C-CC5FE49679EE}"/>
+          </ac:spMkLst>
+        </pc:spChg>
+        <pc:spChg chg="add">
+          <ac:chgData name="Cervan Canton Alvaro W.MSCIDS_F24.2301" userId="09644743-1044-4338-95c6-f7c68461d1d3" providerId="ADAL" clId="{47809704-D555-43E9-8763-C18ABFFD866A}" dt="2025-06-28T22:56:49.674" v="1814"/>
+          <ac:spMkLst>
+            <pc:docMk/>
+            <pc:sldMk cId="3653057986" sldId="270"/>
+            <ac:spMk id="9" creationId="{8DB4FD09-F373-02E7-0A71-FAA5A6D974EC}"/>
+          </ac:spMkLst>
+        </pc:spChg>
+        <pc:spChg chg="mod">
+          <ac:chgData name="Cervan Canton Alvaro W.MSCIDS_F24.2301" userId="09644743-1044-4338-95c6-f7c68461d1d3" providerId="ADAL" clId="{47809704-D555-43E9-8763-C18ABFFD866A}" dt="2025-06-28T23:00:54.186" v="2072" actId="1076"/>
+          <ac:spMkLst>
+            <pc:docMk/>
+            <pc:sldMk cId="3653057986" sldId="270"/>
+            <ac:spMk id="10" creationId="{977DDC21-4FA7-C6E5-5FF8-5CAD877B7EA0}"/>
+          </ac:spMkLst>
+        </pc:spChg>
+        <pc:picChg chg="del">
+          <ac:chgData name="Cervan Canton Alvaro W.MSCIDS_F24.2301" userId="09644743-1044-4338-95c6-f7c68461d1d3" providerId="ADAL" clId="{47809704-D555-43E9-8763-C18ABFFD866A}" dt="2025-06-28T22:50:13.242" v="1757" actId="478"/>
+          <ac:picMkLst>
+            <pc:docMk/>
+            <pc:sldMk cId="3653057986" sldId="270"/>
+            <ac:picMk id="4" creationId="{3C1CF4E7-D23A-B46D-CDAA-D507B6AAF57A}"/>
+          </ac:picMkLst>
+        </pc:picChg>
+        <pc:picChg chg="add del mod">
+          <ac:chgData name="Cervan Canton Alvaro W.MSCIDS_F24.2301" userId="09644743-1044-4338-95c6-f7c68461d1d3" providerId="ADAL" clId="{47809704-D555-43E9-8763-C18ABFFD866A}" dt="2025-06-28T22:52:13.666" v="1769" actId="478"/>
+          <ac:picMkLst>
+            <pc:docMk/>
+            <pc:sldMk cId="3653057986" sldId="270"/>
+            <ac:picMk id="6" creationId="{CF646954-0CCB-E924-FBC3-AB9A05654088}"/>
+          </ac:picMkLst>
+        </pc:picChg>
+        <pc:picChg chg="add mod">
+          <ac:chgData name="Cervan Canton Alvaro W.MSCIDS_F24.2301" userId="09644743-1044-4338-95c6-f7c68461d1d3" providerId="ADAL" clId="{47809704-D555-43E9-8763-C18ABFFD866A}" dt="2025-06-28T23:01:04.954" v="2073" actId="1076"/>
+          <ac:picMkLst>
+            <pc:docMk/>
+            <pc:sldMk cId="3653057986" sldId="270"/>
+            <ac:picMk id="8" creationId="{68BE0921-8C02-24C4-58B2-64506D720973}"/>
+          </ac:picMkLst>
+        </pc:picChg>
+      </pc:sldChg>
+      <pc:sldChg chg="addSp delSp modSp new mod setBg">
+        <pc:chgData name="Cervan Canton Alvaro W.MSCIDS_F24.2301" userId="09644743-1044-4338-95c6-f7c68461d1d3" providerId="ADAL" clId="{47809704-D555-43E9-8763-C18ABFFD866A}" dt="2025-06-29T20:17:20.663" v="2935" actId="1076"/>
+        <pc:sldMkLst>
+          <pc:docMk/>
+          <pc:sldMk cId="2743383934" sldId="271"/>
+        </pc:sldMkLst>
+        <pc:spChg chg="mod ord">
+          <ac:chgData name="Cervan Canton Alvaro W.MSCIDS_F24.2301" userId="09644743-1044-4338-95c6-f7c68461d1d3" providerId="ADAL" clId="{47809704-D555-43E9-8763-C18ABFFD866A}" dt="2025-06-29T20:14:33.635" v="2851" actId="166"/>
+          <ac:spMkLst>
+            <pc:docMk/>
+            <pc:sldMk cId="2743383934" sldId="271"/>
+            <ac:spMk id="2" creationId="{F940F301-08A0-A00B-AC7C-1C8518D39654}"/>
+          </ac:spMkLst>
+        </pc:spChg>
+        <pc:spChg chg="del">
+          <ac:chgData name="Cervan Canton Alvaro W.MSCIDS_F24.2301" userId="09644743-1044-4338-95c6-f7c68461d1d3" providerId="ADAL" clId="{47809704-D555-43E9-8763-C18ABFFD866A}" dt="2025-06-29T19:58:29.108" v="2574"/>
+          <ac:spMkLst>
+            <pc:docMk/>
+            <pc:sldMk cId="2743383934" sldId="271"/>
+            <ac:spMk id="3" creationId="{EA7B584B-67BA-3BDA-D2C9-B82CAFD275BB}"/>
+          </ac:spMkLst>
+        </pc:spChg>
+        <pc:spChg chg="add del">
+          <ac:chgData name="Cervan Canton Alvaro W.MSCIDS_F24.2301" userId="09644743-1044-4338-95c6-f7c68461d1d3" providerId="ADAL" clId="{47809704-D555-43E9-8763-C18ABFFD866A}" dt="2025-06-29T20:01:09.027" v="2609" actId="11529"/>
+          <ac:spMkLst>
+            <pc:docMk/>
+            <pc:sldMk cId="2743383934" sldId="271"/>
+            <ac:spMk id="8" creationId="{CA78C022-F398-D2AE-6FFE-D3B36635B27D}"/>
+          </ac:spMkLst>
+        </pc:spChg>
+        <pc:spChg chg="add del mod">
+          <ac:chgData name="Cervan Canton Alvaro W.MSCIDS_F24.2301" userId="09644743-1044-4338-95c6-f7c68461d1d3" providerId="ADAL" clId="{47809704-D555-43E9-8763-C18ABFFD866A}" dt="2025-06-29T20:00:28.569" v="2606" actId="22"/>
+          <ac:spMkLst>
+            <pc:docMk/>
+            <pc:sldMk cId="2743383934" sldId="271"/>
+            <ac:spMk id="9" creationId="{5B02B1F0-23D0-4E2C-FF18-F757A58F4EF8}"/>
+          </ac:spMkLst>
+        </pc:spChg>
+        <pc:spChg chg="add mod">
+          <ac:chgData name="Cervan Canton Alvaro W.MSCIDS_F24.2301" userId="09644743-1044-4338-95c6-f7c68461d1d3" providerId="ADAL" clId="{47809704-D555-43E9-8763-C18ABFFD866A}" dt="2025-06-29T20:03:34.962" v="2771" actId="14100"/>
+          <ac:spMkLst>
+            <pc:docMk/>
+            <pc:sldMk cId="2743383934" sldId="271"/>
+            <ac:spMk id="10" creationId="{1DB9B3BD-91C7-3084-7AD6-319CFCC8A5E5}"/>
+          </ac:spMkLst>
+        </pc:spChg>
+        <pc:spChg chg="add mod">
+          <ac:chgData name="Cervan Canton Alvaro W.MSCIDS_F24.2301" userId="09644743-1044-4338-95c6-f7c68461d1d3" providerId="ADAL" clId="{47809704-D555-43E9-8763-C18ABFFD866A}" dt="2025-06-29T20:17:20.663" v="2935" actId="1076"/>
+          <ac:spMkLst>
+            <pc:docMk/>
+            <pc:sldMk cId="2743383934" sldId="271"/>
+            <ac:spMk id="11" creationId="{31CAA0D0-0058-458B-6275-70DE33F93685}"/>
+          </ac:spMkLst>
+        </pc:spChg>
+        <pc:spChg chg="add">
+          <ac:chgData name="Cervan Canton Alvaro W.MSCIDS_F24.2301" userId="09644743-1044-4338-95c6-f7c68461d1d3" providerId="ADAL" clId="{47809704-D555-43E9-8763-C18ABFFD866A}" dt="2025-06-29T19:58:37.571" v="2577" actId="26606"/>
+          <ac:spMkLst>
+            <pc:docMk/>
+            <pc:sldMk cId="2743383934" sldId="271"/>
+            <ac:spMk id="12" creationId="{C20CE451-818C-E63D-258B-234B6C543D34}"/>
+          </ac:spMkLst>
+        </pc:spChg>
+        <pc:picChg chg="add mod modCrop">
+          <ac:chgData name="Cervan Canton Alvaro W.MSCIDS_F24.2301" userId="09644743-1044-4338-95c6-f7c68461d1d3" providerId="ADAL" clId="{47809704-D555-43E9-8763-C18ABFFD866A}" dt="2025-06-29T20:04:51.247" v="2774" actId="14100"/>
+          <ac:picMkLst>
+            <pc:docMk/>
+            <pc:sldMk cId="2743383934" sldId="271"/>
+            <ac:picMk id="5" creationId="{CFD2E0B5-B74F-284F-A808-7722790A54A2}"/>
+          </ac:picMkLst>
+        </pc:picChg>
+        <pc:picChg chg="add mod ord">
+          <ac:chgData name="Cervan Canton Alvaro W.MSCIDS_F24.2301" userId="09644743-1044-4338-95c6-f7c68461d1d3" providerId="ADAL" clId="{47809704-D555-43E9-8763-C18ABFFD866A}" dt="2025-06-29T20:15:51.335" v="2881" actId="1076"/>
+          <ac:picMkLst>
+            <pc:docMk/>
+            <pc:sldMk cId="2743383934" sldId="271"/>
+            <ac:picMk id="7" creationId="{F8A96A85-122B-EE62-619B-1B8BA530AA98}"/>
+          </ac:picMkLst>
+        </pc:picChg>
+      </pc:sldChg>
+      <pc:sldChg chg="addSp delSp modSp new mod">
+        <pc:chgData name="Cervan Canton Alvaro W.MSCIDS_F24.2301" userId="09644743-1044-4338-95c6-f7c68461d1d3" providerId="ADAL" clId="{47809704-D555-43E9-8763-C18ABFFD866A}" dt="2025-06-29T20:24:18.556" v="3116"/>
+        <pc:sldMkLst>
+          <pc:docMk/>
+          <pc:sldMk cId="1022207080" sldId="272"/>
+        </pc:sldMkLst>
+        <pc:spChg chg="mod ord">
+          <ac:chgData name="Cervan Canton Alvaro W.MSCIDS_F24.2301" userId="09644743-1044-4338-95c6-f7c68461d1d3" providerId="ADAL" clId="{47809704-D555-43E9-8763-C18ABFFD866A}" dt="2025-06-29T20:19:15.968" v="2952" actId="166"/>
+          <ac:spMkLst>
+            <pc:docMk/>
+            <pc:sldMk cId="1022207080" sldId="272"/>
+            <ac:spMk id="2" creationId="{ACD54872-147D-6054-11F5-9986B6DBE3C5}"/>
+          </ac:spMkLst>
+        </pc:spChg>
+        <pc:spChg chg="add del mod">
+          <ac:chgData name="Cervan Canton Alvaro W.MSCIDS_F24.2301" userId="09644743-1044-4338-95c6-f7c68461d1d3" providerId="ADAL" clId="{47809704-D555-43E9-8763-C18ABFFD866A}" dt="2025-06-29T20:18:48.932" v="2943"/>
+          <ac:spMkLst>
+            <pc:docMk/>
+            <pc:sldMk cId="1022207080" sldId="272"/>
+            <ac:spMk id="3" creationId="{1217199C-58C0-22C3-E6C4-233C97720D5A}"/>
+          </ac:spMkLst>
+        </pc:spChg>
+        <pc:spChg chg="add mod">
+          <ac:chgData name="Cervan Canton Alvaro W.MSCIDS_F24.2301" userId="09644743-1044-4338-95c6-f7c68461d1d3" providerId="ADAL" clId="{47809704-D555-43E9-8763-C18ABFFD866A}" dt="2025-06-29T20:20:08.447" v="2961" actId="20577"/>
+          <ac:spMkLst>
+            <pc:docMk/>
+            <pc:sldMk cId="1022207080" sldId="272"/>
+            <ac:spMk id="10" creationId="{D6E9C06A-B626-7E83-3E7B-23ACFE6B27DC}"/>
+          </ac:spMkLst>
+        </pc:spChg>
+        <pc:spChg chg="add mod">
+          <ac:chgData name="Cervan Canton Alvaro W.MSCIDS_F24.2301" userId="09644743-1044-4338-95c6-f7c68461d1d3" providerId="ADAL" clId="{47809704-D555-43E9-8763-C18ABFFD866A}" dt="2025-06-29T20:24:18.556" v="3116"/>
+          <ac:spMkLst>
+            <pc:docMk/>
+            <pc:sldMk cId="1022207080" sldId="272"/>
+            <ac:spMk id="11" creationId="{B41B0D44-A7E0-5FA0-A4C6-9DCD6E951AFC}"/>
+          </ac:spMkLst>
+        </pc:spChg>
+        <pc:picChg chg="add mod">
+          <ac:chgData name="Cervan Canton Alvaro W.MSCIDS_F24.2301" userId="09644743-1044-4338-95c6-f7c68461d1d3" providerId="ADAL" clId="{47809704-D555-43E9-8763-C18ABFFD866A}" dt="2025-06-29T20:19:32.879" v="2953" actId="14100"/>
+          <ac:picMkLst>
+            <pc:docMk/>
+            <pc:sldMk cId="1022207080" sldId="272"/>
+            <ac:picMk id="5" creationId="{015A7E74-795E-0269-419B-267B25B05909}"/>
+          </ac:picMkLst>
+        </pc:picChg>
+        <pc:picChg chg="add mod">
+          <ac:chgData name="Cervan Canton Alvaro W.MSCIDS_F24.2301" userId="09644743-1044-4338-95c6-f7c68461d1d3" providerId="ADAL" clId="{47809704-D555-43E9-8763-C18ABFFD866A}" dt="2025-06-29T20:18:39.579" v="2942"/>
+          <ac:picMkLst>
+            <pc:docMk/>
+            <pc:sldMk cId="1022207080" sldId="272"/>
+            <ac:picMk id="7" creationId="{9AEA7BAF-FB66-5558-8FC5-655FA967BA0D}"/>
+          </ac:picMkLst>
+        </pc:picChg>
+        <pc:picChg chg="add mod">
+          <ac:chgData name="Cervan Canton Alvaro W.MSCIDS_F24.2301" userId="09644743-1044-4338-95c6-f7c68461d1d3" providerId="ADAL" clId="{47809704-D555-43E9-8763-C18ABFFD866A}" dt="2025-06-29T20:19:10.447" v="2951" actId="14100"/>
+          <ac:picMkLst>
+            <pc:docMk/>
+            <pc:sldMk cId="1022207080" sldId="272"/>
+            <ac:picMk id="9" creationId="{D7290B01-5FF6-20C3-262E-0FC326354190}"/>
+          </ac:picMkLst>
+        </pc:picChg>
+      </pc:sldChg>
+      <pc:sldChg chg="addSp delSp modSp add mod">
+        <pc:chgData name="Cervan Canton Alvaro W.MSCIDS_F24.2301" userId="09644743-1044-4338-95c6-f7c68461d1d3" providerId="ADAL" clId="{47809704-D555-43E9-8763-C18ABFFD866A}" dt="2025-06-29T21:04:46.343" v="4125" actId="1076"/>
+        <pc:sldMkLst>
+          <pc:docMk/>
+          <pc:sldMk cId="4079644549" sldId="273"/>
+        </pc:sldMkLst>
+        <pc:spChg chg="mod">
+          <ac:chgData name="Cervan Canton Alvaro W.MSCIDS_F24.2301" userId="09644743-1044-4338-95c6-f7c68461d1d3" providerId="ADAL" clId="{47809704-D555-43E9-8763-C18ABFFD866A}" dt="2025-06-29T20:28:27.661" v="3127"/>
+          <ac:spMkLst>
+            <pc:docMk/>
+            <pc:sldMk cId="4079644549" sldId="273"/>
+            <ac:spMk id="2" creationId="{ACD54872-147D-6054-11F5-9986B6DBE3C5}"/>
+          </ac:spMkLst>
+        </pc:spChg>
+        <pc:spChg chg="add del mod">
+          <ac:chgData name="Cervan Canton Alvaro W.MSCIDS_F24.2301" userId="09644743-1044-4338-95c6-f7c68461d1d3" providerId="ADAL" clId="{47809704-D555-43E9-8763-C18ABFFD866A}" dt="2025-06-29T20:28:49.034" v="3134"/>
+          <ac:spMkLst>
+            <pc:docMk/>
+            <pc:sldMk cId="4079644549" sldId="273"/>
+            <ac:spMk id="4" creationId="{BC9A9D57-AB55-7FF1-04C5-0CB59BF4DA1B}"/>
+          </ac:spMkLst>
+        </pc:spChg>
+        <pc:spChg chg="add mod">
+          <ac:chgData name="Cervan Canton Alvaro W.MSCIDS_F24.2301" userId="09644743-1044-4338-95c6-f7c68461d1d3" providerId="ADAL" clId="{47809704-D555-43E9-8763-C18ABFFD866A}" dt="2025-06-29T20:38:46.627" v="3485" actId="20577"/>
+          <ac:spMkLst>
+            <pc:docMk/>
+            <pc:sldMk cId="4079644549" sldId="273"/>
+            <ac:spMk id="7" creationId="{3CBD4DF5-7CC5-9AFE-8451-6CC9B5F9EBC5}"/>
+          </ac:spMkLst>
+        </pc:spChg>
+        <pc:spChg chg="del">
+          <ac:chgData name="Cervan Canton Alvaro W.MSCIDS_F24.2301" userId="09644743-1044-4338-95c6-f7c68461d1d3" providerId="ADAL" clId="{47809704-D555-43E9-8763-C18ABFFD866A}" dt="2025-06-29T20:28:40.109" v="3130" actId="478"/>
+          <ac:spMkLst>
+            <pc:docMk/>
+            <pc:sldMk cId="4079644549" sldId="273"/>
+            <ac:spMk id="10" creationId="{D6E9C06A-B626-7E83-3E7B-23ACFE6B27DC}"/>
+          </ac:spMkLst>
+        </pc:spChg>
+        <pc:spChg chg="del mod">
+          <ac:chgData name="Cervan Canton Alvaro W.MSCIDS_F24.2301" userId="09644743-1044-4338-95c6-f7c68461d1d3" providerId="ADAL" clId="{47809704-D555-43E9-8763-C18ABFFD866A}" dt="2025-06-29T20:28:40.142" v="3132"/>
+          <ac:spMkLst>
+            <pc:docMk/>
+            <pc:sldMk cId="4079644549" sldId="273"/>
+            <ac:spMk id="11" creationId="{B41B0D44-A7E0-5FA0-A4C6-9DCD6E951AFC}"/>
+          </ac:spMkLst>
+        </pc:spChg>
+        <pc:picChg chg="del">
+          <ac:chgData name="Cervan Canton Alvaro W.MSCIDS_F24.2301" userId="09644743-1044-4338-95c6-f7c68461d1d3" providerId="ADAL" clId="{47809704-D555-43E9-8763-C18ABFFD866A}" dt="2025-06-29T20:28:33.422" v="3128" actId="478"/>
+          <ac:picMkLst>
+            <pc:docMk/>
+            <pc:sldMk cId="4079644549" sldId="273"/>
+            <ac:picMk id="5" creationId="{015A7E74-795E-0269-419B-267B25B05909}"/>
+          </ac:picMkLst>
+        </pc:picChg>
+        <pc:picChg chg="add mod">
+          <ac:chgData name="Cervan Canton Alvaro W.MSCIDS_F24.2301" userId="09644743-1044-4338-95c6-f7c68461d1d3" providerId="ADAL" clId="{47809704-D555-43E9-8763-C18ABFFD866A}" dt="2025-06-29T21:04:21.216" v="4118" actId="1076"/>
+          <ac:picMkLst>
+            <pc:docMk/>
+            <pc:sldMk cId="4079644549" sldId="273"/>
+            <ac:picMk id="6" creationId="{407BC509-C67E-98F9-EAE1-6B7856C375A7}"/>
+          </ac:picMkLst>
+        </pc:picChg>
+        <pc:picChg chg="del">
+          <ac:chgData name="Cervan Canton Alvaro W.MSCIDS_F24.2301" userId="09644743-1044-4338-95c6-f7c68461d1d3" providerId="ADAL" clId="{47809704-D555-43E9-8763-C18ABFFD866A}" dt="2025-06-29T20:28:45.114" v="3133" actId="478"/>
+          <ac:picMkLst>
+            <pc:docMk/>
+            <pc:sldMk cId="4079644549" sldId="273"/>
+            <ac:picMk id="9" creationId="{D7290B01-5FF6-20C3-262E-0FC326354190}"/>
+          </ac:picMkLst>
+        </pc:picChg>
+        <pc:picChg chg="add mod modCrop">
+          <ac:chgData name="Cervan Canton Alvaro W.MSCIDS_F24.2301" userId="09644743-1044-4338-95c6-f7c68461d1d3" providerId="ADAL" clId="{47809704-D555-43E9-8763-C18ABFFD866A}" dt="2025-06-29T21:04:46.343" v="4125" actId="1076"/>
+          <ac:picMkLst>
+            <pc:docMk/>
+            <pc:sldMk cId="4079644549" sldId="273"/>
+            <ac:picMk id="12" creationId="{23C20CB9-0DAC-FE94-D13B-85874DA94B9D}"/>
+          </ac:picMkLst>
+        </pc:picChg>
+      </pc:sldChg>
+      <pc:sldChg chg="addSp delSp modSp new mod">
+        <pc:chgData name="Cervan Canton Alvaro W.MSCIDS_F24.2301" userId="09644743-1044-4338-95c6-f7c68461d1d3" providerId="ADAL" clId="{47809704-D555-43E9-8763-C18ABFFD866A}" dt="2025-06-29T21:03:06.604" v="4117" actId="20577"/>
+        <pc:sldMkLst>
+          <pc:docMk/>
+          <pc:sldMk cId="1734992041" sldId="274"/>
+        </pc:sldMkLst>
+        <pc:spChg chg="mod">
+          <ac:chgData name="Cervan Canton Alvaro W.MSCIDS_F24.2301" userId="09644743-1044-4338-95c6-f7c68461d1d3" providerId="ADAL" clId="{47809704-D555-43E9-8763-C18ABFFD866A}" dt="2025-06-29T20:39:51.628" v="3508" actId="20577"/>
+          <ac:spMkLst>
+            <pc:docMk/>
+            <pc:sldMk cId="1734992041" sldId="274"/>
+            <ac:spMk id="2" creationId="{B5D233E2-1138-2856-831A-27E03C344295}"/>
+          </ac:spMkLst>
+        </pc:spChg>
+        <pc:spChg chg="del">
+          <ac:chgData name="Cervan Canton Alvaro W.MSCIDS_F24.2301" userId="09644743-1044-4338-95c6-f7c68461d1d3" providerId="ADAL" clId="{47809704-D555-43E9-8763-C18ABFFD866A}" dt="2025-06-29T20:39:04.619" v="3487" actId="22"/>
+          <ac:spMkLst>
+            <pc:docMk/>
+            <pc:sldMk cId="1734992041" sldId="274"/>
+            <ac:spMk id="3" creationId="{D55FCE19-1CA4-87EE-3FB4-7DE3537B0C41}"/>
+          </ac:spMkLst>
+        </pc:spChg>
+        <pc:spChg chg="add del mod">
+          <ac:chgData name="Cervan Canton Alvaro W.MSCIDS_F24.2301" userId="09644743-1044-4338-95c6-f7c68461d1d3" providerId="ADAL" clId="{47809704-D555-43E9-8763-C18ABFFD866A}" dt="2025-06-29T20:41:04.689" v="3514"/>
+          <ac:spMkLst>
+            <pc:docMk/>
+            <pc:sldMk cId="1734992041" sldId="274"/>
+            <ac:spMk id="6" creationId="{36AC45CB-FC54-A88D-D5BB-A4AAC5C328B8}"/>
+          </ac:spMkLst>
+        </pc:spChg>
+        <pc:spChg chg="add mod">
+          <ac:chgData name="Cervan Canton Alvaro W.MSCIDS_F24.2301" userId="09644743-1044-4338-95c6-f7c68461d1d3" providerId="ADAL" clId="{47809704-D555-43E9-8763-C18ABFFD866A}" dt="2025-06-29T21:03:06.604" v="4117" actId="20577"/>
+          <ac:spMkLst>
+            <pc:docMk/>
+            <pc:sldMk cId="1734992041" sldId="274"/>
+            <ac:spMk id="7" creationId="{B0478D3E-366B-3D9C-2D6A-802B834292C8}"/>
+          </ac:spMkLst>
+        </pc:spChg>
+        <pc:picChg chg="add mod ord">
+          <ac:chgData name="Cervan Canton Alvaro W.MSCIDS_F24.2301" userId="09644743-1044-4338-95c6-f7c68461d1d3" providerId="ADAL" clId="{47809704-D555-43E9-8763-C18ABFFD866A}" dt="2025-06-29T20:41:02.231" v="3512" actId="14100"/>
+          <ac:picMkLst>
+            <pc:docMk/>
+            <pc:sldMk cId="1734992041" sldId="274"/>
+            <ac:picMk id="5" creationId="{84BC6772-B94E-E397-3B45-9228E54CF73A}"/>
+          </ac:picMkLst>
+        </pc:picChg>
+      </pc:sldChg>
+      <pc:sldChg chg="addSp delSp modSp add mod">
+        <pc:chgData name="Cervan Canton Alvaro W.MSCIDS_F24.2301" userId="09644743-1044-4338-95c6-f7c68461d1d3" providerId="ADAL" clId="{47809704-D555-43E9-8763-C18ABFFD866A}" dt="2025-06-30T12:54:18.078" v="4355" actId="113"/>
+        <pc:sldMkLst>
+          <pc:docMk/>
+          <pc:sldMk cId="2152212823" sldId="275"/>
+        </pc:sldMkLst>
+        <pc:spChg chg="mod">
+          <ac:chgData name="Cervan Canton Alvaro W.MSCIDS_F24.2301" userId="09644743-1044-4338-95c6-f7c68461d1d3" providerId="ADAL" clId="{47809704-D555-43E9-8763-C18ABFFD866A}" dt="2025-06-29T21:05:42.635" v="4139" actId="20577"/>
+          <ac:spMkLst>
+            <pc:docMk/>
+            <pc:sldMk cId="2152212823" sldId="275"/>
+            <ac:spMk id="2" creationId="{FF365628-049E-9992-49EF-EEE27A6201B2}"/>
+          </ac:spMkLst>
+        </pc:spChg>
+        <pc:spChg chg="add del mod">
+          <ac:chgData name="Cervan Canton Alvaro W.MSCIDS_F24.2301" userId="09644743-1044-4338-95c6-f7c68461d1d3" providerId="ADAL" clId="{47809704-D555-43E9-8763-C18ABFFD866A}" dt="2025-06-29T21:06:56.204" v="4142" actId="22"/>
+          <ac:spMkLst>
+            <pc:docMk/>
+            <pc:sldMk cId="2152212823" sldId="275"/>
+            <ac:spMk id="4" creationId="{C3E8227D-DBDA-6C47-D806-C07300FE1BF7}"/>
+          </ac:spMkLst>
+        </pc:spChg>
+        <pc:spChg chg="mod">
+          <ac:chgData name="Cervan Canton Alvaro W.MSCIDS_F24.2301" userId="09644743-1044-4338-95c6-f7c68461d1d3" providerId="ADAL" clId="{47809704-D555-43E9-8763-C18ABFFD866A}" dt="2025-06-30T12:54:18.078" v="4355" actId="113"/>
+          <ac:spMkLst>
+            <pc:docMk/>
+            <pc:sldMk cId="2152212823" sldId="275"/>
+            <ac:spMk id="6" creationId="{E8770D66-49D2-5060-E7CB-8E1B7A969801}"/>
+          </ac:spMkLst>
+        </pc:spChg>
+        <pc:picChg chg="del">
+          <ac:chgData name="Cervan Canton Alvaro W.MSCIDS_F24.2301" userId="09644743-1044-4338-95c6-f7c68461d1d3" providerId="ADAL" clId="{47809704-D555-43E9-8763-C18ABFFD866A}" dt="2025-06-29T21:06:54.661" v="4141" actId="478"/>
+          <ac:picMkLst>
+            <pc:docMk/>
+            <pc:sldMk cId="2152212823" sldId="275"/>
+            <ac:picMk id="5" creationId="{6D77D4CA-C9F3-4073-7B47-ACDBC5B2E972}"/>
+          </ac:picMkLst>
+        </pc:picChg>
+        <pc:picChg chg="add mod ord">
+          <ac:chgData name="Cervan Canton Alvaro W.MSCIDS_F24.2301" userId="09644743-1044-4338-95c6-f7c68461d1d3" providerId="ADAL" clId="{47809704-D555-43E9-8763-C18ABFFD866A}" dt="2025-06-29T21:08:02.367" v="4150" actId="14100"/>
+          <ac:picMkLst>
+            <pc:docMk/>
+            <pc:sldMk cId="2152212823" sldId="275"/>
+            <ac:picMk id="8" creationId="{0DF7B00E-0E90-E5B0-063E-008F12031085}"/>
+          </ac:picMkLst>
+        </pc:picChg>
+        <pc:picChg chg="add mod">
+          <ac:chgData name="Cervan Canton Alvaro W.MSCIDS_F24.2301" userId="09644743-1044-4338-95c6-f7c68461d1d3" providerId="ADAL" clId="{47809704-D555-43E9-8763-C18ABFFD866A}" dt="2025-06-29T21:07:54.471" v="4148" actId="1076"/>
+          <ac:picMkLst>
+            <pc:docMk/>
+            <pc:sldMk cId="2152212823" sldId="275"/>
+            <ac:picMk id="10" creationId="{CA5BE67E-3C29-D1E6-24E3-86CD313A852A}"/>
+          </ac:picMkLst>
+        </pc:picChg>
+      </pc:sldChg>
+      <pc:sldChg chg="addSp delSp modSp new mod setBg">
+        <pc:chgData name="Cervan Canton Alvaro W.MSCIDS_F24.2301" userId="09644743-1044-4338-95c6-f7c68461d1d3" providerId="ADAL" clId="{47809704-D555-43E9-8763-C18ABFFD866A}" dt="2025-06-30T13:42:24.016" v="5001" actId="26606"/>
+        <pc:sldMkLst>
+          <pc:docMk/>
+          <pc:sldMk cId="2810167478" sldId="276"/>
+        </pc:sldMkLst>
+        <pc:spChg chg="mod">
+          <ac:chgData name="Cervan Canton Alvaro W.MSCIDS_F24.2301" userId="09644743-1044-4338-95c6-f7c68461d1d3" providerId="ADAL" clId="{47809704-D555-43E9-8763-C18ABFFD866A}" dt="2025-06-30T13:42:24.016" v="5001" actId="26606"/>
+          <ac:spMkLst>
+            <pc:docMk/>
+            <pc:sldMk cId="2810167478" sldId="276"/>
+            <ac:spMk id="2" creationId="{1DEB7DDF-20EA-DB5D-7462-FA8CACA19853}"/>
+          </ac:spMkLst>
+        </pc:spChg>
+        <pc:spChg chg="add del mod">
+          <ac:chgData name="Cervan Canton Alvaro W.MSCIDS_F24.2301" userId="09644743-1044-4338-95c6-f7c68461d1d3" providerId="ADAL" clId="{47809704-D555-43E9-8763-C18ABFFD866A}" dt="2025-06-30T13:42:24.016" v="5001" actId="26606"/>
+          <ac:spMkLst>
+            <pc:docMk/>
+            <pc:sldMk cId="2810167478" sldId="276"/>
+            <ac:spMk id="3" creationId="{D3A9411C-6CFE-1F25-BCCC-DB1A9C091B9B}"/>
+          </ac:spMkLst>
+        </pc:spChg>
+        <pc:spChg chg="add mod">
+          <ac:chgData name="Cervan Canton Alvaro W.MSCIDS_F24.2301" userId="09644743-1044-4338-95c6-f7c68461d1d3" providerId="ADAL" clId="{47809704-D555-43E9-8763-C18ABFFD866A}" dt="2025-06-30T12:37:13.087" v="4153"/>
+          <ac:spMkLst>
+            <pc:docMk/>
+            <pc:sldMk cId="2810167478" sldId="276"/>
+            <ac:spMk id="4" creationId="{D9A0CE65-CE2F-8AEC-1509-0AC7A4D70935}"/>
+          </ac:spMkLst>
+        </pc:spChg>
+        <pc:spChg chg="add">
+          <ac:chgData name="Cervan Canton Alvaro W.MSCIDS_F24.2301" userId="09644743-1044-4338-95c6-f7c68461d1d3" providerId="ADAL" clId="{47809704-D555-43E9-8763-C18ABFFD866A}" dt="2025-06-30T13:40:41.773" v="4936"/>
+          <ac:spMkLst>
+            <pc:docMk/>
+            <pc:sldMk cId="2810167478" sldId="276"/>
+            <ac:spMk id="6" creationId="{A2ACAF44-8402-83E3-A2D3-BC7AF8482752}"/>
+          </ac:spMkLst>
+        </pc:spChg>
+        <pc:spChg chg="add">
+          <ac:chgData name="Cervan Canton Alvaro W.MSCIDS_F24.2301" userId="09644743-1044-4338-95c6-f7c68461d1d3" providerId="ADAL" clId="{47809704-D555-43E9-8763-C18ABFFD866A}" dt="2025-06-30T13:41:01.377" v="4948"/>
+          <ac:spMkLst>
+            <pc:docMk/>
+            <pc:sldMk cId="2810167478" sldId="276"/>
+            <ac:spMk id="7" creationId="{EC8EBDD3-869B-A030-02B3-D6DB6B6A2BCE}"/>
+          </ac:spMkLst>
+        </pc:spChg>
+        <pc:spChg chg="add del">
+          <ac:chgData name="Cervan Canton Alvaro W.MSCIDS_F24.2301" userId="09644743-1044-4338-95c6-f7c68461d1d3" providerId="ADAL" clId="{47809704-D555-43E9-8763-C18ABFFD866A}" dt="2025-06-30T13:42:24.016" v="5001" actId="26606"/>
+          <ac:spMkLst>
+            <pc:docMk/>
+            <pc:sldMk cId="2810167478" sldId="276"/>
+            <ac:spMk id="9" creationId="{2961259D-605E-E200-FF9F-7C8C71D7C8E4}"/>
+          </ac:spMkLst>
+        </pc:spChg>
+        <pc:spChg chg="add del">
+          <ac:chgData name="Cervan Canton Alvaro W.MSCIDS_F24.2301" userId="09644743-1044-4338-95c6-f7c68461d1d3" providerId="ADAL" clId="{47809704-D555-43E9-8763-C18ABFFD866A}" dt="2025-06-30T13:42:24.016" v="5001" actId="26606"/>
+          <ac:spMkLst>
+            <pc:docMk/>
+            <pc:sldMk cId="2810167478" sldId="276"/>
+            <ac:spMk id="14" creationId="{2961259D-605E-E200-FF9F-7C8C71D7C8E4}"/>
+          </ac:spMkLst>
+        </pc:spChg>
+        <pc:picChg chg="add mod">
+          <ac:chgData name="Cervan Canton Alvaro W.MSCIDS_F24.2301" userId="09644743-1044-4338-95c6-f7c68461d1d3" providerId="ADAL" clId="{47809704-D555-43E9-8763-C18ABFFD866A}" dt="2025-06-30T13:42:24.016" v="5001" actId="26606"/>
+          <ac:picMkLst>
+            <pc:docMk/>
+            <pc:sldMk cId="2810167478" sldId="276"/>
+            <ac:picMk id="5" creationId="{CD32A0B8-F16D-A91B-F964-A921BDDBB1EE}"/>
+          </ac:picMkLst>
+        </pc:picChg>
+      </pc:sldChg>
+      <pc:sldChg chg="addSp delSp modSp new mod">
+        <pc:chgData name="Cervan Canton Alvaro W.MSCIDS_F24.2301" userId="09644743-1044-4338-95c6-f7c68461d1d3" providerId="ADAL" clId="{47809704-D555-43E9-8763-C18ABFFD866A}" dt="2025-06-30T13:15:02.689" v="4816" actId="207"/>
+        <pc:sldMkLst>
+          <pc:docMk/>
+          <pc:sldMk cId="2605861646" sldId="277"/>
+        </pc:sldMkLst>
+        <pc:spChg chg="mod">
+          <ac:chgData name="Cervan Canton Alvaro W.MSCIDS_F24.2301" userId="09644743-1044-4338-95c6-f7c68461d1d3" providerId="ADAL" clId="{47809704-D555-43E9-8763-C18ABFFD866A}" dt="2025-06-30T12:54:59.249" v="4388" actId="20577"/>
+          <ac:spMkLst>
+            <pc:docMk/>
+            <pc:sldMk cId="2605861646" sldId="277"/>
+            <ac:spMk id="2" creationId="{E1D4A8BB-F858-1988-CD37-331E8D834DE7}"/>
+          </ac:spMkLst>
+        </pc:spChg>
+        <pc:spChg chg="del">
+          <ac:chgData name="Cervan Canton Alvaro W.MSCIDS_F24.2301" userId="09644743-1044-4338-95c6-f7c68461d1d3" providerId="ADAL" clId="{47809704-D555-43E9-8763-C18ABFFD866A}" dt="2025-06-30T13:04:56.816" v="4389" actId="22"/>
+          <ac:spMkLst>
+            <pc:docMk/>
+            <pc:sldMk cId="2605861646" sldId="277"/>
+            <ac:spMk id="3" creationId="{EA7BC501-DAAD-286F-D904-3C8CC7E14A65}"/>
+          </ac:spMkLst>
+        </pc:spChg>
+        <pc:spChg chg="add mod">
+          <ac:chgData name="Cervan Canton Alvaro W.MSCIDS_F24.2301" userId="09644743-1044-4338-95c6-f7c68461d1d3" providerId="ADAL" clId="{47809704-D555-43E9-8763-C18ABFFD866A}" dt="2025-06-30T13:06:37.019" v="4418" actId="1076"/>
+          <ac:spMkLst>
+            <pc:docMk/>
+            <pc:sldMk cId="2605861646" sldId="277"/>
+            <ac:spMk id="10" creationId="{02C72DA1-4B66-7286-946B-E342E23E69FB}"/>
+          </ac:spMkLst>
+        </pc:spChg>
+        <pc:spChg chg="add mod">
+          <ac:chgData name="Cervan Canton Alvaro W.MSCIDS_F24.2301" userId="09644743-1044-4338-95c6-f7c68461d1d3" providerId="ADAL" clId="{47809704-D555-43E9-8763-C18ABFFD866A}" dt="2025-06-30T13:12:40.482" v="4744" actId="20577"/>
+          <ac:spMkLst>
+            <pc:docMk/>
+            <pc:sldMk cId="2605861646" sldId="277"/>
+            <ac:spMk id="11" creationId="{1850E6B7-5F2F-C295-5BCE-0CD7B5AAF26C}"/>
+          </ac:spMkLst>
+        </pc:spChg>
+        <pc:spChg chg="add mod">
+          <ac:chgData name="Cervan Canton Alvaro W.MSCIDS_F24.2301" userId="09644743-1044-4338-95c6-f7c68461d1d3" providerId="ADAL" clId="{47809704-D555-43E9-8763-C18ABFFD866A}" dt="2025-06-30T13:12:43.727" v="4754" actId="20577"/>
+          <ac:spMkLst>
+            <pc:docMk/>
+            <pc:sldMk cId="2605861646" sldId="277"/>
+            <ac:spMk id="12" creationId="{83EB8173-1EC9-C37F-2393-AAFCFEF4BAB4}"/>
+          </ac:spMkLst>
+        </pc:spChg>
+        <pc:spChg chg="add del mod">
+          <ac:chgData name="Cervan Canton Alvaro W.MSCIDS_F24.2301" userId="09644743-1044-4338-95c6-f7c68461d1d3" providerId="ADAL" clId="{47809704-D555-43E9-8763-C18ABFFD866A}" dt="2025-06-30T13:08:03.512" v="4466"/>
+          <ac:spMkLst>
+            <pc:docMk/>
+            <pc:sldMk cId="2605861646" sldId="277"/>
+            <ac:spMk id="13" creationId="{590D9A6C-9129-B857-E2E7-595A53733E61}"/>
+          </ac:spMkLst>
+        </pc:spChg>
+        <pc:spChg chg="add">
+          <ac:chgData name="Cervan Canton Alvaro W.MSCIDS_F24.2301" userId="09644743-1044-4338-95c6-f7c68461d1d3" providerId="ADAL" clId="{47809704-D555-43E9-8763-C18ABFFD866A}" dt="2025-06-30T13:07:58.279" v="4464"/>
+          <ac:spMkLst>
+            <pc:docMk/>
+            <pc:sldMk cId="2605861646" sldId="277"/>
+            <ac:spMk id="14" creationId="{F657A392-3123-104F-1DAD-0263F723E272}"/>
+          </ac:spMkLst>
+        </pc:spChg>
+        <pc:spChg chg="add mod">
+          <ac:chgData name="Cervan Canton Alvaro W.MSCIDS_F24.2301" userId="09644743-1044-4338-95c6-f7c68461d1d3" providerId="ADAL" clId="{47809704-D555-43E9-8763-C18ABFFD866A}" dt="2025-06-30T13:13:09.344" v="4768" actId="14100"/>
+          <ac:spMkLst>
+            <pc:docMk/>
+            <pc:sldMk cId="2605861646" sldId="277"/>
+            <ac:spMk id="15" creationId="{BB6B339E-4AB4-5EDA-95D6-EACBB8DF960C}"/>
+          </ac:spMkLst>
+        </pc:spChg>
+        <pc:spChg chg="add">
+          <ac:chgData name="Cervan Canton Alvaro W.MSCIDS_F24.2301" userId="09644743-1044-4338-95c6-f7c68461d1d3" providerId="ADAL" clId="{47809704-D555-43E9-8763-C18ABFFD866A}" dt="2025-06-30T13:08:13.816" v="4468"/>
+          <ac:spMkLst>
+            <pc:docMk/>
+            <pc:sldMk cId="2605861646" sldId="277"/>
+            <ac:spMk id="16" creationId="{E83A16B6-440E-BAF0-885D-839653294F00}"/>
+          </ac:spMkLst>
+        </pc:spChg>
+        <pc:spChg chg="add mod">
+          <ac:chgData name="Cervan Canton Alvaro W.MSCIDS_F24.2301" userId="09644743-1044-4338-95c6-f7c68461d1d3" providerId="ADAL" clId="{47809704-D555-43E9-8763-C18ABFFD866A}" dt="2025-06-30T13:14:50.189" v="4813" actId="207"/>
+          <ac:spMkLst>
+            <pc:docMk/>
+            <pc:sldMk cId="2605861646" sldId="277"/>
+            <ac:spMk id="17" creationId="{E049EDF7-9229-030B-A16F-A74ABDE41563}"/>
+          </ac:spMkLst>
+        </pc:spChg>
+        <pc:spChg chg="add mod">
+          <ac:chgData name="Cervan Canton Alvaro W.MSCIDS_F24.2301" userId="09644743-1044-4338-95c6-f7c68461d1d3" providerId="ADAL" clId="{47809704-D555-43E9-8763-C18ABFFD866A}" dt="2025-06-30T13:15:02.689" v="4816" actId="207"/>
+          <ac:spMkLst>
+            <pc:docMk/>
+            <pc:sldMk cId="2605861646" sldId="277"/>
+            <ac:spMk id="18" creationId="{50CFB9DB-E750-8F94-D6FC-4BB043335BEB}"/>
+          </ac:spMkLst>
+        </pc:spChg>
+        <pc:picChg chg="add mod ord">
+          <ac:chgData name="Cervan Canton Alvaro W.MSCIDS_F24.2301" userId="09644743-1044-4338-95c6-f7c68461d1d3" providerId="ADAL" clId="{47809704-D555-43E9-8763-C18ABFFD866A}" dt="2025-06-30T13:05:38.747" v="4395" actId="1076"/>
+          <ac:picMkLst>
+            <pc:docMk/>
+            <pc:sldMk cId="2605861646" sldId="277"/>
+            <ac:picMk id="5" creationId="{9096E8CE-B347-8A78-E148-ADB40881A08B}"/>
+          </ac:picMkLst>
+        </pc:picChg>
+        <pc:picChg chg="add mod">
+          <ac:chgData name="Cervan Canton Alvaro W.MSCIDS_F24.2301" userId="09644743-1044-4338-95c6-f7c68461d1d3" providerId="ADAL" clId="{47809704-D555-43E9-8763-C18ABFFD866A}" dt="2025-06-30T13:05:40.683" v="4396" actId="1076"/>
+          <ac:picMkLst>
+            <pc:docMk/>
+            <pc:sldMk cId="2605861646" sldId="277"/>
+            <ac:picMk id="7" creationId="{837202C7-07B7-520C-46AA-8E0D306CAFD1}"/>
+          </ac:picMkLst>
+        </pc:picChg>
+        <pc:picChg chg="add mod">
+          <ac:chgData name="Cervan Canton Alvaro W.MSCIDS_F24.2301" userId="09644743-1044-4338-95c6-f7c68461d1d3" providerId="ADAL" clId="{47809704-D555-43E9-8763-C18ABFFD866A}" dt="2025-06-30T13:05:56.947" v="4400" actId="1076"/>
+          <ac:picMkLst>
+            <pc:docMk/>
+            <pc:sldMk cId="2605861646" sldId="277"/>
+            <ac:picMk id="9" creationId="{3DB7367C-3814-6ECF-E6EF-7380B51BFB4F}"/>
+          </ac:picMkLst>
+        </pc:picChg>
+      </pc:sldChg>
+      <pc:sldChg chg="addSp modSp new mod setBg">
+        <pc:chgData name="Cervan Canton Alvaro W.MSCIDS_F24.2301" userId="09644743-1044-4338-95c6-f7c68461d1d3" providerId="ADAL" clId="{47809704-D555-43E9-8763-C18ABFFD866A}" dt="2025-06-30T13:38:40.976" v="4934" actId="20577"/>
+        <pc:sldMkLst>
+          <pc:docMk/>
+          <pc:sldMk cId="551498668" sldId="278"/>
+        </pc:sldMkLst>
+        <pc:spChg chg="mod">
+          <ac:chgData name="Cervan Canton Alvaro W.MSCIDS_F24.2301" userId="09644743-1044-4338-95c6-f7c68461d1d3" providerId="ADAL" clId="{47809704-D555-43E9-8763-C18ABFFD866A}" dt="2025-06-30T13:38:40.976" v="4934" actId="20577"/>
+          <ac:spMkLst>
+            <pc:docMk/>
+            <pc:sldMk cId="551498668" sldId="278"/>
+            <ac:spMk id="2" creationId="{FBEC1642-0856-56FB-A658-7318B400EB43}"/>
+          </ac:spMkLst>
+        </pc:spChg>
+        <pc:spChg chg="mod">
+          <ac:chgData name="Cervan Canton Alvaro W.MSCIDS_F24.2301" userId="09644743-1044-4338-95c6-f7c68461d1d3" providerId="ADAL" clId="{47809704-D555-43E9-8763-C18ABFFD866A}" dt="2025-06-30T13:38:29.604" v="4932" actId="14100"/>
+          <ac:spMkLst>
+            <pc:docMk/>
+            <pc:sldMk cId="551498668" sldId="278"/>
+            <ac:spMk id="3" creationId="{08DC2150-CC29-4060-0A45-C056046205A2}"/>
+          </ac:spMkLst>
+        </pc:spChg>
+        <pc:spChg chg="add">
+          <ac:chgData name="Cervan Canton Alvaro W.MSCIDS_F24.2301" userId="09644743-1044-4338-95c6-f7c68461d1d3" providerId="ADAL" clId="{47809704-D555-43E9-8763-C18ABFFD866A}" dt="2025-06-30T13:37:14.648" v="4838" actId="26606"/>
+          <ac:spMkLst>
+            <pc:docMk/>
+            <pc:sldMk cId="551498668" sldId="278"/>
+            <ac:spMk id="9" creationId="{2961259D-605E-E200-FF9F-7C8C71D7C8E4}"/>
+          </ac:spMkLst>
+        </pc:spChg>
+        <pc:picChg chg="add">
+          <ac:chgData name="Cervan Canton Alvaro W.MSCIDS_F24.2301" userId="09644743-1044-4338-95c6-f7c68461d1d3" providerId="ADAL" clId="{47809704-D555-43E9-8763-C18ABFFD866A}" dt="2025-06-30T13:37:14.648" v="4838" actId="26606"/>
+          <ac:picMkLst>
+            <pc:docMk/>
+            <pc:sldMk cId="551498668" sldId="278"/>
+            <ac:picMk id="5" creationId="{64B5D145-256D-EB4B-50AA-B364EEC57B1F}"/>
+          </ac:picMkLst>
+        </pc:picChg>
+      </pc:sldChg>
+      <pc:sldChg chg="addSp delSp modSp new mod setBg addAnim delAnim modAnim">
+        <pc:chgData name="Cervan Canton Alvaro W.MSCIDS_F24.2301" userId="09644743-1044-4338-95c6-f7c68461d1d3" providerId="ADAL" clId="{47809704-D555-43E9-8763-C18ABFFD866A}" dt="2025-06-30T14:16:28.215" v="5820" actId="20577"/>
+        <pc:sldMkLst>
+          <pc:docMk/>
+          <pc:sldMk cId="2890042335" sldId="279"/>
+        </pc:sldMkLst>
+        <pc:spChg chg="mod">
+          <ac:chgData name="Cervan Canton Alvaro W.MSCIDS_F24.2301" userId="09644743-1044-4338-95c6-f7c68461d1d3" providerId="ADAL" clId="{47809704-D555-43E9-8763-C18ABFFD866A}" dt="2025-06-30T14:10:45.598" v="5091" actId="26606"/>
+          <ac:spMkLst>
+            <pc:docMk/>
+            <pc:sldMk cId="2890042335" sldId="279"/>
+            <ac:spMk id="2" creationId="{63073272-CC03-9E33-391C-70916CBF650B}"/>
+          </ac:spMkLst>
+        </pc:spChg>
+        <pc:spChg chg="mod">
+          <ac:chgData name="Cervan Canton Alvaro W.MSCIDS_F24.2301" userId="09644743-1044-4338-95c6-f7c68461d1d3" providerId="ADAL" clId="{47809704-D555-43E9-8763-C18ABFFD866A}" dt="2025-06-30T14:16:28.215" v="5820" actId="20577"/>
+          <ac:spMkLst>
+            <pc:docMk/>
+            <pc:sldMk cId="2890042335" sldId="279"/>
+            <ac:spMk id="3" creationId="{73762168-7D3F-1013-0D40-C81B7C1DF73D}"/>
+          </ac:spMkLst>
+        </pc:spChg>
+        <pc:spChg chg="add del">
+          <ac:chgData name="Cervan Canton Alvaro W.MSCIDS_F24.2301" userId="09644743-1044-4338-95c6-f7c68461d1d3" providerId="ADAL" clId="{47809704-D555-43E9-8763-C18ABFFD866A}" dt="2025-06-30T14:10:41.298" v="5087" actId="26606"/>
+          <ac:spMkLst>
+            <pc:docMk/>
+            <pc:sldMk cId="2890042335" sldId="279"/>
+            <ac:spMk id="9" creationId="{2961259D-605E-E200-FF9F-7C8C71D7C8E4}"/>
+          </ac:spMkLst>
+        </pc:spChg>
+        <pc:spChg chg="add del">
+          <ac:chgData name="Cervan Canton Alvaro W.MSCIDS_F24.2301" userId="09644743-1044-4338-95c6-f7c68461d1d3" providerId="ADAL" clId="{47809704-D555-43E9-8763-C18ABFFD866A}" dt="2025-06-30T14:10:45.582" v="5090" actId="26606"/>
+          <ac:spMkLst>
+            <pc:docMk/>
+            <pc:sldMk cId="2890042335" sldId="279"/>
+            <ac:spMk id="11" creationId="{84D07BF5-D29E-918E-55FE-747AF2A0E23F}"/>
+          </ac:spMkLst>
+        </pc:spChg>
+        <pc:spChg chg="add del">
+          <ac:chgData name="Cervan Canton Alvaro W.MSCIDS_F24.2301" userId="09644743-1044-4338-95c6-f7c68461d1d3" providerId="ADAL" clId="{47809704-D555-43E9-8763-C18ABFFD866A}" dt="2025-06-30T14:10:45.582" v="5090" actId="26606"/>
+          <ac:spMkLst>
+            <pc:docMk/>
+            <pc:sldMk cId="2890042335" sldId="279"/>
+            <ac:spMk id="12" creationId="{21E0DC6F-DB0E-DBE1-8178-AE81BC6B96EA}"/>
+          </ac:spMkLst>
+        </pc:spChg>
+        <pc:spChg chg="add">
+          <ac:chgData name="Cervan Canton Alvaro W.MSCIDS_F24.2301" userId="09644743-1044-4338-95c6-f7c68461d1d3" providerId="ADAL" clId="{47809704-D555-43E9-8763-C18ABFFD866A}" dt="2025-06-30T14:10:45.598" v="5091" actId="26606"/>
+          <ac:spMkLst>
+            <pc:docMk/>
+            <pc:sldMk cId="2890042335" sldId="279"/>
+            <ac:spMk id="15" creationId="{2961259D-605E-E200-FF9F-7C8C71D7C8E4}"/>
+          </ac:spMkLst>
+        </pc:spChg>
+        <pc:picChg chg="add del">
+          <ac:chgData name="Cervan Canton Alvaro W.MSCIDS_F24.2301" userId="09644743-1044-4338-95c6-f7c68461d1d3" providerId="ADAL" clId="{47809704-D555-43E9-8763-C18ABFFD866A}" dt="2025-06-30T14:10:41.298" v="5087" actId="26606"/>
+          <ac:picMkLst>
+            <pc:docMk/>
+            <pc:sldMk cId="2890042335" sldId="279"/>
+            <ac:picMk id="5" creationId="{055AC352-E2E7-02B4-F8FE-B19C1D3C6CD7}"/>
+          </ac:picMkLst>
+        </pc:picChg>
+        <pc:picChg chg="add del">
+          <ac:chgData name="Cervan Canton Alvaro W.MSCIDS_F24.2301" userId="09644743-1044-4338-95c6-f7c68461d1d3" providerId="ADAL" clId="{47809704-D555-43E9-8763-C18ABFFD866A}" dt="2025-06-30T14:10:45.582" v="5090" actId="26606"/>
+          <ac:picMkLst>
+            <pc:docMk/>
+            <pc:sldMk cId="2890042335" sldId="279"/>
+            <ac:picMk id="13" creationId="{563F338A-4E59-C27F-6DEC-DF79E671D74C}"/>
+          </ac:picMkLst>
+        </pc:picChg>
+        <pc:picChg chg="add">
+          <ac:chgData name="Cervan Canton Alvaro W.MSCIDS_F24.2301" userId="09644743-1044-4338-95c6-f7c68461d1d3" providerId="ADAL" clId="{47809704-D555-43E9-8763-C18ABFFD866A}" dt="2025-06-30T14:10:45.598" v="5091" actId="26606"/>
+          <ac:picMkLst>
+            <pc:docMk/>
+            <pc:sldMk cId="2890042335" sldId="279"/>
+            <ac:picMk id="16" creationId="{055AC352-E2E7-02B4-F8FE-B19C1D3C6CD7}"/>
+          </ac:picMkLst>
+        </pc:picChg>
+      </pc:sldChg>
+      <pc:sldChg chg="addSp modSp new mod setBg">
+        <pc:chgData name="Cervan Canton Alvaro W.MSCIDS_F24.2301" userId="09644743-1044-4338-95c6-f7c68461d1d3" providerId="ADAL" clId="{47809704-D555-43E9-8763-C18ABFFD866A}" dt="2025-06-30T14:18:31.659" v="5878" actId="122"/>
+        <pc:sldMkLst>
+          <pc:docMk/>
+          <pc:sldMk cId="87852736" sldId="280"/>
+        </pc:sldMkLst>
+        <pc:spChg chg="mod">
+          <ac:chgData name="Cervan Canton Alvaro W.MSCIDS_F24.2301" userId="09644743-1044-4338-95c6-f7c68461d1d3" providerId="ADAL" clId="{47809704-D555-43E9-8763-C18ABFFD866A}" dt="2025-06-30T14:18:31.659" v="5878" actId="122"/>
+          <ac:spMkLst>
+            <pc:docMk/>
+            <pc:sldMk cId="87852736" sldId="280"/>
+            <ac:spMk id="2" creationId="{73B198F2-0D76-CC3A-002C-ADD17D243802}"/>
+          </ac:spMkLst>
+        </pc:spChg>
+        <pc:spChg chg="mod">
+          <ac:chgData name="Cervan Canton Alvaro W.MSCIDS_F24.2301" userId="09644743-1044-4338-95c6-f7c68461d1d3" providerId="ADAL" clId="{47809704-D555-43E9-8763-C18ABFFD866A}" dt="2025-06-30T14:18:26.897" v="5877" actId="20577"/>
+          <ac:spMkLst>
+            <pc:docMk/>
+            <pc:sldMk cId="87852736" sldId="280"/>
+            <ac:spMk id="3" creationId="{7ABF891A-42F5-83ED-BA67-0BC80E9FEBE9}"/>
+          </ac:spMkLst>
+        </pc:spChg>
+        <pc:spChg chg="add">
+          <ac:chgData name="Cervan Canton Alvaro W.MSCIDS_F24.2301" userId="09644743-1044-4338-95c6-f7c68461d1d3" providerId="ADAL" clId="{47809704-D555-43E9-8763-C18ABFFD866A}" dt="2025-06-30T14:16:49.869" v="5825" actId="26606"/>
+          <ac:spMkLst>
+            <pc:docMk/>
+            <pc:sldMk cId="87852736" sldId="280"/>
+            <ac:spMk id="9" creationId="{2961259D-605E-E200-FF9F-7C8C71D7C8E4}"/>
+          </ac:spMkLst>
+        </pc:spChg>
+        <pc:picChg chg="add">
+          <ac:chgData name="Cervan Canton Alvaro W.MSCIDS_F24.2301" userId="09644743-1044-4338-95c6-f7c68461d1d3" providerId="ADAL" clId="{47809704-D555-43E9-8763-C18ABFFD866A}" dt="2025-06-30T14:16:49.869" v="5825" actId="26606"/>
+          <ac:picMkLst>
+            <pc:docMk/>
+            <pc:sldMk cId="87852736" sldId="280"/>
+            <ac:picMk id="5" creationId="{86191B43-2E6E-0DDD-2BE0-0EF7C2DA6D3E}"/>
+          </ac:picMkLst>
+        </pc:picChg>
       </pc:sldChg>
     </pc:docChg>
   </pc:docChgLst>
 </pc:chgInfo>
+</file>
+
+<file path=ppt/notesMasters/notesMaster1.xml><?xml version="1.0" encoding="utf-8"?>
+<p:notesMaster xmlns:a="http://schemas.openxmlformats.org/drawingml/2006/main" xmlns:r="http://schemas.openxmlformats.org/officeDocument/2006/relationships" xmlns:p="http://schemas.openxmlformats.org/presentationml/2006/main">
+  <p:cSld>
+    <p:bg>
+      <p:bgRef idx="1001">
+        <a:schemeClr val="bg1"/>
+      </p:bgRef>
+    </p:bg>
+    <p:spTree>
+      <p:nvGrpSpPr>
+        <p:cNvPr id="1" name=""/>
+        <p:cNvGrpSpPr/>
+        <p:nvPr/>
+      </p:nvGrpSpPr>
+      <p:grpSpPr>
+        <a:xfrm>
+          <a:off x="0" y="0"/>
+          <a:ext cx="0" cy="0"/>
+          <a:chOff x="0" y="0"/>
+          <a:chExt cx="0" cy="0"/>
+        </a:xfrm>
+      </p:grpSpPr>
+      <p:sp>
+        <p:nvSpPr>
+          <p:cNvPr id="2" name="Header Placeholder 1"/>
+          <p:cNvSpPr>
+            <a:spLocks noGrp="1"/>
+          </p:cNvSpPr>
+          <p:nvPr>
+            <p:ph type="hdr" sz="quarter"/>
+          </p:nvPr>
+        </p:nvSpPr>
+        <p:spPr>
+          <a:xfrm>
+            <a:off x="0" y="0"/>
+            <a:ext cx="2971800" cy="458788"/>
+          </a:xfrm>
+          <a:prstGeom prst="rect">
+            <a:avLst/>
+          </a:prstGeom>
+        </p:spPr>
+        <p:txBody>
+          <a:bodyPr vert="horz" lIns="91440" tIns="45720" rIns="91440" bIns="45720" rtlCol="0"/>
+          <a:lstStyle>
+            <a:lvl1pPr algn="l">
+              <a:defRPr sz="1200"/>
+            </a:lvl1pPr>
+          </a:lstStyle>
+          <a:p>
+            <a:endParaRPr lang="es-ES"/>
+          </a:p>
+        </p:txBody>
+      </p:sp>
+      <p:sp>
+        <p:nvSpPr>
+          <p:cNvPr id="3" name="Date Placeholder 2"/>
+          <p:cNvSpPr>
+            <a:spLocks noGrp="1"/>
+          </p:cNvSpPr>
+          <p:nvPr>
+            <p:ph type="dt" idx="1"/>
+          </p:nvPr>
+        </p:nvSpPr>
+        <p:spPr>
+          <a:xfrm>
+            <a:off x="3884613" y="0"/>
+            <a:ext cx="2971800" cy="458788"/>
+          </a:xfrm>
+          <a:prstGeom prst="rect">
+            <a:avLst/>
+          </a:prstGeom>
+        </p:spPr>
+        <p:txBody>
+          <a:bodyPr vert="horz" lIns="91440" tIns="45720" rIns="91440" bIns="45720" rtlCol="0"/>
+          <a:lstStyle>
+            <a:lvl1pPr algn="r">
+              <a:defRPr sz="1200"/>
+            </a:lvl1pPr>
+          </a:lstStyle>
+          <a:p>
+            <a:fld id="{8C4046F9-7AAF-4D9F-9270-30A915B223BC}" type="datetimeFigureOut">
+              <a:rPr lang="es-ES" smtClean="0"/>
+              <a:t>29/06/2025</a:t>
+            </a:fld>
+            <a:endParaRPr lang="es-ES"/>
+          </a:p>
+        </p:txBody>
+      </p:sp>
+      <p:sp>
+        <p:nvSpPr>
+          <p:cNvPr id="4" name="Slide Image Placeholder 3"/>
+          <p:cNvSpPr>
+            <a:spLocks noGrp="1" noRot="1" noChangeAspect="1"/>
+          </p:cNvSpPr>
+          <p:nvPr>
+            <p:ph type="sldImg" idx="2"/>
+          </p:nvPr>
+        </p:nvSpPr>
+        <p:spPr>
+          <a:xfrm>
+            <a:off x="685800" y="1143000"/>
+            <a:ext cx="5486400" cy="3086100"/>
+          </a:xfrm>
+          <a:prstGeom prst="rect">
+            <a:avLst/>
+          </a:prstGeom>
+          <a:noFill/>
+          <a:ln w="12700">
+            <a:solidFill>
+              <a:prstClr val="black"/>
+            </a:solidFill>
+          </a:ln>
+        </p:spPr>
+        <p:txBody>
+          <a:bodyPr vert="horz" lIns="91440" tIns="45720" rIns="91440" bIns="45720" rtlCol="0" anchor="ctr"/>
+          <a:lstStyle/>
+          <a:p>
+            <a:endParaRPr lang="es-ES"/>
+          </a:p>
+        </p:txBody>
+      </p:sp>
+      <p:sp>
+        <p:nvSpPr>
+          <p:cNvPr id="5" name="Notes Placeholder 4"/>
+          <p:cNvSpPr>
+            <a:spLocks noGrp="1"/>
+          </p:cNvSpPr>
+          <p:nvPr>
+            <p:ph type="body" sz="quarter" idx="3"/>
+          </p:nvPr>
+        </p:nvSpPr>
+        <p:spPr>
+          <a:xfrm>
+            <a:off x="685800" y="4400550"/>
+            <a:ext cx="5486400" cy="3600450"/>
+          </a:xfrm>
+          <a:prstGeom prst="rect">
+            <a:avLst/>
+          </a:prstGeom>
+        </p:spPr>
+        <p:txBody>
+          <a:bodyPr vert="horz" lIns="91440" tIns="45720" rIns="91440" bIns="45720" rtlCol="0"/>
+          <a:lstStyle/>
+          <a:p>
+            <a:pPr lvl="0"/>
+            <a:r>
+              <a:rPr lang="en-US"/>
+              <a:t>Click to edit Master text styles</a:t>
+            </a:r>
+          </a:p>
+          <a:p>
+            <a:pPr lvl="1"/>
+            <a:r>
+              <a:rPr lang="en-US"/>
+              <a:t>Second level</a:t>
+            </a:r>
+          </a:p>
+          <a:p>
+            <a:pPr lvl="2"/>
+            <a:r>
+              <a:rPr lang="en-US"/>
+              <a:t>Third level</a:t>
+            </a:r>
+          </a:p>
+          <a:p>
+            <a:pPr lvl="3"/>
+            <a:r>
+              <a:rPr lang="en-US"/>
+              <a:t>Fourth level</a:t>
+            </a:r>
+          </a:p>
+          <a:p>
+            <a:pPr lvl="4"/>
+            <a:r>
+              <a:rPr lang="en-US"/>
+              <a:t>Fifth level</a:t>
+            </a:r>
+            <a:endParaRPr lang="es-ES"/>
+          </a:p>
+        </p:txBody>
+      </p:sp>
+      <p:sp>
+        <p:nvSpPr>
+          <p:cNvPr id="6" name="Footer Placeholder 5"/>
+          <p:cNvSpPr>
+            <a:spLocks noGrp="1"/>
+          </p:cNvSpPr>
+          <p:nvPr>
+            <p:ph type="ftr" sz="quarter" idx="4"/>
+          </p:nvPr>
+        </p:nvSpPr>
+        <p:spPr>
+          <a:xfrm>
+            <a:off x="0" y="8685213"/>
+            <a:ext cx="2971800" cy="458787"/>
+          </a:xfrm>
+          <a:prstGeom prst="rect">
+            <a:avLst/>
+          </a:prstGeom>
+        </p:spPr>
+        <p:txBody>
+          <a:bodyPr vert="horz" lIns="91440" tIns="45720" rIns="91440" bIns="45720" rtlCol="0" anchor="b"/>
+          <a:lstStyle>
+            <a:lvl1pPr algn="l">
+              <a:defRPr sz="1200"/>
+            </a:lvl1pPr>
+          </a:lstStyle>
+          <a:p>
+            <a:endParaRPr lang="es-ES"/>
+          </a:p>
+        </p:txBody>
+      </p:sp>
+      <p:sp>
+        <p:nvSpPr>
+          <p:cNvPr id="7" name="Slide Number Placeholder 6"/>
+          <p:cNvSpPr>
+            <a:spLocks noGrp="1"/>
+          </p:cNvSpPr>
+          <p:nvPr>
+            <p:ph type="sldNum" sz="quarter" idx="5"/>
+          </p:nvPr>
+        </p:nvSpPr>
+        <p:spPr>
+          <a:xfrm>
+            <a:off x="3884613" y="8685213"/>
+            <a:ext cx="2971800" cy="458787"/>
+          </a:xfrm>
+          <a:prstGeom prst="rect">
+            <a:avLst/>
+          </a:prstGeom>
+        </p:spPr>
+        <p:txBody>
+          <a:bodyPr vert="horz" lIns="91440" tIns="45720" rIns="91440" bIns="45720" rtlCol="0" anchor="b"/>
+          <a:lstStyle>
+            <a:lvl1pPr algn="r">
+              <a:defRPr sz="1200"/>
+            </a:lvl1pPr>
+          </a:lstStyle>
+          <a:p>
+            <a:fld id="{297B618C-8880-408A-ADC2-B88998EA0782}" type="slidenum">
+              <a:rPr lang="es-ES" smtClean="0"/>
+              <a:t>‹#›</a:t>
+            </a:fld>
+            <a:endParaRPr lang="es-ES"/>
+          </a:p>
+        </p:txBody>
+      </p:sp>
+    </p:spTree>
+    <p:extLst>
+      <p:ext uri="{BB962C8B-B14F-4D97-AF65-F5344CB8AC3E}">
+        <p14:creationId xmlns:p14="http://schemas.microsoft.com/office/powerpoint/2010/main" val="3429214275"/>
+      </p:ext>
+    </p:extLst>
+  </p:cSld>
+  <p:clrMap bg1="lt1" tx1="dk1" bg2="lt2" tx2="dk2" accent1="accent1" accent2="accent2" accent3="accent3" accent4="accent4" accent5="accent5" accent6="accent6" hlink="hlink" folHlink="folHlink"/>
+  <p:notesStyle>
+    <a:lvl1pPr marL="0" algn="l" defTabSz="914400" rtl="0" eaLnBrk="1" latinLnBrk="0" hangingPunct="1">
+      <a:defRPr sz="1200" kern="1200">
+        <a:solidFill>
+          <a:schemeClr val="tx1"/>
+        </a:solidFill>
+        <a:latin typeface="+mn-lt"/>
+        <a:ea typeface="+mn-ea"/>
+        <a:cs typeface="+mn-cs"/>
+      </a:defRPr>
+    </a:lvl1pPr>
+    <a:lvl2pPr marL="457200" algn="l" defTabSz="914400" rtl="0" eaLnBrk="1" latinLnBrk="0" hangingPunct="1">
+      <a:defRPr sz="1200" kern="1200">
+        <a:solidFill>
+          <a:schemeClr val="tx1"/>
+        </a:solidFill>
+        <a:latin typeface="+mn-lt"/>
+        <a:ea typeface="+mn-ea"/>
+        <a:cs typeface="+mn-cs"/>
+      </a:defRPr>
+    </a:lvl2pPr>
+    <a:lvl3pPr marL="914400" algn="l" defTabSz="914400" rtl="0" eaLnBrk="1" latinLnBrk="0" hangingPunct="1">
+      <a:defRPr sz="1200" kern="1200">
+        <a:solidFill>
+          <a:schemeClr val="tx1"/>
+        </a:solidFill>
+        <a:latin typeface="+mn-lt"/>
+        <a:ea typeface="+mn-ea"/>
+        <a:cs typeface="+mn-cs"/>
+      </a:defRPr>
+    </a:lvl3pPr>
+    <a:lvl4pPr marL="1371600" algn="l" defTabSz="914400" rtl="0" eaLnBrk="1" latinLnBrk="0" hangingPunct="1">
+      <a:defRPr sz="1200" kern="1200">
+        <a:solidFill>
+          <a:schemeClr val="tx1"/>
+        </a:solidFill>
+        <a:latin typeface="+mn-lt"/>
+        <a:ea typeface="+mn-ea"/>
+        <a:cs typeface="+mn-cs"/>
+      </a:defRPr>
+    </a:lvl4pPr>
+    <a:lvl5pPr marL="1828800" algn="l" defTabSz="914400" rtl="0" eaLnBrk="1" latinLnBrk="0" hangingPunct="1">
+      <a:defRPr sz="1200" kern="1200">
+        <a:solidFill>
+          <a:schemeClr val="tx1"/>
+        </a:solidFill>
+        <a:latin typeface="+mn-lt"/>
+        <a:ea typeface="+mn-ea"/>
+        <a:cs typeface="+mn-cs"/>
+      </a:defRPr>
+    </a:lvl5pPr>
+    <a:lvl6pPr marL="2286000" algn="l" defTabSz="914400" rtl="0" eaLnBrk="1" latinLnBrk="0" hangingPunct="1">
+      <a:defRPr sz="1200" kern="1200">
+        <a:solidFill>
+          <a:schemeClr val="tx1"/>
+        </a:solidFill>
+        <a:latin typeface="+mn-lt"/>
+        <a:ea typeface="+mn-ea"/>
+        <a:cs typeface="+mn-cs"/>
+      </a:defRPr>
+    </a:lvl6pPr>
+    <a:lvl7pPr marL="2743200" algn="l" defTabSz="914400" rtl="0" eaLnBrk="1" latinLnBrk="0" hangingPunct="1">
+      <a:defRPr sz="1200" kern="1200">
+        <a:solidFill>
+          <a:schemeClr val="tx1"/>
+        </a:solidFill>
+        <a:latin typeface="+mn-lt"/>
+        <a:ea typeface="+mn-ea"/>
+        <a:cs typeface="+mn-cs"/>
+      </a:defRPr>
+    </a:lvl7pPr>
+    <a:lvl8pPr marL="3200400" algn="l" defTabSz="914400" rtl="0" eaLnBrk="1" latinLnBrk="0" hangingPunct="1">
+      <a:defRPr sz="1200" kern="1200">
+        <a:solidFill>
+          <a:schemeClr val="tx1"/>
+        </a:solidFill>
+        <a:latin typeface="+mn-lt"/>
+        <a:ea typeface="+mn-ea"/>
+        <a:cs typeface="+mn-cs"/>
+      </a:defRPr>
+    </a:lvl8pPr>
+    <a:lvl9pPr marL="3657600" algn="l" defTabSz="914400" rtl="0" eaLnBrk="1" latinLnBrk="0" hangingPunct="1">
+      <a:defRPr sz="1200" kern="1200">
+        <a:solidFill>
+          <a:schemeClr val="tx1"/>
+        </a:solidFill>
+        <a:latin typeface="+mn-lt"/>
+        <a:ea typeface="+mn-ea"/>
+        <a:cs typeface="+mn-cs"/>
+      </a:defRPr>
+    </a:lvl9pPr>
+  </p:notesStyle>
+</p:notesMaster>
+</file>
+
+<file path=ppt/notesSlides/notesSlide1.xml><?xml version="1.0" encoding="utf-8"?>
+<p:notes xmlns:a="http://schemas.openxmlformats.org/drawingml/2006/main" xmlns:r="http://schemas.openxmlformats.org/officeDocument/2006/relationships" xmlns:p="http://schemas.openxmlformats.org/presentationml/2006/main">
+  <p:cSld>
+    <p:spTree>
+      <p:nvGrpSpPr>
+        <p:cNvPr id="1" name=""/>
+        <p:cNvGrpSpPr/>
+        <p:nvPr/>
+      </p:nvGrpSpPr>
+      <p:grpSpPr>
+        <a:xfrm>
+          <a:off x="0" y="0"/>
+          <a:ext cx="0" cy="0"/>
+          <a:chOff x="0" y="0"/>
+          <a:chExt cx="0" cy="0"/>
+        </a:xfrm>
+      </p:grpSpPr>
+      <p:sp>
+        <p:nvSpPr>
+          <p:cNvPr id="2" name="Slide Image Placeholder 1"/>
+          <p:cNvSpPr>
+            <a:spLocks noGrp="1" noRot="1" noChangeAspect="1"/>
+          </p:cNvSpPr>
+          <p:nvPr>
+            <p:ph type="sldImg"/>
+          </p:nvPr>
+        </p:nvSpPr>
+        <p:spPr/>
+      </p:sp>
+      <p:sp>
+        <p:nvSpPr>
+          <p:cNvPr id="3" name="Notes Placeholder 2"/>
+          <p:cNvSpPr>
+            <a:spLocks noGrp="1"/>
+          </p:cNvSpPr>
+          <p:nvPr>
+            <p:ph type="body" idx="1"/>
+          </p:nvPr>
+        </p:nvSpPr>
+        <p:spPr/>
+        <p:txBody>
+          <a:bodyPr/>
+          <a:lstStyle/>
+          <a:p>
+            <a:r>
+              <a:rPr lang="es-ES" dirty="0" err="1"/>
+              <a:t>It</a:t>
+            </a:r>
+            <a:r>
+              <a:rPr lang="es-ES" dirty="0"/>
+              <a:t> has many more </a:t>
+            </a:r>
+            <a:r>
+              <a:rPr lang="es-ES" dirty="0" err="1"/>
+              <a:t>layers</a:t>
+            </a:r>
+            <a:r>
+              <a:rPr lang="es-ES" dirty="0"/>
+              <a:t> tan VGG16</a:t>
+            </a:r>
+          </a:p>
+        </p:txBody>
+      </p:sp>
+      <p:sp>
+        <p:nvSpPr>
+          <p:cNvPr id="4" name="Slide Number Placeholder 3"/>
+          <p:cNvSpPr>
+            <a:spLocks noGrp="1"/>
+          </p:cNvSpPr>
+          <p:nvPr>
+            <p:ph type="sldNum" sz="quarter" idx="5"/>
+          </p:nvPr>
+        </p:nvSpPr>
+        <p:spPr/>
+        <p:txBody>
+          <a:bodyPr/>
+          <a:lstStyle/>
+          <a:p>
+            <a:fld id="{297B618C-8880-408A-ADC2-B88998EA0782}" type="slidenum">
+              <a:rPr lang="es-ES" smtClean="0"/>
+              <a:t>11</a:t>
+            </a:fld>
+            <a:endParaRPr lang="es-ES"/>
+          </a:p>
+        </p:txBody>
+      </p:sp>
+    </p:spTree>
+    <p:extLst>
+      <p:ext uri="{BB962C8B-B14F-4D97-AF65-F5344CB8AC3E}">
+        <p14:creationId xmlns:p14="http://schemas.microsoft.com/office/powerpoint/2010/main" val="1947266691"/>
+      </p:ext>
+    </p:extLst>
+  </p:cSld>
+  <p:clrMapOvr>
+    <a:masterClrMapping/>
+  </p:clrMapOvr>
+</p:notes>
 </file>
 
 <file path=ppt/slideLayouts/slideLayout1.xml><?xml version="1.0" encoding="utf-8"?>
@@ -4142,7 +5633,30 @@
             </a:r>
             <a:r>
               <a:rPr lang="es-ES" dirty="0"/>
-              <a:t>: Transfer Learning – MobileNetV2</a:t>
+              <a:t>: Transfer Learning – </a:t>
+            </a:r>
+            <a:r>
+              <a:rPr lang="es-ES" dirty="0" err="1"/>
+              <a:t>Custom</a:t>
+            </a:r>
+            <a:r>
+              <a:rPr lang="es-ES" dirty="0"/>
+              <a:t> VGG16</a:t>
+            </a:r>
+            <a:br>
+              <a:rPr lang="es-ES" dirty="0"/>
+            </a:br>
+            <a:r>
+              <a:rPr lang="es-ES" dirty="0"/>
+              <a:t>(</a:t>
+            </a:r>
+            <a:r>
+              <a:rPr lang="es-ES" dirty="0" err="1"/>
+              <a:t>finetuned</a:t>
+            </a:r>
+            <a:r>
+              <a:rPr lang="es-ES" dirty="0"/>
+              <a:t>)</a:t>
             </a:r>
           </a:p>
         </p:txBody>
@@ -4163,19 +5677,569 @@
             <p:ph idx="1"/>
           </p:nvPr>
         </p:nvSpPr>
-        <p:spPr/>
+        <p:spPr>
+          <a:xfrm>
+            <a:off x="612647" y="1715532"/>
+            <a:ext cx="11360277" cy="4941942"/>
+          </a:xfrm>
+        </p:spPr>
         <p:txBody>
-          <a:bodyPr/>
+          <a:bodyPr>
+            <a:normAutofit/>
+          </a:bodyPr>
           <a:lstStyle/>
           <a:p>
-            <a:endParaRPr lang="es-ES"/>
+            <a:r>
+              <a:rPr lang="en-US" b="1" dirty="0"/>
+              <a:t>First 10 layers frozen</a:t>
+            </a:r>
+            <a:r>
+              <a:rPr lang="en-US" dirty="0"/>
+              <a:t> (general features), others fine-tuned for face-specific patterns</a:t>
+            </a:r>
+          </a:p>
+          <a:p>
+            <a:r>
+              <a:rPr lang="en-US" b="1" dirty="0"/>
+              <a:t>Batch Normalization: </a:t>
+            </a:r>
+            <a:r>
+              <a:rPr lang="en-US" dirty="0"/>
+              <a:t>Added after pooling &amp; Dense layers — stabilizes training, improves convergence.</a:t>
+            </a:r>
+          </a:p>
+          <a:p>
+            <a:r>
+              <a:rPr lang="en-US" b="1" dirty="0"/>
+              <a:t>Dropout (0.4 × 2) </a:t>
+            </a:r>
+            <a:r>
+              <a:rPr lang="en-US" dirty="0"/>
+              <a:t>Reduces overfitting, complements </a:t>
+            </a:r>
+            <a:r>
+              <a:rPr lang="en-US" dirty="0" err="1"/>
+              <a:t>BatchNorm</a:t>
+            </a:r>
+            <a:r>
+              <a:rPr lang="en-US" dirty="0"/>
+              <a:t> for robust generalization.</a:t>
+            </a:r>
+          </a:p>
+          <a:p>
+            <a:r>
+              <a:rPr lang="es-ES" b="1" dirty="0" err="1"/>
+              <a:t>Callbacks</a:t>
+            </a:r>
+            <a:r>
+              <a:rPr lang="es-ES" b="1" dirty="0"/>
+              <a:t>:</a:t>
+            </a:r>
+            <a:r>
+              <a:rPr lang="es-ES" dirty="0"/>
+              <a:t> </a:t>
+            </a:r>
+            <a:r>
+              <a:rPr lang="en-US" dirty="0"/>
+              <a:t>Early Stopping + Reduce Learning Rate on Plateau dynamically adjust training to preserve best weights.</a:t>
+            </a:r>
+          </a:p>
+          <a:p>
+            <a:r>
+              <a:rPr lang="en-US" dirty="0"/>
+              <a:t>Results </a:t>
+            </a:r>
+            <a:r>
+              <a:rPr lang="es-ES" dirty="0"/>
+              <a:t>(</a:t>
+            </a:r>
+            <a:r>
+              <a:rPr lang="es-ES" dirty="0" err="1"/>
+              <a:t>Accuracy</a:t>
+            </a:r>
+            <a:r>
+              <a:rPr lang="es-ES" dirty="0"/>
+              <a:t>): </a:t>
+            </a:r>
+            <a:endParaRPr lang="en-US" dirty="0"/>
+          </a:p>
+          <a:p>
+            <a:pPr lvl="1"/>
+            <a:r>
+              <a:rPr lang="en-US" dirty="0"/>
+              <a:t>Original Dataset: </a:t>
+            </a:r>
+            <a:r>
+              <a:rPr lang="es-ES" b="1" dirty="0"/>
+              <a:t>82.17%</a:t>
+            </a:r>
+          </a:p>
+          <a:p>
+            <a:pPr lvl="1"/>
+            <a:r>
+              <a:rPr lang="es-ES" dirty="0" err="1"/>
+              <a:t>Augmented</a:t>
+            </a:r>
+            <a:r>
+              <a:rPr lang="es-ES" dirty="0"/>
+              <a:t>: </a:t>
+            </a:r>
+            <a:r>
+              <a:rPr lang="es-ES" b="1" dirty="0"/>
+              <a:t>93.81%</a:t>
+            </a:r>
           </a:p>
         </p:txBody>
       </p:sp>
+      <p:sp>
+        <p:nvSpPr>
+          <p:cNvPr id="10" name="Rectangle: Rounded Corners 9">
+            <a:extLst>
+              <a:ext uri="{FF2B5EF4-FFF2-40B4-BE49-F238E27FC236}">
+                <a16:creationId xmlns:a16="http://schemas.microsoft.com/office/drawing/2014/main" id="{977DDC21-4FA7-C6E5-5FF8-5CAD877B7EA0}"/>
+              </a:ext>
+            </a:extLst>
+          </p:cNvPr>
+          <p:cNvSpPr/>
+          <p:nvPr/>
+        </p:nvSpPr>
+        <p:spPr>
+          <a:xfrm>
+            <a:off x="4307951" y="4391104"/>
+            <a:ext cx="7500002" cy="1238171"/>
+          </a:xfrm>
+          <a:prstGeom prst="roundRect">
+            <a:avLst/>
+          </a:prstGeom>
+          <a:solidFill>
+            <a:schemeClr val="bg1"/>
+          </a:solidFill>
+          <a:ln w="28575">
+            <a:solidFill>
+              <a:srgbClr val="0070C0"/>
+            </a:solidFill>
+          </a:ln>
+        </p:spPr>
+        <p:style>
+          <a:lnRef idx="2">
+            <a:schemeClr val="accent1">
+              <a:shade val="15000"/>
+            </a:schemeClr>
+          </a:lnRef>
+          <a:fillRef idx="1">
+            <a:schemeClr val="accent1"/>
+          </a:fillRef>
+          <a:effectRef idx="0">
+            <a:schemeClr val="accent1"/>
+          </a:effectRef>
+          <a:fontRef idx="minor">
+            <a:schemeClr val="lt1"/>
+          </a:fontRef>
+        </p:style>
+        <p:txBody>
+          <a:bodyPr rtlCol="0" anchor="t"/>
+          <a:lstStyle/>
+          <a:p>
+            <a:pPr marL="0" marR="0" lvl="0" indent="0" defTabSz="914400" rtl="0" eaLnBrk="1" fontAlgn="auto" latinLnBrk="0" hangingPunct="1">
+              <a:lnSpc>
+                <a:spcPct val="100000"/>
+              </a:lnSpc>
+              <a:spcBef>
+                <a:spcPts val="0"/>
+              </a:spcBef>
+              <a:spcAft>
+                <a:spcPts val="0"/>
+              </a:spcAft>
+              <a:buClrTx/>
+              <a:buSzTx/>
+              <a:buFontTx/>
+              <a:buNone/>
+              <a:tabLst/>
+              <a:defRPr/>
+            </a:pPr>
+            <a:r>
+              <a:rPr kumimoji="0" lang="es-ES" sz="1800" b="1" i="0" u="none" strike="noStrike" kern="1200" cap="none" spc="0" normalizeH="0" baseline="0" noProof="0" dirty="0" err="1">
+                <a:ln>
+                  <a:noFill/>
+                </a:ln>
+                <a:solidFill>
+                  <a:prstClr val="black"/>
+                </a:solidFill>
+                <a:effectLst/>
+                <a:uLnTx/>
+                <a:uFillTx/>
+                <a:latin typeface="Neue Haas Grotesk Text Pro"/>
+                <a:ea typeface="+mn-ea"/>
+                <a:cs typeface="+mn-cs"/>
+              </a:rPr>
+              <a:t>Conclusion</a:t>
+            </a:r>
+            <a:r>
+              <a:rPr kumimoji="0" lang="es-ES" sz="1800" b="0" i="0" u="none" strike="noStrike" kern="1200" cap="none" spc="0" normalizeH="0" baseline="0" noProof="0" dirty="0">
+                <a:ln>
+                  <a:noFill/>
+                </a:ln>
+                <a:solidFill>
+                  <a:prstClr val="black"/>
+                </a:solidFill>
+                <a:effectLst/>
+                <a:uLnTx/>
+                <a:uFillTx/>
+                <a:latin typeface="Neue Haas Grotesk Text Pro"/>
+                <a:ea typeface="+mn-ea"/>
+                <a:cs typeface="+mn-cs"/>
+              </a:rPr>
+              <a:t>: </a:t>
+            </a:r>
+            <a:r>
+              <a:rPr kumimoji="0" lang="es-ES" sz="1800" b="0" i="0" u="none" strike="noStrike" kern="1200" cap="none" spc="0" normalizeH="0" baseline="0" noProof="0" dirty="0" err="1">
+                <a:ln>
+                  <a:noFill/>
+                </a:ln>
+                <a:solidFill>
+                  <a:prstClr val="black"/>
+                </a:solidFill>
+                <a:effectLst/>
+                <a:uLnTx/>
+                <a:uFillTx/>
+                <a:latin typeface="Neue Haas Grotesk Text Pro"/>
+                <a:ea typeface="+mn-ea"/>
+                <a:cs typeface="+mn-cs"/>
+              </a:rPr>
+              <a:t>Finetuned</a:t>
+            </a:r>
+            <a:r>
+              <a:rPr kumimoji="0" lang="es-ES" sz="1800" b="0" i="0" u="none" strike="noStrike" kern="1200" cap="none" spc="0" normalizeH="0" baseline="0" noProof="0" dirty="0">
+                <a:ln>
+                  <a:noFill/>
+                </a:ln>
+                <a:solidFill>
+                  <a:prstClr val="black"/>
+                </a:solidFill>
+                <a:effectLst/>
+                <a:uLnTx/>
+                <a:uFillTx/>
+                <a:latin typeface="Neue Haas Grotesk Text Pro"/>
+                <a:ea typeface="+mn-ea"/>
+                <a:cs typeface="+mn-cs"/>
+              </a:rPr>
+              <a:t> model </a:t>
+            </a:r>
+            <a:r>
+              <a:rPr kumimoji="0" lang="es-ES" sz="1800" b="0" i="0" u="none" strike="noStrike" kern="1200" cap="none" spc="0" normalizeH="0" baseline="0" noProof="0" dirty="0" err="1">
+                <a:ln>
+                  <a:noFill/>
+                </a:ln>
+                <a:solidFill>
+                  <a:prstClr val="black"/>
+                </a:solidFill>
+                <a:effectLst/>
+                <a:uLnTx/>
+                <a:uFillTx/>
+                <a:latin typeface="Neue Haas Grotesk Text Pro"/>
+                <a:ea typeface="+mn-ea"/>
+                <a:cs typeface="+mn-cs"/>
+              </a:rPr>
+              <a:t>clearly</a:t>
+            </a:r>
+            <a:r>
+              <a:rPr kumimoji="0" lang="es-ES" sz="1800" b="0" i="0" u="none" strike="noStrike" kern="1200" cap="none" spc="0" normalizeH="0" baseline="0" noProof="0" dirty="0">
+                <a:ln>
+                  <a:noFill/>
+                </a:ln>
+                <a:solidFill>
+                  <a:prstClr val="black"/>
+                </a:solidFill>
+                <a:effectLst/>
+                <a:uLnTx/>
+                <a:uFillTx/>
+                <a:latin typeface="Neue Haas Grotesk Text Pro"/>
+                <a:ea typeface="+mn-ea"/>
+                <a:cs typeface="+mn-cs"/>
+              </a:rPr>
+              <a:t> </a:t>
+            </a:r>
+            <a:r>
+              <a:rPr kumimoji="0" lang="es-ES" sz="1800" b="0" i="0" u="none" strike="noStrike" kern="1200" cap="none" spc="0" normalizeH="0" baseline="0" noProof="0" dirty="0" err="1">
+                <a:ln>
+                  <a:noFill/>
+                </a:ln>
+                <a:solidFill>
+                  <a:prstClr val="black"/>
+                </a:solidFill>
+                <a:effectLst/>
+                <a:uLnTx/>
+                <a:uFillTx/>
+                <a:latin typeface="Neue Haas Grotesk Text Pro"/>
+                <a:ea typeface="+mn-ea"/>
+                <a:cs typeface="+mn-cs"/>
+              </a:rPr>
+              <a:t>outperforms</a:t>
+            </a:r>
+            <a:r>
+              <a:rPr kumimoji="0" lang="es-ES" sz="1800" b="0" i="0" u="none" strike="noStrike" kern="1200" cap="none" spc="0" normalizeH="0" baseline="0" noProof="0" dirty="0">
+                <a:ln>
+                  <a:noFill/>
+                </a:ln>
+                <a:solidFill>
+                  <a:prstClr val="black"/>
+                </a:solidFill>
+                <a:effectLst/>
+                <a:uLnTx/>
+                <a:uFillTx/>
+                <a:latin typeface="Neue Haas Grotesk Text Pro"/>
+                <a:ea typeface="+mn-ea"/>
+                <a:cs typeface="+mn-cs"/>
+              </a:rPr>
+              <a:t> the base model, shows </a:t>
+            </a:r>
+            <a:r>
+              <a:rPr kumimoji="0" lang="es-ES" sz="1800" b="0" i="0" u="none" strike="noStrike" kern="1200" cap="none" spc="0" normalizeH="0" baseline="0" noProof="0" dirty="0" err="1">
+                <a:ln>
+                  <a:noFill/>
+                </a:ln>
+                <a:solidFill>
+                  <a:prstClr val="black"/>
+                </a:solidFill>
+                <a:effectLst/>
+                <a:uLnTx/>
+                <a:uFillTx/>
+                <a:latin typeface="Neue Haas Grotesk Text Pro"/>
+                <a:ea typeface="+mn-ea"/>
+                <a:cs typeface="+mn-cs"/>
+              </a:rPr>
+              <a:t>significant</a:t>
+            </a:r>
+            <a:r>
+              <a:rPr kumimoji="0" lang="es-ES" sz="1800" b="0" i="0" u="none" strike="noStrike" kern="1200" cap="none" spc="0" normalizeH="0" baseline="0" noProof="0" dirty="0">
+                <a:ln>
+                  <a:noFill/>
+                </a:ln>
+                <a:solidFill>
+                  <a:prstClr val="black"/>
+                </a:solidFill>
+                <a:effectLst/>
+                <a:uLnTx/>
+                <a:uFillTx/>
+                <a:latin typeface="Neue Haas Grotesk Text Pro"/>
+                <a:ea typeface="+mn-ea"/>
+                <a:cs typeface="+mn-cs"/>
+              </a:rPr>
+              <a:t> </a:t>
+            </a:r>
+            <a:r>
+              <a:rPr kumimoji="0" lang="es-ES" sz="1800" b="0" i="0" u="none" strike="noStrike" kern="1200" cap="none" spc="0" normalizeH="0" baseline="0" noProof="0" dirty="0" err="1">
+                <a:ln>
+                  <a:noFill/>
+                </a:ln>
+                <a:solidFill>
+                  <a:prstClr val="black"/>
+                </a:solidFill>
+                <a:effectLst/>
+                <a:uLnTx/>
+                <a:uFillTx/>
+                <a:latin typeface="Neue Haas Grotesk Text Pro"/>
+                <a:ea typeface="+mn-ea"/>
+                <a:cs typeface="+mn-cs"/>
+              </a:rPr>
+              <a:t>improvement</a:t>
+            </a:r>
+            <a:r>
+              <a:rPr kumimoji="0" lang="es-ES" sz="1800" b="0" i="0" u="none" strike="noStrike" kern="1200" cap="none" spc="0" normalizeH="0" baseline="0" noProof="0" dirty="0">
+                <a:ln>
+                  <a:noFill/>
+                </a:ln>
+                <a:solidFill>
+                  <a:prstClr val="black"/>
+                </a:solidFill>
+                <a:effectLst/>
+                <a:uLnTx/>
+                <a:uFillTx/>
+                <a:latin typeface="Neue Haas Grotesk Text Pro"/>
+                <a:ea typeface="+mn-ea"/>
+                <a:cs typeface="+mn-cs"/>
+              </a:rPr>
+              <a:t> by the </a:t>
+            </a:r>
+            <a:r>
+              <a:rPr kumimoji="0" lang="es-ES" sz="1800" b="0" i="0" u="none" strike="noStrike" kern="1200" cap="none" spc="0" normalizeH="0" baseline="0" noProof="0" dirty="0" err="1">
+                <a:ln>
+                  <a:noFill/>
+                </a:ln>
+                <a:solidFill>
+                  <a:prstClr val="black"/>
+                </a:solidFill>
+                <a:effectLst/>
+                <a:uLnTx/>
+                <a:uFillTx/>
+                <a:latin typeface="Neue Haas Grotesk Text Pro"/>
+                <a:ea typeface="+mn-ea"/>
+                <a:cs typeface="+mn-cs"/>
+              </a:rPr>
+              <a:t>augmented</a:t>
+            </a:r>
+            <a:r>
+              <a:rPr kumimoji="0" lang="es-ES" sz="1800" b="0" i="0" u="none" strike="noStrike" kern="1200" cap="none" spc="0" normalizeH="0" baseline="0" noProof="0" dirty="0">
+                <a:ln>
+                  <a:noFill/>
+                </a:ln>
+                <a:solidFill>
+                  <a:prstClr val="black"/>
+                </a:solidFill>
+                <a:effectLst/>
+                <a:uLnTx/>
+                <a:uFillTx/>
+                <a:latin typeface="Neue Haas Grotesk Text Pro"/>
+                <a:ea typeface="+mn-ea"/>
+                <a:cs typeface="+mn-cs"/>
+              </a:rPr>
+              <a:t> </a:t>
+            </a:r>
+            <a:r>
+              <a:rPr kumimoji="0" lang="es-ES" sz="1800" b="0" i="0" u="none" strike="noStrike" kern="1200" cap="none" spc="0" normalizeH="0" baseline="0" noProof="0" dirty="0" err="1">
+                <a:ln>
+                  <a:noFill/>
+                </a:ln>
+                <a:solidFill>
+                  <a:prstClr val="black"/>
+                </a:solidFill>
+                <a:effectLst/>
+                <a:uLnTx/>
+                <a:uFillTx/>
+                <a:latin typeface="Neue Haas Grotesk Text Pro"/>
+                <a:ea typeface="+mn-ea"/>
+                <a:cs typeface="+mn-cs"/>
+              </a:rPr>
+              <a:t>dataset</a:t>
+            </a:r>
+            <a:r>
+              <a:rPr kumimoji="0" lang="es-ES" sz="1800" b="0" i="0" u="none" strike="noStrike" kern="1200" cap="none" spc="0" normalizeH="0" baseline="0" noProof="0" dirty="0">
+                <a:ln>
+                  <a:noFill/>
+                </a:ln>
+                <a:solidFill>
+                  <a:prstClr val="black"/>
+                </a:solidFill>
+                <a:effectLst/>
+                <a:uLnTx/>
+                <a:uFillTx/>
+                <a:latin typeface="Neue Haas Grotesk Text Pro"/>
+                <a:ea typeface="+mn-ea"/>
+                <a:cs typeface="+mn-cs"/>
+              </a:rPr>
+              <a:t> but has </a:t>
+            </a:r>
+            <a:r>
+              <a:rPr kumimoji="0" lang="es-ES" sz="1800" b="0" i="0" u="none" strike="noStrike" kern="1200" cap="none" spc="0" normalizeH="0" baseline="0" noProof="0" dirty="0" err="1">
+                <a:ln>
+                  <a:noFill/>
+                </a:ln>
+                <a:solidFill>
+                  <a:prstClr val="black"/>
+                </a:solidFill>
+                <a:effectLst/>
+                <a:uLnTx/>
+                <a:uFillTx/>
+                <a:latin typeface="Neue Haas Grotesk Text Pro"/>
+                <a:ea typeface="+mn-ea"/>
+                <a:cs typeface="+mn-cs"/>
+              </a:rPr>
+              <a:t>slower</a:t>
+            </a:r>
+            <a:r>
+              <a:rPr kumimoji="0" lang="es-ES" sz="1800" b="0" i="0" u="none" strike="noStrike" kern="1200" cap="none" spc="0" normalizeH="0" baseline="0" noProof="0" dirty="0">
+                <a:ln>
+                  <a:noFill/>
+                </a:ln>
+                <a:solidFill>
+                  <a:prstClr val="black"/>
+                </a:solidFill>
+                <a:effectLst/>
+                <a:uLnTx/>
+                <a:uFillTx/>
+                <a:latin typeface="Neue Haas Grotesk Text Pro"/>
+                <a:ea typeface="+mn-ea"/>
+                <a:cs typeface="+mn-cs"/>
+              </a:rPr>
+              <a:t> training. A </a:t>
+            </a:r>
+            <a:r>
+              <a:rPr kumimoji="0" lang="en-US" sz="1800" b="0" i="0" u="none" strike="noStrike" kern="1200" cap="none" spc="0" normalizeH="0" baseline="0" noProof="0" dirty="0">
+                <a:ln>
+                  <a:noFill/>
+                </a:ln>
+                <a:solidFill>
+                  <a:prstClr val="black"/>
+                </a:solidFill>
+                <a:effectLst/>
+                <a:uLnTx/>
+                <a:uFillTx/>
+                <a:latin typeface="Neue Haas Grotesk Text Pro"/>
+                <a:ea typeface="+mn-ea"/>
+                <a:cs typeface="+mn-cs"/>
+              </a:rPr>
+              <a:t>scalable and accurate solution for face recognition in real-world scenarios.</a:t>
+            </a:r>
+            <a:endParaRPr kumimoji="0" lang="es-ES" sz="1800" b="0" i="0" u="none" strike="noStrike" kern="1200" cap="none" spc="0" normalizeH="0" baseline="0" noProof="0" dirty="0">
+              <a:ln>
+                <a:noFill/>
+              </a:ln>
+              <a:solidFill>
+                <a:prstClr val="black"/>
+              </a:solidFill>
+              <a:effectLst/>
+              <a:uLnTx/>
+              <a:uFillTx/>
+              <a:latin typeface="Neue Haas Grotesk Text Pro"/>
+              <a:ea typeface="+mn-ea"/>
+              <a:cs typeface="+mn-cs"/>
+            </a:endParaRPr>
+          </a:p>
+        </p:txBody>
+      </p:sp>
+      <p:pic>
+        <p:nvPicPr>
+          <p:cNvPr id="8" name="Graphic 7">
+            <a:extLst>
+              <a:ext uri="{FF2B5EF4-FFF2-40B4-BE49-F238E27FC236}">
+                <a16:creationId xmlns:a16="http://schemas.microsoft.com/office/drawing/2014/main" id="{68BE0921-8C02-24C4-58B2-64506D720973}"/>
+              </a:ext>
+            </a:extLst>
+          </p:cNvPr>
+          <p:cNvPicPr>
+            <a:picLocks noChangeAspect="1"/>
+          </p:cNvPicPr>
+          <p:nvPr/>
+        </p:nvPicPr>
+        <p:blipFill>
+          <a:blip r:embed="rId2">
+            <a:extLst>
+              <a:ext uri="{28A0092B-C50C-407E-A947-70E740481C1C}">
+                <a14:useLocalDpi xmlns:a14="http://schemas.microsoft.com/office/drawing/2010/main" val="0"/>
+              </a:ext>
+              <a:ext uri="{96DAC541-7B7A-43D3-8B79-37D633B846F1}">
+                <asvg:svgBlip xmlns:asvg="http://schemas.microsoft.com/office/drawing/2016/SVG/main" r:embed="rId3"/>
+              </a:ext>
+            </a:extLst>
+          </a:blip>
+          <a:stretch>
+            <a:fillRect/>
+          </a:stretch>
+        </p:blipFill>
+        <p:spPr>
+          <a:xfrm rot="16200000">
+            <a:off x="5638044" y="750799"/>
+            <a:ext cx="993645" cy="10888973"/>
+          </a:xfrm>
+          <a:prstGeom prst="rect">
+            <a:avLst/>
+          </a:prstGeom>
+        </p:spPr>
+      </p:pic>
     </p:spTree>
     <p:extLst>
       <p:ext uri="{BB962C8B-B14F-4D97-AF65-F5344CB8AC3E}">
-        <p14:creationId xmlns:p14="http://schemas.microsoft.com/office/powerpoint/2010/main" val="1001368556"/>
+        <p14:creationId xmlns:p14="http://schemas.microsoft.com/office/powerpoint/2010/main" val="3653057986"/>
       </p:ext>
     </p:extLst>
   </p:cSld>
@@ -4218,9 +6282,16 @@
             <p:ph type="title"/>
           </p:nvPr>
         </p:nvSpPr>
-        <p:spPr/>
+        <p:spPr>
+          <a:xfrm>
+            <a:off x="612648" y="548641"/>
+            <a:ext cx="10653578" cy="656704"/>
+          </a:xfrm>
+        </p:spPr>
         <p:txBody>
-          <a:bodyPr/>
+          <a:bodyPr>
+            <a:normAutofit/>
+          </a:bodyPr>
           <a:lstStyle/>
           <a:p>
             <a:r>
@@ -4229,53 +6300,613 @@
             </a:r>
             <a:r>
               <a:rPr lang="es-ES" dirty="0"/>
-              <a:t>: </a:t>
-            </a:r>
-            <a:r>
-              <a:rPr lang="es-ES" dirty="0" err="1"/>
-              <a:t>Embedding-Based</a:t>
-            </a:r>
-            <a:r>
-              <a:rPr lang="es-ES" dirty="0"/>
-              <a:t> – </a:t>
-            </a:r>
-            <a:r>
-              <a:rPr lang="es-ES" dirty="0" err="1"/>
-              <a:t>FaceNet</a:t>
-            </a:r>
-            <a:endParaRPr lang="es-ES" dirty="0"/>
+              <a:t>: Transfer Learning – MobileNetV2</a:t>
+            </a:r>
+          </a:p>
+        </p:txBody>
+      </p:sp>
+      <p:pic>
+        <p:nvPicPr>
+          <p:cNvPr id="5" name="Content Placeholder 4">
+            <a:extLst>
+              <a:ext uri="{FF2B5EF4-FFF2-40B4-BE49-F238E27FC236}">
+                <a16:creationId xmlns:a16="http://schemas.microsoft.com/office/drawing/2014/main" id="{A25BCE4A-C90D-6F61-D14C-62E45A1646D6}"/>
+              </a:ext>
+            </a:extLst>
+          </p:cNvPr>
+          <p:cNvPicPr>
+            <a:picLocks noGrp="1" noChangeAspect="1"/>
+          </p:cNvPicPr>
+          <p:nvPr>
+            <p:ph idx="1"/>
+          </p:nvPr>
+        </p:nvPicPr>
+        <p:blipFill>
+          <a:blip r:embed="rId3">
+            <a:extLst>
+              <a:ext uri="{28A0092B-C50C-407E-A947-70E740481C1C}">
+                <a14:useLocalDpi xmlns:a14="http://schemas.microsoft.com/office/drawing/2010/main" val="0"/>
+              </a:ext>
+              <a:ext uri="{96DAC541-7B7A-43D3-8B79-37D633B846F1}">
+                <asvg:svgBlip xmlns:asvg="http://schemas.microsoft.com/office/drawing/2016/SVG/main" r:embed="rId4"/>
+              </a:ext>
+            </a:extLst>
+          </a:blip>
+          <a:stretch>
+            <a:fillRect/>
+          </a:stretch>
+        </p:blipFill>
+        <p:spPr>
+          <a:xfrm rot="16200000">
+            <a:off x="5942500" y="366860"/>
+            <a:ext cx="300621" cy="12185622"/>
+          </a:xfrm>
+        </p:spPr>
+      </p:pic>
+      <p:sp>
+        <p:nvSpPr>
+          <p:cNvPr id="7" name="Content Placeholder 2">
+            <a:extLst>
+              <a:ext uri="{FF2B5EF4-FFF2-40B4-BE49-F238E27FC236}">
+                <a16:creationId xmlns:a16="http://schemas.microsoft.com/office/drawing/2014/main" id="{AB6A5032-431D-5231-581C-BE4C80E64EF1}"/>
+              </a:ext>
+            </a:extLst>
+          </p:cNvPr>
+          <p:cNvSpPr txBox="1">
+            <a:spLocks/>
+          </p:cNvSpPr>
+          <p:nvPr/>
+        </p:nvSpPr>
+        <p:spPr>
+          <a:xfrm>
+            <a:off x="612647" y="1715532"/>
+            <a:ext cx="11360277" cy="4941942"/>
+          </a:xfrm>
+          <a:prstGeom prst="rect">
+            <a:avLst/>
+          </a:prstGeom>
+        </p:spPr>
+        <p:txBody>
+          <a:bodyPr vert="horz" lIns="91440" tIns="45720" rIns="91440" bIns="45720" rtlCol="0">
+            <a:normAutofit/>
+          </a:bodyPr>
+          <a:lstStyle>
+            <a:lvl1pPr marL="228600" indent="-228600" algn="l" defTabSz="914400" rtl="0" eaLnBrk="1" latinLnBrk="0" hangingPunct="1">
+              <a:lnSpc>
+                <a:spcPct val="120000"/>
+              </a:lnSpc>
+              <a:spcBef>
+                <a:spcPts val="1000"/>
+              </a:spcBef>
+              <a:buFont typeface="Arial" panose="020B0604020202020204" pitchFamily="34" charset="0"/>
+              <a:buChar char="•"/>
+              <a:defRPr sz="2000" kern="1200">
+                <a:solidFill>
+                  <a:schemeClr val="tx1"/>
+                </a:solidFill>
+                <a:latin typeface="+mn-lt"/>
+                <a:ea typeface="+mn-ea"/>
+                <a:cs typeface="+mn-cs"/>
+              </a:defRPr>
+            </a:lvl1pPr>
+            <a:lvl2pPr marL="457200" indent="-228600" algn="l" defTabSz="914400" rtl="0" eaLnBrk="1" latinLnBrk="0" hangingPunct="1">
+              <a:lnSpc>
+                <a:spcPct val="120000"/>
+              </a:lnSpc>
+              <a:spcBef>
+                <a:spcPts val="500"/>
+              </a:spcBef>
+              <a:buFont typeface="Arial" panose="020B0604020202020204" pitchFamily="34" charset="0"/>
+              <a:buChar char="•"/>
+              <a:defRPr sz="1800" kern="1200">
+                <a:solidFill>
+                  <a:schemeClr val="tx1"/>
+                </a:solidFill>
+                <a:latin typeface="+mn-lt"/>
+                <a:ea typeface="+mn-ea"/>
+                <a:cs typeface="+mn-cs"/>
+              </a:defRPr>
+            </a:lvl2pPr>
+            <a:lvl3pPr marL="685800" indent="-228600" algn="l" defTabSz="914400" rtl="0" eaLnBrk="1" latinLnBrk="0" hangingPunct="1">
+              <a:lnSpc>
+                <a:spcPct val="120000"/>
+              </a:lnSpc>
+              <a:spcBef>
+                <a:spcPts val="500"/>
+              </a:spcBef>
+              <a:buFont typeface="Arial" panose="020B0604020202020204" pitchFamily="34" charset="0"/>
+              <a:buChar char="•"/>
+              <a:defRPr sz="1600" kern="1200">
+                <a:solidFill>
+                  <a:schemeClr val="tx1"/>
+                </a:solidFill>
+                <a:latin typeface="+mn-lt"/>
+                <a:ea typeface="+mn-ea"/>
+                <a:cs typeface="+mn-cs"/>
+              </a:defRPr>
+            </a:lvl3pPr>
+            <a:lvl4pPr marL="914400" indent="-228600" algn="l" defTabSz="914400" rtl="0" eaLnBrk="1" latinLnBrk="0" hangingPunct="1">
+              <a:lnSpc>
+                <a:spcPct val="120000"/>
+              </a:lnSpc>
+              <a:spcBef>
+                <a:spcPts val="500"/>
+              </a:spcBef>
+              <a:buFont typeface="Arial" panose="020B0604020202020204" pitchFamily="34" charset="0"/>
+              <a:buChar char="•"/>
+              <a:defRPr sz="1400" kern="1200">
+                <a:solidFill>
+                  <a:schemeClr val="tx1"/>
+                </a:solidFill>
+                <a:latin typeface="+mn-lt"/>
+                <a:ea typeface="+mn-ea"/>
+                <a:cs typeface="+mn-cs"/>
+              </a:defRPr>
+            </a:lvl4pPr>
+            <a:lvl5pPr marL="1143000" indent="-228600" algn="l" defTabSz="914400" rtl="0" eaLnBrk="1" latinLnBrk="0" hangingPunct="1">
+              <a:lnSpc>
+                <a:spcPct val="120000"/>
+              </a:lnSpc>
+              <a:spcBef>
+                <a:spcPts val="500"/>
+              </a:spcBef>
+              <a:buFont typeface="Arial" panose="020B0604020202020204" pitchFamily="34" charset="0"/>
+              <a:buChar char="•"/>
+              <a:defRPr sz="1200" kern="1200">
+                <a:solidFill>
+                  <a:schemeClr val="tx1"/>
+                </a:solidFill>
+                <a:latin typeface="+mn-lt"/>
+                <a:ea typeface="+mn-ea"/>
+                <a:cs typeface="+mn-cs"/>
+              </a:defRPr>
+            </a:lvl5pPr>
+            <a:lvl6pPr marL="2514600" indent="-228600" algn="l" defTabSz="914400" rtl="0" eaLnBrk="1" latinLnBrk="0" hangingPunct="1">
+              <a:lnSpc>
+                <a:spcPct val="90000"/>
+              </a:lnSpc>
+              <a:spcBef>
+                <a:spcPts val="500"/>
+              </a:spcBef>
+              <a:buFont typeface="Arial" panose="020B0604020202020204" pitchFamily="34" charset="0"/>
+              <a:buChar char="•"/>
+              <a:defRPr sz="1800" kern="1200">
+                <a:solidFill>
+                  <a:schemeClr val="tx1"/>
+                </a:solidFill>
+                <a:latin typeface="+mn-lt"/>
+                <a:ea typeface="+mn-ea"/>
+                <a:cs typeface="+mn-cs"/>
+              </a:defRPr>
+            </a:lvl6pPr>
+            <a:lvl7pPr marL="2971800" indent="-228600" algn="l" defTabSz="914400" rtl="0" eaLnBrk="1" latinLnBrk="0" hangingPunct="1">
+              <a:lnSpc>
+                <a:spcPct val="90000"/>
+              </a:lnSpc>
+              <a:spcBef>
+                <a:spcPts val="500"/>
+              </a:spcBef>
+              <a:buFont typeface="Arial" panose="020B0604020202020204" pitchFamily="34" charset="0"/>
+              <a:buChar char="•"/>
+              <a:defRPr sz="1800" kern="1200">
+                <a:solidFill>
+                  <a:schemeClr val="tx1"/>
+                </a:solidFill>
+                <a:latin typeface="+mn-lt"/>
+                <a:ea typeface="+mn-ea"/>
+                <a:cs typeface="+mn-cs"/>
+              </a:defRPr>
+            </a:lvl7pPr>
+            <a:lvl8pPr marL="3429000" indent="-228600" algn="l" defTabSz="914400" rtl="0" eaLnBrk="1" latinLnBrk="0" hangingPunct="1">
+              <a:lnSpc>
+                <a:spcPct val="90000"/>
+              </a:lnSpc>
+              <a:spcBef>
+                <a:spcPts val="500"/>
+              </a:spcBef>
+              <a:buFont typeface="Arial" panose="020B0604020202020204" pitchFamily="34" charset="0"/>
+              <a:buChar char="•"/>
+              <a:defRPr sz="1800" kern="1200">
+                <a:solidFill>
+                  <a:schemeClr val="tx1"/>
+                </a:solidFill>
+                <a:latin typeface="+mn-lt"/>
+                <a:ea typeface="+mn-ea"/>
+                <a:cs typeface="+mn-cs"/>
+              </a:defRPr>
+            </a:lvl8pPr>
+            <a:lvl9pPr marL="3886200" indent="-228600" algn="l" defTabSz="914400" rtl="0" eaLnBrk="1" latinLnBrk="0" hangingPunct="1">
+              <a:lnSpc>
+                <a:spcPct val="90000"/>
+              </a:lnSpc>
+              <a:spcBef>
+                <a:spcPts val="500"/>
+              </a:spcBef>
+              <a:buFont typeface="Arial" panose="020B0604020202020204" pitchFamily="34" charset="0"/>
+              <a:buChar char="•"/>
+              <a:defRPr sz="1800" kern="1200">
+                <a:solidFill>
+                  <a:schemeClr val="tx1"/>
+                </a:solidFill>
+                <a:latin typeface="+mn-lt"/>
+                <a:ea typeface="+mn-ea"/>
+                <a:cs typeface="+mn-cs"/>
+              </a:defRPr>
+            </a:lvl9pPr>
+          </a:lstStyle>
+          <a:p>
+            <a:r>
+              <a:rPr lang="en-US" dirty="0"/>
+              <a:t>Lightweight, efficient CNN optimized for speed and performance, ideal for small devices</a:t>
+            </a:r>
+          </a:p>
+          <a:p>
+            <a:r>
+              <a:rPr lang="en-US" dirty="0"/>
+              <a:t>Features:</a:t>
+            </a:r>
+          </a:p>
+          <a:p>
+            <a:pPr lvl="1"/>
+            <a:r>
+              <a:rPr lang="en-US" b="1" dirty="0"/>
+              <a:t>Partial Unfreezing</a:t>
+            </a:r>
+            <a:r>
+              <a:rPr lang="en-US" dirty="0"/>
+              <a:t>: First 20 layers frozen → preserves low-level features</a:t>
+            </a:r>
+          </a:p>
+          <a:p>
+            <a:pPr lvl="1"/>
+            <a:r>
+              <a:rPr lang="en-US" b="1" dirty="0"/>
+              <a:t>Fine-tuning deeper layers</a:t>
+            </a:r>
+            <a:r>
+              <a:rPr lang="en-US" dirty="0"/>
+              <a:t>: Adapts MobileNetV2 to facial identity recognition</a:t>
+            </a:r>
+          </a:p>
+          <a:p>
+            <a:pPr lvl="1"/>
+            <a:r>
+              <a:rPr lang="en-US" b="1" dirty="0"/>
+              <a:t>Batch Normalization</a:t>
+            </a:r>
+            <a:r>
+              <a:rPr lang="en-US" dirty="0"/>
+              <a:t>: Added after pooling and dense layer</a:t>
+            </a:r>
+          </a:p>
+          <a:p>
+            <a:pPr lvl="1"/>
+            <a:r>
+              <a:rPr lang="en-US" b="1" dirty="0"/>
+              <a:t>Dropout (0.3 × 2)</a:t>
+            </a:r>
+            <a:r>
+              <a:rPr lang="en-US" dirty="0"/>
+              <a:t>: Regularizes and prevents overfitting</a:t>
+            </a:r>
+          </a:p>
+          <a:p>
+            <a:pPr lvl="1"/>
+            <a:r>
+              <a:rPr lang="en-US" b="1" dirty="0"/>
+              <a:t>Mixed Precision Enabled</a:t>
+            </a:r>
+            <a:r>
+              <a:rPr lang="en-US" dirty="0"/>
+              <a:t>: Faster training, reduced memory usage</a:t>
+            </a:r>
+          </a:p>
+          <a:p>
+            <a:pPr lvl="1"/>
+            <a:r>
+              <a:rPr lang="en-US" b="1" dirty="0"/>
+              <a:t>Callbacks</a:t>
+            </a:r>
+            <a:r>
+              <a:rPr lang="en-US" dirty="0"/>
+              <a:t>: Early Stopping and </a:t>
+            </a:r>
+            <a:r>
+              <a:rPr lang="en-US" dirty="0" err="1"/>
+              <a:t>RLRPlateau</a:t>
+            </a:r>
+            <a:r>
+              <a:rPr lang="en-US" dirty="0"/>
+              <a:t>.</a:t>
+            </a:r>
+          </a:p>
+          <a:p>
+            <a:r>
+              <a:rPr lang="en-US" dirty="0"/>
+              <a:t>Results </a:t>
+            </a:r>
+            <a:r>
+              <a:rPr lang="es-ES" dirty="0"/>
+              <a:t>(</a:t>
+            </a:r>
+            <a:r>
+              <a:rPr lang="es-ES" dirty="0" err="1"/>
+              <a:t>Accuracy</a:t>
+            </a:r>
+            <a:r>
+              <a:rPr lang="es-ES" dirty="0"/>
+              <a:t>): </a:t>
+            </a:r>
+            <a:endParaRPr lang="en-US" dirty="0"/>
+          </a:p>
+          <a:p>
+            <a:pPr lvl="1"/>
+            <a:r>
+              <a:rPr lang="en-US" dirty="0"/>
+              <a:t>Original Dataset: </a:t>
+            </a:r>
+            <a:r>
+              <a:rPr lang="en-US" b="1" dirty="0"/>
+              <a:t>67.37%</a:t>
+            </a:r>
+          </a:p>
+          <a:p>
+            <a:pPr lvl="1"/>
+            <a:r>
+              <a:rPr lang="en-US" dirty="0"/>
+              <a:t>Augmented: </a:t>
+            </a:r>
+            <a:r>
+              <a:rPr lang="en-US" b="1" dirty="0"/>
+              <a:t>84.29%</a:t>
+            </a:r>
+            <a:endParaRPr lang="es-ES" b="1" dirty="0"/>
           </a:p>
         </p:txBody>
       </p:sp>
       <p:sp>
         <p:nvSpPr>
-          <p:cNvPr id="3" name="Content Placeholder 2">
-            <a:extLst>
-              <a:ext uri="{FF2B5EF4-FFF2-40B4-BE49-F238E27FC236}">
-                <a16:creationId xmlns:a16="http://schemas.microsoft.com/office/drawing/2014/main" id="{E60DA390-2E8B-082C-7D4C-CC5FE49679EE}"/>
-              </a:ext>
-            </a:extLst>
-          </p:cNvPr>
-          <p:cNvSpPr>
-            <a:spLocks noGrp="1"/>
-          </p:cNvSpPr>
-          <p:nvPr>
-            <p:ph idx="1"/>
-          </p:nvPr>
+          <p:cNvPr id="9" name="Rectangle: Rounded Corners 8">
+            <a:extLst>
+              <a:ext uri="{FF2B5EF4-FFF2-40B4-BE49-F238E27FC236}">
+                <a16:creationId xmlns:a16="http://schemas.microsoft.com/office/drawing/2014/main" id="{1B112EA8-3445-68AB-5090-D74A5B53C3FC}"/>
+              </a:ext>
+            </a:extLst>
+          </p:cNvPr>
+          <p:cNvSpPr/>
+          <p:nvPr/>
         </p:nvSpPr>
-        <p:spPr/>
+        <p:spPr>
+          <a:xfrm>
+            <a:off x="4314878" y="5087620"/>
+            <a:ext cx="7500002" cy="1030739"/>
+          </a:xfrm>
+          <a:prstGeom prst="roundRect">
+            <a:avLst/>
+          </a:prstGeom>
+          <a:solidFill>
+            <a:schemeClr val="bg1"/>
+          </a:solidFill>
+          <a:ln w="28575">
+            <a:solidFill>
+              <a:srgbClr val="0070C0"/>
+            </a:solidFill>
+          </a:ln>
+        </p:spPr>
+        <p:style>
+          <a:lnRef idx="2">
+            <a:schemeClr val="accent1">
+              <a:shade val="15000"/>
+            </a:schemeClr>
+          </a:lnRef>
+          <a:fillRef idx="1">
+            <a:schemeClr val="accent1"/>
+          </a:fillRef>
+          <a:effectRef idx="0">
+            <a:schemeClr val="accent1"/>
+          </a:effectRef>
+          <a:fontRef idx="minor">
+            <a:schemeClr val="lt1"/>
+          </a:fontRef>
+        </p:style>
         <p:txBody>
-          <a:bodyPr/>
+          <a:bodyPr rtlCol="0" anchor="t"/>
           <a:lstStyle/>
           <a:p>
-            <a:endParaRPr lang="es-ES"/>
+            <a:pPr marL="0" marR="0" lvl="0" indent="0" defTabSz="914400" rtl="0" eaLnBrk="1" fontAlgn="auto" latinLnBrk="0" hangingPunct="1">
+              <a:lnSpc>
+                <a:spcPct val="100000"/>
+              </a:lnSpc>
+              <a:spcBef>
+                <a:spcPts val="0"/>
+              </a:spcBef>
+              <a:spcAft>
+                <a:spcPts val="0"/>
+              </a:spcAft>
+              <a:buClrTx/>
+              <a:buSzTx/>
+              <a:buFontTx/>
+              <a:buNone/>
+              <a:tabLst/>
+              <a:defRPr/>
+            </a:pPr>
+            <a:r>
+              <a:rPr kumimoji="0" lang="es-ES" sz="1800" b="1" i="0" u="none" strike="noStrike" kern="1200" cap="none" spc="0" normalizeH="0" baseline="0" noProof="0" dirty="0" err="1">
+                <a:ln>
+                  <a:noFill/>
+                </a:ln>
+                <a:solidFill>
+                  <a:prstClr val="black"/>
+                </a:solidFill>
+                <a:effectLst/>
+                <a:uLnTx/>
+                <a:uFillTx/>
+                <a:latin typeface="Neue Haas Grotesk Text Pro"/>
+                <a:ea typeface="+mn-ea"/>
+                <a:cs typeface="+mn-cs"/>
+              </a:rPr>
+              <a:t>Conclusion</a:t>
+            </a:r>
+            <a:r>
+              <a:rPr kumimoji="0" lang="es-ES" sz="1800" b="0" i="0" u="none" strike="noStrike" kern="1200" cap="none" spc="0" normalizeH="0" baseline="0" noProof="0" dirty="0">
+                <a:ln>
+                  <a:noFill/>
+                </a:ln>
+                <a:solidFill>
+                  <a:prstClr val="black"/>
+                </a:solidFill>
+                <a:effectLst/>
+                <a:uLnTx/>
+                <a:uFillTx/>
+                <a:latin typeface="Neue Haas Grotesk Text Pro"/>
+                <a:ea typeface="+mn-ea"/>
+                <a:cs typeface="+mn-cs"/>
+              </a:rPr>
+              <a:t>: </a:t>
+            </a:r>
+            <a:r>
+              <a:rPr kumimoji="0" lang="en-US" sz="1800" b="0" i="0" u="none" strike="noStrike" kern="1200" cap="none" spc="0" normalizeH="0" baseline="0" noProof="0" dirty="0">
+                <a:ln>
+                  <a:noFill/>
+                </a:ln>
+                <a:solidFill>
+                  <a:prstClr val="black"/>
+                </a:solidFill>
+                <a:effectLst/>
+                <a:uLnTx/>
+                <a:uFillTx/>
+                <a:latin typeface="Neue Haas Grotesk Text Pro"/>
+                <a:ea typeface="+mn-ea"/>
+                <a:cs typeface="+mn-cs"/>
+              </a:rPr>
+              <a:t>Fine-tuned MobileNetV2 balances performance and efficiency well fitted for mobile face recognition applications.</a:t>
+            </a:r>
+            <a:r>
+              <a:rPr kumimoji="0" lang="es-ES" sz="1800" b="0" i="0" u="none" strike="noStrike" kern="1200" cap="none" spc="0" normalizeH="0" baseline="0" noProof="0" dirty="0">
+                <a:ln>
+                  <a:noFill/>
+                </a:ln>
+                <a:solidFill>
+                  <a:prstClr val="black"/>
+                </a:solidFill>
+                <a:effectLst/>
+                <a:uLnTx/>
+                <a:uFillTx/>
+                <a:latin typeface="Neue Haas Grotesk Text Pro"/>
+                <a:ea typeface="+mn-ea"/>
+                <a:cs typeface="+mn-cs"/>
+              </a:rPr>
+              <a:t> Less </a:t>
+            </a:r>
+            <a:r>
+              <a:rPr kumimoji="0" lang="es-ES" sz="1800" b="0" i="0" u="none" strike="noStrike" kern="1200" cap="none" spc="0" normalizeH="0" baseline="0" noProof="0" dirty="0" err="1">
+                <a:ln>
+                  <a:noFill/>
+                </a:ln>
+                <a:solidFill>
+                  <a:prstClr val="black"/>
+                </a:solidFill>
+                <a:effectLst/>
+                <a:uLnTx/>
+                <a:uFillTx/>
+                <a:latin typeface="Neue Haas Grotesk Text Pro"/>
+                <a:ea typeface="+mn-ea"/>
+                <a:cs typeface="+mn-cs"/>
+              </a:rPr>
+              <a:t>performant</a:t>
+            </a:r>
+            <a:r>
+              <a:rPr kumimoji="0" lang="es-ES" sz="1800" b="0" i="0" u="none" strike="noStrike" kern="1200" cap="none" spc="0" normalizeH="0" baseline="0" noProof="0" dirty="0">
+                <a:ln>
+                  <a:noFill/>
+                </a:ln>
+                <a:solidFill>
+                  <a:prstClr val="black"/>
+                </a:solidFill>
+                <a:effectLst/>
+                <a:uLnTx/>
+                <a:uFillTx/>
+                <a:latin typeface="Neue Haas Grotesk Text Pro"/>
+                <a:ea typeface="+mn-ea"/>
+                <a:cs typeface="+mn-cs"/>
+              </a:rPr>
+              <a:t> tan VGG16 but </a:t>
+            </a:r>
+            <a:r>
+              <a:rPr kumimoji="0" lang="es-ES" sz="1800" b="0" i="0" u="none" strike="noStrike" kern="1200" cap="none" spc="0" normalizeH="0" baseline="0" noProof="0" dirty="0" err="1">
+                <a:ln>
+                  <a:noFill/>
+                </a:ln>
+                <a:solidFill>
+                  <a:prstClr val="black"/>
+                </a:solidFill>
+                <a:effectLst/>
+                <a:uLnTx/>
+                <a:uFillTx/>
+                <a:latin typeface="Neue Haas Grotesk Text Pro"/>
+                <a:ea typeface="+mn-ea"/>
+                <a:cs typeface="+mn-cs"/>
+              </a:rPr>
+              <a:t>faster</a:t>
+            </a:r>
+            <a:r>
+              <a:rPr kumimoji="0" lang="es-ES" sz="1800" b="0" i="0" u="none" strike="noStrike" kern="1200" cap="none" spc="0" normalizeH="0" baseline="0" noProof="0" dirty="0">
+                <a:ln>
+                  <a:noFill/>
+                </a:ln>
+                <a:solidFill>
+                  <a:prstClr val="black"/>
+                </a:solidFill>
+                <a:effectLst/>
+                <a:uLnTx/>
+                <a:uFillTx/>
+                <a:latin typeface="Neue Haas Grotesk Text Pro"/>
+                <a:ea typeface="+mn-ea"/>
+                <a:cs typeface="+mn-cs"/>
+              </a:rPr>
+              <a:t> to </a:t>
+            </a:r>
+            <a:r>
+              <a:rPr kumimoji="0" lang="es-ES" sz="1800" b="0" i="0" u="none" strike="noStrike" kern="1200" cap="none" spc="0" normalizeH="0" baseline="0" noProof="0" dirty="0" err="1">
+                <a:ln>
+                  <a:noFill/>
+                </a:ln>
+                <a:solidFill>
+                  <a:prstClr val="black"/>
+                </a:solidFill>
+                <a:effectLst/>
+                <a:uLnTx/>
+                <a:uFillTx/>
+                <a:latin typeface="Neue Haas Grotesk Text Pro"/>
+                <a:ea typeface="+mn-ea"/>
+                <a:cs typeface="+mn-cs"/>
+              </a:rPr>
+              <a:t>train</a:t>
+            </a:r>
+            <a:r>
+              <a:rPr kumimoji="0" lang="es-ES" sz="1800" b="0" i="0" u="none" strike="noStrike" kern="1200" cap="none" spc="0" normalizeH="0" baseline="0" noProof="0" dirty="0">
+                <a:ln>
+                  <a:noFill/>
+                </a:ln>
+                <a:solidFill>
+                  <a:prstClr val="black"/>
+                </a:solidFill>
+                <a:effectLst/>
+                <a:uLnTx/>
+                <a:uFillTx/>
+                <a:latin typeface="Neue Haas Grotesk Text Pro"/>
+                <a:ea typeface="+mn-ea"/>
+                <a:cs typeface="+mn-cs"/>
+              </a:rPr>
+              <a:t>.</a:t>
+            </a:r>
           </a:p>
         </p:txBody>
       </p:sp>
     </p:spTree>
     <p:extLst>
       <p:ext uri="{BB962C8B-B14F-4D97-AF65-F5344CB8AC3E}">
-        <p14:creationId xmlns:p14="http://schemas.microsoft.com/office/powerpoint/2010/main" val="631473613"/>
+        <p14:creationId xmlns:p14="http://schemas.microsoft.com/office/powerpoint/2010/main" val="1001368556"/>
       </p:ext>
     </p:extLst>
   </p:cSld>
@@ -4333,7 +6964,15 @@
             </a:r>
             <a:r>
               <a:rPr lang="es-ES" dirty="0" err="1"/>
-              <a:t>Embedding-Based</a:t>
+              <a:t>Embedding</a:t>
+            </a:r>
+            <a:r>
+              <a:rPr lang="es-ES" dirty="0"/>
+              <a:t> </a:t>
+            </a:r>
+            <a:r>
+              <a:rPr lang="es-ES" dirty="0" err="1"/>
+              <a:t>Based</a:t>
             </a:r>
             <a:r>
               <a:rPr lang="es-ES" dirty="0"/>
@@ -4341,9 +6980,12 @@
             </a:r>
             <a:r>
               <a:rPr lang="es-ES" dirty="0" err="1"/>
-              <a:t>ArcFace</a:t>
-            </a:r>
-            <a:endParaRPr lang="es-ES" dirty="0"/>
+              <a:t>FaceNet</a:t>
+            </a:r>
+            <a:r>
+              <a:rPr lang="es-ES" dirty="0"/>
+              <a:t> (Google)</a:t>
+            </a:r>
           </a:p>
         </p:txBody>
       </p:sp>
@@ -4363,11 +7005,356 @@
             <p:ph idx="1"/>
           </p:nvPr>
         </p:nvSpPr>
-        <p:spPr/>
+        <p:spPr>
+          <a:xfrm>
+            <a:off x="612648" y="1680898"/>
+            <a:ext cx="7035062" cy="4593828"/>
+          </a:xfrm>
+        </p:spPr>
         <p:txBody>
-          <a:bodyPr/>
+          <a:bodyPr>
+            <a:normAutofit fontScale="92500" lnSpcReduction="10000"/>
+          </a:bodyPr>
           <a:lstStyle/>
           <a:p>
+            <a:r>
+              <a:rPr lang="es-ES" dirty="0"/>
+              <a:t>Uses </a:t>
+            </a:r>
+            <a:r>
+              <a:rPr lang="es-ES" dirty="0" err="1"/>
+              <a:t>DeepFace</a:t>
+            </a:r>
+            <a:r>
+              <a:rPr lang="es-ES" dirty="0"/>
+              <a:t> </a:t>
+            </a:r>
+            <a:r>
+              <a:rPr lang="es-ES" dirty="0" err="1"/>
+              <a:t>library</a:t>
+            </a:r>
+            <a:r>
+              <a:rPr lang="es-ES" dirty="0"/>
+              <a:t> to </a:t>
+            </a:r>
+            <a:r>
+              <a:rPr lang="es-ES" dirty="0" err="1"/>
+              <a:t>implement</a:t>
+            </a:r>
+            <a:r>
+              <a:rPr lang="es-ES" dirty="0"/>
+              <a:t> and to </a:t>
+            </a:r>
+            <a:r>
+              <a:rPr lang="es-ES" dirty="0" err="1"/>
+              <a:t>extract</a:t>
+            </a:r>
+            <a:r>
+              <a:rPr lang="es-ES" dirty="0"/>
+              <a:t> </a:t>
+            </a:r>
+            <a:r>
+              <a:rPr lang="es-ES" dirty="0" err="1"/>
+              <a:t>high-quality</a:t>
+            </a:r>
+            <a:r>
+              <a:rPr lang="es-ES" dirty="0"/>
+              <a:t> </a:t>
+            </a:r>
+            <a:r>
+              <a:rPr lang="es-ES" dirty="0" err="1"/>
+              <a:t>FaceNet</a:t>
+            </a:r>
+            <a:r>
+              <a:rPr lang="es-ES" dirty="0"/>
+              <a:t> </a:t>
+            </a:r>
+            <a:r>
+              <a:rPr lang="es-ES" dirty="0" err="1"/>
+              <a:t>embeddings</a:t>
+            </a:r>
+            <a:r>
+              <a:rPr lang="es-ES" dirty="0"/>
+              <a:t>.</a:t>
+            </a:r>
+          </a:p>
+          <a:p>
+            <a:r>
+              <a:rPr lang="en-US" b="1" dirty="0"/>
+              <a:t>Face Embeddings</a:t>
+            </a:r>
+            <a:r>
+              <a:rPr lang="en-US" dirty="0"/>
+              <a:t>: Pre-trained </a:t>
+            </a:r>
+            <a:r>
+              <a:rPr lang="en-US" dirty="0" err="1"/>
+              <a:t>FaceNet</a:t>
+            </a:r>
+            <a:r>
+              <a:rPr lang="en-US" dirty="0"/>
+              <a:t> generates identity-aware descriptors</a:t>
+            </a:r>
+            <a:endParaRPr lang="es-ES" dirty="0"/>
+          </a:p>
+          <a:p>
+            <a:pPr lvl="1"/>
+            <a:r>
+              <a:rPr lang="es-ES" dirty="0" err="1"/>
+              <a:t>learns</a:t>
+            </a:r>
+            <a:r>
+              <a:rPr lang="es-ES" dirty="0"/>
+              <a:t> a </a:t>
+            </a:r>
+            <a:r>
+              <a:rPr lang="es-ES" b="1" dirty="0"/>
+              <a:t>128D</a:t>
+            </a:r>
+            <a:r>
+              <a:rPr lang="es-ES" dirty="0"/>
+              <a:t> vector </a:t>
+            </a:r>
+            <a:r>
+              <a:rPr lang="es-ES" dirty="0" err="1"/>
+              <a:t>for</a:t>
+            </a:r>
+            <a:r>
+              <a:rPr lang="es-ES" dirty="0"/>
+              <a:t> each </a:t>
+            </a:r>
+            <a:r>
+              <a:rPr lang="es-ES" dirty="0" err="1"/>
+              <a:t>face</a:t>
+            </a:r>
+            <a:r>
+              <a:rPr lang="es-ES" dirty="0"/>
+              <a:t> → </a:t>
+            </a:r>
+            <a:r>
+              <a:rPr lang="es-ES" dirty="0" err="1"/>
+              <a:t>optimized</a:t>
+            </a:r>
+            <a:r>
+              <a:rPr lang="es-ES" dirty="0"/>
+              <a:t> </a:t>
+            </a:r>
+            <a:r>
+              <a:rPr lang="es-ES" dirty="0" err="1"/>
+              <a:t>for</a:t>
+            </a:r>
+            <a:r>
+              <a:rPr lang="es-ES" dirty="0"/>
+              <a:t> </a:t>
+            </a:r>
+            <a:r>
+              <a:rPr lang="es-ES" dirty="0" err="1"/>
+              <a:t>identity</a:t>
+            </a:r>
+            <a:r>
+              <a:rPr lang="es-ES" dirty="0"/>
+              <a:t> </a:t>
+            </a:r>
+            <a:r>
+              <a:rPr lang="es-ES" dirty="0" err="1"/>
+              <a:t>separation</a:t>
+            </a:r>
+            <a:endParaRPr lang="es-ES" dirty="0"/>
+          </a:p>
+          <a:p>
+            <a:r>
+              <a:rPr lang="es-ES" dirty="0"/>
+              <a:t>Simple KNN </a:t>
+            </a:r>
+            <a:r>
+              <a:rPr lang="es-ES" dirty="0" err="1"/>
+              <a:t>classifier</a:t>
+            </a:r>
+            <a:r>
+              <a:rPr lang="es-ES" dirty="0"/>
+              <a:t> (k=1) </a:t>
+            </a:r>
+            <a:r>
+              <a:rPr lang="es-ES" dirty="0" err="1"/>
+              <a:t>used</a:t>
+            </a:r>
+            <a:r>
+              <a:rPr lang="es-ES" dirty="0"/>
+              <a:t> </a:t>
+            </a:r>
+            <a:r>
+              <a:rPr lang="es-ES" dirty="0" err="1"/>
+              <a:t>on</a:t>
+            </a:r>
+            <a:r>
+              <a:rPr lang="es-ES" dirty="0"/>
+              <a:t> </a:t>
+            </a:r>
+            <a:r>
+              <a:rPr lang="es-ES" dirty="0" err="1"/>
+              <a:t>embeddings</a:t>
+            </a:r>
+            <a:r>
+              <a:rPr lang="es-ES" dirty="0"/>
+              <a:t> </a:t>
+            </a:r>
+            <a:r>
+              <a:rPr lang="es-ES" dirty="0" err="1"/>
+              <a:t>for</a:t>
+            </a:r>
+            <a:r>
+              <a:rPr lang="es-ES" dirty="0"/>
+              <a:t> final </a:t>
+            </a:r>
+            <a:r>
+              <a:rPr lang="es-ES" dirty="0" err="1"/>
+              <a:t>recognition</a:t>
+            </a:r>
+            <a:endParaRPr lang="es-ES" dirty="0"/>
+          </a:p>
+          <a:p>
+            <a:pPr lvl="1"/>
+            <a:r>
+              <a:rPr lang="es-ES" dirty="0" err="1"/>
+              <a:t>Embedding</a:t>
+            </a:r>
+            <a:r>
+              <a:rPr lang="es-ES" dirty="0"/>
+              <a:t>-to-</a:t>
+            </a:r>
+            <a:r>
+              <a:rPr lang="es-ES" dirty="0" err="1"/>
+              <a:t>embedding</a:t>
+            </a:r>
+            <a:r>
+              <a:rPr lang="es-ES" dirty="0"/>
+              <a:t> </a:t>
+            </a:r>
+            <a:r>
+              <a:rPr lang="es-ES" dirty="0" err="1"/>
+              <a:t>comparison</a:t>
+            </a:r>
+            <a:r>
+              <a:rPr lang="es-ES" dirty="0"/>
+              <a:t> (</a:t>
+            </a:r>
+            <a:r>
+              <a:rPr lang="es-ES" dirty="0" err="1"/>
+              <a:t>Euclidean</a:t>
+            </a:r>
+            <a:r>
+              <a:rPr lang="es-ES" dirty="0"/>
+              <a:t> </a:t>
+            </a:r>
+            <a:r>
+              <a:rPr lang="es-ES" dirty="0" err="1"/>
+              <a:t>distance</a:t>
+            </a:r>
+            <a:r>
+              <a:rPr lang="es-ES" dirty="0"/>
+              <a:t>)</a:t>
+            </a:r>
+          </a:p>
+          <a:p>
+            <a:r>
+              <a:rPr lang="en-US" b="1" dirty="0"/>
+              <a:t>No retraining needed</a:t>
+            </a:r>
+            <a:r>
+              <a:rPr lang="en-US" dirty="0"/>
+              <a:t>: Embeddings computed once → fast and memory-efficient</a:t>
+            </a:r>
+          </a:p>
+          <a:p>
+            <a:r>
+              <a:rPr lang="en-US" dirty="0"/>
+              <a:t>Results: Original dataset </a:t>
+            </a:r>
+            <a:r>
+              <a:rPr lang="en-US" b="1" dirty="0"/>
+              <a:t>88.18%</a:t>
+            </a:r>
+            <a:endParaRPr lang="es-ES" b="1" dirty="0"/>
+          </a:p>
+        </p:txBody>
+      </p:sp>
+      <p:pic>
+        <p:nvPicPr>
+          <p:cNvPr id="5" name="Picture 4">
+            <a:extLst>
+              <a:ext uri="{FF2B5EF4-FFF2-40B4-BE49-F238E27FC236}">
+                <a16:creationId xmlns:a16="http://schemas.microsoft.com/office/drawing/2014/main" id="{5CD61DA5-9966-6A91-F9E0-1787F812F09D}"/>
+              </a:ext>
+            </a:extLst>
+          </p:cNvPr>
+          <p:cNvPicPr>
+            <a:picLocks noChangeAspect="1"/>
+          </p:cNvPicPr>
+          <p:nvPr/>
+        </p:nvPicPr>
+        <p:blipFill rotWithShape="1">
+          <a:blip r:embed="rId2"/>
+          <a:srcRect l="13256" r="17671"/>
+          <a:stretch/>
+        </p:blipFill>
+        <p:spPr>
+          <a:xfrm>
+            <a:off x="7647710" y="2013414"/>
+            <a:ext cx="4544290" cy="3684268"/>
+          </a:xfrm>
+          <a:prstGeom prst="rect">
+            <a:avLst/>
+          </a:prstGeom>
+        </p:spPr>
+      </p:pic>
+      <p:sp>
+        <p:nvSpPr>
+          <p:cNvPr id="6" name="Rectangle 5">
+            <a:extLst>
+              <a:ext uri="{FF2B5EF4-FFF2-40B4-BE49-F238E27FC236}">
+                <a16:creationId xmlns:a16="http://schemas.microsoft.com/office/drawing/2014/main" id="{0388CF5E-F212-9990-3CCD-46D50631628D}"/>
+              </a:ext>
+            </a:extLst>
+          </p:cNvPr>
+          <p:cNvSpPr/>
+          <p:nvPr/>
+        </p:nvSpPr>
+        <p:spPr>
+          <a:xfrm>
+            <a:off x="7883236" y="2493818"/>
+            <a:ext cx="1302328" cy="360218"/>
+          </a:xfrm>
+          <a:prstGeom prst="rect">
+            <a:avLst/>
+          </a:prstGeom>
+          <a:noFill/>
+          <a:ln w="28575">
+            <a:solidFill>
+              <a:srgbClr val="00B050"/>
+            </a:solidFill>
+          </a:ln>
+        </p:spPr>
+        <p:style>
+          <a:lnRef idx="2">
+            <a:schemeClr val="accent1">
+              <a:shade val="15000"/>
+            </a:schemeClr>
+          </a:lnRef>
+          <a:fillRef idx="1">
+            <a:schemeClr val="accent1"/>
+          </a:fillRef>
+          <a:effectRef idx="0">
+            <a:schemeClr val="accent1"/>
+          </a:effectRef>
+          <a:fontRef idx="minor">
+            <a:schemeClr val="lt1"/>
+          </a:fontRef>
+        </p:style>
+        <p:txBody>
+          <a:bodyPr rtlCol="0" anchor="ctr"/>
+          <a:lstStyle/>
+          <a:p>
+            <a:pPr algn="ctr"/>
             <a:endParaRPr lang="es-ES"/>
           </a:p>
         </p:txBody>
@@ -4375,7 +7362,7 @@
     </p:spTree>
     <p:extLst>
       <p:ext uri="{BB962C8B-B14F-4D97-AF65-F5344CB8AC3E}">
-        <p14:creationId xmlns:p14="http://schemas.microsoft.com/office/powerpoint/2010/main" val="984394870"/>
+        <p14:creationId xmlns:p14="http://schemas.microsoft.com/office/powerpoint/2010/main" val="631473613"/>
       </p:ext>
     </p:extLst>
   </p:cSld>
@@ -4388,6 +7375,14 @@
 <file path=ppt/slides/slide13.xml><?xml version="1.0" encoding="utf-8"?>
 <p:sld xmlns:a="http://schemas.openxmlformats.org/drawingml/2006/main" xmlns:r="http://schemas.openxmlformats.org/officeDocument/2006/relationships" xmlns:p="http://schemas.openxmlformats.org/presentationml/2006/main">
   <p:cSld>
+    <p:bg>
+      <p:bgPr>
+        <a:solidFill>
+          <a:schemeClr val="bg1"/>
+        </a:solidFill>
+        <a:effectLst/>
+      </p:bgPr>
+    </p:bg>
     <p:spTree>
       <p:nvGrpSpPr>
         <p:cNvPr id="1" name=""/>
@@ -4402,12 +7397,265 @@
           <a:chExt cx="0" cy="0"/>
         </a:xfrm>
       </p:grpSpPr>
+      <p:sp useBgFill="1">
+        <p:nvSpPr>
+          <p:cNvPr id="12" name="Rectangle 11">
+            <a:extLst>
+              <a:ext uri="{FF2B5EF4-FFF2-40B4-BE49-F238E27FC236}">
+                <a16:creationId xmlns:a16="http://schemas.microsoft.com/office/drawing/2014/main" id="{C20CE451-818C-E63D-258B-234B6C543D34}"/>
+              </a:ext>
+              <a:ext uri="{C183D7F6-B498-43B3-948B-1728B52AA6E4}">
+                <adec:decorative xmlns:adec="http://schemas.microsoft.com/office/drawing/2017/decorative" val="1"/>
+              </a:ext>
+            </a:extLst>
+          </p:cNvPr>
+          <p:cNvSpPr>
+            <a:spLocks noGrp="1" noRot="1" noChangeAspect="1" noMove="1" noResize="1" noEditPoints="1" noAdjustHandles="1" noChangeArrowheads="1" noChangeShapeType="1" noTextEdit="1"/>
+          </p:cNvSpPr>
+          <p:nvPr>
+            <p:extLst>
+              <p:ext uri="{386F3935-93C4-4BCD-93E2-E3B085C9AB24}">
+                <p16:designElem xmlns:p16="http://schemas.microsoft.com/office/powerpoint/2015/main" val="1"/>
+              </p:ext>
+            </p:extLst>
+          </p:nvPr>
+        </p:nvSpPr>
+        <p:spPr>
+          <a:xfrm>
+            <a:off x="0" y="0"/>
+            <a:ext cx="12192000" cy="6858000"/>
+          </a:xfrm>
+          <a:prstGeom prst="rect">
+            <a:avLst/>
+          </a:prstGeom>
+          <a:ln w="12700" cap="flat" cmpd="sng" algn="ctr">
+            <a:noFill/>
+            <a:prstDash val="solid"/>
+            <a:miter lim="800000"/>
+          </a:ln>
+          <a:effectLst/>
+          <a:extLst>
+            <a:ext uri="{91240B29-F687-4F45-9708-019B960494DF}">
+              <a14:hiddenLine xmlns:a14="http://schemas.microsoft.com/office/drawing/2010/main" w="12700" cap="flat" cmpd="sng" algn="ctr">
+                <a:solidFill>
+                  <a:schemeClr val="accent1">
+                    <a:shade val="15000"/>
+                  </a:schemeClr>
+                </a:solidFill>
+                <a:prstDash val="solid"/>
+                <a:miter lim="800000"/>
+              </a14:hiddenLine>
+            </a:ext>
+          </a:extLst>
+        </p:spPr>
+        <p:style>
+          <a:lnRef idx="2">
+            <a:schemeClr val="accent1">
+              <a:shade val="15000"/>
+            </a:schemeClr>
+          </a:lnRef>
+          <a:fillRef idx="1">
+            <a:schemeClr val="accent1"/>
+          </a:fillRef>
+          <a:effectRef idx="0">
+            <a:schemeClr val="accent1"/>
+          </a:effectRef>
+          <a:fontRef idx="minor">
+            <a:schemeClr val="lt1"/>
+          </a:fontRef>
+        </p:style>
+        <p:txBody>
+          <a:bodyPr rtlCol="0" anchor="ctr"/>
+          <a:lstStyle/>
+          <a:p>
+            <a:pPr algn="ctr"/>
+            <a:endParaRPr lang="en-US"/>
+          </a:p>
+        </p:txBody>
+      </p:sp>
+      <p:pic>
+        <p:nvPicPr>
+          <p:cNvPr id="7" name="Content Placeholder 6">
+            <a:extLst>
+              <a:ext uri="{FF2B5EF4-FFF2-40B4-BE49-F238E27FC236}">
+                <a16:creationId xmlns:a16="http://schemas.microsoft.com/office/drawing/2014/main" id="{F8A96A85-122B-EE62-619B-1B8BA530AA98}"/>
+              </a:ext>
+            </a:extLst>
+          </p:cNvPr>
+          <p:cNvPicPr>
+            <a:picLocks noGrp="1" noChangeAspect="1"/>
+          </p:cNvPicPr>
+          <p:nvPr>
+            <p:ph idx="1"/>
+          </p:nvPr>
+        </p:nvPicPr>
+        <p:blipFill>
+          <a:blip r:embed="rId2"/>
+          <a:stretch>
+            <a:fillRect/>
+          </a:stretch>
+        </p:blipFill>
+        <p:spPr>
+          <a:xfrm>
+            <a:off x="1007363" y="2769265"/>
+            <a:ext cx="4056335" cy="3674153"/>
+          </a:xfrm>
+        </p:spPr>
+      </p:pic>
+      <p:pic>
+        <p:nvPicPr>
+          <p:cNvPr id="5" name="Content Placeholder 4" descr="A screenshot of a computer&#10;&#10;Description automatically generated">
+            <a:extLst>
+              <a:ext uri="{FF2B5EF4-FFF2-40B4-BE49-F238E27FC236}">
+                <a16:creationId xmlns:a16="http://schemas.microsoft.com/office/drawing/2014/main" id="{CFD2E0B5-B74F-284F-A808-7722790A54A2}"/>
+              </a:ext>
+            </a:extLst>
+          </p:cNvPr>
+          <p:cNvPicPr>
+            <a:picLocks noChangeAspect="1"/>
+          </p:cNvPicPr>
+          <p:nvPr/>
+        </p:nvPicPr>
+        <p:blipFill rotWithShape="1">
+          <a:blip r:embed="rId3">
+            <a:extLst>
+              <a:ext uri="{28A0092B-C50C-407E-A947-70E740481C1C}">
+                <a14:useLocalDpi xmlns:a14="http://schemas.microsoft.com/office/drawing/2010/main" val="0"/>
+              </a:ext>
+            </a:extLst>
+          </a:blip>
+          <a:srcRect l="-153" r="-1"/>
+          <a:stretch/>
+        </p:blipFill>
+        <p:spPr>
+          <a:xfrm>
+            <a:off x="5444836" y="-1"/>
+            <a:ext cx="6747164" cy="6858001"/>
+          </a:xfrm>
+          <a:prstGeom prst="rect">
+            <a:avLst/>
+          </a:prstGeom>
+        </p:spPr>
+      </p:pic>
+      <p:sp>
+        <p:nvSpPr>
+          <p:cNvPr id="10" name="TextBox 9">
+            <a:extLst>
+              <a:ext uri="{FF2B5EF4-FFF2-40B4-BE49-F238E27FC236}">
+                <a16:creationId xmlns:a16="http://schemas.microsoft.com/office/drawing/2014/main" id="{1DB9B3BD-91C7-3084-7AD6-319CFCC8A5E5}"/>
+              </a:ext>
+            </a:extLst>
+          </p:cNvPr>
+          <p:cNvSpPr txBox="1"/>
+          <p:nvPr/>
+        </p:nvSpPr>
+        <p:spPr>
+          <a:xfrm>
+            <a:off x="457200" y="1337680"/>
+            <a:ext cx="5361432" cy="1200329"/>
+          </a:xfrm>
+          <a:prstGeom prst="rect">
+            <a:avLst/>
+          </a:prstGeom>
+          <a:noFill/>
+        </p:spPr>
+        <p:txBody>
+          <a:bodyPr wrap="square" rtlCol="0">
+            <a:spAutoFit/>
+          </a:bodyPr>
+          <a:lstStyle/>
+          <a:p>
+            <a:pPr marL="285750" indent="-285750">
+              <a:buFont typeface="Arial" panose="020B0604020202020204" pitchFamily="34" charset="0"/>
+              <a:buChar char="•"/>
+            </a:pPr>
+            <a:r>
+              <a:rPr lang="es-ES" dirty="0" err="1"/>
+              <a:t>Noticeable</a:t>
+            </a:r>
+            <a:r>
+              <a:rPr lang="es-ES" dirty="0"/>
+              <a:t> F1 scores </a:t>
+            </a:r>
+            <a:r>
+              <a:rPr lang="es-ES" dirty="0" err="1"/>
+              <a:t>for</a:t>
+            </a:r>
+            <a:r>
+              <a:rPr lang="es-ES" dirty="0"/>
+              <a:t> Johnny Deep, Alvaro or </a:t>
+            </a:r>
+            <a:r>
+              <a:rPr lang="es-ES" dirty="0" err="1"/>
+              <a:t>Scarlet</a:t>
+            </a:r>
+            <a:r>
+              <a:rPr lang="es-ES" dirty="0"/>
+              <a:t> Johansson </a:t>
+            </a:r>
+            <a:r>
+              <a:rPr lang="es-ES" dirty="0" err="1"/>
+              <a:t>for</a:t>
+            </a:r>
+            <a:r>
+              <a:rPr lang="es-ES" dirty="0"/>
+              <a:t> a </a:t>
+            </a:r>
+            <a:r>
+              <a:rPr lang="es-ES" dirty="0" err="1"/>
+              <a:t>near</a:t>
+            </a:r>
+            <a:r>
+              <a:rPr lang="es-ES" dirty="0"/>
+              <a:t> 100% score.</a:t>
+            </a:r>
+          </a:p>
+          <a:p>
+            <a:pPr marL="285750" indent="-285750">
+              <a:buFont typeface="Arial" panose="020B0604020202020204" pitchFamily="34" charset="0"/>
+              <a:buChar char="•"/>
+            </a:pPr>
+            <a:r>
+              <a:rPr lang="es-ES" dirty="0" err="1"/>
+              <a:t>Worst</a:t>
+            </a:r>
+            <a:r>
+              <a:rPr lang="es-ES" dirty="0"/>
+              <a:t> </a:t>
+            </a:r>
+            <a:r>
+              <a:rPr lang="es-ES" dirty="0" err="1"/>
+              <a:t>performers</a:t>
+            </a:r>
+            <a:r>
+              <a:rPr lang="es-ES" dirty="0"/>
+              <a:t> were Kate </a:t>
+            </a:r>
+            <a:r>
+              <a:rPr lang="es-ES" dirty="0" err="1"/>
+              <a:t>Winslet</a:t>
+            </a:r>
+            <a:r>
+              <a:rPr lang="es-ES" dirty="0"/>
+              <a:t> and </a:t>
+            </a:r>
+            <a:r>
+              <a:rPr lang="es-ES" dirty="0" err="1"/>
+              <a:t>Wills</a:t>
+            </a:r>
+            <a:r>
+              <a:rPr lang="es-ES" dirty="0"/>
+              <a:t> Smith</a:t>
+            </a:r>
+          </a:p>
+        </p:txBody>
+      </p:sp>
       <p:sp>
         <p:nvSpPr>
           <p:cNvPr id="2" name="Title 1">
             <a:extLst>
               <a:ext uri="{FF2B5EF4-FFF2-40B4-BE49-F238E27FC236}">
-                <a16:creationId xmlns:a16="http://schemas.microsoft.com/office/drawing/2014/main" id="{FF365628-049E-9992-49EF-EEE27A6201B2}"/>
+                <a16:creationId xmlns:a16="http://schemas.microsoft.com/office/drawing/2014/main" id="{F940F301-08A0-A00B-AC7C-1C8518D39654}"/>
               </a:ext>
             </a:extLst>
           </p:cNvPr>
@@ -4418,56 +7666,89 @@
             <p:ph type="title"/>
           </p:nvPr>
         </p:nvSpPr>
-        <p:spPr/>
+        <p:spPr>
+          <a:xfrm>
+            <a:off x="612647" y="346349"/>
+            <a:ext cx="7755498" cy="760075"/>
+          </a:xfrm>
+        </p:spPr>
         <p:txBody>
-          <a:bodyPr/>
+          <a:bodyPr anchor="b">
+            <a:normAutofit/>
+          </a:bodyPr>
           <a:lstStyle/>
           <a:p>
             <a:r>
               <a:rPr lang="es-ES" dirty="0" err="1"/>
-              <a:t>Evaluation</a:t>
-            </a:r>
-            <a:r>
-              <a:rPr lang="es-ES" dirty="0"/>
-              <a:t> - </a:t>
-            </a:r>
-            <a:r>
-              <a:rPr lang="es-ES" dirty="0" err="1"/>
-              <a:t>Classification</a:t>
-            </a:r>
-            <a:endParaRPr lang="es-ES" dirty="0"/>
+              <a:t>FaceNet</a:t>
+            </a:r>
+            <a:r>
+              <a:rPr lang="es-ES" dirty="0"/>
+              <a:t> </a:t>
+            </a:r>
+            <a:r>
+              <a:rPr lang="es-ES" dirty="0" err="1"/>
+              <a:t>Confusion</a:t>
+            </a:r>
+            <a:r>
+              <a:rPr lang="es-ES" dirty="0"/>
+              <a:t> Matrix</a:t>
+            </a:r>
           </a:p>
         </p:txBody>
       </p:sp>
       <p:sp>
         <p:nvSpPr>
-          <p:cNvPr id="3" name="Content Placeholder 2">
-            <a:extLst>
-              <a:ext uri="{FF2B5EF4-FFF2-40B4-BE49-F238E27FC236}">
-                <a16:creationId xmlns:a16="http://schemas.microsoft.com/office/drawing/2014/main" id="{65518192-0545-B17B-4EA3-4AD08303C051}"/>
-              </a:ext>
-            </a:extLst>
-          </p:cNvPr>
-          <p:cNvSpPr>
-            <a:spLocks noGrp="1"/>
-          </p:cNvSpPr>
-          <p:nvPr>
-            <p:ph idx="1"/>
-          </p:nvPr>
+          <p:cNvPr id="11" name="TextBox 10">
+            <a:extLst>
+              <a:ext uri="{FF2B5EF4-FFF2-40B4-BE49-F238E27FC236}">
+                <a16:creationId xmlns:a16="http://schemas.microsoft.com/office/drawing/2014/main" id="{31CAA0D0-0058-458B-6275-70DE33F93685}"/>
+              </a:ext>
+            </a:extLst>
+          </p:cNvPr>
+          <p:cNvSpPr txBox="1"/>
+          <p:nvPr/>
         </p:nvSpPr>
-        <p:spPr/>
+        <p:spPr>
+          <a:xfrm>
+            <a:off x="1175198" y="6443418"/>
+            <a:ext cx="3727302" cy="276999"/>
+          </a:xfrm>
+          <a:prstGeom prst="rect">
+            <a:avLst/>
+          </a:prstGeom>
+          <a:noFill/>
+        </p:spPr>
         <p:txBody>
-          <a:bodyPr/>
+          <a:bodyPr wrap="none" rtlCol="0">
+            <a:spAutoFit/>
+          </a:bodyPr>
           <a:lstStyle/>
           <a:p>
-            <a:endParaRPr lang="es-ES"/>
+            <a:pPr algn="ctr"/>
+            <a:r>
+              <a:rPr lang="es-ES" sz="1200" dirty="0" err="1"/>
+              <a:t>Facenet</a:t>
+            </a:r>
+            <a:r>
+              <a:rPr lang="es-ES" sz="1200" dirty="0"/>
+              <a:t> </a:t>
+            </a:r>
+            <a:r>
+              <a:rPr lang="es-ES" sz="1200" dirty="0" err="1"/>
+              <a:t>Evaluation</a:t>
+            </a:r>
+            <a:r>
+              <a:rPr lang="es-ES" sz="1200" dirty="0"/>
+              <a:t> scores per class (actor name)</a:t>
+            </a:r>
           </a:p>
         </p:txBody>
       </p:sp>
     </p:spTree>
     <p:extLst>
       <p:ext uri="{BB962C8B-B14F-4D97-AF65-F5344CB8AC3E}">
-        <p14:creationId xmlns:p14="http://schemas.microsoft.com/office/powerpoint/2010/main" val="2522694870"/>
+        <p14:creationId xmlns:p14="http://schemas.microsoft.com/office/powerpoint/2010/main" val="2743383934"/>
       </p:ext>
     </p:extLst>
   </p:cSld>
@@ -4499,7 +7780,7 @@
           <p:cNvPr id="2" name="Title 1">
             <a:extLst>
               <a:ext uri="{FF2B5EF4-FFF2-40B4-BE49-F238E27FC236}">
-                <a16:creationId xmlns:a16="http://schemas.microsoft.com/office/drawing/2014/main" id="{FF365628-049E-9992-49EF-EEE27A6201B2}"/>
+                <a16:creationId xmlns:a16="http://schemas.microsoft.com/office/drawing/2014/main" id="{ABAA091E-A79B-A64F-5B66-50BDC9382FAC}"/>
               </a:ext>
             </a:extLst>
           </p:cNvPr>
@@ -4517,7 +7798,23 @@
           <a:p>
             <a:r>
               <a:rPr lang="es-ES" dirty="0" err="1"/>
-              <a:t>Evaluation</a:t>
+              <a:t>Models</a:t>
+            </a:r>
+            <a:r>
+              <a:rPr lang="es-ES" dirty="0"/>
+              <a:t>: </a:t>
+            </a:r>
+            <a:r>
+              <a:rPr lang="es-ES" dirty="0" err="1"/>
+              <a:t>Embedding</a:t>
+            </a:r>
+            <a:r>
+              <a:rPr lang="es-ES" dirty="0"/>
+              <a:t> </a:t>
+            </a:r>
+            <a:r>
+              <a:rPr lang="es-ES" dirty="0" err="1"/>
+              <a:t>Based</a:t>
             </a:r>
             <a:r>
               <a:rPr lang="es-ES" dirty="0"/>
@@ -4525,12 +7822,9 @@
             </a:r>
             <a:r>
               <a:rPr lang="es-ES" dirty="0" err="1"/>
-              <a:t>Validation</a:t>
-            </a:r>
-            <a:r>
-              <a:rPr lang="es-ES" dirty="0"/>
-              <a:t> 1:1</a:t>
-            </a:r>
+              <a:t>ArcFace</a:t>
+            </a:r>
+            <a:endParaRPr lang="es-ES" dirty="0"/>
           </a:p>
         </p:txBody>
       </p:sp>
@@ -4539,7 +7833,7 @@
           <p:cNvPr id="3" name="Content Placeholder 2">
             <a:extLst>
               <a:ext uri="{FF2B5EF4-FFF2-40B4-BE49-F238E27FC236}">
-                <a16:creationId xmlns:a16="http://schemas.microsoft.com/office/drawing/2014/main" id="{65518192-0545-B17B-4EA3-4AD08303C051}"/>
+                <a16:creationId xmlns:a16="http://schemas.microsoft.com/office/drawing/2014/main" id="{E60DA390-2E8B-082C-7D4C-CC5FE49679EE}"/>
               </a:ext>
             </a:extLst>
           </p:cNvPr>
@@ -4550,11 +7844,1584 @@
             <p:ph idx="1"/>
           </p:nvPr>
         </p:nvSpPr>
+        <p:spPr>
+          <a:xfrm>
+            <a:off x="612648" y="1715531"/>
+            <a:ext cx="8503644" cy="4823813"/>
+          </a:xfrm>
+        </p:spPr>
+        <p:txBody>
+          <a:bodyPr>
+            <a:normAutofit/>
+          </a:bodyPr>
+          <a:lstStyle/>
+          <a:p>
+            <a:r>
+              <a:rPr lang="en-US" dirty="0"/>
+              <a:t>Uses </a:t>
+            </a:r>
+            <a:r>
+              <a:rPr lang="en-US" dirty="0" err="1"/>
+              <a:t>ArcFace</a:t>
+            </a:r>
+            <a:r>
+              <a:rPr lang="en-US" dirty="0"/>
+              <a:t> (</a:t>
+            </a:r>
+            <a:r>
+              <a:rPr lang="en-US" dirty="0" err="1"/>
+              <a:t>buffalo_l</a:t>
+            </a:r>
+            <a:r>
+              <a:rPr lang="en-US" dirty="0"/>
+              <a:t>) from </a:t>
+            </a:r>
+            <a:r>
+              <a:rPr lang="en-US" dirty="0" err="1"/>
+              <a:t>InsightFace</a:t>
+            </a:r>
+            <a:r>
+              <a:rPr lang="en-US" dirty="0"/>
+              <a:t> with </a:t>
+            </a:r>
+            <a:r>
+              <a:rPr lang="en-US" dirty="0" err="1"/>
+              <a:t>RetinaFace</a:t>
+            </a:r>
+            <a:r>
+              <a:rPr lang="en-US" dirty="0"/>
+              <a:t> detector. Embeddings are 512-dimensional and extracted per aligned face.</a:t>
+            </a:r>
+          </a:p>
+          <a:p>
+            <a:r>
+              <a:rPr lang="en-US" dirty="0"/>
+              <a:t>Images are preprocessed (RGB, resized to 112×112).Embeddings are generated using the native </a:t>
+            </a:r>
+            <a:r>
+              <a:rPr lang="en-US" dirty="0" err="1"/>
+              <a:t>ArcFace</a:t>
+            </a:r>
+            <a:r>
+              <a:rPr lang="en-US" dirty="0"/>
+              <a:t> model.</a:t>
+            </a:r>
+          </a:p>
+          <a:p>
+            <a:r>
+              <a:rPr lang="en-US" dirty="0"/>
+              <a:t>Classification is done using 1-NN with Euclidean </a:t>
+            </a:r>
+            <a:r>
+              <a:rPr lang="en-US" dirty="0" err="1"/>
+              <a:t>distance.No</a:t>
+            </a:r>
+            <a:r>
+              <a:rPr lang="en-US" dirty="0"/>
+              <a:t> model training is needed — it's a retrieval-based approach.</a:t>
+            </a:r>
+          </a:p>
+          <a:p>
+            <a:r>
+              <a:rPr lang="en-US" dirty="0"/>
+              <a:t>Embeddings from training + validation form the reference </a:t>
+            </a:r>
+            <a:r>
+              <a:rPr lang="en-US" dirty="0" err="1"/>
+              <a:t>set.Test</a:t>
+            </a:r>
+            <a:r>
+              <a:rPr lang="en-US" dirty="0"/>
+              <a:t> samples are matched against this using direct comparison.</a:t>
+            </a:r>
+          </a:p>
+          <a:p>
+            <a:r>
+              <a:rPr lang="en-US" dirty="0"/>
+              <a:t>If no face is detected, a zero-vector is assigned. Ensures robustness and avoids pipeline failure.</a:t>
+            </a:r>
+          </a:p>
+          <a:p>
+            <a:r>
+              <a:rPr lang="en-US" dirty="0"/>
+              <a:t>Results: Original dataset </a:t>
+            </a:r>
+            <a:r>
+              <a:rPr lang="en-US" b="1" dirty="0"/>
+              <a:t>91.81%</a:t>
+            </a:r>
+            <a:endParaRPr lang="es-ES" b="1" dirty="0"/>
+          </a:p>
+          <a:p>
+            <a:endParaRPr lang="es-ES" dirty="0"/>
+          </a:p>
+        </p:txBody>
+      </p:sp>
+      <p:pic>
+        <p:nvPicPr>
+          <p:cNvPr id="6" name="Picture 5" descr="A group of people standing on top of a planet&#10;&#10;Description automatically generated">
+            <a:extLst>
+              <a:ext uri="{FF2B5EF4-FFF2-40B4-BE49-F238E27FC236}">
+                <a16:creationId xmlns:a16="http://schemas.microsoft.com/office/drawing/2014/main" id="{6F7F44FC-4E03-0ABF-B2D2-B8357013F18A}"/>
+              </a:ext>
+            </a:extLst>
+          </p:cNvPr>
+          <p:cNvPicPr>
+            <a:picLocks noChangeAspect="1"/>
+          </p:cNvPicPr>
+          <p:nvPr/>
+        </p:nvPicPr>
+        <p:blipFill rotWithShape="1">
+          <a:blip r:embed="rId2">
+            <a:extLst>
+              <a:ext uri="{28A0092B-C50C-407E-A947-70E740481C1C}">
+                <a14:useLocalDpi xmlns:a14="http://schemas.microsoft.com/office/drawing/2010/main" val="0"/>
+              </a:ext>
+            </a:extLst>
+          </a:blip>
+          <a:srcRect t="17760" r="50000"/>
+          <a:stretch/>
+        </p:blipFill>
+        <p:spPr>
+          <a:xfrm>
+            <a:off x="8414905" y="1649615"/>
+            <a:ext cx="3777095" cy="3558769"/>
+          </a:xfrm>
+          <a:prstGeom prst="rect">
+            <a:avLst/>
+          </a:prstGeom>
+        </p:spPr>
+      </p:pic>
+    </p:spTree>
+    <p:extLst>
+      <p:ext uri="{BB962C8B-B14F-4D97-AF65-F5344CB8AC3E}">
+        <p14:creationId xmlns:p14="http://schemas.microsoft.com/office/powerpoint/2010/main" val="984394870"/>
+      </p:ext>
+    </p:extLst>
+  </p:cSld>
+  <p:clrMapOvr>
+    <a:masterClrMapping/>
+  </p:clrMapOvr>
+</p:sld>
+</file>
+
+<file path=ppt/slides/slide15.xml><?xml version="1.0" encoding="utf-8"?>
+<p:sld xmlns:a="http://schemas.openxmlformats.org/drawingml/2006/main" xmlns:r="http://schemas.openxmlformats.org/officeDocument/2006/relationships" xmlns:p="http://schemas.openxmlformats.org/presentationml/2006/main">
+  <p:cSld>
+    <p:spTree>
+      <p:nvGrpSpPr>
+        <p:cNvPr id="1" name=""/>
+        <p:cNvGrpSpPr/>
+        <p:nvPr/>
+      </p:nvGrpSpPr>
+      <p:grpSpPr>
+        <a:xfrm>
+          <a:off x="0" y="0"/>
+          <a:ext cx="0" cy="0"/>
+          <a:chOff x="0" y="0"/>
+          <a:chExt cx="0" cy="0"/>
+        </a:xfrm>
+      </p:grpSpPr>
+      <p:pic>
+        <p:nvPicPr>
+          <p:cNvPr id="9" name="Content Placeholder 8" descr="A graph with numbers and letters&#10;&#10;Description automatically generated with medium confidence">
+            <a:extLst>
+              <a:ext uri="{FF2B5EF4-FFF2-40B4-BE49-F238E27FC236}">
+                <a16:creationId xmlns:a16="http://schemas.microsoft.com/office/drawing/2014/main" id="{D7290B01-5FF6-20C3-262E-0FC326354190}"/>
+              </a:ext>
+            </a:extLst>
+          </p:cNvPr>
+          <p:cNvPicPr>
+            <a:picLocks noGrp="1" noChangeAspect="1"/>
+          </p:cNvPicPr>
+          <p:nvPr>
+            <p:ph idx="1"/>
+          </p:nvPr>
+        </p:nvPicPr>
+        <p:blipFill>
+          <a:blip r:embed="rId2">
+            <a:extLst>
+              <a:ext uri="{28A0092B-C50C-407E-A947-70E740481C1C}">
+                <a14:useLocalDpi xmlns:a14="http://schemas.microsoft.com/office/drawing/2010/main" val="0"/>
+              </a:ext>
+            </a:extLst>
+          </a:blip>
+          <a:stretch>
+            <a:fillRect/>
+          </a:stretch>
+        </p:blipFill>
+        <p:spPr>
+          <a:xfrm>
+            <a:off x="5319392" y="0"/>
+            <a:ext cx="6872608" cy="6858000"/>
+          </a:xfrm>
+        </p:spPr>
+      </p:pic>
+      <p:pic>
+        <p:nvPicPr>
+          <p:cNvPr id="5" name="Picture 4">
+            <a:extLst>
+              <a:ext uri="{FF2B5EF4-FFF2-40B4-BE49-F238E27FC236}">
+                <a16:creationId xmlns:a16="http://schemas.microsoft.com/office/drawing/2014/main" id="{015A7E74-795E-0269-419B-267B25B05909}"/>
+              </a:ext>
+            </a:extLst>
+          </p:cNvPr>
+          <p:cNvPicPr>
+            <a:picLocks noChangeAspect="1"/>
+          </p:cNvPicPr>
+          <p:nvPr/>
+        </p:nvPicPr>
+        <p:blipFill>
+          <a:blip r:embed="rId3"/>
+          <a:stretch>
+            <a:fillRect/>
+          </a:stretch>
+        </p:blipFill>
+        <p:spPr>
+          <a:xfrm>
+            <a:off x="1060535" y="2775283"/>
+            <a:ext cx="3962188" cy="3696901"/>
+          </a:xfrm>
+          <a:prstGeom prst="rect">
+            <a:avLst/>
+          </a:prstGeom>
+        </p:spPr>
+      </p:pic>
+      <p:sp>
+        <p:nvSpPr>
+          <p:cNvPr id="2" name="Title 1">
+            <a:extLst>
+              <a:ext uri="{FF2B5EF4-FFF2-40B4-BE49-F238E27FC236}">
+                <a16:creationId xmlns:a16="http://schemas.microsoft.com/office/drawing/2014/main" id="{ACD54872-147D-6054-11F5-9986B6DBE3C5}"/>
+              </a:ext>
+            </a:extLst>
+          </p:cNvPr>
+          <p:cNvSpPr>
+            <a:spLocks noGrp="1"/>
+          </p:cNvSpPr>
+          <p:nvPr>
+            <p:ph type="title"/>
+          </p:nvPr>
+        </p:nvSpPr>
         <p:spPr/>
         <p:txBody>
           <a:bodyPr/>
           <a:lstStyle/>
           <a:p>
+            <a:r>
+              <a:rPr lang="es-ES" dirty="0" err="1"/>
+              <a:t>ArcFace</a:t>
+            </a:r>
+            <a:r>
+              <a:rPr lang="es-ES" dirty="0"/>
+              <a:t> </a:t>
+            </a:r>
+            <a:r>
+              <a:rPr lang="es-ES" dirty="0" err="1"/>
+              <a:t>Confusion</a:t>
+            </a:r>
+            <a:r>
+              <a:rPr lang="es-ES" dirty="0"/>
+              <a:t> Matrix</a:t>
+            </a:r>
+          </a:p>
+        </p:txBody>
+      </p:sp>
+      <p:sp>
+        <p:nvSpPr>
+          <p:cNvPr id="10" name="TextBox 9">
+            <a:extLst>
+              <a:ext uri="{FF2B5EF4-FFF2-40B4-BE49-F238E27FC236}">
+                <a16:creationId xmlns:a16="http://schemas.microsoft.com/office/drawing/2014/main" id="{D6E9C06A-B626-7E83-3E7B-23ACFE6B27DC}"/>
+              </a:ext>
+            </a:extLst>
+          </p:cNvPr>
+          <p:cNvSpPr txBox="1"/>
+          <p:nvPr/>
+        </p:nvSpPr>
+        <p:spPr>
+          <a:xfrm>
+            <a:off x="1164779" y="6443418"/>
+            <a:ext cx="3748142" cy="276999"/>
+          </a:xfrm>
+          <a:prstGeom prst="rect">
+            <a:avLst/>
+          </a:prstGeom>
+          <a:noFill/>
+        </p:spPr>
+        <p:txBody>
+          <a:bodyPr wrap="none" rtlCol="0">
+            <a:spAutoFit/>
+          </a:bodyPr>
+          <a:lstStyle/>
+          <a:p>
+            <a:pPr algn="ctr"/>
+            <a:r>
+              <a:rPr lang="es-ES" sz="1200" dirty="0" err="1"/>
+              <a:t>ArcFace</a:t>
+            </a:r>
+            <a:r>
+              <a:rPr lang="es-ES" sz="1200" dirty="0"/>
+              <a:t> </a:t>
+            </a:r>
+            <a:r>
+              <a:rPr lang="es-ES" sz="1200" dirty="0" err="1"/>
+              <a:t>Evaluation</a:t>
+            </a:r>
+            <a:r>
+              <a:rPr lang="es-ES" sz="1200" dirty="0"/>
+              <a:t> scores per class (actor name)</a:t>
+            </a:r>
+          </a:p>
+        </p:txBody>
+      </p:sp>
+      <p:sp>
+        <p:nvSpPr>
+          <p:cNvPr id="11" name="TextBox 10">
+            <a:extLst>
+              <a:ext uri="{FF2B5EF4-FFF2-40B4-BE49-F238E27FC236}">
+                <a16:creationId xmlns:a16="http://schemas.microsoft.com/office/drawing/2014/main" id="{B41B0D44-A7E0-5FA0-A4C6-9DCD6E951AFC}"/>
+              </a:ext>
+            </a:extLst>
+          </p:cNvPr>
+          <p:cNvSpPr txBox="1"/>
+          <p:nvPr/>
+        </p:nvSpPr>
+        <p:spPr>
+          <a:xfrm>
+            <a:off x="612648" y="1163782"/>
+            <a:ext cx="4873752" cy="1323439"/>
+          </a:xfrm>
+          <a:prstGeom prst="rect">
+            <a:avLst/>
+          </a:prstGeom>
+          <a:noFill/>
+        </p:spPr>
+        <p:txBody>
+          <a:bodyPr wrap="square" rtlCol="0">
+            <a:spAutoFit/>
+          </a:bodyPr>
+          <a:lstStyle/>
+          <a:p>
+            <a:pPr marL="285750" indent="-285750">
+              <a:buFont typeface="Arial" panose="020B0604020202020204" pitchFamily="34" charset="0"/>
+              <a:buChar char="•"/>
+            </a:pPr>
+            <a:r>
+              <a:rPr lang="es-ES" sz="1600" dirty="0" err="1"/>
+              <a:t>Precision</a:t>
+            </a:r>
+            <a:r>
+              <a:rPr lang="es-ES" sz="1600" dirty="0"/>
+              <a:t> </a:t>
+            </a:r>
+            <a:r>
+              <a:rPr lang="es-ES" sz="1600" dirty="0" err="1"/>
+              <a:t>noticeably</a:t>
+            </a:r>
+            <a:r>
+              <a:rPr lang="es-ES" sz="1600" dirty="0"/>
+              <a:t> better </a:t>
+            </a:r>
+            <a:r>
+              <a:rPr lang="es-ES" sz="1600" dirty="0" err="1"/>
+              <a:t>compared</a:t>
+            </a:r>
+            <a:r>
+              <a:rPr lang="es-ES" sz="1600" dirty="0"/>
+              <a:t> to </a:t>
+            </a:r>
+            <a:r>
+              <a:rPr lang="es-ES" sz="1600" dirty="0" err="1"/>
+              <a:t>FaceNet</a:t>
+            </a:r>
+            <a:r>
+              <a:rPr lang="es-ES" sz="1600" dirty="0"/>
+              <a:t>, </a:t>
+            </a:r>
+            <a:r>
+              <a:rPr lang="es-ES" sz="1600" dirty="0" err="1"/>
+              <a:t>outlier</a:t>
+            </a:r>
+            <a:r>
+              <a:rPr lang="es-ES" sz="1600" dirty="0"/>
+              <a:t> Denzel Washington.</a:t>
+            </a:r>
+          </a:p>
+          <a:p>
+            <a:pPr marL="285750" indent="-285750">
+              <a:buFont typeface="Arial" panose="020B0604020202020204" pitchFamily="34" charset="0"/>
+              <a:buChar char="•"/>
+            </a:pPr>
+            <a:r>
+              <a:rPr lang="es-ES" sz="1600" dirty="0" err="1"/>
+              <a:t>Several</a:t>
+            </a:r>
+            <a:r>
+              <a:rPr lang="es-ES" sz="1600" dirty="0"/>
+              <a:t> </a:t>
+            </a:r>
+            <a:r>
+              <a:rPr lang="es-ES" sz="1600" dirty="0" err="1"/>
+              <a:t>identities</a:t>
+            </a:r>
+            <a:r>
+              <a:rPr lang="es-ES" sz="1600" dirty="0"/>
+              <a:t> </a:t>
+            </a:r>
+            <a:r>
+              <a:rPr lang="es-ES" sz="1600" dirty="0" err="1"/>
+              <a:t>achieve</a:t>
+            </a:r>
+            <a:r>
+              <a:rPr lang="es-ES" sz="1600" dirty="0"/>
+              <a:t> </a:t>
+            </a:r>
+            <a:r>
+              <a:rPr lang="es-ES" sz="1600" dirty="0" err="1"/>
+              <a:t>perfect</a:t>
+            </a:r>
+            <a:r>
+              <a:rPr lang="es-ES" sz="1600" dirty="0"/>
+              <a:t> </a:t>
+            </a:r>
+            <a:r>
+              <a:rPr lang="es-ES" sz="1600" dirty="0" err="1"/>
+              <a:t>precision</a:t>
+            </a:r>
+            <a:r>
+              <a:rPr lang="es-ES" sz="1600" dirty="0"/>
+              <a:t> and </a:t>
+            </a:r>
+            <a:r>
+              <a:rPr lang="es-ES" sz="1600" dirty="0" err="1"/>
+              <a:t>recall</a:t>
+            </a:r>
+            <a:endParaRPr lang="es-ES" sz="1600" dirty="0"/>
+          </a:p>
+          <a:p>
+            <a:pPr marL="285750" indent="-285750">
+              <a:buFont typeface="Arial" panose="020B0604020202020204" pitchFamily="34" charset="0"/>
+              <a:buChar char="•"/>
+            </a:pPr>
+            <a:r>
+              <a:rPr lang="en-US" sz="1600" dirty="0"/>
+              <a:t>Fast, accurate, and training-free approach</a:t>
+            </a:r>
+            <a:endParaRPr lang="es-ES" sz="1600" dirty="0"/>
+          </a:p>
+        </p:txBody>
+      </p:sp>
+    </p:spTree>
+    <p:extLst>
+      <p:ext uri="{BB962C8B-B14F-4D97-AF65-F5344CB8AC3E}">
+        <p14:creationId xmlns:p14="http://schemas.microsoft.com/office/powerpoint/2010/main" val="1022207080"/>
+      </p:ext>
+    </p:extLst>
+  </p:cSld>
+  <p:clrMapOvr>
+    <a:masterClrMapping/>
+  </p:clrMapOvr>
+</p:sld>
+</file>
+
+<file path=ppt/slides/slide16.xml><?xml version="1.0" encoding="utf-8"?>
+<p:sld xmlns:a="http://schemas.openxmlformats.org/drawingml/2006/main" xmlns:r="http://schemas.openxmlformats.org/officeDocument/2006/relationships" xmlns:p="http://schemas.openxmlformats.org/presentationml/2006/main">
+  <p:cSld>
+    <p:spTree>
+      <p:nvGrpSpPr>
+        <p:cNvPr id="1" name=""/>
+        <p:cNvGrpSpPr/>
+        <p:nvPr/>
+      </p:nvGrpSpPr>
+      <p:grpSpPr>
+        <a:xfrm>
+          <a:off x="0" y="0"/>
+          <a:ext cx="0" cy="0"/>
+          <a:chOff x="0" y="0"/>
+          <a:chExt cx="0" cy="0"/>
+        </a:xfrm>
+      </p:grpSpPr>
+      <p:sp>
+        <p:nvSpPr>
+          <p:cNvPr id="2" name="Title 1">
+            <a:extLst>
+              <a:ext uri="{FF2B5EF4-FFF2-40B4-BE49-F238E27FC236}">
+                <a16:creationId xmlns:a16="http://schemas.microsoft.com/office/drawing/2014/main" id="{ACD54872-147D-6054-11F5-9986B6DBE3C5}"/>
+              </a:ext>
+            </a:extLst>
+          </p:cNvPr>
+          <p:cNvSpPr>
+            <a:spLocks noGrp="1"/>
+          </p:cNvSpPr>
+          <p:nvPr>
+            <p:ph type="title"/>
+          </p:nvPr>
+        </p:nvSpPr>
+        <p:spPr/>
+        <p:txBody>
+          <a:bodyPr/>
+          <a:lstStyle/>
+          <a:p>
+            <a:r>
+              <a:rPr lang="es-ES" dirty="0" err="1"/>
+              <a:t>Evaluation</a:t>
+            </a:r>
+            <a:r>
+              <a:rPr lang="es-ES" dirty="0"/>
+              <a:t> - </a:t>
+            </a:r>
+            <a:r>
+              <a:rPr lang="es-ES" dirty="0" err="1"/>
+              <a:t>Classification</a:t>
+            </a:r>
+            <a:endParaRPr lang="es-ES" dirty="0"/>
+          </a:p>
+        </p:txBody>
+      </p:sp>
+      <p:pic>
+        <p:nvPicPr>
+          <p:cNvPr id="6" name="Content Placeholder 5">
+            <a:extLst>
+              <a:ext uri="{FF2B5EF4-FFF2-40B4-BE49-F238E27FC236}">
+                <a16:creationId xmlns:a16="http://schemas.microsoft.com/office/drawing/2014/main" id="{407BC509-C67E-98F9-EAE1-6B7856C375A7}"/>
+              </a:ext>
+            </a:extLst>
+          </p:cNvPr>
+          <p:cNvPicPr>
+            <a:picLocks noGrp="1" noChangeAspect="1"/>
+          </p:cNvPicPr>
+          <p:nvPr>
+            <p:ph idx="1"/>
+          </p:nvPr>
+        </p:nvPicPr>
+        <p:blipFill>
+          <a:blip r:embed="rId2"/>
+          <a:stretch>
+            <a:fillRect/>
+          </a:stretch>
+        </p:blipFill>
+        <p:spPr>
+          <a:xfrm>
+            <a:off x="5782432" y="3344361"/>
+            <a:ext cx="6409568" cy="3513639"/>
+          </a:xfrm>
+          <a:prstGeom prst="rect">
+            <a:avLst/>
+          </a:prstGeom>
+        </p:spPr>
+      </p:pic>
+      <p:sp>
+        <p:nvSpPr>
+          <p:cNvPr id="7" name="TextBox 6">
+            <a:extLst>
+              <a:ext uri="{FF2B5EF4-FFF2-40B4-BE49-F238E27FC236}">
+                <a16:creationId xmlns:a16="http://schemas.microsoft.com/office/drawing/2014/main" id="{3CBD4DF5-7CC5-9AFE-8451-6CC9B5F9EBC5}"/>
+              </a:ext>
+            </a:extLst>
+          </p:cNvPr>
+          <p:cNvSpPr txBox="1"/>
+          <p:nvPr/>
+        </p:nvSpPr>
+        <p:spPr>
+          <a:xfrm>
+            <a:off x="612648" y="1475874"/>
+            <a:ext cx="5169784" cy="4770537"/>
+          </a:xfrm>
+          <a:prstGeom prst="rect">
+            <a:avLst/>
+          </a:prstGeom>
+          <a:noFill/>
+        </p:spPr>
+        <p:txBody>
+          <a:bodyPr wrap="square" rtlCol="0">
+            <a:spAutoFit/>
+          </a:bodyPr>
+          <a:lstStyle/>
+          <a:p>
+            <a:pPr marL="342900" indent="-342900">
+              <a:buFont typeface="Arial" panose="020B0604020202020204" pitchFamily="34" charset="0"/>
+              <a:buChar char="•"/>
+            </a:pPr>
+            <a:r>
+              <a:rPr lang="es-ES" sz="2000" dirty="0" err="1"/>
+              <a:t>Images</a:t>
+            </a:r>
+            <a:r>
+              <a:rPr lang="es-ES" sz="2000" dirty="0"/>
+              <a:t> </a:t>
+            </a:r>
+            <a:r>
+              <a:rPr lang="es-ES" sz="2000" dirty="0" err="1"/>
+              <a:t>on</a:t>
+            </a:r>
+            <a:r>
+              <a:rPr lang="es-ES" sz="2000" dirty="0"/>
+              <a:t> the test set are </a:t>
+            </a:r>
+            <a:r>
+              <a:rPr lang="es-ES" sz="2000" dirty="0" err="1"/>
+              <a:t>assigned</a:t>
+            </a:r>
+            <a:r>
+              <a:rPr lang="es-ES" sz="2000" dirty="0"/>
+              <a:t> a class that can be </a:t>
+            </a:r>
+            <a:r>
+              <a:rPr lang="es-ES" sz="2000" dirty="0" err="1"/>
+              <a:t>correct</a:t>
+            </a:r>
+            <a:r>
+              <a:rPr lang="es-ES" sz="2000" dirty="0"/>
+              <a:t> or </a:t>
+            </a:r>
+            <a:r>
+              <a:rPr lang="es-ES" sz="2000" dirty="0" err="1"/>
+              <a:t>incorrect</a:t>
+            </a:r>
+            <a:r>
+              <a:rPr lang="es-ES" sz="2000" dirty="0"/>
+              <a:t>.</a:t>
+            </a:r>
+          </a:p>
+          <a:p>
+            <a:pPr marL="342900" indent="-342900">
+              <a:buFont typeface="Arial" panose="020B0604020202020204" pitchFamily="34" charset="0"/>
+              <a:buChar char="•"/>
+            </a:pPr>
+            <a:r>
+              <a:rPr lang="es-ES" sz="2000" dirty="0" err="1"/>
+              <a:t>Useful</a:t>
+            </a:r>
+            <a:r>
+              <a:rPr lang="es-ES" sz="2000" dirty="0"/>
+              <a:t> to decide if an </a:t>
+            </a:r>
+            <a:r>
+              <a:rPr lang="es-ES" sz="2000" dirty="0" err="1"/>
+              <a:t>image</a:t>
+            </a:r>
+            <a:r>
+              <a:rPr lang="es-ES" sz="2000" dirty="0"/>
+              <a:t> (</a:t>
+            </a:r>
+            <a:r>
+              <a:rPr lang="es-ES" sz="2000" dirty="0" err="1"/>
+              <a:t>user</a:t>
+            </a:r>
+            <a:r>
+              <a:rPr lang="es-ES" sz="2000" dirty="0"/>
+              <a:t> </a:t>
+            </a:r>
+            <a:r>
+              <a:rPr lang="es-ES" sz="2000" dirty="0" err="1"/>
+              <a:t>login</a:t>
+            </a:r>
+            <a:r>
+              <a:rPr lang="es-ES" sz="2000" dirty="0"/>
+              <a:t>) </a:t>
+            </a:r>
+            <a:r>
+              <a:rPr lang="es-ES" sz="2000" dirty="0" err="1"/>
+              <a:t>matches</a:t>
+            </a:r>
+            <a:r>
+              <a:rPr lang="es-ES" sz="2000" dirty="0"/>
+              <a:t> </a:t>
+            </a:r>
+            <a:r>
+              <a:rPr lang="es-ES" sz="2000" dirty="0" err="1"/>
+              <a:t>any</a:t>
+            </a:r>
+            <a:r>
+              <a:rPr lang="es-ES" sz="2000" dirty="0"/>
+              <a:t> </a:t>
+            </a:r>
+            <a:r>
+              <a:rPr lang="es-ES" sz="2000" dirty="0" err="1"/>
+              <a:t>of</a:t>
+            </a:r>
+            <a:r>
+              <a:rPr lang="es-ES" sz="2000" dirty="0"/>
+              <a:t> the </a:t>
+            </a:r>
+            <a:r>
+              <a:rPr lang="es-ES" sz="2000" dirty="0" err="1"/>
+              <a:t>registered</a:t>
+            </a:r>
+            <a:r>
+              <a:rPr lang="es-ES" sz="2000" dirty="0"/>
+              <a:t> </a:t>
+            </a:r>
+            <a:r>
+              <a:rPr lang="es-ES" sz="2000" dirty="0" err="1"/>
+              <a:t>identities</a:t>
+            </a:r>
+            <a:r>
+              <a:rPr lang="es-ES" sz="2000" dirty="0"/>
+              <a:t>. The </a:t>
+            </a:r>
+            <a:r>
+              <a:rPr lang="es-ES" sz="2000" dirty="0" err="1"/>
+              <a:t>user</a:t>
+            </a:r>
+            <a:r>
+              <a:rPr lang="es-ES" sz="2000" dirty="0"/>
+              <a:t> must be </a:t>
+            </a:r>
+            <a:r>
+              <a:rPr lang="es-ES" sz="2000" dirty="0" err="1"/>
+              <a:t>on</a:t>
+            </a:r>
+            <a:r>
+              <a:rPr lang="es-ES" sz="2000" dirty="0"/>
+              <a:t> the model when </a:t>
+            </a:r>
+            <a:r>
+              <a:rPr lang="es-ES" sz="2000" dirty="0" err="1"/>
+              <a:t>trained</a:t>
+            </a:r>
+            <a:r>
+              <a:rPr lang="es-ES" sz="2000" dirty="0"/>
+              <a:t>.</a:t>
+            </a:r>
+          </a:p>
+          <a:p>
+            <a:pPr marL="342900" indent="-342900">
+              <a:buFont typeface="Arial" panose="020B0604020202020204" pitchFamily="34" charset="0"/>
+              <a:buChar char="•"/>
+            </a:pPr>
+            <a:r>
+              <a:rPr lang="es-ES" sz="2000" dirty="0" err="1"/>
+              <a:t>Evaluation</a:t>
+            </a:r>
+            <a:r>
+              <a:rPr lang="es-ES" sz="2000" dirty="0"/>
+              <a:t> </a:t>
+            </a:r>
+            <a:r>
+              <a:rPr lang="es-ES" sz="2000" dirty="0" err="1"/>
+              <a:t>metrics</a:t>
+            </a:r>
+            <a:r>
+              <a:rPr lang="es-ES" sz="2000" dirty="0"/>
+              <a:t> are:</a:t>
+            </a:r>
+            <a:br>
+              <a:rPr lang="es-ES" sz="2000" dirty="0"/>
+            </a:br>
+            <a:endParaRPr lang="es-ES" sz="2000" dirty="0"/>
+          </a:p>
+          <a:p>
+            <a:pPr marL="800100" lvl="1" indent="-342900">
+              <a:buFont typeface="Arial" panose="020B0604020202020204" pitchFamily="34" charset="0"/>
+              <a:buChar char="•"/>
+            </a:pPr>
+            <a:r>
+              <a:rPr lang="en-US" dirty="0"/>
+              <a:t>Accuracy: % of correct predictions.</a:t>
+            </a:r>
+          </a:p>
+          <a:p>
+            <a:pPr marL="800100" lvl="1" indent="-342900">
+              <a:buFont typeface="Arial" panose="020B0604020202020204" pitchFamily="34" charset="0"/>
+              <a:buChar char="•"/>
+            </a:pPr>
+            <a:r>
+              <a:rPr lang="en-US" dirty="0"/>
+              <a:t>Precision: % of predicted positives that are correct.</a:t>
+            </a:r>
+          </a:p>
+          <a:p>
+            <a:pPr marL="800100" lvl="1" indent="-342900">
+              <a:buFont typeface="Arial" panose="020B0604020202020204" pitchFamily="34" charset="0"/>
+              <a:buChar char="•"/>
+            </a:pPr>
+            <a:r>
+              <a:rPr lang="en-US" dirty="0"/>
+              <a:t>Recall: % of actual positives correctly predicted.</a:t>
+            </a:r>
+          </a:p>
+          <a:p>
+            <a:pPr marL="800100" lvl="1" indent="-342900">
+              <a:buFont typeface="Arial" panose="020B0604020202020204" pitchFamily="34" charset="0"/>
+              <a:buChar char="•"/>
+            </a:pPr>
+            <a:r>
+              <a:rPr lang="en-US" dirty="0"/>
+              <a:t>F1-Score: Balance between precision and recall.</a:t>
+            </a:r>
+          </a:p>
+          <a:p>
+            <a:pPr marL="342900" indent="-342900">
+              <a:buFont typeface="Arial" panose="020B0604020202020204" pitchFamily="34" charset="0"/>
+              <a:buChar char="•"/>
+            </a:pPr>
+            <a:endParaRPr lang="es-ES" dirty="0"/>
+          </a:p>
+        </p:txBody>
+      </p:sp>
+      <p:pic>
+        <p:nvPicPr>
+          <p:cNvPr id="12" name="Picture 11" descr="A collage of a person smiling&#10;&#10;Description automatically generated">
+            <a:extLst>
+              <a:ext uri="{FF2B5EF4-FFF2-40B4-BE49-F238E27FC236}">
+                <a16:creationId xmlns:a16="http://schemas.microsoft.com/office/drawing/2014/main" id="{23C20CB9-0DAC-FE94-D13B-85874DA94B9D}"/>
+              </a:ext>
+            </a:extLst>
+          </p:cNvPr>
+          <p:cNvPicPr>
+            <a:picLocks noChangeAspect="1"/>
+          </p:cNvPicPr>
+          <p:nvPr/>
+        </p:nvPicPr>
+        <p:blipFill rotWithShape="1">
+          <a:blip r:embed="rId3">
+            <a:extLst>
+              <a:ext uri="{28A0092B-C50C-407E-A947-70E740481C1C}">
+                <a14:useLocalDpi xmlns:a14="http://schemas.microsoft.com/office/drawing/2010/main" val="0"/>
+              </a:ext>
+            </a:extLst>
+          </a:blip>
+          <a:srcRect l="8737"/>
+          <a:stretch/>
+        </p:blipFill>
+        <p:spPr>
+          <a:xfrm>
+            <a:off x="7015442" y="126067"/>
+            <a:ext cx="5045242" cy="3109662"/>
+          </a:xfrm>
+          <a:prstGeom prst="rect">
+            <a:avLst/>
+          </a:prstGeom>
+        </p:spPr>
+      </p:pic>
+    </p:spTree>
+    <p:extLst>
+      <p:ext uri="{BB962C8B-B14F-4D97-AF65-F5344CB8AC3E}">
+        <p14:creationId xmlns:p14="http://schemas.microsoft.com/office/powerpoint/2010/main" val="4079644549"/>
+      </p:ext>
+    </p:extLst>
+  </p:cSld>
+  <p:clrMapOvr>
+    <a:masterClrMapping/>
+  </p:clrMapOvr>
+</p:sld>
+</file>
+
+<file path=ppt/slides/slide17.xml><?xml version="1.0" encoding="utf-8"?>
+<p:sld xmlns:a="http://schemas.openxmlformats.org/drawingml/2006/main" xmlns:r="http://schemas.openxmlformats.org/officeDocument/2006/relationships" xmlns:p="http://schemas.openxmlformats.org/presentationml/2006/main">
+  <p:cSld>
+    <p:spTree>
+      <p:nvGrpSpPr>
+        <p:cNvPr id="1" name=""/>
+        <p:cNvGrpSpPr/>
+        <p:nvPr/>
+      </p:nvGrpSpPr>
+      <p:grpSpPr>
+        <a:xfrm>
+          <a:off x="0" y="0"/>
+          <a:ext cx="0" cy="0"/>
+          <a:chOff x="0" y="0"/>
+          <a:chExt cx="0" cy="0"/>
+        </a:xfrm>
+      </p:grpSpPr>
+      <p:sp>
+        <p:nvSpPr>
+          <p:cNvPr id="2" name="Title 1">
+            <a:extLst>
+              <a:ext uri="{FF2B5EF4-FFF2-40B4-BE49-F238E27FC236}">
+                <a16:creationId xmlns:a16="http://schemas.microsoft.com/office/drawing/2014/main" id="{B5D233E2-1138-2856-831A-27E03C344295}"/>
+              </a:ext>
+            </a:extLst>
+          </p:cNvPr>
+          <p:cNvSpPr>
+            <a:spLocks noGrp="1"/>
+          </p:cNvSpPr>
+          <p:nvPr>
+            <p:ph type="title"/>
+          </p:nvPr>
+        </p:nvSpPr>
+        <p:spPr/>
+        <p:txBody>
+          <a:bodyPr/>
+          <a:lstStyle/>
+          <a:p>
+            <a:r>
+              <a:rPr lang="es-ES" dirty="0" err="1"/>
+              <a:t>Evaluation</a:t>
+            </a:r>
+            <a:r>
+              <a:rPr lang="es-ES" dirty="0"/>
+              <a:t> - </a:t>
+            </a:r>
+            <a:r>
+              <a:rPr lang="es-ES" dirty="0" err="1"/>
+              <a:t>Classification</a:t>
+            </a:r>
+            <a:r>
+              <a:rPr lang="es-ES" dirty="0"/>
+              <a:t> - </a:t>
+            </a:r>
+            <a:r>
+              <a:rPr lang="es-ES" dirty="0" err="1"/>
+              <a:t>Comparison</a:t>
+            </a:r>
+            <a:endParaRPr lang="es-ES" dirty="0"/>
+          </a:p>
+        </p:txBody>
+      </p:sp>
+      <p:pic>
+        <p:nvPicPr>
+          <p:cNvPr id="5" name="Content Placeholder 4">
+            <a:extLst>
+              <a:ext uri="{FF2B5EF4-FFF2-40B4-BE49-F238E27FC236}">
+                <a16:creationId xmlns:a16="http://schemas.microsoft.com/office/drawing/2014/main" id="{84BC6772-B94E-E397-3B45-9228E54CF73A}"/>
+              </a:ext>
+            </a:extLst>
+          </p:cNvPr>
+          <p:cNvPicPr>
+            <a:picLocks noGrp="1" noChangeAspect="1"/>
+          </p:cNvPicPr>
+          <p:nvPr>
+            <p:ph idx="1"/>
+          </p:nvPr>
+        </p:nvPicPr>
+        <p:blipFill>
+          <a:blip r:embed="rId2"/>
+          <a:stretch>
+            <a:fillRect/>
+          </a:stretch>
+        </p:blipFill>
+        <p:spPr>
+          <a:xfrm>
+            <a:off x="5749636" y="1680898"/>
+            <a:ext cx="6277794" cy="3914056"/>
+          </a:xfrm>
+        </p:spPr>
+      </p:pic>
+      <p:sp>
+        <p:nvSpPr>
+          <p:cNvPr id="7" name="TextBox 6">
+            <a:extLst>
+              <a:ext uri="{FF2B5EF4-FFF2-40B4-BE49-F238E27FC236}">
+                <a16:creationId xmlns:a16="http://schemas.microsoft.com/office/drawing/2014/main" id="{B0478D3E-366B-3D9C-2D6A-802B834292C8}"/>
+              </a:ext>
+            </a:extLst>
+          </p:cNvPr>
+          <p:cNvSpPr txBox="1"/>
+          <p:nvPr/>
+        </p:nvSpPr>
+        <p:spPr>
+          <a:xfrm>
+            <a:off x="612648" y="1565564"/>
+            <a:ext cx="5026152" cy="3785652"/>
+          </a:xfrm>
+          <a:prstGeom prst="rect">
+            <a:avLst/>
+          </a:prstGeom>
+          <a:noFill/>
+        </p:spPr>
+        <p:txBody>
+          <a:bodyPr wrap="square" rtlCol="0">
+            <a:spAutoFit/>
+          </a:bodyPr>
+          <a:lstStyle/>
+          <a:p>
+            <a:pPr marL="342900" indent="-342900">
+              <a:buFont typeface="Arial" panose="020B0604020202020204" pitchFamily="34" charset="0"/>
+              <a:buChar char="•"/>
+            </a:pPr>
+            <a:r>
+              <a:rPr lang="es-ES" sz="2000" b="1" dirty="0" err="1"/>
+              <a:t>Best</a:t>
+            </a:r>
+            <a:r>
+              <a:rPr lang="es-ES" sz="2000" b="1" dirty="0"/>
+              <a:t> </a:t>
+            </a:r>
+            <a:r>
+              <a:rPr lang="es-ES" sz="2000" b="1" dirty="0" err="1"/>
+              <a:t>models</a:t>
+            </a:r>
+            <a:r>
+              <a:rPr lang="es-ES" sz="2000" dirty="0"/>
+              <a:t>: VGG16 </a:t>
+            </a:r>
+            <a:r>
+              <a:rPr lang="es-ES" sz="2000" dirty="0" err="1"/>
+              <a:t>Custom</a:t>
+            </a:r>
+            <a:r>
+              <a:rPr lang="es-ES" sz="2000" dirty="0"/>
+              <a:t> </a:t>
+            </a:r>
+            <a:r>
+              <a:rPr lang="es-ES" sz="2000" dirty="0" err="1"/>
+              <a:t>trained</a:t>
+            </a:r>
+            <a:r>
+              <a:rPr lang="es-ES" sz="2000" dirty="0"/>
+              <a:t> </a:t>
+            </a:r>
+            <a:r>
+              <a:rPr lang="es-ES" sz="2000" dirty="0" err="1"/>
+              <a:t>on</a:t>
+            </a:r>
+            <a:r>
+              <a:rPr lang="es-ES" sz="2000" dirty="0"/>
+              <a:t> </a:t>
+            </a:r>
+            <a:r>
+              <a:rPr lang="es-ES" sz="2000" dirty="0" err="1"/>
+              <a:t>Augmented</a:t>
+            </a:r>
+            <a:r>
+              <a:rPr lang="es-ES" sz="2000" dirty="0"/>
+              <a:t> </a:t>
+            </a:r>
+            <a:r>
+              <a:rPr lang="es-ES" sz="2000" dirty="0" err="1"/>
+              <a:t>dataset</a:t>
+            </a:r>
+            <a:r>
+              <a:rPr lang="es-ES" sz="2000" dirty="0"/>
+              <a:t> and </a:t>
+            </a:r>
+            <a:r>
+              <a:rPr lang="es-ES" sz="2000" dirty="0" err="1"/>
+              <a:t>ArcFace</a:t>
+            </a:r>
+            <a:r>
+              <a:rPr lang="es-ES" sz="2000" dirty="0"/>
+              <a:t>, </a:t>
+            </a:r>
+            <a:r>
+              <a:rPr lang="es-ES" sz="2000" dirty="0" err="1"/>
+              <a:t>followed</a:t>
+            </a:r>
+            <a:r>
+              <a:rPr lang="es-ES" sz="2000" dirty="0"/>
+              <a:t> by </a:t>
+            </a:r>
+            <a:r>
+              <a:rPr lang="es-ES" sz="2000" dirty="0" err="1"/>
+              <a:t>DeepFace</a:t>
+            </a:r>
+            <a:r>
+              <a:rPr lang="es-ES" sz="2000" dirty="0"/>
+              <a:t> and MobileNetV2 </a:t>
+            </a:r>
+            <a:r>
+              <a:rPr lang="es-ES" sz="2000" dirty="0" err="1"/>
+              <a:t>trained</a:t>
+            </a:r>
+            <a:r>
+              <a:rPr lang="es-ES" sz="2000" dirty="0"/>
+              <a:t> </a:t>
+            </a:r>
+            <a:r>
+              <a:rPr lang="es-ES" sz="2000" dirty="0" err="1"/>
+              <a:t>on</a:t>
+            </a:r>
+            <a:r>
+              <a:rPr lang="es-ES" sz="2000" dirty="0"/>
+              <a:t> </a:t>
+            </a:r>
+            <a:r>
+              <a:rPr lang="es-ES" sz="2000" dirty="0" err="1"/>
+              <a:t>Augmented</a:t>
+            </a:r>
+            <a:r>
+              <a:rPr lang="es-ES" sz="2000" dirty="0"/>
+              <a:t>.</a:t>
+            </a:r>
+          </a:p>
+          <a:p>
+            <a:pPr marL="342900" indent="-342900">
+              <a:buFont typeface="Arial" panose="020B0604020202020204" pitchFamily="34" charset="0"/>
+              <a:buChar char="•"/>
+            </a:pPr>
+            <a:r>
+              <a:rPr lang="es-ES" sz="2000" b="1" dirty="0" err="1"/>
+              <a:t>Worst</a:t>
+            </a:r>
+            <a:r>
+              <a:rPr lang="es-ES" sz="2000" b="1" dirty="0"/>
+              <a:t> </a:t>
+            </a:r>
+            <a:r>
+              <a:rPr lang="es-ES" sz="2000" b="1" dirty="0" err="1"/>
+              <a:t>performers</a:t>
+            </a:r>
+            <a:r>
+              <a:rPr lang="es-ES" sz="2000" dirty="0"/>
+              <a:t>:</a:t>
+            </a:r>
+            <a:r>
+              <a:rPr lang="es-ES" sz="2000" b="1" dirty="0"/>
+              <a:t> </a:t>
+            </a:r>
+            <a:r>
+              <a:rPr lang="es-ES" sz="2000" dirty="0"/>
+              <a:t>the </a:t>
+            </a:r>
+            <a:r>
+              <a:rPr lang="es-ES" sz="2000" dirty="0" err="1"/>
+              <a:t>Classical</a:t>
+            </a:r>
+            <a:r>
+              <a:rPr lang="es-ES" sz="2000" dirty="0"/>
+              <a:t> </a:t>
+            </a:r>
+            <a:r>
+              <a:rPr lang="es-ES" sz="2000" dirty="0" err="1"/>
+              <a:t>Approaches</a:t>
+            </a:r>
+            <a:r>
+              <a:rPr lang="es-ES" sz="2000" dirty="0"/>
+              <a:t>: PCA, LBP </a:t>
+            </a:r>
+          </a:p>
+          <a:p>
+            <a:pPr marL="342900" indent="-342900">
+              <a:buFont typeface="Arial" panose="020B0604020202020204" pitchFamily="34" charset="0"/>
+              <a:buChar char="•"/>
+            </a:pPr>
+            <a:r>
+              <a:rPr lang="es-ES" sz="2000" dirty="0" err="1"/>
+              <a:t>Best</a:t>
+            </a:r>
+            <a:r>
+              <a:rPr lang="es-ES" sz="2000" dirty="0"/>
+              <a:t> </a:t>
+            </a:r>
+            <a:r>
+              <a:rPr lang="es-ES" sz="2000" dirty="0" err="1"/>
+              <a:t>models</a:t>
+            </a:r>
+            <a:r>
+              <a:rPr lang="es-ES" sz="2000" dirty="0"/>
+              <a:t> </a:t>
+            </a:r>
+            <a:r>
+              <a:rPr lang="es-ES" sz="2000" dirty="0" err="1"/>
+              <a:t>achieve</a:t>
+            </a:r>
+            <a:r>
+              <a:rPr lang="es-ES" sz="2000" dirty="0"/>
+              <a:t> F1_scores </a:t>
+            </a:r>
+            <a:r>
+              <a:rPr lang="es-ES" sz="2000" dirty="0" err="1"/>
+              <a:t>above</a:t>
+            </a:r>
+            <a:r>
+              <a:rPr lang="es-ES" sz="2000" dirty="0"/>
+              <a:t> 0.88, </a:t>
+            </a:r>
+            <a:r>
+              <a:rPr lang="en-US" sz="2000" dirty="0"/>
+              <a:t>indicating strong and consistent prediction quality</a:t>
+            </a:r>
+            <a:endParaRPr lang="es-ES" sz="2000" dirty="0"/>
+          </a:p>
+          <a:p>
+            <a:pPr marL="342900" indent="-342900">
+              <a:buFont typeface="Arial" panose="020B0604020202020204" pitchFamily="34" charset="0"/>
+              <a:buChar char="•"/>
+            </a:pPr>
+            <a:r>
+              <a:rPr lang="es-ES" sz="2000" dirty="0"/>
+              <a:t>CNN </a:t>
+            </a:r>
+            <a:r>
+              <a:rPr lang="es-ES" sz="2000" dirty="0" err="1"/>
+              <a:t>models</a:t>
+            </a:r>
+            <a:r>
+              <a:rPr lang="es-ES" sz="2000" dirty="0"/>
+              <a:t> </a:t>
+            </a:r>
+            <a:r>
+              <a:rPr lang="es-ES" sz="2000" dirty="0" err="1"/>
+              <a:t>outperform</a:t>
+            </a:r>
+            <a:r>
+              <a:rPr lang="es-ES" sz="2000" dirty="0"/>
+              <a:t> </a:t>
+            </a:r>
+            <a:r>
+              <a:rPr lang="es-ES" sz="2000" dirty="0" err="1"/>
+              <a:t>Classical</a:t>
+            </a:r>
+            <a:r>
+              <a:rPr lang="es-ES" sz="2000" dirty="0"/>
+              <a:t> ones even after </a:t>
+            </a:r>
+            <a:r>
+              <a:rPr lang="es-ES" sz="2000" dirty="0" err="1"/>
+              <a:t>augmentation</a:t>
+            </a:r>
+            <a:r>
+              <a:rPr lang="es-ES" sz="2000" dirty="0"/>
+              <a:t>, </a:t>
+            </a:r>
+            <a:r>
+              <a:rPr lang="es-ES" sz="2000" dirty="0" err="1"/>
+              <a:t>highlighting</a:t>
+            </a:r>
+            <a:r>
+              <a:rPr lang="es-ES" sz="2000" dirty="0"/>
+              <a:t> </a:t>
+            </a:r>
+            <a:r>
+              <a:rPr lang="es-ES" sz="2000" dirty="0" err="1"/>
+              <a:t>their</a:t>
+            </a:r>
+            <a:r>
+              <a:rPr lang="es-ES" sz="2000" dirty="0"/>
+              <a:t> </a:t>
+            </a:r>
+            <a:r>
+              <a:rPr lang="es-ES" sz="2000" dirty="0" err="1"/>
+              <a:t>limitations</a:t>
+            </a:r>
+            <a:r>
+              <a:rPr lang="es-ES" sz="2000" dirty="0"/>
+              <a:t>.</a:t>
+            </a:r>
+          </a:p>
+        </p:txBody>
+      </p:sp>
+    </p:spTree>
+    <p:extLst>
+      <p:ext uri="{BB962C8B-B14F-4D97-AF65-F5344CB8AC3E}">
+        <p14:creationId xmlns:p14="http://schemas.microsoft.com/office/powerpoint/2010/main" val="1734992041"/>
+      </p:ext>
+    </p:extLst>
+  </p:cSld>
+  <p:clrMapOvr>
+    <a:masterClrMapping/>
+  </p:clrMapOvr>
+</p:sld>
+</file>
+
+<file path=ppt/slides/slide18.xml><?xml version="1.0" encoding="utf-8"?>
+<p:sld xmlns:a="http://schemas.openxmlformats.org/drawingml/2006/main" xmlns:r="http://schemas.openxmlformats.org/officeDocument/2006/relationships" xmlns:p="http://schemas.openxmlformats.org/presentationml/2006/main">
+  <p:cSld>
+    <p:spTree>
+      <p:nvGrpSpPr>
+        <p:cNvPr id="1" name=""/>
+        <p:cNvGrpSpPr/>
+        <p:nvPr/>
+      </p:nvGrpSpPr>
+      <p:grpSpPr>
+        <a:xfrm>
+          <a:off x="0" y="0"/>
+          <a:ext cx="0" cy="0"/>
+          <a:chOff x="0" y="0"/>
+          <a:chExt cx="0" cy="0"/>
+        </a:xfrm>
+      </p:grpSpPr>
+      <p:sp>
+        <p:nvSpPr>
+          <p:cNvPr id="2" name="Title 1">
+            <a:extLst>
+              <a:ext uri="{FF2B5EF4-FFF2-40B4-BE49-F238E27FC236}">
+                <a16:creationId xmlns:a16="http://schemas.microsoft.com/office/drawing/2014/main" id="{FF365628-049E-9992-49EF-EEE27A6201B2}"/>
+              </a:ext>
+            </a:extLst>
+          </p:cNvPr>
+          <p:cNvSpPr>
+            <a:spLocks noGrp="1"/>
+          </p:cNvSpPr>
+          <p:nvPr>
+            <p:ph type="title"/>
+          </p:nvPr>
+        </p:nvSpPr>
+        <p:spPr/>
+        <p:txBody>
+          <a:bodyPr/>
+          <a:lstStyle/>
+          <a:p>
+            <a:r>
+              <a:rPr lang="es-ES" dirty="0" err="1"/>
+              <a:t>Evaluation</a:t>
+            </a:r>
+            <a:r>
+              <a:rPr lang="es-ES" dirty="0"/>
+              <a:t> – </a:t>
+            </a:r>
+            <a:r>
+              <a:rPr lang="es-ES" dirty="0" err="1"/>
+              <a:t>Validation</a:t>
+            </a:r>
+            <a:r>
+              <a:rPr lang="es-ES" dirty="0"/>
+              <a:t> 1:1</a:t>
+            </a:r>
+          </a:p>
+        </p:txBody>
+      </p:sp>
+      <p:pic>
+        <p:nvPicPr>
+          <p:cNvPr id="5" name="Content Placeholder 4" descr="A person and person with a red box&#10;&#10;Description automatically generated">
+            <a:extLst>
+              <a:ext uri="{FF2B5EF4-FFF2-40B4-BE49-F238E27FC236}">
+                <a16:creationId xmlns:a16="http://schemas.microsoft.com/office/drawing/2014/main" id="{6D77D4CA-C9F3-4073-7B47-ACDBC5B2E972}"/>
+              </a:ext>
+            </a:extLst>
+          </p:cNvPr>
+          <p:cNvPicPr>
+            <a:picLocks noGrp="1" noChangeAspect="1"/>
+          </p:cNvPicPr>
+          <p:nvPr>
+            <p:ph idx="1"/>
+          </p:nvPr>
+        </p:nvPicPr>
+        <p:blipFill>
+          <a:blip r:embed="rId2">
+            <a:extLst>
+              <a:ext uri="{28A0092B-C50C-407E-A947-70E740481C1C}">
+                <a14:useLocalDpi xmlns:a14="http://schemas.microsoft.com/office/drawing/2010/main" val="0"/>
+              </a:ext>
+            </a:extLst>
+          </a:blip>
+          <a:stretch>
+            <a:fillRect/>
+          </a:stretch>
+        </p:blipFill>
+        <p:spPr>
+          <a:xfrm>
+            <a:off x="6531588" y="1837009"/>
+            <a:ext cx="5660412" cy="3183982"/>
+          </a:xfrm>
+        </p:spPr>
+      </p:pic>
+      <p:sp>
+        <p:nvSpPr>
+          <p:cNvPr id="6" name="TextBox 5">
+            <a:extLst>
+              <a:ext uri="{FF2B5EF4-FFF2-40B4-BE49-F238E27FC236}">
+                <a16:creationId xmlns:a16="http://schemas.microsoft.com/office/drawing/2014/main" id="{E8770D66-49D2-5060-E7CB-8E1B7A969801}"/>
+              </a:ext>
+            </a:extLst>
+          </p:cNvPr>
+          <p:cNvSpPr txBox="1"/>
+          <p:nvPr/>
+        </p:nvSpPr>
+        <p:spPr>
+          <a:xfrm>
+            <a:off x="612648" y="1459832"/>
+            <a:ext cx="5918940" cy="4801314"/>
+          </a:xfrm>
+          <a:prstGeom prst="rect">
+            <a:avLst/>
+          </a:prstGeom>
+          <a:noFill/>
+        </p:spPr>
+        <p:txBody>
+          <a:bodyPr wrap="square" rtlCol="0">
+            <a:spAutoFit/>
+          </a:bodyPr>
+          <a:lstStyle/>
+          <a:p>
+            <a:r>
+              <a:rPr lang="en-US" dirty="0"/>
+              <a:t>Measure whether two face images belong to the same person, regardless of their class label.</a:t>
+            </a:r>
+          </a:p>
+          <a:p>
+            <a:r>
+              <a:rPr lang="en-US" dirty="0"/>
+              <a:t>Used for open-set matching (compare user of the device with their identity on database)</a:t>
+            </a:r>
+          </a:p>
+          <a:p>
+            <a:endParaRPr lang="en-US" dirty="0"/>
+          </a:p>
+          <a:p>
+            <a:pPr marL="285750" indent="-285750">
+              <a:buFont typeface="Arial" panose="020B0604020202020204" pitchFamily="34" charset="0"/>
+              <a:buChar char="•"/>
+            </a:pPr>
+            <a:r>
+              <a:rPr lang="en-US" dirty="0"/>
+              <a:t>Each image is passed through an </a:t>
+            </a:r>
+            <a:r>
+              <a:rPr lang="en-US" b="1" dirty="0"/>
+              <a:t>embedding model</a:t>
+            </a:r>
+            <a:r>
+              <a:rPr lang="en-US" dirty="0"/>
+              <a:t> -&gt; </a:t>
+            </a:r>
+            <a:r>
+              <a:rPr lang="es-ES" dirty="0" err="1"/>
+              <a:t>numerical</a:t>
+            </a:r>
+            <a:r>
+              <a:rPr lang="es-ES" dirty="0"/>
+              <a:t> descriptor.</a:t>
+            </a:r>
+          </a:p>
+          <a:p>
+            <a:pPr marL="285750" indent="-285750">
+              <a:buFont typeface="Arial" panose="020B0604020202020204" pitchFamily="34" charset="0"/>
+              <a:buChar char="•"/>
+            </a:pPr>
+            <a:r>
+              <a:rPr lang="es-ES" dirty="0"/>
+              <a:t>Compute </a:t>
+            </a:r>
+            <a:r>
+              <a:rPr lang="es-ES" b="1" dirty="0" err="1"/>
+              <a:t>pairwise</a:t>
+            </a:r>
+            <a:r>
+              <a:rPr lang="es-ES" b="1" dirty="0"/>
+              <a:t> </a:t>
+            </a:r>
+            <a:r>
+              <a:rPr lang="es-ES" b="1" dirty="0" err="1"/>
+              <a:t>distances</a:t>
+            </a:r>
+            <a:r>
+              <a:rPr lang="es-ES" b="1" dirty="0"/>
+              <a:t> (KNN)</a:t>
+            </a:r>
+          </a:p>
+          <a:p>
+            <a:pPr marL="285750" indent="-285750">
+              <a:buFont typeface="Arial" panose="020B0604020202020204" pitchFamily="34" charset="0"/>
+              <a:buChar char="•"/>
+            </a:pPr>
+            <a:r>
+              <a:rPr lang="es-ES" dirty="0" err="1"/>
+              <a:t>Label</a:t>
+            </a:r>
+            <a:r>
+              <a:rPr lang="es-ES" dirty="0"/>
+              <a:t> each </a:t>
+            </a:r>
+            <a:r>
+              <a:rPr lang="es-ES" dirty="0" err="1"/>
+              <a:t>pair</a:t>
+            </a:r>
+            <a:r>
+              <a:rPr lang="es-ES" dirty="0"/>
+              <a:t> as </a:t>
+            </a:r>
+            <a:r>
+              <a:rPr lang="es-ES" i="1" dirty="0"/>
+              <a:t>Match </a:t>
+            </a:r>
+            <a:r>
+              <a:rPr lang="es-ES" dirty="0"/>
+              <a:t>or </a:t>
+            </a:r>
+            <a:r>
+              <a:rPr lang="es-ES" i="1" dirty="0"/>
+              <a:t>non-Match</a:t>
+            </a:r>
+          </a:p>
+          <a:p>
+            <a:endParaRPr lang="es-ES" dirty="0"/>
+          </a:p>
+          <a:p>
+            <a:r>
+              <a:rPr lang="es-ES" dirty="0"/>
+              <a:t>The </a:t>
+            </a:r>
+            <a:r>
+              <a:rPr lang="es-ES" dirty="0" err="1"/>
+              <a:t>results</a:t>
+            </a:r>
+            <a:r>
+              <a:rPr lang="es-ES" dirty="0"/>
+              <a:t> are </a:t>
+            </a:r>
+            <a:r>
+              <a:rPr lang="es-ES" dirty="0" err="1"/>
+              <a:t>compared</a:t>
+            </a:r>
+            <a:r>
+              <a:rPr lang="es-ES" dirty="0"/>
+              <a:t> to </a:t>
+            </a:r>
+            <a:r>
+              <a:rPr lang="es-ES" dirty="0" err="1"/>
+              <a:t>their</a:t>
+            </a:r>
+            <a:r>
+              <a:rPr lang="es-ES" dirty="0"/>
+              <a:t> </a:t>
+            </a:r>
+            <a:r>
+              <a:rPr lang="es-ES" dirty="0" err="1"/>
+              <a:t>correct</a:t>
+            </a:r>
+            <a:r>
+              <a:rPr lang="es-ES" dirty="0"/>
+              <a:t> </a:t>
+            </a:r>
+            <a:r>
+              <a:rPr lang="es-ES" dirty="0" err="1"/>
+              <a:t>labels</a:t>
+            </a:r>
+            <a:r>
+              <a:rPr lang="es-ES" dirty="0"/>
+              <a:t> and </a:t>
+            </a:r>
+            <a:r>
+              <a:rPr lang="es-ES" dirty="0" err="1"/>
+              <a:t>claculate</a:t>
+            </a:r>
+            <a:r>
+              <a:rPr lang="es-ES" dirty="0"/>
+              <a:t> the </a:t>
+            </a:r>
+            <a:r>
+              <a:rPr lang="es-ES" dirty="0" err="1"/>
+              <a:t>metrics</a:t>
+            </a:r>
+            <a:r>
+              <a:rPr lang="es-ES" dirty="0"/>
+              <a:t>:</a:t>
+            </a:r>
+          </a:p>
+          <a:p>
+            <a:endParaRPr lang="es-ES" dirty="0"/>
+          </a:p>
+          <a:p>
+            <a:pPr marL="285750" indent="-285750">
+              <a:buFont typeface="Arial" panose="020B0604020202020204" pitchFamily="34" charset="0"/>
+              <a:buChar char="•"/>
+            </a:pPr>
+            <a:r>
+              <a:rPr lang="en-US" b="1" dirty="0"/>
+              <a:t>AUC</a:t>
+            </a:r>
+            <a:r>
+              <a:rPr lang="en-US" dirty="0"/>
+              <a:t> (Area Under Curve): overall ranking performance.</a:t>
+            </a:r>
+          </a:p>
+          <a:p>
+            <a:pPr marL="285750" indent="-285750">
+              <a:buFont typeface="Arial" panose="020B0604020202020204" pitchFamily="34" charset="0"/>
+              <a:buChar char="•"/>
+            </a:pPr>
+            <a:r>
+              <a:rPr lang="en-US" b="1" dirty="0"/>
+              <a:t>EER</a:t>
+            </a:r>
+            <a:r>
+              <a:rPr lang="en-US" dirty="0"/>
+              <a:t> (Equal Error Rate): the point where false acceptance = false rejection.</a:t>
+            </a:r>
             <a:endParaRPr lang="es-ES" dirty="0"/>
           </a:p>
         </p:txBody>
@@ -4563,6 +9430,270 @@
     <p:extLst>
       <p:ext uri="{BB962C8B-B14F-4D97-AF65-F5344CB8AC3E}">
         <p14:creationId xmlns:p14="http://schemas.microsoft.com/office/powerpoint/2010/main" val="253357861"/>
+      </p:ext>
+    </p:extLst>
+  </p:cSld>
+  <p:clrMapOvr>
+    <a:masterClrMapping/>
+  </p:clrMapOvr>
+</p:sld>
+</file>
+
+<file path=ppt/slides/slide19.xml><?xml version="1.0" encoding="utf-8"?>
+<p:sld xmlns:a="http://schemas.openxmlformats.org/drawingml/2006/main" xmlns:r="http://schemas.openxmlformats.org/officeDocument/2006/relationships" xmlns:p="http://schemas.openxmlformats.org/presentationml/2006/main">
+  <p:cSld>
+    <p:spTree>
+      <p:nvGrpSpPr>
+        <p:cNvPr id="1" name=""/>
+        <p:cNvGrpSpPr/>
+        <p:nvPr/>
+      </p:nvGrpSpPr>
+      <p:grpSpPr>
+        <a:xfrm>
+          <a:off x="0" y="0"/>
+          <a:ext cx="0" cy="0"/>
+          <a:chOff x="0" y="0"/>
+          <a:chExt cx="0" cy="0"/>
+        </a:xfrm>
+      </p:grpSpPr>
+      <p:sp>
+        <p:nvSpPr>
+          <p:cNvPr id="2" name="Title 1">
+            <a:extLst>
+              <a:ext uri="{FF2B5EF4-FFF2-40B4-BE49-F238E27FC236}">
+                <a16:creationId xmlns:a16="http://schemas.microsoft.com/office/drawing/2014/main" id="{FF365628-049E-9992-49EF-EEE27A6201B2}"/>
+              </a:ext>
+            </a:extLst>
+          </p:cNvPr>
+          <p:cNvSpPr>
+            <a:spLocks noGrp="1"/>
+          </p:cNvSpPr>
+          <p:nvPr>
+            <p:ph type="title"/>
+          </p:nvPr>
+        </p:nvSpPr>
+        <p:spPr/>
+        <p:txBody>
+          <a:bodyPr/>
+          <a:lstStyle/>
+          <a:p>
+            <a:r>
+              <a:rPr lang="es-ES" dirty="0" err="1"/>
+              <a:t>Evaluation</a:t>
+            </a:r>
+            <a:r>
+              <a:rPr lang="es-ES" dirty="0"/>
+              <a:t> – </a:t>
+            </a:r>
+            <a:r>
+              <a:rPr lang="es-ES" dirty="0" err="1"/>
+              <a:t>Validation</a:t>
+            </a:r>
+            <a:r>
+              <a:rPr lang="es-ES" dirty="0"/>
+              <a:t> 1:1 – </a:t>
+            </a:r>
+            <a:r>
+              <a:rPr lang="es-ES" dirty="0" err="1"/>
+              <a:t>Comparison</a:t>
+            </a:r>
+            <a:endParaRPr lang="es-ES" dirty="0"/>
+          </a:p>
+        </p:txBody>
+      </p:sp>
+      <p:sp>
+        <p:nvSpPr>
+          <p:cNvPr id="6" name="TextBox 5">
+            <a:extLst>
+              <a:ext uri="{FF2B5EF4-FFF2-40B4-BE49-F238E27FC236}">
+                <a16:creationId xmlns:a16="http://schemas.microsoft.com/office/drawing/2014/main" id="{E8770D66-49D2-5060-E7CB-8E1B7A969801}"/>
+              </a:ext>
+            </a:extLst>
+          </p:cNvPr>
+          <p:cNvSpPr txBox="1"/>
+          <p:nvPr/>
+        </p:nvSpPr>
+        <p:spPr>
+          <a:xfrm>
+            <a:off x="323367" y="1487541"/>
+            <a:ext cx="5772633" cy="4524315"/>
+          </a:xfrm>
+          <a:prstGeom prst="rect">
+            <a:avLst/>
+          </a:prstGeom>
+          <a:noFill/>
+        </p:spPr>
+        <p:txBody>
+          <a:bodyPr wrap="square" rtlCol="0">
+            <a:spAutoFit/>
+          </a:bodyPr>
+          <a:lstStyle/>
+          <a:p>
+            <a:pPr marL="285750" indent="-285750">
+              <a:buFont typeface="Arial" panose="020B0604020202020204" pitchFamily="34" charset="0"/>
+              <a:buChar char="•"/>
+            </a:pPr>
+            <a:r>
+              <a:rPr lang="en-US" b="1" dirty="0"/>
+              <a:t>Custom VGG16 with augmentation </a:t>
+            </a:r>
+            <a:r>
+              <a:rPr lang="en-US" dirty="0"/>
+              <a:t>produces the most reliable embeddings for identity verification.</a:t>
+            </a:r>
+          </a:p>
+          <a:p>
+            <a:pPr marL="285750" indent="-285750">
+              <a:buFont typeface="Arial" panose="020B0604020202020204" pitchFamily="34" charset="0"/>
+              <a:buChar char="•"/>
+            </a:pPr>
+            <a:r>
+              <a:rPr lang="en-US" b="1" dirty="0"/>
+              <a:t>Data augmentation significantly boosts verification </a:t>
+            </a:r>
+            <a:r>
+              <a:rPr lang="en-US" dirty="0"/>
+              <a:t>accuracy when also used during training.</a:t>
+            </a:r>
+          </a:p>
+          <a:p>
+            <a:pPr marL="285750" indent="-285750">
+              <a:buFont typeface="Arial" panose="020B0604020202020204" pitchFamily="34" charset="0"/>
+              <a:buChar char="•"/>
+            </a:pPr>
+            <a:r>
+              <a:rPr lang="en-US" b="1" dirty="0"/>
+              <a:t>Fine-tuning improves embedding quality</a:t>
+            </a:r>
+            <a:r>
+              <a:rPr lang="en-US" dirty="0"/>
+              <a:t>, especially for CNN-based models like VGG16.</a:t>
+            </a:r>
+          </a:p>
+          <a:p>
+            <a:pPr marL="285750" indent="-285750">
+              <a:buFont typeface="Arial" panose="020B0604020202020204" pitchFamily="34" charset="0"/>
+              <a:buChar char="•"/>
+            </a:pPr>
+            <a:r>
+              <a:rPr lang="en-US" b="1" dirty="0"/>
+              <a:t>MobileNetV2 and </a:t>
+            </a:r>
+            <a:r>
+              <a:rPr lang="en-US" b="1" dirty="0" err="1"/>
+              <a:t>DeepFace</a:t>
+            </a:r>
+            <a:r>
+              <a:rPr lang="en-US" b="1" dirty="0"/>
+              <a:t> </a:t>
+            </a:r>
+            <a:r>
+              <a:rPr lang="en-US" dirty="0"/>
+              <a:t>models show limited generalization, underperforming across test sets.</a:t>
+            </a:r>
+          </a:p>
+          <a:p>
+            <a:pPr marL="285750" indent="-285750">
+              <a:buFont typeface="Arial" panose="020B0604020202020204" pitchFamily="34" charset="0"/>
+              <a:buChar char="•"/>
+            </a:pPr>
+            <a:r>
+              <a:rPr lang="en-US" dirty="0"/>
+              <a:t>Verification </a:t>
+            </a:r>
+            <a:r>
+              <a:rPr lang="en-US" b="1" dirty="0"/>
+              <a:t>accuracy depends heavily on consistency </a:t>
+            </a:r>
+            <a:r>
+              <a:rPr lang="en-US" dirty="0"/>
+              <a:t>between training and test distributions. (Real vs Verified face)</a:t>
+            </a:r>
+          </a:p>
+          <a:p>
+            <a:pPr marL="285750" indent="-285750">
+              <a:buFont typeface="Arial" panose="020B0604020202020204" pitchFamily="34" charset="0"/>
+              <a:buChar char="•"/>
+            </a:pPr>
+            <a:r>
+              <a:rPr lang="en-US" b="1" dirty="0" err="1"/>
+              <a:t>ArcFace</a:t>
+            </a:r>
+            <a:r>
+              <a:rPr lang="en-US" b="1" dirty="0"/>
+              <a:t> failed </a:t>
+            </a:r>
+            <a:r>
+              <a:rPr lang="en-US" dirty="0"/>
+              <a:t>to generate valid embeddings in this test due to dependency issues (excluded from conclusions).</a:t>
+            </a:r>
+            <a:endParaRPr lang="es-ES" dirty="0"/>
+          </a:p>
+        </p:txBody>
+      </p:sp>
+      <p:pic>
+        <p:nvPicPr>
+          <p:cNvPr id="8" name="Content Placeholder 7">
+            <a:extLst>
+              <a:ext uri="{FF2B5EF4-FFF2-40B4-BE49-F238E27FC236}">
+                <a16:creationId xmlns:a16="http://schemas.microsoft.com/office/drawing/2014/main" id="{0DF7B00E-0E90-E5B0-063E-008F12031085}"/>
+              </a:ext>
+            </a:extLst>
+          </p:cNvPr>
+          <p:cNvPicPr>
+            <a:picLocks noGrp="1" noChangeAspect="1"/>
+          </p:cNvPicPr>
+          <p:nvPr>
+            <p:ph idx="1"/>
+          </p:nvPr>
+        </p:nvPicPr>
+        <p:blipFill>
+          <a:blip r:embed="rId2"/>
+          <a:stretch>
+            <a:fillRect/>
+          </a:stretch>
+        </p:blipFill>
+        <p:spPr>
+          <a:xfrm>
+            <a:off x="5953025" y="1357102"/>
+            <a:ext cx="6225384" cy="2626896"/>
+          </a:xfrm>
+        </p:spPr>
+      </p:pic>
+      <p:pic>
+        <p:nvPicPr>
+          <p:cNvPr id="10" name="Picture 9">
+            <a:extLst>
+              <a:ext uri="{FF2B5EF4-FFF2-40B4-BE49-F238E27FC236}">
+                <a16:creationId xmlns:a16="http://schemas.microsoft.com/office/drawing/2014/main" id="{CA5BE67E-3C29-D1E6-24E3-86CD313A852A}"/>
+              </a:ext>
+            </a:extLst>
+          </p:cNvPr>
+          <p:cNvPicPr>
+            <a:picLocks noChangeAspect="1"/>
+          </p:cNvPicPr>
+          <p:nvPr/>
+        </p:nvPicPr>
+        <p:blipFill>
+          <a:blip r:embed="rId3"/>
+          <a:stretch>
+            <a:fillRect/>
+          </a:stretch>
+        </p:blipFill>
+        <p:spPr>
+          <a:xfrm>
+            <a:off x="5966616" y="3983998"/>
+            <a:ext cx="6225384" cy="2626896"/>
+          </a:xfrm>
+          <a:prstGeom prst="rect">
+            <a:avLst/>
+          </a:prstGeom>
+        </p:spPr>
+      </p:pic>
+    </p:spTree>
+    <p:extLst>
+      <p:ext uri="{BB962C8B-B14F-4D97-AF65-F5344CB8AC3E}">
+        <p14:creationId xmlns:p14="http://schemas.microsoft.com/office/powerpoint/2010/main" val="2152212823"/>
       </p:ext>
     </p:extLst>
   </p:cSld>
@@ -4883,6 +10014,2044 @@
     <p:extLst>
       <p:ext uri="{BB962C8B-B14F-4D97-AF65-F5344CB8AC3E}">
         <p14:creationId xmlns:p14="http://schemas.microsoft.com/office/powerpoint/2010/main" val="1294510381"/>
+      </p:ext>
+    </p:extLst>
+  </p:cSld>
+  <p:clrMapOvr>
+    <a:masterClrMapping/>
+  </p:clrMapOvr>
+</p:sld>
+</file>
+
+<file path=ppt/slides/slide20.xml><?xml version="1.0" encoding="utf-8"?>
+<p:sld xmlns:a="http://schemas.openxmlformats.org/drawingml/2006/main" xmlns:r="http://schemas.openxmlformats.org/officeDocument/2006/relationships" xmlns:p="http://schemas.openxmlformats.org/presentationml/2006/main">
+  <p:cSld>
+    <p:spTree>
+      <p:nvGrpSpPr>
+        <p:cNvPr id="1" name=""/>
+        <p:cNvGrpSpPr/>
+        <p:nvPr/>
+      </p:nvGrpSpPr>
+      <p:grpSpPr>
+        <a:xfrm>
+          <a:off x="0" y="0"/>
+          <a:ext cx="0" cy="0"/>
+          <a:chOff x="0" y="0"/>
+          <a:chExt cx="0" cy="0"/>
+        </a:xfrm>
+      </p:grpSpPr>
+      <p:sp>
+        <p:nvSpPr>
+          <p:cNvPr id="2" name="Title 1">
+            <a:extLst>
+              <a:ext uri="{FF2B5EF4-FFF2-40B4-BE49-F238E27FC236}">
+                <a16:creationId xmlns:a16="http://schemas.microsoft.com/office/drawing/2014/main" id="{E1D4A8BB-F858-1988-CD37-331E8D834DE7}"/>
+              </a:ext>
+            </a:extLst>
+          </p:cNvPr>
+          <p:cNvSpPr>
+            <a:spLocks noGrp="1"/>
+          </p:cNvSpPr>
+          <p:nvPr>
+            <p:ph type="title"/>
+          </p:nvPr>
+        </p:nvSpPr>
+        <p:spPr/>
+        <p:txBody>
+          <a:bodyPr/>
+          <a:lstStyle/>
+          <a:p>
+            <a:r>
+              <a:rPr lang="es-ES" dirty="0"/>
+              <a:t>Does Data </a:t>
+            </a:r>
+            <a:r>
+              <a:rPr lang="es-ES" dirty="0" err="1"/>
+              <a:t>Augmentation</a:t>
+            </a:r>
+            <a:r>
+              <a:rPr lang="es-ES" dirty="0"/>
+              <a:t> </a:t>
+            </a:r>
+            <a:r>
+              <a:rPr lang="es-ES" dirty="0" err="1"/>
+              <a:t>matter</a:t>
+            </a:r>
+            <a:r>
+              <a:rPr lang="es-ES" dirty="0"/>
+              <a:t>?</a:t>
+            </a:r>
+          </a:p>
+        </p:txBody>
+      </p:sp>
+      <p:pic>
+        <p:nvPicPr>
+          <p:cNvPr id="5" name="Content Placeholder 4">
+            <a:extLst>
+              <a:ext uri="{FF2B5EF4-FFF2-40B4-BE49-F238E27FC236}">
+                <a16:creationId xmlns:a16="http://schemas.microsoft.com/office/drawing/2014/main" id="{9096E8CE-B347-8A78-E148-ADB40881A08B}"/>
+              </a:ext>
+            </a:extLst>
+          </p:cNvPr>
+          <p:cNvPicPr>
+            <a:picLocks noGrp="1" noChangeAspect="1"/>
+          </p:cNvPicPr>
+          <p:nvPr>
+            <p:ph idx="1"/>
+          </p:nvPr>
+        </p:nvPicPr>
+        <p:blipFill>
+          <a:blip r:embed="rId2"/>
+          <a:stretch>
+            <a:fillRect/>
+          </a:stretch>
+        </p:blipFill>
+        <p:spPr>
+          <a:xfrm>
+            <a:off x="8248028" y="523782"/>
+            <a:ext cx="3943971" cy="2314231"/>
+          </a:xfrm>
+        </p:spPr>
+      </p:pic>
+      <p:pic>
+        <p:nvPicPr>
+          <p:cNvPr id="7" name="Picture 6">
+            <a:extLst>
+              <a:ext uri="{FF2B5EF4-FFF2-40B4-BE49-F238E27FC236}">
+                <a16:creationId xmlns:a16="http://schemas.microsoft.com/office/drawing/2014/main" id="{837202C7-07B7-520C-46AA-8E0D306CAFD1}"/>
+              </a:ext>
+            </a:extLst>
+          </p:cNvPr>
+          <p:cNvPicPr>
+            <a:picLocks noChangeAspect="1"/>
+          </p:cNvPicPr>
+          <p:nvPr/>
+        </p:nvPicPr>
+        <p:blipFill>
+          <a:blip r:embed="rId3"/>
+          <a:stretch>
+            <a:fillRect/>
+          </a:stretch>
+        </p:blipFill>
+        <p:spPr>
+          <a:xfrm>
+            <a:off x="8248029" y="2862871"/>
+            <a:ext cx="3943971" cy="1921248"/>
+          </a:xfrm>
+          <a:prstGeom prst="rect">
+            <a:avLst/>
+          </a:prstGeom>
+        </p:spPr>
+      </p:pic>
+      <p:pic>
+        <p:nvPicPr>
+          <p:cNvPr id="9" name="Picture 8">
+            <a:extLst>
+              <a:ext uri="{FF2B5EF4-FFF2-40B4-BE49-F238E27FC236}">
+                <a16:creationId xmlns:a16="http://schemas.microsoft.com/office/drawing/2014/main" id="{3DB7367C-3814-6ECF-E6EF-7380B51BFB4F}"/>
+              </a:ext>
+            </a:extLst>
+          </p:cNvPr>
+          <p:cNvPicPr>
+            <a:picLocks noChangeAspect="1"/>
+          </p:cNvPicPr>
+          <p:nvPr/>
+        </p:nvPicPr>
+        <p:blipFill>
+          <a:blip r:embed="rId4"/>
+          <a:stretch>
+            <a:fillRect/>
+          </a:stretch>
+        </p:blipFill>
+        <p:spPr>
+          <a:xfrm>
+            <a:off x="8248028" y="4808977"/>
+            <a:ext cx="3943972" cy="1921249"/>
+          </a:xfrm>
+          <a:prstGeom prst="rect">
+            <a:avLst/>
+          </a:prstGeom>
+        </p:spPr>
+      </p:pic>
+      <p:sp>
+        <p:nvSpPr>
+          <p:cNvPr id="10" name="TextBox 9">
+            <a:extLst>
+              <a:ext uri="{FF2B5EF4-FFF2-40B4-BE49-F238E27FC236}">
+                <a16:creationId xmlns:a16="http://schemas.microsoft.com/office/drawing/2014/main" id="{02C72DA1-4B66-7286-946B-E342E23E69FB}"/>
+              </a:ext>
+            </a:extLst>
+          </p:cNvPr>
+          <p:cNvSpPr txBox="1"/>
+          <p:nvPr/>
+        </p:nvSpPr>
+        <p:spPr>
+          <a:xfrm>
+            <a:off x="7786363" y="948460"/>
+            <a:ext cx="461665" cy="1653693"/>
+          </a:xfrm>
+          <a:prstGeom prst="rect">
+            <a:avLst/>
+          </a:prstGeom>
+          <a:noFill/>
+        </p:spPr>
+        <p:txBody>
+          <a:bodyPr vert="vert270" wrap="square" rtlCol="0">
+            <a:spAutoFit/>
+          </a:bodyPr>
+          <a:lstStyle/>
+          <a:p>
+            <a:r>
+              <a:rPr lang="es-ES" dirty="0" err="1"/>
+              <a:t>Classification</a:t>
+            </a:r>
+            <a:endParaRPr lang="es-ES" dirty="0"/>
+          </a:p>
+        </p:txBody>
+      </p:sp>
+      <p:sp>
+        <p:nvSpPr>
+          <p:cNvPr id="11" name="TextBox 10">
+            <a:extLst>
+              <a:ext uri="{FF2B5EF4-FFF2-40B4-BE49-F238E27FC236}">
+                <a16:creationId xmlns:a16="http://schemas.microsoft.com/office/drawing/2014/main" id="{1850E6B7-5F2F-C295-5BCE-0CD7B5AAF26C}"/>
+              </a:ext>
+            </a:extLst>
+          </p:cNvPr>
+          <p:cNvSpPr txBox="1"/>
+          <p:nvPr/>
+        </p:nvSpPr>
+        <p:spPr>
+          <a:xfrm>
+            <a:off x="7509364" y="2919424"/>
+            <a:ext cx="738664" cy="1653693"/>
+          </a:xfrm>
+          <a:prstGeom prst="rect">
+            <a:avLst/>
+          </a:prstGeom>
+          <a:noFill/>
+        </p:spPr>
+        <p:txBody>
+          <a:bodyPr vert="vert270" wrap="square" rtlCol="0">
+            <a:spAutoFit/>
+          </a:bodyPr>
+          <a:lstStyle/>
+          <a:p>
+            <a:pPr algn="ctr"/>
+            <a:r>
+              <a:rPr lang="es-ES" dirty="0" err="1"/>
+              <a:t>Validation</a:t>
+            </a:r>
+            <a:r>
+              <a:rPr lang="es-ES" dirty="0"/>
+              <a:t> Original Data</a:t>
+            </a:r>
+          </a:p>
+        </p:txBody>
+      </p:sp>
+      <p:sp>
+        <p:nvSpPr>
+          <p:cNvPr id="12" name="TextBox 11">
+            <a:extLst>
+              <a:ext uri="{FF2B5EF4-FFF2-40B4-BE49-F238E27FC236}">
+                <a16:creationId xmlns:a16="http://schemas.microsoft.com/office/drawing/2014/main" id="{83EB8173-1EC9-C37F-2393-AAFCFEF4BAB4}"/>
+              </a:ext>
+            </a:extLst>
+          </p:cNvPr>
+          <p:cNvSpPr txBox="1"/>
+          <p:nvPr/>
+        </p:nvSpPr>
+        <p:spPr>
+          <a:xfrm>
+            <a:off x="7509364" y="4782283"/>
+            <a:ext cx="738664" cy="1653693"/>
+          </a:xfrm>
+          <a:prstGeom prst="rect">
+            <a:avLst/>
+          </a:prstGeom>
+          <a:noFill/>
+        </p:spPr>
+        <p:txBody>
+          <a:bodyPr vert="vert270" wrap="square" rtlCol="0">
+            <a:spAutoFit/>
+          </a:bodyPr>
+          <a:lstStyle/>
+          <a:p>
+            <a:pPr algn="ctr"/>
+            <a:r>
+              <a:rPr lang="es-ES" dirty="0" err="1"/>
+              <a:t>Validation</a:t>
+            </a:r>
+            <a:r>
+              <a:rPr lang="es-ES" dirty="0"/>
+              <a:t> </a:t>
+            </a:r>
+            <a:r>
+              <a:rPr lang="es-ES" dirty="0" err="1"/>
+              <a:t>Augmented</a:t>
+            </a:r>
+            <a:endParaRPr lang="es-ES" dirty="0"/>
+          </a:p>
+        </p:txBody>
+      </p:sp>
+      <p:sp>
+        <p:nvSpPr>
+          <p:cNvPr id="15" name="TextBox 14">
+            <a:extLst>
+              <a:ext uri="{FF2B5EF4-FFF2-40B4-BE49-F238E27FC236}">
+                <a16:creationId xmlns:a16="http://schemas.microsoft.com/office/drawing/2014/main" id="{BB6B339E-4AB4-5EDA-95D6-EACBB8DF960C}"/>
+              </a:ext>
+            </a:extLst>
+          </p:cNvPr>
+          <p:cNvSpPr txBox="1"/>
+          <p:nvPr/>
+        </p:nvSpPr>
+        <p:spPr>
+          <a:xfrm>
+            <a:off x="593631" y="1207113"/>
+            <a:ext cx="6728623" cy="5078313"/>
+          </a:xfrm>
+          <a:prstGeom prst="rect">
+            <a:avLst/>
+          </a:prstGeom>
+          <a:noFill/>
+        </p:spPr>
+        <p:txBody>
+          <a:bodyPr wrap="square" rtlCol="0">
+            <a:spAutoFit/>
+          </a:bodyPr>
+          <a:lstStyle/>
+          <a:p>
+            <a:r>
+              <a:rPr lang="en-US" b="1" dirty="0"/>
+              <a:t>Augmentation increases F1-score </a:t>
+            </a:r>
+            <a:r>
+              <a:rPr lang="en-US" dirty="0"/>
+              <a:t>in classification by almost </a:t>
+            </a:r>
+            <a:r>
+              <a:rPr lang="en-US" b="1" dirty="0"/>
+              <a:t>19%</a:t>
+            </a:r>
+            <a:r>
+              <a:rPr lang="en-US" dirty="0"/>
+              <a:t>.</a:t>
+            </a:r>
+          </a:p>
+          <a:p>
+            <a:r>
+              <a:rPr lang="en-US" dirty="0"/>
+              <a:t>In </a:t>
+            </a:r>
+            <a:r>
+              <a:rPr lang="en-US" b="1" dirty="0"/>
+              <a:t>validation</a:t>
+            </a:r>
+            <a:r>
+              <a:rPr lang="en-US" dirty="0"/>
+              <a:t>, depends </a:t>
+            </a:r>
+            <a:r>
+              <a:rPr lang="en-US" dirty="0" err="1"/>
+              <a:t>wether</a:t>
+            </a:r>
+            <a:r>
+              <a:rPr lang="en-US" dirty="0"/>
+              <a:t> the models were </a:t>
+            </a:r>
+            <a:r>
+              <a:rPr lang="en-US" b="1" dirty="0"/>
+              <a:t>trained</a:t>
+            </a:r>
+            <a:r>
+              <a:rPr lang="en-US" dirty="0"/>
+              <a:t> with </a:t>
+            </a:r>
+            <a:r>
+              <a:rPr lang="en-US" b="1" dirty="0"/>
+              <a:t>original data </a:t>
+            </a:r>
+            <a:r>
+              <a:rPr lang="en-US" dirty="0"/>
+              <a:t>(</a:t>
+            </a:r>
+            <a:r>
+              <a:rPr lang="en-US" i="1" dirty="0"/>
+              <a:t>worse results</a:t>
+            </a:r>
+            <a:r>
+              <a:rPr lang="en-US" dirty="0"/>
+              <a:t>) or also with </a:t>
+            </a:r>
+            <a:r>
+              <a:rPr lang="en-US" b="1" dirty="0"/>
+              <a:t>augmented data </a:t>
+            </a:r>
+            <a:r>
+              <a:rPr lang="en-US" dirty="0"/>
+              <a:t>(</a:t>
+            </a:r>
+            <a:r>
+              <a:rPr lang="en-US" i="1" dirty="0"/>
+              <a:t>noticeable improvement</a:t>
+            </a:r>
+            <a:r>
+              <a:rPr lang="en-US" dirty="0"/>
+              <a:t>)</a:t>
+            </a:r>
+          </a:p>
+          <a:p>
+            <a:endParaRPr lang="en-US" dirty="0"/>
+          </a:p>
+          <a:p>
+            <a:pPr marL="285750" indent="-285750">
+              <a:buFont typeface="Arial" panose="020B0604020202020204" pitchFamily="34" charset="0"/>
+              <a:buChar char="•"/>
+            </a:pPr>
+            <a:r>
+              <a:rPr lang="en-US" b="1" dirty="0"/>
+              <a:t>Augmentation is critical for improving classification accuracy across all architectures.</a:t>
+            </a:r>
+          </a:p>
+          <a:p>
+            <a:pPr marL="285750" indent="-285750">
+              <a:buFont typeface="Arial" panose="020B0604020202020204" pitchFamily="34" charset="0"/>
+              <a:buChar char="•"/>
+            </a:pPr>
+            <a:endParaRPr lang="en-US" dirty="0"/>
+          </a:p>
+          <a:p>
+            <a:pPr marL="285750" indent="-285750">
+              <a:buFont typeface="Arial" panose="020B0604020202020204" pitchFamily="34" charset="0"/>
+              <a:buChar char="•"/>
+            </a:pPr>
+            <a:r>
+              <a:rPr lang="en-US" b="1" dirty="0"/>
+              <a:t>For validation</a:t>
+            </a:r>
+            <a:r>
+              <a:rPr lang="en-US" dirty="0"/>
+              <a:t>, augmentation must be mirrored in both </a:t>
+            </a:r>
+            <a:r>
+              <a:rPr lang="en-US" b="1" dirty="0"/>
+              <a:t>training and evaluation </a:t>
+            </a:r>
+            <a:r>
+              <a:rPr lang="en-US" dirty="0"/>
+              <a:t>to be effective.</a:t>
+            </a:r>
+          </a:p>
+          <a:p>
+            <a:pPr marL="285750" indent="-285750">
+              <a:buFont typeface="Arial" panose="020B0604020202020204" pitchFamily="34" charset="0"/>
+              <a:buChar char="•"/>
+            </a:pPr>
+            <a:endParaRPr lang="en-US" dirty="0"/>
+          </a:p>
+          <a:p>
+            <a:pPr marL="285750" indent="-285750">
+              <a:buFont typeface="Arial" panose="020B0604020202020204" pitchFamily="34" charset="0"/>
+              <a:buChar char="•"/>
+            </a:pPr>
+            <a:r>
+              <a:rPr lang="en-US" b="1" dirty="0"/>
+              <a:t>Best results </a:t>
+            </a:r>
+            <a:r>
+              <a:rPr lang="en-US" dirty="0"/>
+              <a:t>come from combining </a:t>
+            </a:r>
+            <a:r>
+              <a:rPr lang="en-US" b="1" dirty="0"/>
+              <a:t>augmentation and fine-tuning</a:t>
+            </a:r>
+            <a:r>
+              <a:rPr lang="en-US" dirty="0"/>
+              <a:t>, as seen in VGG16 Custom Augmented.</a:t>
+            </a:r>
+          </a:p>
+          <a:p>
+            <a:pPr marL="285750" indent="-285750">
+              <a:buFont typeface="Arial" panose="020B0604020202020204" pitchFamily="34" charset="0"/>
+              <a:buChar char="•"/>
+            </a:pPr>
+            <a:endParaRPr lang="en-US" dirty="0"/>
+          </a:p>
+          <a:p>
+            <a:pPr marL="285750" indent="-285750">
+              <a:buFont typeface="Arial" panose="020B0604020202020204" pitchFamily="34" charset="0"/>
+              <a:buChar char="•"/>
+            </a:pPr>
+            <a:r>
+              <a:rPr lang="en-US" dirty="0"/>
+              <a:t>Embedding-based pipelines are highly sensitive to image distribution — augmentation must be controlled and consistent.</a:t>
+            </a:r>
+            <a:endParaRPr lang="es-ES" dirty="0"/>
+          </a:p>
+        </p:txBody>
+      </p:sp>
+      <p:sp>
+        <p:nvSpPr>
+          <p:cNvPr id="17" name="TextBox 16">
+            <a:extLst>
+              <a:ext uri="{FF2B5EF4-FFF2-40B4-BE49-F238E27FC236}">
+                <a16:creationId xmlns:a16="http://schemas.microsoft.com/office/drawing/2014/main" id="{E049EDF7-9229-030B-A16F-A74ABDE41563}"/>
+              </a:ext>
+            </a:extLst>
+          </p:cNvPr>
+          <p:cNvSpPr txBox="1"/>
+          <p:nvPr/>
+        </p:nvSpPr>
+        <p:spPr>
+          <a:xfrm>
+            <a:off x="8248029" y="6334218"/>
+            <a:ext cx="1867522" cy="523220"/>
+          </a:xfrm>
+          <a:prstGeom prst="rect">
+            <a:avLst/>
+          </a:prstGeom>
+          <a:noFill/>
+        </p:spPr>
+        <p:txBody>
+          <a:bodyPr wrap="square" rtlCol="0">
+            <a:spAutoFit/>
+          </a:bodyPr>
+          <a:lstStyle/>
+          <a:p>
+            <a:pPr algn="ctr"/>
+            <a:r>
+              <a:rPr lang="es-ES" sz="1400" b="1" dirty="0">
+                <a:solidFill>
+                  <a:srgbClr val="0070C0"/>
+                </a:solidFill>
+              </a:rPr>
+              <a:t>EER (</a:t>
+            </a:r>
+            <a:r>
+              <a:rPr lang="es-ES" sz="1400" b="1" dirty="0" err="1">
+                <a:solidFill>
+                  <a:srgbClr val="0070C0"/>
+                </a:solidFill>
+              </a:rPr>
+              <a:t>Lower</a:t>
+            </a:r>
+            <a:r>
+              <a:rPr lang="es-ES" sz="1400" b="1" dirty="0">
+                <a:solidFill>
+                  <a:srgbClr val="0070C0"/>
+                </a:solidFill>
+              </a:rPr>
+              <a:t> is Better)</a:t>
+            </a:r>
+          </a:p>
+        </p:txBody>
+      </p:sp>
+      <p:sp>
+        <p:nvSpPr>
+          <p:cNvPr id="18" name="TextBox 17">
+            <a:extLst>
+              <a:ext uri="{FF2B5EF4-FFF2-40B4-BE49-F238E27FC236}">
+                <a16:creationId xmlns:a16="http://schemas.microsoft.com/office/drawing/2014/main" id="{50CFB9DB-E750-8F94-D6FC-4BB043335BEB}"/>
+              </a:ext>
+            </a:extLst>
+          </p:cNvPr>
+          <p:cNvSpPr txBox="1"/>
+          <p:nvPr/>
+        </p:nvSpPr>
+        <p:spPr>
+          <a:xfrm>
+            <a:off x="10332465" y="6334780"/>
+            <a:ext cx="1867522" cy="523220"/>
+          </a:xfrm>
+          <a:prstGeom prst="rect">
+            <a:avLst/>
+          </a:prstGeom>
+          <a:noFill/>
+        </p:spPr>
+        <p:txBody>
+          <a:bodyPr wrap="square" rtlCol="0">
+            <a:spAutoFit/>
+          </a:bodyPr>
+          <a:lstStyle/>
+          <a:p>
+            <a:pPr algn="ctr"/>
+            <a:r>
+              <a:rPr lang="es-ES" sz="1400" b="1" dirty="0">
+                <a:solidFill>
+                  <a:schemeClr val="accent6">
+                    <a:lumMod val="75000"/>
+                  </a:schemeClr>
+                </a:solidFill>
+              </a:rPr>
+              <a:t>AUC (</a:t>
+            </a:r>
+            <a:r>
+              <a:rPr lang="es-ES" sz="1400" b="1" dirty="0" err="1">
+                <a:solidFill>
+                  <a:schemeClr val="accent6">
+                    <a:lumMod val="75000"/>
+                  </a:schemeClr>
+                </a:solidFill>
+              </a:rPr>
+              <a:t>Higher</a:t>
+            </a:r>
+            <a:r>
+              <a:rPr lang="es-ES" sz="1400" b="1" dirty="0">
+                <a:solidFill>
+                  <a:schemeClr val="accent6">
+                    <a:lumMod val="75000"/>
+                  </a:schemeClr>
+                </a:solidFill>
+              </a:rPr>
+              <a:t> is Better)</a:t>
+            </a:r>
+          </a:p>
+        </p:txBody>
+      </p:sp>
+    </p:spTree>
+    <p:extLst>
+      <p:ext uri="{BB962C8B-B14F-4D97-AF65-F5344CB8AC3E}">
+        <p14:creationId xmlns:p14="http://schemas.microsoft.com/office/powerpoint/2010/main" val="2605861646"/>
+      </p:ext>
+    </p:extLst>
+  </p:cSld>
+  <p:clrMapOvr>
+    <a:masterClrMapping/>
+  </p:clrMapOvr>
+</p:sld>
+</file>
+
+<file path=ppt/slides/slide21.xml><?xml version="1.0" encoding="utf-8"?>
+<p:sld xmlns:a="http://schemas.openxmlformats.org/drawingml/2006/main" xmlns:r="http://schemas.openxmlformats.org/officeDocument/2006/relationships" xmlns:p="http://schemas.openxmlformats.org/presentationml/2006/main">
+  <p:cSld>
+    <p:bg>
+      <p:bgPr>
+        <a:solidFill>
+          <a:schemeClr val="bg1"/>
+        </a:solidFill>
+        <a:effectLst/>
+      </p:bgPr>
+    </p:bg>
+    <p:spTree>
+      <p:nvGrpSpPr>
+        <p:cNvPr id="1" name=""/>
+        <p:cNvGrpSpPr/>
+        <p:nvPr/>
+      </p:nvGrpSpPr>
+      <p:grpSpPr>
+        <a:xfrm>
+          <a:off x="0" y="0"/>
+          <a:ext cx="0" cy="0"/>
+          <a:chOff x="0" y="0"/>
+          <a:chExt cx="0" cy="0"/>
+        </a:xfrm>
+      </p:grpSpPr>
+      <p:sp useBgFill="1">
+        <p:nvSpPr>
+          <p:cNvPr id="9" name="Rectangle 8">
+            <a:extLst>
+              <a:ext uri="{FF2B5EF4-FFF2-40B4-BE49-F238E27FC236}">
+                <a16:creationId xmlns:a16="http://schemas.microsoft.com/office/drawing/2014/main" id="{2961259D-605E-E200-FF9F-7C8C71D7C8E4}"/>
+              </a:ext>
+              <a:ext uri="{C183D7F6-B498-43B3-948B-1728B52AA6E4}">
+                <adec:decorative xmlns:adec="http://schemas.microsoft.com/office/drawing/2017/decorative" val="1"/>
+              </a:ext>
+            </a:extLst>
+          </p:cNvPr>
+          <p:cNvSpPr>
+            <a:spLocks noGrp="1" noRot="1" noChangeAspect="1" noMove="1" noResize="1" noEditPoints="1" noAdjustHandles="1" noChangeArrowheads="1" noChangeShapeType="1" noTextEdit="1"/>
+          </p:cNvSpPr>
+          <p:nvPr>
+            <p:extLst>
+              <p:ext uri="{386F3935-93C4-4BCD-93E2-E3B085C9AB24}">
+                <p16:designElem xmlns:p16="http://schemas.microsoft.com/office/powerpoint/2015/main" val="1"/>
+              </p:ext>
+            </p:extLst>
+          </p:nvPr>
+        </p:nvSpPr>
+        <p:spPr>
+          <a:xfrm>
+            <a:off x="0" y="0"/>
+            <a:ext cx="12192000" cy="6858000"/>
+          </a:xfrm>
+          <a:prstGeom prst="rect">
+            <a:avLst/>
+          </a:prstGeom>
+          <a:ln w="12700" cap="flat" cmpd="sng" algn="ctr">
+            <a:noFill/>
+            <a:prstDash val="solid"/>
+            <a:miter lim="800000"/>
+          </a:ln>
+          <a:effectLst/>
+          <a:extLst>
+            <a:ext uri="{91240B29-F687-4F45-9708-019B960494DF}">
+              <a14:hiddenLine xmlns:a14="http://schemas.microsoft.com/office/drawing/2010/main" w="12700" cap="flat" cmpd="sng" algn="ctr">
+                <a:solidFill>
+                  <a:schemeClr val="accent1">
+                    <a:shade val="15000"/>
+                  </a:schemeClr>
+                </a:solidFill>
+                <a:prstDash val="solid"/>
+                <a:miter lim="800000"/>
+              </a14:hiddenLine>
+            </a:ext>
+          </a:extLst>
+        </p:spPr>
+        <p:style>
+          <a:lnRef idx="2">
+            <a:schemeClr val="accent1">
+              <a:shade val="15000"/>
+            </a:schemeClr>
+          </a:lnRef>
+          <a:fillRef idx="1">
+            <a:schemeClr val="accent1"/>
+          </a:fillRef>
+          <a:effectRef idx="0">
+            <a:schemeClr val="accent1"/>
+          </a:effectRef>
+          <a:fontRef idx="minor">
+            <a:schemeClr val="lt1"/>
+          </a:fontRef>
+        </p:style>
+        <p:txBody>
+          <a:bodyPr rtlCol="0" anchor="ctr"/>
+          <a:lstStyle/>
+          <a:p>
+            <a:pPr algn="ctr"/>
+            <a:endParaRPr lang="en-US"/>
+          </a:p>
+        </p:txBody>
+      </p:sp>
+      <p:sp>
+        <p:nvSpPr>
+          <p:cNvPr id="2" name="Title 1">
+            <a:extLst>
+              <a:ext uri="{FF2B5EF4-FFF2-40B4-BE49-F238E27FC236}">
+                <a16:creationId xmlns:a16="http://schemas.microsoft.com/office/drawing/2014/main" id="{FBEC1642-0856-56FB-A658-7318B400EB43}"/>
+              </a:ext>
+            </a:extLst>
+          </p:cNvPr>
+          <p:cNvSpPr>
+            <a:spLocks noGrp="1"/>
+          </p:cNvSpPr>
+          <p:nvPr>
+            <p:ph type="title"/>
+          </p:nvPr>
+        </p:nvSpPr>
+        <p:spPr>
+          <a:xfrm>
+            <a:off x="612648" y="600074"/>
+            <a:ext cx="6035040" cy="651210"/>
+          </a:xfrm>
+        </p:spPr>
+        <p:txBody>
+          <a:bodyPr anchor="b">
+            <a:normAutofit/>
+          </a:bodyPr>
+          <a:lstStyle/>
+          <a:p>
+            <a:r>
+              <a:rPr lang="es-ES" dirty="0" err="1"/>
+              <a:t>Conclusions</a:t>
+            </a:r>
+            <a:endParaRPr lang="es-ES" dirty="0"/>
+          </a:p>
+        </p:txBody>
+      </p:sp>
+      <p:sp>
+        <p:nvSpPr>
+          <p:cNvPr id="3" name="Content Placeholder 2">
+            <a:extLst>
+              <a:ext uri="{FF2B5EF4-FFF2-40B4-BE49-F238E27FC236}">
+                <a16:creationId xmlns:a16="http://schemas.microsoft.com/office/drawing/2014/main" id="{08DC2150-CC29-4060-0A45-C056046205A2}"/>
+              </a:ext>
+            </a:extLst>
+          </p:cNvPr>
+          <p:cNvSpPr>
+            <a:spLocks noGrp="1"/>
+          </p:cNvSpPr>
+          <p:nvPr>
+            <p:ph idx="1"/>
+          </p:nvPr>
+        </p:nvSpPr>
+        <p:spPr>
+          <a:xfrm>
+            <a:off x="612647" y="1411705"/>
+            <a:ext cx="6035041" cy="5213684"/>
+          </a:xfrm>
+        </p:spPr>
+        <p:txBody>
+          <a:bodyPr>
+            <a:normAutofit fontScale="92500" lnSpcReduction="10000"/>
+          </a:bodyPr>
+          <a:lstStyle/>
+          <a:p>
+            <a:pPr>
+              <a:lnSpc>
+                <a:spcPct val="110000"/>
+              </a:lnSpc>
+              <a:buFont typeface="Arial" panose="020B0604020202020204" pitchFamily="34" charset="0"/>
+              <a:buChar char="•"/>
+            </a:pPr>
+            <a:r>
+              <a:rPr lang="en-US" b="1" dirty="0"/>
+              <a:t>Custom fine-tuned CNNs, especially VGG16 and MobileNetV2, deliver the strongest performance</a:t>
+            </a:r>
+            <a:r>
+              <a:rPr lang="en-US" dirty="0"/>
+              <a:t> across both classification and verification tasks when trained on augmented data.</a:t>
+            </a:r>
+          </a:p>
+          <a:p>
+            <a:pPr>
+              <a:lnSpc>
+                <a:spcPct val="110000"/>
+              </a:lnSpc>
+              <a:buFont typeface="Arial" panose="020B0604020202020204" pitchFamily="34" charset="0"/>
+              <a:buChar char="•"/>
+            </a:pPr>
+            <a:r>
+              <a:rPr lang="en-US" b="1" dirty="0"/>
+              <a:t>Embedding-based pipelines (</a:t>
+            </a:r>
+            <a:r>
+              <a:rPr lang="en-US" b="1" dirty="0" err="1"/>
+              <a:t>ArcFace</a:t>
+            </a:r>
+            <a:r>
+              <a:rPr lang="en-US" b="1" dirty="0"/>
+              <a:t>, </a:t>
+            </a:r>
+            <a:r>
+              <a:rPr lang="en-US" b="1" dirty="0" err="1"/>
+              <a:t>FaceNet</a:t>
+            </a:r>
+            <a:r>
+              <a:rPr lang="en-US" b="1" dirty="0"/>
+              <a:t> + KNN) are also highly effective</a:t>
+            </a:r>
+            <a:r>
+              <a:rPr lang="en-US" dirty="0"/>
+              <a:t>, particularly in classification — but rely on clean, consistent input data and may struggle with verification if embeddings are misaligned.</a:t>
+            </a:r>
+          </a:p>
+          <a:p>
+            <a:pPr>
+              <a:lnSpc>
+                <a:spcPct val="110000"/>
+              </a:lnSpc>
+              <a:buFont typeface="Arial" panose="020B0604020202020204" pitchFamily="34" charset="0"/>
+              <a:buChar char="•"/>
+            </a:pPr>
+            <a:r>
+              <a:rPr lang="en-US" b="1" dirty="0"/>
+              <a:t>Traditional methods (PCA, LBP)</a:t>
+            </a:r>
+            <a:r>
+              <a:rPr lang="en-US" dirty="0"/>
+              <a:t> perform significantly worse, even with augmentation, and are not suitable for high-accuracy recognition.</a:t>
+            </a:r>
+          </a:p>
+          <a:p>
+            <a:pPr>
+              <a:lnSpc>
+                <a:spcPct val="110000"/>
+              </a:lnSpc>
+              <a:buFont typeface="Arial" panose="020B0604020202020204" pitchFamily="34" charset="0"/>
+              <a:buChar char="•"/>
+            </a:pPr>
+            <a:r>
+              <a:rPr lang="en-US" b="1" dirty="0"/>
+              <a:t>Augmentation </a:t>
+            </a:r>
+            <a:r>
+              <a:rPr lang="en-US" dirty="0"/>
+              <a:t>generally improves significantly a CNN model capabilities.</a:t>
+            </a:r>
+            <a:endParaRPr lang="en-US" b="1" dirty="0"/>
+          </a:p>
+          <a:p>
+            <a:pPr>
+              <a:lnSpc>
+                <a:spcPct val="110000"/>
+              </a:lnSpc>
+            </a:pPr>
+            <a:endParaRPr lang="es-ES" sz="1800" dirty="0"/>
+          </a:p>
+        </p:txBody>
+      </p:sp>
+      <p:pic>
+        <p:nvPicPr>
+          <p:cNvPr id="5" name="Picture 4" descr="A robot with human face">
+            <a:extLst>
+              <a:ext uri="{FF2B5EF4-FFF2-40B4-BE49-F238E27FC236}">
+                <a16:creationId xmlns:a16="http://schemas.microsoft.com/office/drawing/2014/main" id="{64B5D145-256D-EB4B-50AA-B364EEC57B1F}"/>
+              </a:ext>
+            </a:extLst>
+          </p:cNvPr>
+          <p:cNvPicPr>
+            <a:picLocks noChangeAspect="1"/>
+          </p:cNvPicPr>
+          <p:nvPr/>
+        </p:nvPicPr>
+        <p:blipFill>
+          <a:blip r:embed="rId2"/>
+          <a:srcRect l="23361" r="29468" b="-1"/>
+          <a:stretch>
+            <a:fillRect/>
+          </a:stretch>
+        </p:blipFill>
+        <p:spPr>
+          <a:xfrm>
+            <a:off x="7345680" y="10"/>
+            <a:ext cx="4846320" cy="6857990"/>
+          </a:xfrm>
+          <a:prstGeom prst="rect">
+            <a:avLst/>
+          </a:prstGeom>
+        </p:spPr>
+      </p:pic>
+    </p:spTree>
+    <p:extLst>
+      <p:ext uri="{BB962C8B-B14F-4D97-AF65-F5344CB8AC3E}">
+        <p14:creationId xmlns:p14="http://schemas.microsoft.com/office/powerpoint/2010/main" val="551498668"/>
+      </p:ext>
+    </p:extLst>
+  </p:cSld>
+  <p:clrMapOvr>
+    <a:masterClrMapping/>
+  </p:clrMapOvr>
+</p:sld>
+</file>
+
+<file path=ppt/slides/slide22.xml><?xml version="1.0" encoding="utf-8"?>
+<p:sld xmlns:a="http://schemas.openxmlformats.org/drawingml/2006/main" xmlns:r="http://schemas.openxmlformats.org/officeDocument/2006/relationships" xmlns:p="http://schemas.openxmlformats.org/presentationml/2006/main">
+  <p:cSld>
+    <p:bg>
+      <p:bgPr>
+        <a:solidFill>
+          <a:schemeClr val="bg1"/>
+        </a:solidFill>
+        <a:effectLst/>
+      </p:bgPr>
+    </p:bg>
+    <p:spTree>
+      <p:nvGrpSpPr>
+        <p:cNvPr id="1" name=""/>
+        <p:cNvGrpSpPr/>
+        <p:nvPr/>
+      </p:nvGrpSpPr>
+      <p:grpSpPr>
+        <a:xfrm>
+          <a:off x="0" y="0"/>
+          <a:ext cx="0" cy="0"/>
+          <a:chOff x="0" y="0"/>
+          <a:chExt cx="0" cy="0"/>
+        </a:xfrm>
+      </p:grpSpPr>
+      <p:sp useBgFill="1">
+        <p:nvSpPr>
+          <p:cNvPr id="9" name="Rectangle 8">
+            <a:extLst>
+              <a:ext uri="{FF2B5EF4-FFF2-40B4-BE49-F238E27FC236}">
+                <a16:creationId xmlns:a16="http://schemas.microsoft.com/office/drawing/2014/main" id="{2961259D-605E-E200-FF9F-7C8C71D7C8E4}"/>
+              </a:ext>
+              <a:ext uri="{C183D7F6-B498-43B3-948B-1728B52AA6E4}">
+                <adec:decorative xmlns:adec="http://schemas.microsoft.com/office/drawing/2017/decorative" val="1"/>
+              </a:ext>
+            </a:extLst>
+          </p:cNvPr>
+          <p:cNvSpPr>
+            <a:spLocks noGrp="1" noRot="1" noChangeAspect="1" noMove="1" noResize="1" noEditPoints="1" noAdjustHandles="1" noChangeArrowheads="1" noChangeShapeType="1" noTextEdit="1"/>
+          </p:cNvSpPr>
+          <p:nvPr>
+            <p:extLst>
+              <p:ext uri="{386F3935-93C4-4BCD-93E2-E3B085C9AB24}">
+                <p16:designElem xmlns:p16="http://schemas.microsoft.com/office/powerpoint/2015/main" val="1"/>
+              </p:ext>
+            </p:extLst>
+          </p:nvPr>
+        </p:nvSpPr>
+        <p:spPr>
+          <a:xfrm>
+            <a:off x="0" y="0"/>
+            <a:ext cx="12192000" cy="6858000"/>
+          </a:xfrm>
+          <a:prstGeom prst="rect">
+            <a:avLst/>
+          </a:prstGeom>
+          <a:ln w="12700" cap="flat" cmpd="sng" algn="ctr">
+            <a:noFill/>
+            <a:prstDash val="solid"/>
+            <a:miter lim="800000"/>
+          </a:ln>
+          <a:effectLst/>
+          <a:extLst>
+            <a:ext uri="{91240B29-F687-4F45-9708-019B960494DF}">
+              <a14:hiddenLine xmlns:a14="http://schemas.microsoft.com/office/drawing/2010/main" w="12700" cap="flat" cmpd="sng" algn="ctr">
+                <a:solidFill>
+                  <a:schemeClr val="accent1">
+                    <a:shade val="15000"/>
+                  </a:schemeClr>
+                </a:solidFill>
+                <a:prstDash val="solid"/>
+                <a:miter lim="800000"/>
+              </a14:hiddenLine>
+            </a:ext>
+          </a:extLst>
+        </p:spPr>
+        <p:style>
+          <a:lnRef idx="2">
+            <a:schemeClr val="accent1">
+              <a:shade val="15000"/>
+            </a:schemeClr>
+          </a:lnRef>
+          <a:fillRef idx="1">
+            <a:schemeClr val="accent1"/>
+          </a:fillRef>
+          <a:effectRef idx="0">
+            <a:schemeClr val="accent1"/>
+          </a:effectRef>
+          <a:fontRef idx="minor">
+            <a:schemeClr val="lt1"/>
+          </a:fontRef>
+        </p:style>
+        <p:txBody>
+          <a:bodyPr rtlCol="0" anchor="ctr"/>
+          <a:lstStyle/>
+          <a:p>
+            <a:pPr algn="ctr"/>
+            <a:endParaRPr lang="en-US"/>
+          </a:p>
+        </p:txBody>
+      </p:sp>
+      <p:sp>
+        <p:nvSpPr>
+          <p:cNvPr id="2" name="Title 1">
+            <a:extLst>
+              <a:ext uri="{FF2B5EF4-FFF2-40B4-BE49-F238E27FC236}">
+                <a16:creationId xmlns:a16="http://schemas.microsoft.com/office/drawing/2014/main" id="{1DEB7DDF-20EA-DB5D-7462-FA8CACA19853}"/>
+              </a:ext>
+            </a:extLst>
+          </p:cNvPr>
+          <p:cNvSpPr>
+            <a:spLocks noGrp="1"/>
+          </p:cNvSpPr>
+          <p:nvPr>
+            <p:ph type="title"/>
+          </p:nvPr>
+        </p:nvSpPr>
+        <p:spPr>
+          <a:xfrm>
+            <a:off x="612648" y="600074"/>
+            <a:ext cx="6035040" cy="667252"/>
+          </a:xfrm>
+        </p:spPr>
+        <p:txBody>
+          <a:bodyPr anchor="b">
+            <a:normAutofit/>
+          </a:bodyPr>
+          <a:lstStyle/>
+          <a:p>
+            <a:r>
+              <a:rPr lang="es-ES" dirty="0" err="1"/>
+              <a:t>Conclusion</a:t>
+            </a:r>
+            <a:r>
+              <a:rPr lang="es-ES" dirty="0"/>
+              <a:t> 2</a:t>
+            </a:r>
+          </a:p>
+        </p:txBody>
+      </p:sp>
+      <p:sp>
+        <p:nvSpPr>
+          <p:cNvPr id="3" name="Content Placeholder 2">
+            <a:extLst>
+              <a:ext uri="{FF2B5EF4-FFF2-40B4-BE49-F238E27FC236}">
+                <a16:creationId xmlns:a16="http://schemas.microsoft.com/office/drawing/2014/main" id="{D3A9411C-6CFE-1F25-BCCC-DB1A9C091B9B}"/>
+              </a:ext>
+            </a:extLst>
+          </p:cNvPr>
+          <p:cNvSpPr>
+            <a:spLocks noGrp="1"/>
+          </p:cNvSpPr>
+          <p:nvPr>
+            <p:ph idx="1"/>
+          </p:nvPr>
+        </p:nvSpPr>
+        <p:spPr>
+          <a:xfrm>
+            <a:off x="612647" y="1267326"/>
+            <a:ext cx="6035041" cy="5042034"/>
+          </a:xfrm>
+        </p:spPr>
+        <p:txBody>
+          <a:bodyPr>
+            <a:normAutofit/>
+          </a:bodyPr>
+          <a:lstStyle/>
+          <a:p>
+            <a:r>
+              <a:rPr lang="en-US" sz="1800" dirty="0"/>
+              <a:t>All top-performing models used in this project are publicly available and open source, making them accessible to developers and researchers without proprietary restrictions.</a:t>
+            </a:r>
+          </a:p>
+          <a:p>
+            <a:r>
+              <a:rPr lang="en-US" sz="1800" dirty="0"/>
+              <a:t>With proper input alignment, light preprocessing, and dataset-specific fine-tuning, these models can rival commercial solutions for many use cases — such as attendance tracking, personal security, or identity validation.</a:t>
+            </a:r>
+          </a:p>
+          <a:p>
+            <a:r>
+              <a:rPr lang="en-US" sz="1800" dirty="0"/>
+              <a:t>Final performance and deployment depend not just on model choice but also on pipeline design, preprocessing consistency, domain adaptation and specific target device.</a:t>
+            </a:r>
+          </a:p>
+        </p:txBody>
+      </p:sp>
+      <p:pic>
+        <p:nvPicPr>
+          <p:cNvPr id="5" name="Picture 4" descr="Mobile device with apps">
+            <a:extLst>
+              <a:ext uri="{FF2B5EF4-FFF2-40B4-BE49-F238E27FC236}">
+                <a16:creationId xmlns:a16="http://schemas.microsoft.com/office/drawing/2014/main" id="{CD32A0B8-F16D-A91B-F964-A921BDDBB1EE}"/>
+              </a:ext>
+            </a:extLst>
+          </p:cNvPr>
+          <p:cNvPicPr>
+            <a:picLocks noChangeAspect="1"/>
+          </p:cNvPicPr>
+          <p:nvPr/>
+        </p:nvPicPr>
+        <p:blipFill>
+          <a:blip r:embed="rId2"/>
+          <a:srcRect l="49910" r="10340"/>
+          <a:stretch>
+            <a:fillRect/>
+          </a:stretch>
+        </p:blipFill>
+        <p:spPr>
+          <a:xfrm>
+            <a:off x="7345680" y="10"/>
+            <a:ext cx="4846320" cy="6857990"/>
+          </a:xfrm>
+          <a:prstGeom prst="rect">
+            <a:avLst/>
+          </a:prstGeom>
+        </p:spPr>
+      </p:pic>
+    </p:spTree>
+    <p:extLst>
+      <p:ext uri="{BB962C8B-B14F-4D97-AF65-F5344CB8AC3E}">
+        <p14:creationId xmlns:p14="http://schemas.microsoft.com/office/powerpoint/2010/main" val="2810167478"/>
+      </p:ext>
+    </p:extLst>
+  </p:cSld>
+  <p:clrMapOvr>
+    <a:masterClrMapping/>
+  </p:clrMapOvr>
+</p:sld>
+</file>
+
+<file path=ppt/slides/slide23.xml><?xml version="1.0" encoding="utf-8"?>
+<p:sld xmlns:a="http://schemas.openxmlformats.org/drawingml/2006/main" xmlns:r="http://schemas.openxmlformats.org/officeDocument/2006/relationships" xmlns:p="http://schemas.openxmlformats.org/presentationml/2006/main">
+  <p:cSld>
+    <p:bg>
+      <p:bgPr>
+        <a:solidFill>
+          <a:schemeClr val="bg1"/>
+        </a:solidFill>
+        <a:effectLst/>
+      </p:bgPr>
+    </p:bg>
+    <p:spTree>
+      <p:nvGrpSpPr>
+        <p:cNvPr id="1" name=""/>
+        <p:cNvGrpSpPr/>
+        <p:nvPr/>
+      </p:nvGrpSpPr>
+      <p:grpSpPr>
+        <a:xfrm>
+          <a:off x="0" y="0"/>
+          <a:ext cx="0" cy="0"/>
+          <a:chOff x="0" y="0"/>
+          <a:chExt cx="0" cy="0"/>
+        </a:xfrm>
+      </p:grpSpPr>
+      <p:sp useBgFill="1">
+        <p:nvSpPr>
+          <p:cNvPr id="15" name="Rectangle 14">
+            <a:extLst>
+              <a:ext uri="{FF2B5EF4-FFF2-40B4-BE49-F238E27FC236}">
+                <a16:creationId xmlns:a16="http://schemas.microsoft.com/office/drawing/2014/main" id="{2961259D-605E-E200-FF9F-7C8C71D7C8E4}"/>
+              </a:ext>
+              <a:ext uri="{C183D7F6-B498-43B3-948B-1728B52AA6E4}">
+                <adec:decorative xmlns:adec="http://schemas.microsoft.com/office/drawing/2017/decorative" val="1"/>
+              </a:ext>
+            </a:extLst>
+          </p:cNvPr>
+          <p:cNvSpPr>
+            <a:spLocks noGrp="1" noRot="1" noChangeAspect="1" noMove="1" noResize="1" noEditPoints="1" noAdjustHandles="1" noChangeArrowheads="1" noChangeShapeType="1" noTextEdit="1"/>
+          </p:cNvSpPr>
+          <p:nvPr>
+            <p:extLst>
+              <p:ext uri="{386F3935-93C4-4BCD-93E2-E3B085C9AB24}">
+                <p16:designElem xmlns:p16="http://schemas.microsoft.com/office/powerpoint/2015/main" val="1"/>
+              </p:ext>
+            </p:extLst>
+          </p:nvPr>
+        </p:nvSpPr>
+        <p:spPr>
+          <a:xfrm>
+            <a:off x="0" y="0"/>
+            <a:ext cx="12192000" cy="6858000"/>
+          </a:xfrm>
+          <a:prstGeom prst="rect">
+            <a:avLst/>
+          </a:prstGeom>
+          <a:ln w="12700" cap="flat" cmpd="sng" algn="ctr">
+            <a:noFill/>
+            <a:prstDash val="solid"/>
+            <a:miter lim="800000"/>
+          </a:ln>
+          <a:effectLst/>
+          <a:extLst>
+            <a:ext uri="{91240B29-F687-4F45-9708-019B960494DF}">
+              <a14:hiddenLine xmlns:a14="http://schemas.microsoft.com/office/drawing/2010/main" w="12700" cap="flat" cmpd="sng" algn="ctr">
+                <a:solidFill>
+                  <a:schemeClr val="accent1">
+                    <a:shade val="15000"/>
+                  </a:schemeClr>
+                </a:solidFill>
+                <a:prstDash val="solid"/>
+                <a:miter lim="800000"/>
+              </a14:hiddenLine>
+            </a:ext>
+          </a:extLst>
+        </p:spPr>
+        <p:style>
+          <a:lnRef idx="2">
+            <a:schemeClr val="accent1">
+              <a:shade val="15000"/>
+            </a:schemeClr>
+          </a:lnRef>
+          <a:fillRef idx="1">
+            <a:schemeClr val="accent1"/>
+          </a:fillRef>
+          <a:effectRef idx="0">
+            <a:schemeClr val="accent1"/>
+          </a:effectRef>
+          <a:fontRef idx="minor">
+            <a:schemeClr val="lt1"/>
+          </a:fontRef>
+        </p:style>
+        <p:txBody>
+          <a:bodyPr rtlCol="0" anchor="ctr"/>
+          <a:lstStyle/>
+          <a:p>
+            <a:pPr algn="ctr"/>
+            <a:endParaRPr lang="en-US"/>
+          </a:p>
+        </p:txBody>
+      </p:sp>
+      <p:sp>
+        <p:nvSpPr>
+          <p:cNvPr id="2" name="Title 1">
+            <a:extLst>
+              <a:ext uri="{FF2B5EF4-FFF2-40B4-BE49-F238E27FC236}">
+                <a16:creationId xmlns:a16="http://schemas.microsoft.com/office/drawing/2014/main" id="{63073272-CC03-9E33-391C-70916CBF650B}"/>
+              </a:ext>
+            </a:extLst>
+          </p:cNvPr>
+          <p:cNvSpPr>
+            <a:spLocks noGrp="1"/>
+          </p:cNvSpPr>
+          <p:nvPr>
+            <p:ph type="title"/>
+          </p:nvPr>
+        </p:nvSpPr>
+        <p:spPr>
+          <a:xfrm>
+            <a:off x="612648" y="600074"/>
+            <a:ext cx="6035040" cy="1529932"/>
+          </a:xfrm>
+        </p:spPr>
+        <p:txBody>
+          <a:bodyPr anchor="b">
+            <a:normAutofit/>
+          </a:bodyPr>
+          <a:lstStyle/>
+          <a:p>
+            <a:r>
+              <a:rPr lang="es-ES" dirty="0"/>
+              <a:t>Target to </a:t>
+            </a:r>
+            <a:r>
+              <a:rPr lang="es-ES" dirty="0" err="1"/>
+              <a:t>Devices</a:t>
+            </a:r>
+            <a:r>
+              <a:rPr lang="es-ES" dirty="0"/>
+              <a:t> (</a:t>
+            </a:r>
+            <a:r>
+              <a:rPr lang="es-ES" dirty="0" err="1"/>
+              <a:t>phone</a:t>
+            </a:r>
+            <a:r>
+              <a:rPr lang="es-ES" dirty="0"/>
+              <a:t> and laptop </a:t>
+            </a:r>
+            <a:r>
+              <a:rPr lang="es-ES" dirty="0" err="1"/>
+              <a:t>image</a:t>
+            </a:r>
+            <a:r>
+              <a:rPr lang="es-ES" dirty="0"/>
+              <a:t>)</a:t>
+            </a:r>
+          </a:p>
+        </p:txBody>
+      </p:sp>
+      <p:sp>
+        <p:nvSpPr>
+          <p:cNvPr id="3" name="Content Placeholder 2">
+            <a:extLst>
+              <a:ext uri="{FF2B5EF4-FFF2-40B4-BE49-F238E27FC236}">
+                <a16:creationId xmlns:a16="http://schemas.microsoft.com/office/drawing/2014/main" id="{73762168-7D3F-1013-0D40-C81B7C1DF73D}"/>
+              </a:ext>
+            </a:extLst>
+          </p:cNvPr>
+          <p:cNvSpPr>
+            <a:spLocks noGrp="1"/>
+          </p:cNvSpPr>
+          <p:nvPr>
+            <p:ph idx="1"/>
+          </p:nvPr>
+        </p:nvSpPr>
+        <p:spPr>
+          <a:xfrm>
+            <a:off x="612647" y="2212848"/>
+            <a:ext cx="6035041" cy="4492752"/>
+          </a:xfrm>
+        </p:spPr>
+        <p:txBody>
+          <a:bodyPr>
+            <a:normAutofit fontScale="92500" lnSpcReduction="20000"/>
+          </a:bodyPr>
+          <a:lstStyle/>
+          <a:p>
+            <a:pPr marL="0" indent="0">
+              <a:buNone/>
+            </a:pPr>
+            <a:r>
+              <a:rPr lang="es-ES" sz="1800" dirty="0"/>
+              <a:t>With the </a:t>
+            </a:r>
+            <a:r>
+              <a:rPr lang="es-ES" sz="1800" dirty="0" err="1"/>
+              <a:t>best</a:t>
+            </a:r>
+            <a:r>
+              <a:rPr lang="es-ES" sz="1800" dirty="0"/>
+              <a:t> </a:t>
+            </a:r>
+            <a:r>
+              <a:rPr lang="es-ES" sz="1800" dirty="0" err="1"/>
+              <a:t>performing</a:t>
+            </a:r>
+            <a:r>
+              <a:rPr lang="es-ES" sz="1800" dirty="0"/>
+              <a:t> </a:t>
+            </a:r>
+            <a:r>
+              <a:rPr lang="es-ES" sz="1800" dirty="0" err="1"/>
+              <a:t>models</a:t>
+            </a:r>
+            <a:r>
+              <a:rPr lang="es-ES" sz="1800" dirty="0"/>
+              <a:t>, now </a:t>
+            </a:r>
+            <a:r>
+              <a:rPr lang="es-ES" sz="1800" dirty="0" err="1"/>
+              <a:t>its</a:t>
+            </a:r>
+            <a:r>
+              <a:rPr lang="es-ES" sz="1800" dirty="0"/>
+              <a:t> time to take </a:t>
+            </a:r>
+            <a:r>
+              <a:rPr lang="es-ES" sz="1800" dirty="0" err="1"/>
+              <a:t>into</a:t>
+            </a:r>
+            <a:r>
+              <a:rPr lang="es-ES" sz="1800" dirty="0"/>
+              <a:t> </a:t>
+            </a:r>
+            <a:r>
+              <a:rPr lang="es-ES" sz="1800" dirty="0" err="1"/>
+              <a:t>account</a:t>
+            </a:r>
+            <a:r>
+              <a:rPr lang="es-ES" sz="1800" dirty="0"/>
+              <a:t> other </a:t>
+            </a:r>
+            <a:r>
+              <a:rPr lang="es-ES" sz="1800" dirty="0" err="1"/>
+              <a:t>factors</a:t>
+            </a:r>
+            <a:r>
+              <a:rPr lang="es-ES" sz="1800" dirty="0"/>
+              <a:t>:</a:t>
+            </a:r>
+          </a:p>
+          <a:p>
+            <a:r>
+              <a:rPr lang="es-ES" sz="1800" dirty="0"/>
+              <a:t>The </a:t>
+            </a:r>
+            <a:r>
+              <a:rPr lang="es-ES" sz="1800" dirty="0" err="1"/>
+              <a:t>easiest</a:t>
+            </a:r>
+            <a:r>
+              <a:rPr lang="es-ES" sz="1800" dirty="0"/>
+              <a:t> way to </a:t>
+            </a:r>
+            <a:r>
+              <a:rPr lang="es-ES" sz="1800" dirty="0" err="1"/>
+              <a:t>implement</a:t>
+            </a:r>
+            <a:r>
+              <a:rPr lang="es-ES" sz="1800" dirty="0"/>
+              <a:t> is </a:t>
+            </a:r>
+            <a:r>
+              <a:rPr lang="es-ES" sz="1800" dirty="0" err="1"/>
+              <a:t>DeepFace</a:t>
+            </a:r>
+            <a:r>
+              <a:rPr lang="es-ES" sz="1800" dirty="0"/>
+              <a:t> </a:t>
+            </a:r>
+            <a:r>
+              <a:rPr lang="es-ES" sz="1800" dirty="0" err="1"/>
+              <a:t>library</a:t>
+            </a:r>
+            <a:r>
+              <a:rPr lang="es-ES" sz="1800" dirty="0"/>
+              <a:t> with </a:t>
+            </a:r>
+            <a:r>
+              <a:rPr lang="es-ES" sz="1800" dirty="0" err="1"/>
+              <a:t>FaceNet</a:t>
+            </a:r>
+            <a:r>
+              <a:rPr lang="es-ES" sz="1800" dirty="0"/>
+              <a:t>.</a:t>
+            </a:r>
+          </a:p>
+          <a:p>
+            <a:r>
+              <a:rPr lang="es-ES" sz="1800" dirty="0" err="1"/>
+              <a:t>Fastest</a:t>
+            </a:r>
+            <a:r>
+              <a:rPr lang="es-ES" sz="1800" dirty="0"/>
+              <a:t> training was </a:t>
+            </a:r>
+            <a:r>
+              <a:rPr lang="es-ES" sz="1800" dirty="0" err="1"/>
+              <a:t>from</a:t>
+            </a:r>
+            <a:r>
+              <a:rPr lang="es-ES" sz="1800" dirty="0"/>
+              <a:t> MobileNetV2.</a:t>
+            </a:r>
+          </a:p>
+          <a:p>
+            <a:r>
+              <a:rPr lang="es-ES" sz="1800" dirty="0" err="1"/>
+              <a:t>Classic</a:t>
+            </a:r>
+            <a:r>
+              <a:rPr lang="es-ES" sz="1800" dirty="0"/>
+              <a:t> </a:t>
+            </a:r>
+            <a:r>
+              <a:rPr lang="es-ES" sz="1800" dirty="0" err="1"/>
+              <a:t>models</a:t>
+            </a:r>
+            <a:r>
+              <a:rPr lang="es-ES" sz="1800" dirty="0"/>
+              <a:t> - not </a:t>
+            </a:r>
+            <a:r>
+              <a:rPr lang="es-ES" sz="1800" dirty="0" err="1"/>
+              <a:t>considered</a:t>
+            </a:r>
+            <a:r>
+              <a:rPr lang="es-ES" sz="1800" dirty="0"/>
+              <a:t> </a:t>
+            </a:r>
+            <a:r>
+              <a:rPr lang="es-ES" sz="1800" dirty="0" err="1"/>
+              <a:t>for</a:t>
+            </a:r>
+            <a:r>
+              <a:rPr lang="es-ES" sz="1800" dirty="0"/>
+              <a:t> </a:t>
+            </a:r>
+            <a:r>
+              <a:rPr lang="es-ES" sz="1800" dirty="0" err="1"/>
+              <a:t>low</a:t>
+            </a:r>
+            <a:r>
+              <a:rPr lang="es-ES" sz="1800" dirty="0"/>
+              <a:t> performance</a:t>
+            </a:r>
+          </a:p>
+          <a:p>
+            <a:pPr marL="0" indent="0">
+              <a:buNone/>
+            </a:pPr>
+            <a:r>
+              <a:rPr lang="es-ES" sz="1800" b="1" dirty="0" err="1"/>
+              <a:t>Best</a:t>
+            </a:r>
+            <a:r>
+              <a:rPr lang="es-ES" sz="1800" b="1" dirty="0"/>
+              <a:t> </a:t>
+            </a:r>
+            <a:r>
+              <a:rPr lang="es-ES" sz="1800" b="1" dirty="0" err="1"/>
+              <a:t>option</a:t>
+            </a:r>
+            <a:r>
+              <a:rPr lang="es-ES" sz="1800" b="1" dirty="0"/>
+              <a:t>:</a:t>
+            </a:r>
+            <a:r>
+              <a:rPr lang="es-ES" sz="1800" dirty="0"/>
+              <a:t> </a:t>
+            </a:r>
+            <a:r>
+              <a:rPr lang="es-ES" sz="1800" dirty="0" err="1"/>
+              <a:t>FaceNet</a:t>
+            </a:r>
+            <a:r>
+              <a:rPr lang="es-ES" sz="1800" dirty="0"/>
+              <a:t> implemente with </a:t>
+            </a:r>
+            <a:r>
+              <a:rPr lang="es-ES" sz="1800" dirty="0" err="1"/>
+              <a:t>DeepFace</a:t>
+            </a:r>
+            <a:r>
+              <a:rPr lang="es-ES" sz="1800" dirty="0"/>
+              <a:t>, </a:t>
+            </a:r>
+            <a:r>
+              <a:rPr lang="es-ES" sz="1800" dirty="0" err="1"/>
+              <a:t>provides</a:t>
+            </a:r>
+            <a:r>
+              <a:rPr lang="es-ES" sz="1800" dirty="0"/>
+              <a:t> one </a:t>
+            </a:r>
+            <a:r>
+              <a:rPr lang="es-ES" sz="1800" dirty="0" err="1"/>
+              <a:t>of</a:t>
+            </a:r>
+            <a:r>
+              <a:rPr lang="es-ES" sz="1800" dirty="0"/>
+              <a:t> the </a:t>
+            </a:r>
+            <a:r>
+              <a:rPr lang="es-ES" sz="1800" dirty="0" err="1"/>
+              <a:t>strongest</a:t>
+            </a:r>
+            <a:r>
+              <a:rPr lang="es-ES" sz="1800" dirty="0"/>
+              <a:t> performances with no training time. </a:t>
+            </a:r>
+            <a:r>
+              <a:rPr lang="es-ES" sz="1800" dirty="0" err="1"/>
+              <a:t>Embedding</a:t>
+            </a:r>
+            <a:r>
+              <a:rPr lang="es-ES" sz="1800" dirty="0"/>
+              <a:t> </a:t>
+            </a:r>
+            <a:r>
+              <a:rPr lang="es-ES" sz="1800" dirty="0" err="1"/>
+              <a:t>extraction</a:t>
+            </a:r>
+            <a:r>
+              <a:rPr lang="es-ES" sz="1800" dirty="0"/>
+              <a:t> is </a:t>
+            </a:r>
+            <a:r>
+              <a:rPr lang="es-ES" sz="1800" dirty="0" err="1"/>
+              <a:t>fast</a:t>
+            </a:r>
+            <a:r>
+              <a:rPr lang="es-ES" sz="1800" dirty="0"/>
+              <a:t>.</a:t>
+            </a:r>
+          </a:p>
+          <a:p>
+            <a:pPr marL="0" indent="0">
+              <a:buNone/>
+            </a:pPr>
+            <a:r>
+              <a:rPr lang="es-ES" sz="1800" b="1" dirty="0" err="1"/>
+              <a:t>Devices</a:t>
+            </a:r>
+            <a:r>
+              <a:rPr lang="es-ES" sz="1800" dirty="0"/>
+              <a:t> could come with the model </a:t>
+            </a:r>
+            <a:r>
+              <a:rPr lang="es-ES" sz="1800" dirty="0" err="1"/>
+              <a:t>pre-downloaded</a:t>
+            </a:r>
+            <a:r>
+              <a:rPr lang="es-ES" sz="1800" dirty="0"/>
+              <a:t>, </a:t>
+            </a:r>
+            <a:r>
+              <a:rPr lang="es-ES" sz="1800" dirty="0" err="1"/>
+              <a:t>only</a:t>
+            </a:r>
+            <a:r>
+              <a:rPr lang="es-ES" sz="1800" dirty="0"/>
+              <a:t> </a:t>
+            </a:r>
+            <a:r>
+              <a:rPr lang="es-ES" sz="1800" dirty="0" err="1"/>
+              <a:t>calculation</a:t>
+            </a:r>
+            <a:r>
+              <a:rPr lang="es-ES" sz="1800" dirty="0"/>
+              <a:t> </a:t>
+            </a:r>
+            <a:r>
+              <a:rPr lang="es-ES" sz="1800" dirty="0" err="1"/>
+              <a:t>on</a:t>
+            </a:r>
+            <a:r>
+              <a:rPr lang="es-ES" sz="1800" dirty="0"/>
+              <a:t> </a:t>
+            </a:r>
+            <a:r>
+              <a:rPr lang="es-ES" sz="1800" dirty="0" err="1"/>
+              <a:t>device</a:t>
+            </a:r>
+            <a:r>
+              <a:rPr lang="es-ES" sz="1800" dirty="0"/>
+              <a:t> would be </a:t>
+            </a:r>
+            <a:r>
+              <a:rPr lang="es-ES" sz="1800" dirty="0" err="1"/>
+              <a:t>embedding</a:t>
+            </a:r>
+            <a:r>
+              <a:rPr lang="es-ES" sz="1800" dirty="0"/>
+              <a:t> </a:t>
+            </a:r>
+            <a:r>
+              <a:rPr lang="es-ES" sz="1800" dirty="0" err="1"/>
+              <a:t>extraction</a:t>
+            </a:r>
+            <a:r>
+              <a:rPr lang="es-ES" sz="1800" dirty="0"/>
+              <a:t> with </a:t>
+            </a:r>
+            <a:r>
+              <a:rPr lang="es-ES" sz="1800" dirty="0" err="1"/>
+              <a:t>possibility</a:t>
+            </a:r>
+            <a:r>
+              <a:rPr lang="es-ES" sz="1800" dirty="0"/>
+              <a:t> </a:t>
+            </a:r>
+            <a:r>
+              <a:rPr lang="es-ES" sz="1800" dirty="0" err="1"/>
+              <a:t>for</a:t>
+            </a:r>
+            <a:r>
+              <a:rPr lang="es-ES" sz="1800" dirty="0"/>
+              <a:t> </a:t>
+            </a:r>
+            <a:r>
+              <a:rPr lang="es-ES" sz="1800" dirty="0" err="1"/>
+              <a:t>image</a:t>
+            </a:r>
+            <a:r>
+              <a:rPr lang="es-ES" sz="1800" dirty="0"/>
+              <a:t> </a:t>
+            </a:r>
+            <a:r>
+              <a:rPr lang="es-ES" sz="1800" dirty="0" err="1"/>
+              <a:t>augmentation</a:t>
+            </a:r>
+            <a:r>
+              <a:rPr lang="es-ES" sz="1800" dirty="0"/>
+              <a:t>.</a:t>
+            </a:r>
+          </a:p>
+          <a:p>
+            <a:pPr marL="0" indent="0">
+              <a:buNone/>
+            </a:pPr>
+            <a:r>
+              <a:rPr lang="es-ES" sz="1800" b="1" dirty="0"/>
+              <a:t>Viable</a:t>
+            </a:r>
+            <a:r>
+              <a:rPr lang="es-ES" sz="1800" dirty="0"/>
+              <a:t> </a:t>
+            </a:r>
+            <a:r>
+              <a:rPr lang="es-ES" sz="1800" dirty="0" err="1"/>
+              <a:t>option</a:t>
+            </a:r>
+            <a:r>
+              <a:rPr lang="es-ES" sz="1800" dirty="0"/>
+              <a:t> </a:t>
+            </a:r>
+            <a:r>
+              <a:rPr lang="es-ES" sz="1800" dirty="0" err="1"/>
+              <a:t>for</a:t>
+            </a:r>
+            <a:r>
+              <a:rPr lang="es-ES" sz="1800" dirty="0"/>
+              <a:t> Android pones, Linux </a:t>
+            </a:r>
+            <a:r>
+              <a:rPr lang="es-ES" sz="1800" dirty="0" err="1"/>
+              <a:t>distributions</a:t>
+            </a:r>
+            <a:r>
+              <a:rPr lang="es-ES" sz="1800" dirty="0"/>
+              <a:t> etc.</a:t>
+            </a:r>
+            <a:endParaRPr lang="es-ES" sz="1800" b="1" dirty="0"/>
+          </a:p>
+        </p:txBody>
+      </p:sp>
+      <p:pic>
+        <p:nvPicPr>
+          <p:cNvPr id="16" name="Picture 15" descr="High angle view of a work table with a laptop">
+            <a:extLst>
+              <a:ext uri="{FF2B5EF4-FFF2-40B4-BE49-F238E27FC236}">
+                <a16:creationId xmlns:a16="http://schemas.microsoft.com/office/drawing/2014/main" id="{055AC352-E2E7-02B4-F8FE-B19C1D3C6CD7}"/>
+              </a:ext>
+            </a:extLst>
+          </p:cNvPr>
+          <p:cNvPicPr>
+            <a:picLocks noChangeAspect="1"/>
+          </p:cNvPicPr>
+          <p:nvPr/>
+        </p:nvPicPr>
+        <p:blipFill>
+          <a:blip r:embed="rId2"/>
+          <a:srcRect l="40700" r="12129" b="-1"/>
+          <a:stretch>
+            <a:fillRect/>
+          </a:stretch>
+        </p:blipFill>
+        <p:spPr>
+          <a:xfrm>
+            <a:off x="7345680" y="10"/>
+            <a:ext cx="4846320" cy="6857990"/>
+          </a:xfrm>
+          <a:prstGeom prst="rect">
+            <a:avLst/>
+          </a:prstGeom>
+        </p:spPr>
+      </p:pic>
+    </p:spTree>
+    <p:extLst>
+      <p:ext uri="{BB962C8B-B14F-4D97-AF65-F5344CB8AC3E}">
+        <p14:creationId xmlns:p14="http://schemas.microsoft.com/office/powerpoint/2010/main" val="2890042335"/>
+      </p:ext>
+    </p:extLst>
+  </p:cSld>
+  <p:clrMapOvr>
+    <a:masterClrMapping/>
+  </p:clrMapOvr>
+</p:sld>
+</file>
+
+<file path=ppt/slides/slide24.xml><?xml version="1.0" encoding="utf-8"?>
+<p:sld xmlns:a="http://schemas.openxmlformats.org/drawingml/2006/main" xmlns:r="http://schemas.openxmlformats.org/officeDocument/2006/relationships" xmlns:p="http://schemas.openxmlformats.org/presentationml/2006/main">
+  <p:cSld>
+    <p:bg>
+      <p:bgPr>
+        <a:solidFill>
+          <a:schemeClr val="bg1"/>
+        </a:solidFill>
+        <a:effectLst/>
+      </p:bgPr>
+    </p:bg>
+    <p:spTree>
+      <p:nvGrpSpPr>
+        <p:cNvPr id="1" name=""/>
+        <p:cNvGrpSpPr/>
+        <p:nvPr/>
+      </p:nvGrpSpPr>
+      <p:grpSpPr>
+        <a:xfrm>
+          <a:off x="0" y="0"/>
+          <a:ext cx="0" cy="0"/>
+          <a:chOff x="0" y="0"/>
+          <a:chExt cx="0" cy="0"/>
+        </a:xfrm>
+      </p:grpSpPr>
+      <p:sp useBgFill="1">
+        <p:nvSpPr>
+          <p:cNvPr id="9" name="Rectangle 8">
+            <a:extLst>
+              <a:ext uri="{FF2B5EF4-FFF2-40B4-BE49-F238E27FC236}">
+                <a16:creationId xmlns:a16="http://schemas.microsoft.com/office/drawing/2014/main" id="{2961259D-605E-E200-FF9F-7C8C71D7C8E4}"/>
+              </a:ext>
+              <a:ext uri="{C183D7F6-B498-43B3-948B-1728B52AA6E4}">
+                <adec:decorative xmlns:adec="http://schemas.microsoft.com/office/drawing/2017/decorative" val="1"/>
+              </a:ext>
+            </a:extLst>
+          </p:cNvPr>
+          <p:cNvSpPr>
+            <a:spLocks noGrp="1" noRot="1" noChangeAspect="1" noMove="1" noResize="1" noEditPoints="1" noAdjustHandles="1" noChangeArrowheads="1" noChangeShapeType="1" noTextEdit="1"/>
+          </p:cNvSpPr>
+          <p:nvPr>
+            <p:extLst>
+              <p:ext uri="{386F3935-93C4-4BCD-93E2-E3B085C9AB24}">
+                <p16:designElem xmlns:p16="http://schemas.microsoft.com/office/powerpoint/2015/main" val="1"/>
+              </p:ext>
+            </p:extLst>
+          </p:nvPr>
+        </p:nvSpPr>
+        <p:spPr>
+          <a:xfrm>
+            <a:off x="0" y="0"/>
+            <a:ext cx="12192000" cy="6858000"/>
+          </a:xfrm>
+          <a:prstGeom prst="rect">
+            <a:avLst/>
+          </a:prstGeom>
+          <a:ln w="12700" cap="flat" cmpd="sng" algn="ctr">
+            <a:noFill/>
+            <a:prstDash val="solid"/>
+            <a:miter lim="800000"/>
+          </a:ln>
+          <a:effectLst/>
+          <a:extLst>
+            <a:ext uri="{91240B29-F687-4F45-9708-019B960494DF}">
+              <a14:hiddenLine xmlns:a14="http://schemas.microsoft.com/office/drawing/2010/main" w="12700" cap="flat" cmpd="sng" algn="ctr">
+                <a:solidFill>
+                  <a:schemeClr val="accent1">
+                    <a:shade val="15000"/>
+                  </a:schemeClr>
+                </a:solidFill>
+                <a:prstDash val="solid"/>
+                <a:miter lim="800000"/>
+              </a14:hiddenLine>
+            </a:ext>
+          </a:extLst>
+        </p:spPr>
+        <p:style>
+          <a:lnRef idx="2">
+            <a:schemeClr val="accent1">
+              <a:shade val="15000"/>
+            </a:schemeClr>
+          </a:lnRef>
+          <a:fillRef idx="1">
+            <a:schemeClr val="accent1"/>
+          </a:fillRef>
+          <a:effectRef idx="0">
+            <a:schemeClr val="accent1"/>
+          </a:effectRef>
+          <a:fontRef idx="minor">
+            <a:schemeClr val="lt1"/>
+          </a:fontRef>
+        </p:style>
+        <p:txBody>
+          <a:bodyPr rtlCol="0" anchor="ctr"/>
+          <a:lstStyle/>
+          <a:p>
+            <a:pPr algn="ctr"/>
+            <a:endParaRPr lang="en-US"/>
+          </a:p>
+        </p:txBody>
+      </p:sp>
+      <p:sp>
+        <p:nvSpPr>
+          <p:cNvPr id="2" name="Title 1">
+            <a:extLst>
+              <a:ext uri="{FF2B5EF4-FFF2-40B4-BE49-F238E27FC236}">
+                <a16:creationId xmlns:a16="http://schemas.microsoft.com/office/drawing/2014/main" id="{73B198F2-0D76-CC3A-002C-ADD17D243802}"/>
+              </a:ext>
+            </a:extLst>
+          </p:cNvPr>
+          <p:cNvSpPr>
+            <a:spLocks noGrp="1"/>
+          </p:cNvSpPr>
+          <p:nvPr>
+            <p:ph type="title"/>
+          </p:nvPr>
+        </p:nvSpPr>
+        <p:spPr>
+          <a:xfrm>
+            <a:off x="612648" y="600074"/>
+            <a:ext cx="6035040" cy="1529932"/>
+          </a:xfrm>
+        </p:spPr>
+        <p:txBody>
+          <a:bodyPr anchor="b">
+            <a:normAutofit/>
+          </a:bodyPr>
+          <a:lstStyle/>
+          <a:p>
+            <a:pPr algn="ctr"/>
+            <a:r>
+              <a:rPr lang="es-ES" dirty="0"/>
+              <a:t>Q&amp;A</a:t>
+            </a:r>
+          </a:p>
+        </p:txBody>
+      </p:sp>
+      <p:sp>
+        <p:nvSpPr>
+          <p:cNvPr id="3" name="Content Placeholder 2">
+            <a:extLst>
+              <a:ext uri="{FF2B5EF4-FFF2-40B4-BE49-F238E27FC236}">
+                <a16:creationId xmlns:a16="http://schemas.microsoft.com/office/drawing/2014/main" id="{7ABF891A-42F5-83ED-BA67-0BC80E9FEBE9}"/>
+              </a:ext>
+            </a:extLst>
+          </p:cNvPr>
+          <p:cNvSpPr>
+            <a:spLocks noGrp="1"/>
+          </p:cNvSpPr>
+          <p:nvPr>
+            <p:ph idx="1"/>
+          </p:nvPr>
+        </p:nvSpPr>
+        <p:spPr>
+          <a:xfrm>
+            <a:off x="612647" y="2212848"/>
+            <a:ext cx="6035041" cy="4096512"/>
+          </a:xfrm>
+        </p:spPr>
+        <p:txBody>
+          <a:bodyPr>
+            <a:normAutofit/>
+          </a:bodyPr>
+          <a:lstStyle/>
+          <a:p>
+            <a:endParaRPr lang="es-ES" sz="1800" dirty="0"/>
+          </a:p>
+          <a:p>
+            <a:pPr marL="0" indent="0" algn="ctr">
+              <a:buNone/>
+            </a:pPr>
+            <a:r>
+              <a:rPr lang="es-ES" sz="2400" dirty="0" err="1"/>
+              <a:t>Thank</a:t>
+            </a:r>
+            <a:r>
+              <a:rPr lang="es-ES" sz="2400" dirty="0"/>
+              <a:t> you </a:t>
+            </a:r>
+            <a:r>
+              <a:rPr lang="es-ES" sz="2400" dirty="0" err="1"/>
+              <a:t>for</a:t>
+            </a:r>
+            <a:r>
+              <a:rPr lang="es-ES" sz="2400" dirty="0"/>
+              <a:t> </a:t>
+            </a:r>
+            <a:r>
+              <a:rPr lang="es-ES" sz="2400" dirty="0" err="1"/>
+              <a:t>listening</a:t>
+            </a:r>
+            <a:endParaRPr lang="es-ES" sz="2400" dirty="0"/>
+          </a:p>
+          <a:p>
+            <a:pPr marL="0" indent="0" algn="ctr">
+              <a:buNone/>
+            </a:pPr>
+            <a:endParaRPr lang="es-ES" sz="2400" dirty="0"/>
+          </a:p>
+          <a:p>
+            <a:pPr marL="0" indent="0" algn="ctr">
+              <a:buNone/>
+            </a:pPr>
+            <a:endParaRPr lang="es-ES" sz="2400" b="1" dirty="0"/>
+          </a:p>
+          <a:p>
+            <a:pPr marL="0" indent="0" algn="ctr">
+              <a:buNone/>
+            </a:pPr>
+            <a:r>
+              <a:rPr lang="es-ES" sz="2400" b="1" dirty="0" err="1"/>
+              <a:t>Any</a:t>
+            </a:r>
+            <a:r>
+              <a:rPr lang="es-ES" sz="2400" b="1" dirty="0"/>
+              <a:t> </a:t>
+            </a:r>
+            <a:r>
+              <a:rPr lang="es-ES" sz="2400" b="1" dirty="0" err="1"/>
+              <a:t>questions</a:t>
+            </a:r>
+            <a:r>
+              <a:rPr lang="es-ES" sz="2400" b="1" dirty="0"/>
+              <a:t>?</a:t>
+            </a:r>
+          </a:p>
+        </p:txBody>
+      </p:sp>
+      <p:pic>
+        <p:nvPicPr>
+          <p:cNvPr id="5" name="Picture 4" descr="Question mark against red wall">
+            <a:extLst>
+              <a:ext uri="{FF2B5EF4-FFF2-40B4-BE49-F238E27FC236}">
+                <a16:creationId xmlns:a16="http://schemas.microsoft.com/office/drawing/2014/main" id="{86191B43-2E6E-0DDD-2BE0-0EF7C2DA6D3E}"/>
+              </a:ext>
+            </a:extLst>
+          </p:cNvPr>
+          <p:cNvPicPr>
+            <a:picLocks noChangeAspect="1"/>
+          </p:cNvPicPr>
+          <p:nvPr/>
+        </p:nvPicPr>
+        <p:blipFill>
+          <a:blip r:embed="rId2"/>
+          <a:srcRect l="56976" r="271" b="1"/>
+          <a:stretch>
+            <a:fillRect/>
+          </a:stretch>
+        </p:blipFill>
+        <p:spPr>
+          <a:xfrm>
+            <a:off x="7345680" y="10"/>
+            <a:ext cx="4846320" cy="6857990"/>
+          </a:xfrm>
+          <a:prstGeom prst="rect">
+            <a:avLst/>
+          </a:prstGeom>
+        </p:spPr>
+      </p:pic>
+    </p:spTree>
+    <p:extLst>
+      <p:ext uri="{BB962C8B-B14F-4D97-AF65-F5344CB8AC3E}">
+        <p14:creationId xmlns:p14="http://schemas.microsoft.com/office/powerpoint/2010/main" val="87852736"/>
       </p:ext>
     </p:extLst>
   </p:cSld>
@@ -5932,6 +13101,14 @@
 <file path=ppt/slides/slide7.xml><?xml version="1.0" encoding="utf-8"?>
 <p:sld xmlns:a="http://schemas.openxmlformats.org/drawingml/2006/main" xmlns:r="http://schemas.openxmlformats.org/officeDocument/2006/relationships" xmlns:p="http://schemas.openxmlformats.org/presentationml/2006/main">
   <p:cSld>
+    <p:bg>
+      <p:bgPr>
+        <a:solidFill>
+          <a:schemeClr val="bg1"/>
+        </a:solidFill>
+        <a:effectLst/>
+      </p:bgPr>
+    </p:bg>
     <p:spTree>
       <p:nvGrpSpPr>
         <p:cNvPr id="1" name=""/>
@@ -6010,15 +13187,142 @@
             <p:ph idx="1"/>
           </p:nvPr>
         </p:nvSpPr>
-        <p:spPr/>
+        <p:spPr>
+          <a:noFill/>
+        </p:spPr>
         <p:txBody>
-          <a:bodyPr/>
+          <a:bodyPr>
+            <a:normAutofit lnSpcReduction="10000"/>
+          </a:bodyPr>
           <a:lstStyle/>
           <a:p>
-            <a:endParaRPr lang="es-ES"/>
+            <a:r>
+              <a:rPr lang="en-US" b="1" dirty="0"/>
+              <a:t>PCA (Principal Component Analysis) </a:t>
+            </a:r>
+            <a:r>
+              <a:rPr lang="en-US" dirty="0"/>
+              <a:t>reduces high-dimensional image data into the most important features (called principal components).</a:t>
+            </a:r>
+          </a:p>
+          <a:p>
+            <a:r>
+              <a:rPr lang="en-US" b="1" dirty="0"/>
+              <a:t>KNN (K-Nearest Neighbors) </a:t>
+            </a:r>
+            <a:r>
+              <a:rPr lang="en-US" dirty="0"/>
+              <a:t>classifies a face by comparing it to the most similar examples in the training set.</a:t>
+            </a:r>
+          </a:p>
+          <a:p>
+            <a:r>
+              <a:rPr lang="en-US" dirty="0"/>
+              <a:t>Results:</a:t>
+            </a:r>
+          </a:p>
+          <a:p>
+            <a:pPr lvl="1"/>
+            <a:r>
+              <a:rPr lang="en-US" sz="2000" dirty="0"/>
+              <a:t>    Original Dataset:</a:t>
+            </a:r>
+          </a:p>
+          <a:p>
+            <a:pPr lvl="2"/>
+            <a:r>
+              <a:rPr lang="en-US" dirty="0"/>
+              <a:t>    </a:t>
+            </a:r>
+            <a:r>
+              <a:rPr lang="en-US" sz="1800" dirty="0"/>
+              <a:t>Accuracy: </a:t>
+            </a:r>
+            <a:r>
+              <a:rPr lang="en-US" sz="1800" b="1" dirty="0"/>
+              <a:t>21.15%</a:t>
+            </a:r>
+            <a:r>
+              <a:rPr lang="en-US" sz="1800" dirty="0"/>
+              <a:t> — struggled with class separation.</a:t>
+            </a:r>
+          </a:p>
+          <a:p>
+            <a:pPr lvl="1"/>
+            <a:r>
+              <a:rPr lang="en-US" sz="2000" dirty="0"/>
+              <a:t>    With Augmentation:</a:t>
+            </a:r>
+          </a:p>
+          <a:p>
+            <a:pPr lvl="2"/>
+            <a:r>
+              <a:rPr lang="en-US" sz="1800" dirty="0"/>
+              <a:t>   	 Accuracy: </a:t>
+            </a:r>
+            <a:r>
+              <a:rPr lang="en-US" sz="1800" b="1" dirty="0"/>
+              <a:t>44.34%</a:t>
+            </a:r>
+            <a:r>
+              <a:rPr lang="en-US" sz="1800" dirty="0"/>
+              <a:t> — improved due to more diverse training samples.</a:t>
+            </a:r>
+          </a:p>
+          <a:p>
+            <a:r>
+              <a:rPr lang="en-US" dirty="0"/>
+              <a:t>Conclusion: PCA + KNN is </a:t>
+            </a:r>
+            <a:r>
+              <a:rPr lang="en-US" b="1" u="sng" dirty="0"/>
+              <a:t>simple and fast</a:t>
+            </a:r>
+            <a:r>
+              <a:rPr lang="en-US" dirty="0"/>
+              <a:t>, but lacks the robustness of modern deep learning methods. Augmentation helps, but performance is still limited.</a:t>
+            </a:r>
+            <a:endParaRPr lang="es-ES" dirty="0"/>
           </a:p>
         </p:txBody>
       </p:sp>
+      <p:pic>
+        <p:nvPicPr>
+          <p:cNvPr id="8" name="Picture 7" descr="A collage of images of a person's face&#10;&#10;Description automatically generated">
+            <a:extLst>
+              <a:ext uri="{FF2B5EF4-FFF2-40B4-BE49-F238E27FC236}">
+                <a16:creationId xmlns:a16="http://schemas.microsoft.com/office/drawing/2014/main" id="{19EFF18C-9660-9BDE-5281-E9BE5B9CEF6B}"/>
+              </a:ext>
+            </a:extLst>
+          </p:cNvPr>
+          <p:cNvPicPr>
+            <a:picLocks noChangeAspect="1"/>
+          </p:cNvPicPr>
+          <p:nvPr/>
+        </p:nvPicPr>
+        <p:blipFill>
+          <a:blip r:embed="rId2">
+            <a:alphaModFix amt="36000"/>
+            <a:extLst>
+              <a:ext uri="{28A0092B-C50C-407E-A947-70E740481C1C}">
+                <a14:useLocalDpi xmlns:a14="http://schemas.microsoft.com/office/drawing/2010/main" val="0"/>
+              </a:ext>
+            </a:extLst>
+          </a:blip>
+          <a:stretch>
+            <a:fillRect/>
+          </a:stretch>
+        </p:blipFill>
+        <p:spPr>
+          <a:xfrm>
+            <a:off x="5900301" y="1"/>
+            <a:ext cx="8763965" cy="6857999"/>
+          </a:xfrm>
+          <a:prstGeom prst="rect">
+            <a:avLst/>
+          </a:prstGeom>
+        </p:spPr>
+      </p:pic>
     </p:spTree>
     <p:extLst>
       <p:ext uri="{BB962C8B-B14F-4D97-AF65-F5344CB8AC3E}">
@@ -6113,15 +13417,419 @@
             <p:ph idx="1"/>
           </p:nvPr>
         </p:nvSpPr>
-        <p:spPr/>
+        <p:spPr>
+          <a:xfrm>
+            <a:off x="612648" y="1715531"/>
+            <a:ext cx="8220074" cy="4905401"/>
+          </a:xfrm>
+        </p:spPr>
         <p:txBody>
-          <a:bodyPr/>
+          <a:bodyPr>
+            <a:normAutofit lnSpcReduction="10000"/>
+          </a:bodyPr>
           <a:lstStyle/>
           <a:p>
-            <a:endParaRPr lang="es-ES"/>
+            <a:r>
+              <a:rPr lang="es-ES" b="1" dirty="0"/>
+              <a:t>LBP (Local </a:t>
+            </a:r>
+            <a:r>
+              <a:rPr lang="es-ES" b="1" dirty="0" err="1"/>
+              <a:t>Binary</a:t>
+            </a:r>
+            <a:r>
+              <a:rPr lang="es-ES" b="1" dirty="0"/>
+              <a:t> </a:t>
+            </a:r>
+            <a:r>
+              <a:rPr lang="es-ES" b="1" dirty="0" err="1"/>
+              <a:t>Patterns</a:t>
+            </a:r>
+            <a:r>
+              <a:rPr lang="es-ES" b="1" dirty="0"/>
+              <a:t>) </a:t>
+            </a:r>
+            <a:r>
+              <a:rPr lang="es-ES" dirty="0"/>
+              <a:t>captures </a:t>
+            </a:r>
+            <a:r>
+              <a:rPr lang="es-ES" dirty="0" err="1"/>
+              <a:t>texture</a:t>
+            </a:r>
+            <a:r>
+              <a:rPr lang="es-ES" dirty="0"/>
+              <a:t> </a:t>
+            </a:r>
+            <a:r>
+              <a:rPr lang="es-ES" dirty="0" err="1"/>
+              <a:t>features</a:t>
+            </a:r>
+            <a:r>
+              <a:rPr lang="es-ES" dirty="0"/>
+              <a:t> </a:t>
+            </a:r>
+            <a:r>
+              <a:rPr lang="es-ES" dirty="0" err="1"/>
+              <a:t>from</a:t>
+            </a:r>
+            <a:r>
+              <a:rPr lang="es-ES" dirty="0"/>
+              <a:t> </a:t>
+            </a:r>
+            <a:r>
+              <a:rPr lang="es-ES" dirty="0" err="1"/>
+              <a:t>grayscale</a:t>
+            </a:r>
+            <a:r>
+              <a:rPr lang="es-ES" dirty="0"/>
+              <a:t> </a:t>
+            </a:r>
+            <a:r>
+              <a:rPr lang="es-ES" dirty="0" err="1"/>
+              <a:t>images</a:t>
+            </a:r>
+            <a:r>
+              <a:rPr lang="es-ES" dirty="0"/>
+              <a:t> at </a:t>
+            </a:r>
+            <a:r>
+              <a:rPr lang="es-ES" dirty="0" err="1"/>
+              <a:t>multiple</a:t>
+            </a:r>
+            <a:r>
+              <a:rPr lang="es-ES" dirty="0"/>
+              <a:t> </a:t>
+            </a:r>
+            <a:r>
+              <a:rPr lang="es-ES" dirty="0" err="1"/>
+              <a:t>scales</a:t>
+            </a:r>
+            <a:r>
+              <a:rPr lang="es-ES" dirty="0"/>
+              <a:t>.</a:t>
+            </a:r>
+          </a:p>
+          <a:p>
+            <a:r>
+              <a:rPr lang="es-ES" b="1" dirty="0"/>
+              <a:t>SVM (</a:t>
+            </a:r>
+            <a:r>
+              <a:rPr lang="es-ES" b="1" dirty="0" err="1"/>
+              <a:t>Support</a:t>
+            </a:r>
+            <a:r>
+              <a:rPr lang="es-ES" b="1" dirty="0"/>
+              <a:t> Vector Machine) </a:t>
+            </a:r>
+            <a:r>
+              <a:rPr lang="es-ES" dirty="0"/>
+              <a:t>is </a:t>
+            </a:r>
+            <a:r>
+              <a:rPr lang="es-ES" dirty="0" err="1"/>
+              <a:t>trained</a:t>
+            </a:r>
+            <a:r>
+              <a:rPr lang="es-ES" dirty="0"/>
+              <a:t> </a:t>
+            </a:r>
+            <a:r>
+              <a:rPr lang="es-ES" dirty="0" err="1"/>
+              <a:t>on</a:t>
+            </a:r>
+            <a:r>
+              <a:rPr lang="es-ES" dirty="0"/>
+              <a:t> </a:t>
+            </a:r>
+            <a:r>
+              <a:rPr lang="es-ES" dirty="0" err="1"/>
+              <a:t>these</a:t>
+            </a:r>
+            <a:r>
+              <a:rPr lang="es-ES" dirty="0"/>
+              <a:t> </a:t>
+            </a:r>
+            <a:r>
+              <a:rPr lang="es-ES" dirty="0" err="1"/>
+              <a:t>features</a:t>
+            </a:r>
+            <a:r>
+              <a:rPr lang="es-ES" dirty="0"/>
+              <a:t> to </a:t>
+            </a:r>
+            <a:r>
+              <a:rPr lang="es-ES" dirty="0" err="1"/>
+              <a:t>classify</a:t>
+            </a:r>
+            <a:r>
+              <a:rPr lang="es-ES" dirty="0"/>
+              <a:t> </a:t>
+            </a:r>
+            <a:r>
+              <a:rPr lang="es-ES" dirty="0" err="1"/>
+              <a:t>identities</a:t>
+            </a:r>
+            <a:r>
+              <a:rPr lang="es-ES" dirty="0"/>
+              <a:t>.</a:t>
+            </a:r>
+          </a:p>
+          <a:p>
+            <a:r>
+              <a:rPr lang="es-ES" dirty="0" err="1"/>
+              <a:t>Results</a:t>
+            </a:r>
+            <a:r>
+              <a:rPr lang="es-ES" dirty="0"/>
+              <a:t>:</a:t>
+            </a:r>
+          </a:p>
+          <a:p>
+            <a:pPr lvl="1"/>
+            <a:r>
+              <a:rPr lang="es-ES" dirty="0"/>
+              <a:t>    </a:t>
+            </a:r>
+            <a:r>
+              <a:rPr lang="es-ES" sz="2000" dirty="0"/>
+              <a:t>Original </a:t>
+            </a:r>
+            <a:r>
+              <a:rPr lang="es-ES" sz="2000" dirty="0" err="1"/>
+              <a:t>Dataset</a:t>
+            </a:r>
+            <a:r>
+              <a:rPr lang="es-ES" sz="2000" dirty="0"/>
+              <a:t>:</a:t>
+            </a:r>
+          </a:p>
+          <a:p>
+            <a:pPr lvl="2"/>
+            <a:r>
+              <a:rPr lang="es-ES" sz="1800" dirty="0"/>
+              <a:t>    </a:t>
+            </a:r>
+            <a:r>
+              <a:rPr lang="es-ES" sz="1800" dirty="0" err="1"/>
+              <a:t>Accuracy</a:t>
+            </a:r>
+            <a:r>
+              <a:rPr lang="es-ES" sz="1800" dirty="0"/>
+              <a:t>: </a:t>
+            </a:r>
+            <a:r>
+              <a:rPr lang="es-ES" sz="1800" b="1" dirty="0"/>
+              <a:t>30.51%</a:t>
+            </a:r>
+          </a:p>
+          <a:p>
+            <a:pPr lvl="1"/>
+            <a:r>
+              <a:rPr lang="es-ES" dirty="0"/>
+              <a:t>    </a:t>
+            </a:r>
+            <a:r>
+              <a:rPr lang="es-ES" sz="2000" dirty="0"/>
+              <a:t>With </a:t>
+            </a:r>
+            <a:r>
+              <a:rPr lang="es-ES" sz="2000" dirty="0" err="1"/>
+              <a:t>Augmentation</a:t>
+            </a:r>
+            <a:r>
+              <a:rPr lang="es-ES" sz="2000" dirty="0"/>
+              <a:t>:</a:t>
+            </a:r>
+          </a:p>
+          <a:p>
+            <a:pPr lvl="2"/>
+            <a:r>
+              <a:rPr lang="es-ES" sz="1800" dirty="0"/>
+              <a:t>    </a:t>
+            </a:r>
+            <a:r>
+              <a:rPr lang="es-ES" sz="1800" dirty="0" err="1"/>
+              <a:t>Accuracy</a:t>
+            </a:r>
+            <a:r>
+              <a:rPr lang="es-ES" sz="1800" dirty="0"/>
+              <a:t>: </a:t>
+            </a:r>
+            <a:r>
+              <a:rPr lang="es-ES" sz="1800" b="1" dirty="0"/>
+              <a:t>35.65%</a:t>
+            </a:r>
+          </a:p>
+          <a:p>
+            <a:r>
+              <a:rPr lang="es-ES" dirty="0" err="1"/>
+              <a:t>Conclusion</a:t>
+            </a:r>
+            <a:r>
+              <a:rPr lang="es-ES" dirty="0"/>
+              <a:t>: LBP + SVM </a:t>
+            </a:r>
+            <a:r>
+              <a:rPr lang="es-ES" dirty="0" err="1"/>
+              <a:t>performs</a:t>
+            </a:r>
+            <a:r>
+              <a:rPr lang="es-ES" dirty="0"/>
+              <a:t> better </a:t>
+            </a:r>
+            <a:br>
+              <a:rPr lang="es-ES" dirty="0"/>
+            </a:br>
+            <a:r>
+              <a:rPr lang="es-ES" dirty="0" err="1"/>
+              <a:t>than</a:t>
+            </a:r>
+            <a:r>
+              <a:rPr lang="es-ES" dirty="0"/>
+              <a:t> PCA in </a:t>
+            </a:r>
+            <a:r>
+              <a:rPr lang="es-ES" dirty="0" err="1"/>
+              <a:t>capturing</a:t>
+            </a:r>
+            <a:r>
+              <a:rPr lang="es-ES" dirty="0"/>
+              <a:t> local </a:t>
+            </a:r>
+            <a:r>
+              <a:rPr lang="es-ES" dirty="0" err="1"/>
+              <a:t>patterns</a:t>
+            </a:r>
+            <a:r>
+              <a:rPr lang="es-ES" dirty="0"/>
+              <a:t> but </a:t>
+            </a:r>
+            <a:r>
+              <a:rPr lang="es-ES" dirty="0" err="1"/>
+              <a:t>still</a:t>
+            </a:r>
+            <a:r>
+              <a:rPr lang="es-ES" dirty="0"/>
+              <a:t> </a:t>
+            </a:r>
+            <a:r>
+              <a:rPr lang="es-ES" dirty="0" err="1"/>
+              <a:t>underperforms</a:t>
+            </a:r>
+            <a:r>
+              <a:rPr lang="es-ES" dirty="0"/>
+              <a:t> in diverse </a:t>
+            </a:r>
+            <a:r>
+              <a:rPr lang="es-ES" dirty="0" err="1"/>
+              <a:t>conditions</a:t>
+            </a:r>
+            <a:r>
+              <a:rPr lang="es-ES" dirty="0"/>
+              <a:t>. Data </a:t>
+            </a:r>
+            <a:r>
+              <a:rPr lang="es-ES" dirty="0" err="1"/>
+              <a:t>augmentation</a:t>
+            </a:r>
+            <a:r>
+              <a:rPr lang="es-ES" dirty="0"/>
+              <a:t> </a:t>
+            </a:r>
+            <a:r>
+              <a:rPr lang="es-ES" dirty="0" err="1"/>
+              <a:t>gives</a:t>
+            </a:r>
+            <a:r>
+              <a:rPr lang="es-ES" dirty="0"/>
+              <a:t> a </a:t>
+            </a:r>
+            <a:r>
+              <a:rPr lang="es-ES" dirty="0" err="1"/>
+              <a:t>slight</a:t>
+            </a:r>
+            <a:r>
+              <a:rPr lang="es-ES" dirty="0"/>
+              <a:t> </a:t>
+            </a:r>
+            <a:r>
+              <a:rPr lang="es-ES" dirty="0" err="1"/>
+              <a:t>boost</a:t>
+            </a:r>
+            <a:r>
+              <a:rPr lang="es-ES" dirty="0"/>
+              <a:t>.</a:t>
+            </a:r>
           </a:p>
         </p:txBody>
       </p:sp>
+      <p:pic>
+        <p:nvPicPr>
+          <p:cNvPr id="4" name="Picture 3">
+            <a:extLst>
+              <a:ext uri="{FF2B5EF4-FFF2-40B4-BE49-F238E27FC236}">
+                <a16:creationId xmlns:a16="http://schemas.microsoft.com/office/drawing/2014/main" id="{738549E6-5096-71B8-77A9-F419BAD87D42}"/>
+              </a:ext>
+            </a:extLst>
+          </p:cNvPr>
+          <p:cNvPicPr>
+            <a:picLocks noChangeAspect="1"/>
+          </p:cNvPicPr>
+          <p:nvPr/>
+        </p:nvPicPr>
+        <p:blipFill rotWithShape="1">
+          <a:blip r:embed="rId2"/>
+          <a:srcRect l="55092"/>
+          <a:stretch/>
+        </p:blipFill>
+        <p:spPr>
+          <a:xfrm>
+            <a:off x="8500534" y="1114769"/>
+            <a:ext cx="3691466" cy="4573909"/>
+          </a:xfrm>
+          <a:prstGeom prst="rect">
+            <a:avLst/>
+          </a:prstGeom>
+        </p:spPr>
+      </p:pic>
+      <p:pic>
+        <p:nvPicPr>
+          <p:cNvPr id="6" name="Picture 5" descr="A collage of a person&#10;&#10;Description automatically generated">
+            <a:extLst>
+              <a:ext uri="{FF2B5EF4-FFF2-40B4-BE49-F238E27FC236}">
+                <a16:creationId xmlns:a16="http://schemas.microsoft.com/office/drawing/2014/main" id="{973C4CC3-B0AC-B046-E999-E6504C4AD5DD}"/>
+              </a:ext>
+            </a:extLst>
+          </p:cNvPr>
+          <p:cNvPicPr>
+            <a:picLocks noChangeAspect="1"/>
+          </p:cNvPicPr>
+          <p:nvPr/>
+        </p:nvPicPr>
+        <p:blipFill rotWithShape="1">
+          <a:blip r:embed="rId3">
+            <a:alphaModFix amt="40000"/>
+            <a:extLst>
+              <a:ext uri="{28A0092B-C50C-407E-A947-70E740481C1C}">
+                <a14:useLocalDpi xmlns:a14="http://schemas.microsoft.com/office/drawing/2010/main" val="0"/>
+              </a:ext>
+            </a:extLst>
+          </a:blip>
+          <a:srcRect r="55150"/>
+          <a:stretch/>
+        </p:blipFill>
+        <p:spPr>
+          <a:xfrm>
+            <a:off x="5756365" y="1114769"/>
+            <a:ext cx="3539244" cy="4573909"/>
+          </a:xfrm>
+          <a:prstGeom prst="rect">
+            <a:avLst/>
+          </a:prstGeom>
+        </p:spPr>
+      </p:pic>
     </p:spTree>
     <p:extLst>
       <p:ext uri="{BB962C8B-B14F-4D97-AF65-F5344CB8AC3E}">
@@ -6200,12 +13908,692 @@
             <p:ph idx="1"/>
           </p:nvPr>
         </p:nvSpPr>
-        <p:spPr/>
+        <p:spPr>
+          <a:xfrm>
+            <a:off x="612648" y="1715532"/>
+            <a:ext cx="6830890" cy="4941942"/>
+          </a:xfrm>
+        </p:spPr>
         <p:txBody>
-          <a:bodyPr/>
+          <a:bodyPr>
+            <a:normAutofit/>
+          </a:bodyPr>
           <a:lstStyle/>
           <a:p>
-            <a:endParaRPr lang="es-ES"/>
+            <a:r>
+              <a:rPr lang="es-ES" dirty="0" err="1"/>
+              <a:t>Loads</a:t>
+            </a:r>
+            <a:r>
+              <a:rPr lang="es-ES" dirty="0"/>
+              <a:t> VGG16 </a:t>
+            </a:r>
+            <a:r>
+              <a:rPr lang="es-ES" dirty="0" err="1"/>
+              <a:t>pre-trained</a:t>
+            </a:r>
+            <a:r>
+              <a:rPr lang="es-ES" dirty="0"/>
+              <a:t> </a:t>
+            </a:r>
+            <a:r>
+              <a:rPr lang="es-ES" dirty="0" err="1"/>
+              <a:t>on</a:t>
+            </a:r>
+            <a:r>
+              <a:rPr lang="es-ES" dirty="0"/>
+              <a:t> </a:t>
+            </a:r>
+            <a:r>
+              <a:rPr lang="es-ES" dirty="0" err="1"/>
+              <a:t>ImageNet</a:t>
+            </a:r>
+            <a:r>
+              <a:rPr lang="es-ES" dirty="0"/>
+              <a:t>, </a:t>
+            </a:r>
+            <a:r>
+              <a:rPr lang="es-ES" dirty="0" err="1"/>
+              <a:t>cuts</a:t>
+            </a:r>
+            <a:r>
+              <a:rPr lang="es-ES" dirty="0"/>
+              <a:t> off the </a:t>
+            </a:r>
+            <a:r>
+              <a:rPr lang="es-ES" dirty="0" err="1"/>
+              <a:t>classifier</a:t>
+            </a:r>
+            <a:r>
+              <a:rPr lang="es-ES" dirty="0"/>
+              <a:t> (</a:t>
+            </a:r>
+            <a:r>
+              <a:rPr lang="es-ES" dirty="0" err="1"/>
+              <a:t>include_top</a:t>
+            </a:r>
+            <a:r>
+              <a:rPr lang="es-ES" dirty="0"/>
+              <a:t>=False).</a:t>
+            </a:r>
+          </a:p>
+          <a:p>
+            <a:r>
+              <a:rPr lang="es-ES" dirty="0" err="1"/>
+              <a:t>Freezes</a:t>
+            </a:r>
+            <a:r>
+              <a:rPr lang="es-ES" dirty="0"/>
+              <a:t> the </a:t>
+            </a:r>
+            <a:r>
+              <a:rPr lang="es-ES" dirty="0" err="1"/>
+              <a:t>entire</a:t>
+            </a:r>
+            <a:r>
+              <a:rPr lang="es-ES" dirty="0"/>
+              <a:t> </a:t>
+            </a:r>
+            <a:r>
+              <a:rPr lang="es-ES" dirty="0" err="1"/>
+              <a:t>convolutional</a:t>
+            </a:r>
+            <a:r>
+              <a:rPr lang="es-ES" dirty="0"/>
+              <a:t> base — i.e., </a:t>
+            </a:r>
+            <a:r>
+              <a:rPr lang="es-ES" dirty="0" err="1"/>
+              <a:t>it</a:t>
+            </a:r>
+            <a:r>
+              <a:rPr lang="es-ES" dirty="0"/>
+              <a:t> </a:t>
+            </a:r>
+            <a:r>
+              <a:rPr lang="es-ES" dirty="0" err="1"/>
+              <a:t>won’t</a:t>
+            </a:r>
+            <a:r>
+              <a:rPr lang="es-ES" dirty="0"/>
+              <a:t> </a:t>
+            </a:r>
+            <a:r>
+              <a:rPr lang="es-ES" dirty="0" err="1"/>
+              <a:t>update</a:t>
+            </a:r>
+            <a:r>
+              <a:rPr lang="es-ES" dirty="0"/>
+              <a:t> </a:t>
+            </a:r>
+            <a:r>
+              <a:rPr lang="es-ES" dirty="0" err="1"/>
+              <a:t>weights</a:t>
+            </a:r>
+            <a:r>
+              <a:rPr lang="es-ES" dirty="0"/>
+              <a:t> but </a:t>
+            </a:r>
+            <a:r>
+              <a:rPr lang="es-ES" dirty="0" err="1"/>
+              <a:t>provides</a:t>
+            </a:r>
+            <a:r>
+              <a:rPr lang="es-ES" dirty="0"/>
+              <a:t> </a:t>
+            </a:r>
+            <a:r>
+              <a:rPr lang="es-ES" b="1" dirty="0" err="1"/>
+              <a:t>fast</a:t>
+            </a:r>
+            <a:r>
+              <a:rPr lang="es-ES" b="1" dirty="0"/>
+              <a:t> training</a:t>
+            </a:r>
+            <a:r>
+              <a:rPr lang="es-ES" dirty="0"/>
+              <a:t>.</a:t>
+            </a:r>
+          </a:p>
+          <a:p>
+            <a:r>
+              <a:rPr lang="es-ES" dirty="0" err="1"/>
+              <a:t>Adds</a:t>
+            </a:r>
+            <a:r>
+              <a:rPr lang="es-ES" dirty="0"/>
+              <a:t> a simple </a:t>
+            </a:r>
+            <a:r>
+              <a:rPr lang="es-ES" dirty="0" err="1"/>
+              <a:t>custom</a:t>
+            </a:r>
+            <a:r>
+              <a:rPr lang="es-ES" dirty="0"/>
+              <a:t> head:</a:t>
+            </a:r>
+          </a:p>
+          <a:p>
+            <a:pPr lvl="1"/>
+            <a:r>
+              <a:rPr lang="es-ES" dirty="0"/>
+              <a:t>GlobalAveragePooling2D: </a:t>
+            </a:r>
+            <a:r>
+              <a:rPr lang="es-ES" dirty="0" err="1"/>
+              <a:t>collapses</a:t>
+            </a:r>
+            <a:r>
+              <a:rPr lang="es-ES" dirty="0"/>
+              <a:t> </a:t>
+            </a:r>
+            <a:r>
+              <a:rPr lang="es-ES" dirty="0" err="1"/>
+              <a:t>spatial</a:t>
+            </a:r>
+            <a:r>
+              <a:rPr lang="es-ES" dirty="0"/>
+              <a:t> </a:t>
+            </a:r>
+            <a:r>
+              <a:rPr lang="es-ES" dirty="0" err="1"/>
+              <a:t>dimensions</a:t>
+            </a:r>
+            <a:r>
+              <a:rPr lang="es-ES" dirty="0"/>
+              <a:t> → reduces </a:t>
+            </a:r>
+            <a:r>
+              <a:rPr lang="es-ES" dirty="0" err="1"/>
+              <a:t>overfitting</a:t>
+            </a:r>
+            <a:r>
+              <a:rPr lang="es-ES" dirty="0"/>
+              <a:t>, </a:t>
+            </a:r>
+            <a:r>
+              <a:rPr lang="es-ES" dirty="0" err="1"/>
+              <a:t>fewer</a:t>
+            </a:r>
+            <a:r>
+              <a:rPr lang="es-ES" dirty="0"/>
+              <a:t> </a:t>
+            </a:r>
+            <a:r>
+              <a:rPr lang="es-ES" dirty="0" err="1"/>
+              <a:t>params</a:t>
+            </a:r>
+            <a:r>
+              <a:rPr lang="es-ES" dirty="0"/>
+              <a:t>.</a:t>
+            </a:r>
+          </a:p>
+          <a:p>
+            <a:pPr lvl="1"/>
+            <a:r>
+              <a:rPr lang="es-ES" dirty="0"/>
+              <a:t>Dense(256, </a:t>
+            </a:r>
+            <a:r>
+              <a:rPr lang="es-ES" dirty="0" err="1"/>
+              <a:t>relu</a:t>
+            </a:r>
+            <a:r>
+              <a:rPr lang="es-ES" dirty="0"/>
+              <a:t>) and </a:t>
+            </a:r>
+            <a:r>
+              <a:rPr lang="es-ES" dirty="0" err="1"/>
+              <a:t>Dropout</a:t>
+            </a:r>
+            <a:r>
+              <a:rPr lang="es-ES" dirty="0"/>
+              <a:t>(0.5): </a:t>
+            </a:r>
+            <a:r>
+              <a:rPr lang="es-ES" dirty="0" err="1"/>
+              <a:t>classic</a:t>
+            </a:r>
+            <a:r>
+              <a:rPr lang="es-ES" dirty="0"/>
+              <a:t> dense head.</a:t>
+            </a:r>
+          </a:p>
+          <a:p>
+            <a:pPr lvl="1"/>
+            <a:r>
+              <a:rPr lang="es-ES" dirty="0"/>
+              <a:t>Final </a:t>
+            </a:r>
+            <a:r>
+              <a:rPr lang="es-ES" dirty="0" err="1"/>
+              <a:t>classification</a:t>
+            </a:r>
+            <a:r>
+              <a:rPr lang="es-ES" dirty="0"/>
+              <a:t> with Dense(</a:t>
+            </a:r>
+            <a:r>
+              <a:rPr lang="es-ES" dirty="0" err="1"/>
+              <a:t>num_classes</a:t>
+            </a:r>
+            <a:r>
+              <a:rPr lang="es-ES" dirty="0"/>
+              <a:t>, </a:t>
+            </a:r>
+            <a:r>
+              <a:rPr lang="es-ES" dirty="0" err="1"/>
+              <a:t>softmax</a:t>
+            </a:r>
+            <a:r>
+              <a:rPr lang="es-ES" dirty="0"/>
+              <a:t>).</a:t>
+            </a:r>
+          </a:p>
+          <a:p>
+            <a:r>
+              <a:rPr lang="es-ES" dirty="0" err="1"/>
+              <a:t>Results</a:t>
+            </a:r>
+            <a:r>
+              <a:rPr lang="es-ES" dirty="0"/>
+              <a:t> (</a:t>
+            </a:r>
+            <a:r>
+              <a:rPr lang="es-ES" dirty="0" err="1"/>
+              <a:t>Accuracy</a:t>
+            </a:r>
+            <a:r>
+              <a:rPr lang="es-ES" dirty="0"/>
+              <a:t>):</a:t>
+            </a:r>
+          </a:p>
+          <a:p>
+            <a:pPr lvl="1"/>
+            <a:r>
+              <a:rPr lang="es-ES" dirty="0"/>
+              <a:t>Original </a:t>
+            </a:r>
+            <a:r>
+              <a:rPr lang="es-ES" dirty="0" err="1"/>
+              <a:t>Dataset</a:t>
+            </a:r>
+            <a:r>
+              <a:rPr lang="es-ES" dirty="0"/>
+              <a:t>: </a:t>
+            </a:r>
+            <a:r>
+              <a:rPr lang="es-ES" b="1" dirty="0"/>
+              <a:t>43.8%</a:t>
+            </a:r>
+          </a:p>
+          <a:p>
+            <a:pPr lvl="1"/>
+            <a:r>
+              <a:rPr lang="es-ES" dirty="0" err="1"/>
+              <a:t>Augmented</a:t>
+            </a:r>
+            <a:r>
+              <a:rPr lang="es-ES" dirty="0"/>
+              <a:t>:  </a:t>
+            </a:r>
+            <a:r>
+              <a:rPr lang="es-ES" b="1" dirty="0"/>
+              <a:t>66.84%</a:t>
+            </a:r>
+          </a:p>
+        </p:txBody>
+      </p:sp>
+      <p:pic>
+        <p:nvPicPr>
+          <p:cNvPr id="4" name="Picture 3" descr="A diagram of a graph&#10;&#10;Description automatically generated">
+            <a:extLst>
+              <a:ext uri="{FF2B5EF4-FFF2-40B4-BE49-F238E27FC236}">
+                <a16:creationId xmlns:a16="http://schemas.microsoft.com/office/drawing/2014/main" id="{3C1CF4E7-D23A-B46D-CDAA-D507B6AAF57A}"/>
+              </a:ext>
+            </a:extLst>
+          </p:cNvPr>
+          <p:cNvPicPr>
+            <a:picLocks noChangeAspect="1"/>
+          </p:cNvPicPr>
+          <p:nvPr/>
+        </p:nvPicPr>
+        <p:blipFill>
+          <a:blip r:embed="rId2"/>
+          <a:stretch>
+            <a:fillRect/>
+          </a:stretch>
+        </p:blipFill>
+        <p:spPr>
+          <a:xfrm>
+            <a:off x="7433416" y="2540000"/>
+            <a:ext cx="4555459" cy="2900309"/>
+          </a:xfrm>
+          <a:prstGeom prst="rect">
+            <a:avLst/>
+          </a:prstGeom>
+        </p:spPr>
+      </p:pic>
+      <p:sp>
+        <p:nvSpPr>
+          <p:cNvPr id="10" name="Rectangle: Rounded Corners 9">
+            <a:extLst>
+              <a:ext uri="{FF2B5EF4-FFF2-40B4-BE49-F238E27FC236}">
+                <a16:creationId xmlns:a16="http://schemas.microsoft.com/office/drawing/2014/main" id="{977DDC21-4FA7-C6E5-5FF8-5CAD877B7EA0}"/>
+              </a:ext>
+            </a:extLst>
+          </p:cNvPr>
+          <p:cNvSpPr/>
+          <p:nvPr/>
+        </p:nvSpPr>
+        <p:spPr>
+          <a:xfrm>
+            <a:off x="4322618" y="5605542"/>
+            <a:ext cx="7500002" cy="1086566"/>
+          </a:xfrm>
+          <a:prstGeom prst="roundRect">
+            <a:avLst/>
+          </a:prstGeom>
+          <a:solidFill>
+            <a:schemeClr val="bg1"/>
+          </a:solidFill>
+          <a:ln w="28575">
+            <a:solidFill>
+              <a:srgbClr val="0070C0"/>
+            </a:solidFill>
+          </a:ln>
+        </p:spPr>
+        <p:style>
+          <a:lnRef idx="2">
+            <a:schemeClr val="accent1">
+              <a:shade val="15000"/>
+            </a:schemeClr>
+          </a:lnRef>
+          <a:fillRef idx="1">
+            <a:schemeClr val="accent1"/>
+          </a:fillRef>
+          <a:effectRef idx="0">
+            <a:schemeClr val="accent1"/>
+          </a:effectRef>
+          <a:fontRef idx="minor">
+            <a:schemeClr val="lt1"/>
+          </a:fontRef>
+        </p:style>
+        <p:txBody>
+          <a:bodyPr rtlCol="0" anchor="t"/>
+          <a:lstStyle/>
+          <a:p>
+            <a:pPr marL="0" marR="0" lvl="0" indent="0" defTabSz="914400" rtl="0" eaLnBrk="1" fontAlgn="auto" latinLnBrk="0" hangingPunct="1">
+              <a:lnSpc>
+                <a:spcPct val="100000"/>
+              </a:lnSpc>
+              <a:spcBef>
+                <a:spcPts val="0"/>
+              </a:spcBef>
+              <a:spcAft>
+                <a:spcPts val="0"/>
+              </a:spcAft>
+              <a:buClrTx/>
+              <a:buSzTx/>
+              <a:buFontTx/>
+              <a:buNone/>
+              <a:tabLst/>
+              <a:defRPr/>
+            </a:pPr>
+            <a:r>
+              <a:rPr kumimoji="0" lang="es-ES" sz="1800" b="1" i="0" u="none" strike="noStrike" kern="1200" cap="none" spc="0" normalizeH="0" baseline="0" noProof="0" dirty="0" err="1">
+                <a:ln>
+                  <a:noFill/>
+                </a:ln>
+                <a:solidFill>
+                  <a:prstClr val="black"/>
+                </a:solidFill>
+                <a:effectLst/>
+                <a:uLnTx/>
+                <a:uFillTx/>
+                <a:latin typeface="Neue Haas Grotesk Text Pro"/>
+                <a:ea typeface="+mn-ea"/>
+                <a:cs typeface="+mn-cs"/>
+              </a:rPr>
+              <a:t>Conclusion</a:t>
+            </a:r>
+            <a:r>
+              <a:rPr kumimoji="0" lang="es-ES" sz="1800" b="0" i="0" u="none" strike="noStrike" kern="1200" cap="none" spc="0" normalizeH="0" baseline="0" noProof="0" dirty="0">
+                <a:ln>
+                  <a:noFill/>
+                </a:ln>
+                <a:solidFill>
+                  <a:prstClr val="black"/>
+                </a:solidFill>
+                <a:effectLst/>
+                <a:uLnTx/>
+                <a:uFillTx/>
+                <a:latin typeface="Neue Haas Grotesk Text Pro"/>
+                <a:ea typeface="+mn-ea"/>
+                <a:cs typeface="+mn-cs"/>
+              </a:rPr>
+              <a:t>: </a:t>
+            </a:r>
+            <a:r>
+              <a:rPr kumimoji="0" lang="en-US" sz="1800" b="0" i="0" u="none" strike="noStrike" kern="1200" cap="none" spc="0" normalizeH="0" baseline="0" noProof="0" dirty="0">
+                <a:ln>
+                  <a:noFill/>
+                </a:ln>
+                <a:solidFill>
+                  <a:prstClr val="black"/>
+                </a:solidFill>
+                <a:effectLst/>
+                <a:uLnTx/>
+                <a:uFillTx/>
+                <a:latin typeface="Neue Haas Grotesk Text Pro"/>
+                <a:ea typeface="+mn-ea"/>
+                <a:cs typeface="+mn-cs"/>
+              </a:rPr>
+              <a:t>Outperforms classical PCA and LBP methods, </a:t>
+            </a:r>
+            <a:r>
+              <a:rPr kumimoji="0" lang="es-ES" sz="1800" b="0" i="0" u="none" strike="noStrike" kern="1200" cap="none" spc="0" normalizeH="0" baseline="0" noProof="0" dirty="0" err="1">
+                <a:ln>
+                  <a:noFill/>
+                </a:ln>
+                <a:solidFill>
+                  <a:prstClr val="black"/>
+                </a:solidFill>
+                <a:effectLst/>
+                <a:uLnTx/>
+                <a:uFillTx/>
+                <a:latin typeface="Neue Haas Grotesk Text Pro"/>
+                <a:ea typeface="+mn-ea"/>
+                <a:cs typeface="+mn-cs"/>
+              </a:rPr>
+              <a:t>leverages</a:t>
+            </a:r>
+            <a:r>
+              <a:rPr kumimoji="0" lang="es-ES" sz="1800" b="0" i="0" u="none" strike="noStrike" kern="1200" cap="none" spc="0" normalizeH="0" baseline="0" noProof="0" dirty="0">
+                <a:ln>
+                  <a:noFill/>
+                </a:ln>
+                <a:solidFill>
+                  <a:prstClr val="black"/>
+                </a:solidFill>
+                <a:effectLst/>
+                <a:uLnTx/>
+                <a:uFillTx/>
+                <a:latin typeface="Neue Haas Grotesk Text Pro"/>
+                <a:ea typeface="+mn-ea"/>
+                <a:cs typeface="+mn-cs"/>
+              </a:rPr>
+              <a:t> </a:t>
+            </a:r>
+            <a:r>
+              <a:rPr kumimoji="0" lang="es-ES" sz="1800" b="0" i="0" u="none" strike="noStrike" kern="1200" cap="none" spc="0" normalizeH="0" baseline="0" noProof="0" dirty="0" err="1">
+                <a:ln>
+                  <a:noFill/>
+                </a:ln>
+                <a:solidFill>
+                  <a:prstClr val="black"/>
+                </a:solidFill>
+                <a:effectLst/>
+                <a:uLnTx/>
+                <a:uFillTx/>
+                <a:latin typeface="Neue Haas Grotesk Text Pro"/>
+                <a:ea typeface="+mn-ea"/>
+                <a:cs typeface="+mn-cs"/>
+              </a:rPr>
+              <a:t>deep</a:t>
+            </a:r>
+            <a:r>
+              <a:rPr kumimoji="0" lang="es-ES" sz="1800" b="0" i="0" u="none" strike="noStrike" kern="1200" cap="none" spc="0" normalizeH="0" baseline="0" noProof="0" dirty="0">
+                <a:ln>
+                  <a:noFill/>
+                </a:ln>
+                <a:solidFill>
+                  <a:prstClr val="black"/>
+                </a:solidFill>
+                <a:effectLst/>
+                <a:uLnTx/>
+                <a:uFillTx/>
+                <a:latin typeface="Neue Haas Grotesk Text Pro"/>
+                <a:ea typeface="+mn-ea"/>
+                <a:cs typeface="+mn-cs"/>
+              </a:rPr>
+              <a:t>, </a:t>
+            </a:r>
+            <a:r>
+              <a:rPr kumimoji="0" lang="es-ES" sz="1800" b="0" i="0" u="none" strike="noStrike" kern="1200" cap="none" spc="0" normalizeH="0" baseline="0" noProof="0" dirty="0" err="1">
+                <a:ln>
+                  <a:noFill/>
+                </a:ln>
+                <a:solidFill>
+                  <a:prstClr val="black"/>
+                </a:solidFill>
+                <a:effectLst/>
+                <a:uLnTx/>
+                <a:uFillTx/>
+                <a:latin typeface="Neue Haas Grotesk Text Pro"/>
+                <a:ea typeface="+mn-ea"/>
+                <a:cs typeface="+mn-cs"/>
+              </a:rPr>
+              <a:t>hierarchical</a:t>
+            </a:r>
+            <a:r>
+              <a:rPr kumimoji="0" lang="es-ES" sz="1800" b="0" i="0" u="none" strike="noStrike" kern="1200" cap="none" spc="0" normalizeH="0" baseline="0" noProof="0" dirty="0">
+                <a:ln>
+                  <a:noFill/>
+                </a:ln>
+                <a:solidFill>
+                  <a:prstClr val="black"/>
+                </a:solidFill>
+                <a:effectLst/>
+                <a:uLnTx/>
+                <a:uFillTx/>
+                <a:latin typeface="Neue Haas Grotesk Text Pro"/>
+                <a:ea typeface="+mn-ea"/>
+                <a:cs typeface="+mn-cs"/>
+              </a:rPr>
+              <a:t> </a:t>
+            </a:r>
+            <a:r>
+              <a:rPr kumimoji="0" lang="es-ES" sz="1800" b="0" i="0" u="none" strike="noStrike" kern="1200" cap="none" spc="0" normalizeH="0" baseline="0" noProof="0" dirty="0" err="1">
+                <a:ln>
+                  <a:noFill/>
+                </a:ln>
+                <a:solidFill>
+                  <a:prstClr val="black"/>
+                </a:solidFill>
+                <a:effectLst/>
+                <a:uLnTx/>
+                <a:uFillTx/>
+                <a:latin typeface="Neue Haas Grotesk Text Pro"/>
+                <a:ea typeface="+mn-ea"/>
+                <a:cs typeface="+mn-cs"/>
+              </a:rPr>
+              <a:t>features</a:t>
+            </a:r>
+            <a:r>
+              <a:rPr kumimoji="0" lang="es-ES" sz="1800" b="0" i="0" u="none" strike="noStrike" kern="1200" cap="none" spc="0" normalizeH="0" baseline="0" noProof="0" dirty="0">
+                <a:ln>
+                  <a:noFill/>
+                </a:ln>
+                <a:solidFill>
+                  <a:prstClr val="black"/>
+                </a:solidFill>
+                <a:effectLst/>
+                <a:uLnTx/>
+                <a:uFillTx/>
+                <a:latin typeface="Neue Haas Grotesk Text Pro"/>
+                <a:ea typeface="+mn-ea"/>
+                <a:cs typeface="+mn-cs"/>
+              </a:rPr>
+              <a:t> and is w</a:t>
+            </a:r>
+            <a:r>
+              <a:rPr kumimoji="0" lang="en-US" sz="1800" b="0" i="0" u="none" strike="noStrike" kern="1200" cap="none" spc="0" normalizeH="0" baseline="0" noProof="0" dirty="0">
+                <a:ln>
+                  <a:noFill/>
+                </a:ln>
+                <a:solidFill>
+                  <a:prstClr val="black"/>
+                </a:solidFill>
+                <a:effectLst/>
+                <a:uLnTx/>
+                <a:uFillTx/>
+                <a:latin typeface="Neue Haas Grotesk Text Pro"/>
+                <a:ea typeface="+mn-ea"/>
+                <a:cs typeface="+mn-cs"/>
+              </a:rPr>
+              <a:t>ell-suited for complex visual patterns in faces</a:t>
+            </a:r>
+            <a:r>
+              <a:rPr kumimoji="0" lang="es-ES" sz="1800" b="0" i="0" u="none" strike="noStrike" kern="1200" cap="none" spc="0" normalizeH="0" baseline="0" noProof="0" dirty="0">
+                <a:ln>
+                  <a:noFill/>
+                </a:ln>
+                <a:solidFill>
+                  <a:prstClr val="black"/>
+                </a:solidFill>
+                <a:effectLst/>
+                <a:uLnTx/>
+                <a:uFillTx/>
+                <a:latin typeface="Neue Haas Grotesk Text Pro"/>
+                <a:ea typeface="+mn-ea"/>
+                <a:cs typeface="+mn-cs"/>
+              </a:rPr>
+              <a:t>.</a:t>
+            </a:r>
+          </a:p>
+          <a:p>
+            <a:pPr marL="0" marR="0" lvl="0" indent="0" algn="l" defTabSz="914400" rtl="0" eaLnBrk="1" fontAlgn="auto" latinLnBrk="0" hangingPunct="1">
+              <a:lnSpc>
+                <a:spcPct val="100000"/>
+              </a:lnSpc>
+              <a:spcBef>
+                <a:spcPts val="0"/>
+              </a:spcBef>
+              <a:spcAft>
+                <a:spcPts val="0"/>
+              </a:spcAft>
+              <a:buClrTx/>
+              <a:buSzTx/>
+              <a:buFontTx/>
+              <a:buNone/>
+              <a:tabLst/>
+              <a:defRPr/>
+            </a:pPr>
+            <a:endParaRPr kumimoji="0" lang="es-ES" sz="1800" b="0" i="0" u="none" strike="noStrike" kern="1200" cap="none" spc="0" normalizeH="0" baseline="0" noProof="0" dirty="0">
+              <a:ln>
+                <a:noFill/>
+              </a:ln>
+              <a:solidFill>
+                <a:prstClr val="black"/>
+              </a:solidFill>
+              <a:effectLst/>
+              <a:uLnTx/>
+              <a:uFillTx/>
+              <a:latin typeface="Neue Haas Grotesk Text Pro"/>
+              <a:ea typeface="+mn-ea"/>
+              <a:cs typeface="+mn-cs"/>
+            </a:endParaRPr>
           </a:p>
         </p:txBody>
       </p:sp>
@@ -6421,4 +14809,319 @@
     </a:ext>
   </a:extLst>
 </a:theme>
+</file>
+
+<file path=ppt/theme/theme2.xml><?xml version="1.0" encoding="utf-8"?>
+<a:theme xmlns:a="http://schemas.openxmlformats.org/drawingml/2006/main" name="Office Theme">
+  <a:themeElements>
+    <a:clrScheme name="Office">
+      <a:dk1>
+        <a:sysClr val="windowText" lastClr="000000"/>
+      </a:dk1>
+      <a:lt1>
+        <a:sysClr val="window" lastClr="FFFFFF"/>
+      </a:lt1>
+      <a:dk2>
+        <a:srgbClr val="0E2841"/>
+      </a:dk2>
+      <a:lt2>
+        <a:srgbClr val="E8E8E8"/>
+      </a:lt2>
+      <a:accent1>
+        <a:srgbClr val="156082"/>
+      </a:accent1>
+      <a:accent2>
+        <a:srgbClr val="E97132"/>
+      </a:accent2>
+      <a:accent3>
+        <a:srgbClr val="196B24"/>
+      </a:accent3>
+      <a:accent4>
+        <a:srgbClr val="0F9ED5"/>
+      </a:accent4>
+      <a:accent5>
+        <a:srgbClr val="A02B93"/>
+      </a:accent5>
+      <a:accent6>
+        <a:srgbClr val="4EA72E"/>
+      </a:accent6>
+      <a:hlink>
+        <a:srgbClr val="467886"/>
+      </a:hlink>
+      <a:folHlink>
+        <a:srgbClr val="96607D"/>
+      </a:folHlink>
+    </a:clrScheme>
+    <a:fontScheme name="Office">
+      <a:majorFont>
+        <a:latin typeface="Aptos Display" panose="02110004020202020204"/>
+        <a:ea typeface=""/>
+        <a:cs typeface=""/>
+        <a:font script="Jpan" typeface="游ゴシック Light"/>
+        <a:font script="Hang" typeface="맑은 고딕"/>
+        <a:font script="Hans" typeface="等线 Light"/>
+        <a:font script="Hant" typeface="新細明體"/>
+        <a:font script="Arab" typeface="Times New Roman"/>
+        <a:font script="Hebr" typeface="Times New Roman"/>
+        <a:font script="Thai" typeface="Angsana New"/>
+        <a:font script="Ethi" typeface="Nyala"/>
+        <a:font script="Beng" typeface="Vrinda"/>
+        <a:font script="Gujr" typeface="Shruti"/>
+        <a:font script="Khmr" typeface="MoolBoran"/>
+        <a:font script="Knda" typeface="Tunga"/>
+        <a:font script="Guru" typeface="Raavi"/>
+        <a:font script="Cans" typeface="Euphemia"/>
+        <a:font script="Cher" typeface="Plantagenet Cherokee"/>
+        <a:font script="Yiii" typeface="Microsoft Yi Baiti"/>
+        <a:font script="Tibt" typeface="Microsoft Himalaya"/>
+        <a:font script="Thaa" typeface="MV Boli"/>
+        <a:font script="Deva" typeface="Mangal"/>
+        <a:font script="Telu" typeface="Gautami"/>
+        <a:font script="Taml" typeface="Latha"/>
+        <a:font script="Syrc" typeface="Estrangelo Edessa"/>
+        <a:font script="Orya" typeface="Kalinga"/>
+        <a:font script="Mlym" typeface="Kartika"/>
+        <a:font script="Laoo" typeface="DokChampa"/>
+        <a:font script="Sinh" typeface="Iskoola Pota"/>
+        <a:font script="Mong" typeface="Mongolian Baiti"/>
+        <a:font script="Viet" typeface="Times New Roman"/>
+        <a:font script="Uigh" typeface="Microsoft Uighur"/>
+        <a:font script="Geor" typeface="Sylfaen"/>
+        <a:font script="Armn" typeface="Arial"/>
+        <a:font script="Bugi" typeface="Leelawadee UI"/>
+        <a:font script="Bopo" typeface="Microsoft JhengHei"/>
+        <a:font script="Java" typeface="Javanese Text"/>
+        <a:font script="Lisu" typeface="Segoe UI"/>
+        <a:font script="Mymr" typeface="Myanmar Text"/>
+        <a:font script="Nkoo" typeface="Ebrima"/>
+        <a:font script="Olck" typeface="Nirmala UI"/>
+        <a:font script="Osma" typeface="Ebrima"/>
+        <a:font script="Phag" typeface="Phagspa"/>
+        <a:font script="Syrn" typeface="Estrangelo Edessa"/>
+        <a:font script="Syrj" typeface="Estrangelo Edessa"/>
+        <a:font script="Syre" typeface="Estrangelo Edessa"/>
+        <a:font script="Sora" typeface="Nirmala UI"/>
+        <a:font script="Tale" typeface="Microsoft Tai Le"/>
+        <a:font script="Talu" typeface="Microsoft New Tai Lue"/>
+        <a:font script="Tfng" typeface="Ebrima"/>
+      </a:majorFont>
+      <a:minorFont>
+        <a:latin typeface="Aptos" panose="02110004020202020204"/>
+        <a:ea typeface=""/>
+        <a:cs typeface=""/>
+        <a:font script="Jpan" typeface="游ゴシック"/>
+        <a:font script="Hang" typeface="맑은 고딕"/>
+        <a:font script="Hans" typeface="等线"/>
+        <a:font script="Hant" typeface="新細明體"/>
+        <a:font script="Arab" typeface="Arial"/>
+        <a:font script="Hebr" typeface="Arial"/>
+        <a:font script="Thai" typeface="Cordia New"/>
+        <a:font script="Ethi" typeface="Nyala"/>
+        <a:font script="Beng" typeface="Vrinda"/>
+        <a:font script="Gujr" typeface="Shruti"/>
+        <a:font script="Khmr" typeface="DaunPenh"/>
+        <a:font script="Knda" typeface="Tunga"/>
+        <a:font script="Guru" typeface="Raavi"/>
+        <a:font script="Cans" typeface="Euphemia"/>
+        <a:font script="Cher" typeface="Plantagenet Cherokee"/>
+        <a:font script="Yiii" typeface="Microsoft Yi Baiti"/>
+        <a:font script="Tibt" typeface="Microsoft Himalaya"/>
+        <a:font script="Thaa" typeface="MV Boli"/>
+        <a:font script="Deva" typeface="Mangal"/>
+        <a:font script="Telu" typeface="Gautami"/>
+        <a:font script="Taml" typeface="Latha"/>
+        <a:font script="Syrc" typeface="Estrangelo Edessa"/>
+        <a:font script="Orya" typeface="Kalinga"/>
+        <a:font script="Mlym" typeface="Kartika"/>
+        <a:font script="Laoo" typeface="DokChampa"/>
+        <a:font script="Sinh" typeface="Iskoola Pota"/>
+        <a:font script="Mong" typeface="Mongolian Baiti"/>
+        <a:font script="Viet" typeface="Arial"/>
+        <a:font script="Uigh" typeface="Microsoft Uighur"/>
+        <a:font script="Geor" typeface="Sylfaen"/>
+        <a:font script="Armn" typeface="Arial"/>
+        <a:font script="Bugi" typeface="Leelawadee UI"/>
+        <a:font script="Bopo" typeface="Microsoft JhengHei"/>
+        <a:font script="Java" typeface="Javanese Text"/>
+        <a:font script="Lisu" typeface="Segoe UI"/>
+        <a:font script="Mymr" typeface="Myanmar Text"/>
+        <a:font script="Nkoo" typeface="Ebrima"/>
+        <a:font script="Olck" typeface="Nirmala UI"/>
+        <a:font script="Osma" typeface="Ebrima"/>
+        <a:font script="Phag" typeface="Phagspa"/>
+        <a:font script="Syrn" typeface="Estrangelo Edessa"/>
+        <a:font script="Syrj" typeface="Estrangelo Edessa"/>
+        <a:font script="Syre" typeface="Estrangelo Edessa"/>
+        <a:font script="Sora" typeface="Nirmala UI"/>
+        <a:font script="Tale" typeface="Microsoft Tai Le"/>
+        <a:font script="Talu" typeface="Microsoft New Tai Lue"/>
+        <a:font script="Tfng" typeface="Ebrima"/>
+      </a:minorFont>
+    </a:fontScheme>
+    <a:fmtScheme name="Office">
+      <a:fillStyleLst>
+        <a:solidFill>
+          <a:schemeClr val="phClr"/>
+        </a:solidFill>
+        <a:gradFill rotWithShape="1">
+          <a:gsLst>
+            <a:gs pos="0">
+              <a:schemeClr val="phClr">
+                <a:lumMod val="110000"/>
+                <a:satMod val="105000"/>
+                <a:tint val="67000"/>
+              </a:schemeClr>
+            </a:gs>
+            <a:gs pos="50000">
+              <a:schemeClr val="phClr">
+                <a:lumMod val="105000"/>
+                <a:satMod val="103000"/>
+                <a:tint val="73000"/>
+              </a:schemeClr>
+            </a:gs>
+            <a:gs pos="100000">
+              <a:schemeClr val="phClr">
+                <a:lumMod val="105000"/>
+                <a:satMod val="109000"/>
+                <a:tint val="81000"/>
+              </a:schemeClr>
+            </a:gs>
+          </a:gsLst>
+          <a:lin ang="5400000" scaled="0"/>
+        </a:gradFill>
+        <a:gradFill rotWithShape="1">
+          <a:gsLst>
+            <a:gs pos="0">
+              <a:schemeClr val="phClr">
+                <a:satMod val="103000"/>
+                <a:lumMod val="102000"/>
+                <a:tint val="94000"/>
+              </a:schemeClr>
+            </a:gs>
+            <a:gs pos="50000">
+              <a:schemeClr val="phClr">
+                <a:satMod val="110000"/>
+                <a:lumMod val="100000"/>
+                <a:shade val="100000"/>
+              </a:schemeClr>
+            </a:gs>
+            <a:gs pos="100000">
+              <a:schemeClr val="phClr">
+                <a:lumMod val="99000"/>
+                <a:satMod val="120000"/>
+                <a:shade val="78000"/>
+              </a:schemeClr>
+            </a:gs>
+          </a:gsLst>
+          <a:lin ang="5400000" scaled="0"/>
+        </a:gradFill>
+      </a:fillStyleLst>
+      <a:lnStyleLst>
+        <a:ln w="12700" cap="flat" cmpd="sng" algn="ctr">
+          <a:solidFill>
+            <a:schemeClr val="phClr"/>
+          </a:solidFill>
+          <a:prstDash val="solid"/>
+          <a:miter lim="800000"/>
+        </a:ln>
+        <a:ln w="19050" cap="flat" cmpd="sng" algn="ctr">
+          <a:solidFill>
+            <a:schemeClr val="phClr"/>
+          </a:solidFill>
+          <a:prstDash val="solid"/>
+          <a:miter lim="800000"/>
+        </a:ln>
+        <a:ln w="25400" cap="flat" cmpd="sng" algn="ctr">
+          <a:solidFill>
+            <a:schemeClr val="phClr"/>
+          </a:solidFill>
+          <a:prstDash val="solid"/>
+          <a:miter lim="800000"/>
+        </a:ln>
+      </a:lnStyleLst>
+      <a:effectStyleLst>
+        <a:effectStyle>
+          <a:effectLst/>
+        </a:effectStyle>
+        <a:effectStyle>
+          <a:effectLst/>
+        </a:effectStyle>
+        <a:effectStyle>
+          <a:effectLst>
+            <a:outerShdw blurRad="57150" dist="19050" dir="5400000" algn="ctr" rotWithShape="0">
+              <a:srgbClr val="000000">
+                <a:alpha val="63000"/>
+              </a:srgbClr>
+            </a:outerShdw>
+          </a:effectLst>
+        </a:effectStyle>
+      </a:effectStyleLst>
+      <a:bgFillStyleLst>
+        <a:solidFill>
+          <a:schemeClr val="phClr"/>
+        </a:solidFill>
+        <a:solidFill>
+          <a:schemeClr val="phClr">
+            <a:tint val="95000"/>
+            <a:satMod val="170000"/>
+          </a:schemeClr>
+        </a:solidFill>
+        <a:gradFill rotWithShape="1">
+          <a:gsLst>
+            <a:gs pos="0">
+              <a:schemeClr val="phClr">
+                <a:tint val="93000"/>
+                <a:satMod val="150000"/>
+                <a:shade val="98000"/>
+                <a:lumMod val="102000"/>
+              </a:schemeClr>
+            </a:gs>
+            <a:gs pos="50000">
+              <a:schemeClr val="phClr">
+                <a:tint val="98000"/>
+                <a:satMod val="130000"/>
+                <a:shade val="90000"/>
+                <a:lumMod val="103000"/>
+              </a:schemeClr>
+            </a:gs>
+            <a:gs pos="100000">
+              <a:schemeClr val="phClr">
+                <a:shade val="63000"/>
+                <a:satMod val="120000"/>
+              </a:schemeClr>
+            </a:gs>
+          </a:gsLst>
+          <a:lin ang="5400000" scaled="0"/>
+        </a:gradFill>
+      </a:bgFillStyleLst>
+    </a:fmtScheme>
+  </a:themeElements>
+  <a:objectDefaults>
+    <a:lnDef>
+      <a:spPr/>
+      <a:bodyPr/>
+      <a:lstStyle/>
+      <a:style>
+        <a:lnRef idx="2">
+          <a:schemeClr val="accent1"/>
+        </a:lnRef>
+        <a:fillRef idx="0">
+          <a:schemeClr val="accent1"/>
+        </a:fillRef>
+        <a:effectRef idx="1">
+          <a:schemeClr val="accent1"/>
+        </a:effectRef>
+        <a:fontRef idx="minor">
+          <a:schemeClr val="tx1"/>
+        </a:fontRef>
+      </a:style>
+    </a:lnDef>
+  </a:objectDefaults>
+  <a:extraClrSchemeLst/>
+  <a:extLst>
+    <a:ext uri="{05A4C25C-085E-4340-85A3-A5531E510DB2}">
+      <thm15:themeFamily xmlns:thm15="http://schemas.microsoft.com/office/thememl/2012/main" name="Office Theme" id="{2E142A2C-CD16-42D6-873A-C26D2A0506FA}" vid="{1BDDFF52-6CD6-40A5-AB3C-68EB2F1E4D0A}"/>
+    </a:ext>
+  </a:extLst>
+</a:theme>
 </file>